--- a/재정학/01_Lectures/재정학_Chapter_5.pptx
+++ b/재정학/01_Lectures/재정학_Chapter_5.pptx
@@ -5,7 +5,7 @@
     <p:sldMasterId id="2147483648" r:id="rId1"/>
   </p:sldMasterIdLst>
   <p:notesMasterIdLst>
-    <p:notesMasterId r:id="rId50"/>
+    <p:notesMasterId r:id="rId52"/>
   </p:notesMasterIdLst>
   <p:sldIdLst>
     <p:sldId id="375" r:id="rId2"/>
@@ -18,44 +18,46 @@
     <p:sldId id="637" r:id="rId9"/>
     <p:sldId id="639" r:id="rId10"/>
     <p:sldId id="640" r:id="rId11"/>
-    <p:sldId id="641" r:id="rId12"/>
-    <p:sldId id="633" r:id="rId13"/>
-    <p:sldId id="634" r:id="rId14"/>
-    <p:sldId id="599" r:id="rId15"/>
-    <p:sldId id="600" r:id="rId16"/>
-    <p:sldId id="601" r:id="rId17"/>
-    <p:sldId id="602" r:id="rId18"/>
-    <p:sldId id="603" r:id="rId19"/>
-    <p:sldId id="595" r:id="rId20"/>
-    <p:sldId id="604" r:id="rId21"/>
-    <p:sldId id="605" r:id="rId22"/>
-    <p:sldId id="607" r:id="rId23"/>
-    <p:sldId id="608" r:id="rId24"/>
-    <p:sldId id="606" r:id="rId25"/>
-    <p:sldId id="609" r:id="rId26"/>
-    <p:sldId id="610" r:id="rId27"/>
-    <p:sldId id="596" r:id="rId28"/>
-    <p:sldId id="611" r:id="rId29"/>
-    <p:sldId id="613" r:id="rId30"/>
-    <p:sldId id="612" r:id="rId31"/>
-    <p:sldId id="614" r:id="rId32"/>
-    <p:sldId id="615" r:id="rId33"/>
-    <p:sldId id="616" r:id="rId34"/>
-    <p:sldId id="597" r:id="rId35"/>
-    <p:sldId id="617" r:id="rId36"/>
-    <p:sldId id="618" r:id="rId37"/>
-    <p:sldId id="620" r:id="rId38"/>
-    <p:sldId id="622" r:id="rId39"/>
-    <p:sldId id="623" r:id="rId40"/>
-    <p:sldId id="624" r:id="rId41"/>
-    <p:sldId id="626" r:id="rId42"/>
-    <p:sldId id="627" r:id="rId43"/>
-    <p:sldId id="598" r:id="rId44"/>
-    <p:sldId id="628" r:id="rId45"/>
-    <p:sldId id="629" r:id="rId46"/>
-    <p:sldId id="630" r:id="rId47"/>
-    <p:sldId id="631" r:id="rId48"/>
-    <p:sldId id="364" r:id="rId49"/>
+    <p:sldId id="642" r:id="rId12"/>
+    <p:sldId id="643" r:id="rId13"/>
+    <p:sldId id="641" r:id="rId14"/>
+    <p:sldId id="633" r:id="rId15"/>
+    <p:sldId id="634" r:id="rId16"/>
+    <p:sldId id="599" r:id="rId17"/>
+    <p:sldId id="600" r:id="rId18"/>
+    <p:sldId id="601" r:id="rId19"/>
+    <p:sldId id="602" r:id="rId20"/>
+    <p:sldId id="603" r:id="rId21"/>
+    <p:sldId id="595" r:id="rId22"/>
+    <p:sldId id="604" r:id="rId23"/>
+    <p:sldId id="605" r:id="rId24"/>
+    <p:sldId id="607" r:id="rId25"/>
+    <p:sldId id="608" r:id="rId26"/>
+    <p:sldId id="606" r:id="rId27"/>
+    <p:sldId id="609" r:id="rId28"/>
+    <p:sldId id="610" r:id="rId29"/>
+    <p:sldId id="596" r:id="rId30"/>
+    <p:sldId id="611" r:id="rId31"/>
+    <p:sldId id="613" r:id="rId32"/>
+    <p:sldId id="612" r:id="rId33"/>
+    <p:sldId id="614" r:id="rId34"/>
+    <p:sldId id="615" r:id="rId35"/>
+    <p:sldId id="616" r:id="rId36"/>
+    <p:sldId id="597" r:id="rId37"/>
+    <p:sldId id="617" r:id="rId38"/>
+    <p:sldId id="618" r:id="rId39"/>
+    <p:sldId id="620" r:id="rId40"/>
+    <p:sldId id="622" r:id="rId41"/>
+    <p:sldId id="623" r:id="rId42"/>
+    <p:sldId id="624" r:id="rId43"/>
+    <p:sldId id="626" r:id="rId44"/>
+    <p:sldId id="627" r:id="rId45"/>
+    <p:sldId id="598" r:id="rId46"/>
+    <p:sldId id="628" r:id="rId47"/>
+    <p:sldId id="629" r:id="rId48"/>
+    <p:sldId id="630" r:id="rId49"/>
+    <p:sldId id="631" r:id="rId50"/>
+    <p:sldId id="364" r:id="rId51"/>
   </p:sldIdLst>
   <p:sldSz cx="12192000" cy="6858000"/>
   <p:notesSz cx="6858000" cy="9144000"/>
@@ -266,7 +268,7 @@
           <a:p>
             <a:fld id="{4A5E00EF-AEA4-43E2-9451-8F9C59A39471}" type="datetimeFigureOut">
               <a:rPr lang="ko-KR" altLang="en-US" smtClean="0"/>
-              <a:t>2026-01-12</a:t>
+              <a:t>2026-01-13</a:t>
             </a:fld>
             <a:endParaRPr lang="ko-KR" altLang="en-US"/>
           </a:p>
@@ -688,7 +690,7 @@
           <a:p>
             <a:fld id="{CD32C56F-BD27-4999-9E6D-D4EACE3DA9F4}" type="datetime1">
               <a:rPr lang="ko-KR" altLang="en-US" smtClean="0"/>
-              <a:t>2026-01-12</a:t>
+              <a:t>2026-01-13</a:t>
             </a:fld>
             <a:endParaRPr lang="ko-KR" altLang="en-US"/>
           </a:p>
@@ -902,7 +904,7 @@
           <a:p>
             <a:fld id="{8EF4A19C-72C8-45CA-8E3F-68A7FA345D6C}" type="datetime1">
               <a:rPr lang="ko-KR" altLang="en-US" smtClean="0"/>
-              <a:t>2026-01-12</a:t>
+              <a:t>2026-01-13</a:t>
             </a:fld>
             <a:endParaRPr lang="ko-KR" altLang="en-US"/>
           </a:p>
@@ -1126,7 +1128,7 @@
           <a:p>
             <a:fld id="{56A175B2-010B-4341-954C-5F8F5C70B124}" type="datetime1">
               <a:rPr lang="ko-KR" altLang="en-US" smtClean="0"/>
-              <a:t>2026-01-12</a:t>
+              <a:t>2026-01-13</a:t>
             </a:fld>
             <a:endParaRPr lang="ko-KR" altLang="en-US"/>
           </a:p>
@@ -1340,7 +1342,7 @@
           <a:p>
             <a:fld id="{16B83F9E-22C9-45CA-9E85-070F1D3EF530}" type="datetime1">
               <a:rPr lang="ko-KR" altLang="en-US" smtClean="0"/>
-              <a:t>2026-01-12</a:t>
+              <a:t>2026-01-13</a:t>
             </a:fld>
             <a:endParaRPr lang="ko-KR" altLang="en-US"/>
           </a:p>
@@ -1631,7 +1633,7 @@
           <a:p>
             <a:fld id="{03278F45-FB3C-4C4D-B89A-7BC3F5F229F6}" type="datetime1">
               <a:rPr lang="ko-KR" altLang="en-US" smtClean="0"/>
-              <a:t>2026-01-12</a:t>
+              <a:t>2026-01-13</a:t>
             </a:fld>
             <a:endParaRPr lang="ko-KR" altLang="en-US"/>
           </a:p>
@@ -2024,7 +2026,7 @@
           <a:p>
             <a:fld id="{38FDAC3C-35A6-415C-9F03-738A6AC328B1}" type="datetime1">
               <a:rPr lang="ko-KR" altLang="en-US" smtClean="0"/>
-              <a:t>2026-01-12</a:t>
+              <a:t>2026-01-13</a:t>
             </a:fld>
             <a:endParaRPr lang="ko-KR" altLang="en-US"/>
           </a:p>
@@ -3618,7 +3620,7 @@
           <a:p>
             <a:fld id="{507A0DF1-AEE6-4B0D-89D2-351E7B3EF65C}" type="datetime1">
               <a:rPr lang="ko-KR" altLang="en-US" smtClean="0"/>
-              <a:t>2026-01-12</a:t>
+              <a:t>2026-01-13</a:t>
             </a:fld>
             <a:endParaRPr lang="ko-KR" altLang="en-US"/>
           </a:p>
@@ -4046,7 +4048,7 @@
           <a:p>
             <a:fld id="{CA93B8C9-630F-4D57-944D-04FD37CECCD3}" type="datetime1">
               <a:rPr lang="ko-KR" altLang="en-US" smtClean="0"/>
-              <a:t>2026-01-12</a:t>
+              <a:t>2026-01-13</a:t>
             </a:fld>
             <a:endParaRPr lang="ko-KR" altLang="en-US"/>
           </a:p>
@@ -4203,7 +4205,7 @@
           <a:p>
             <a:fld id="{E986165A-AC43-4902-9541-874ECD310BA3}" type="datetime1">
               <a:rPr lang="ko-KR" altLang="en-US" smtClean="0"/>
-              <a:t>2026-01-12</a:t>
+              <a:t>2026-01-13</a:t>
             </a:fld>
             <a:endParaRPr lang="ko-KR" altLang="en-US"/>
           </a:p>
@@ -4530,7 +4532,7 @@
           <a:p>
             <a:fld id="{47E6EE6D-2B0E-43A9-87A2-7354CDB998F4}" type="datetime1">
               <a:rPr lang="ko-KR" altLang="en-US" smtClean="0"/>
-              <a:t>2026-01-12</a:t>
+              <a:t>2026-01-13</a:t>
             </a:fld>
             <a:endParaRPr lang="ko-KR" altLang="en-US"/>
           </a:p>
@@ -4834,7 +4836,7 @@
           <a:p>
             <a:fld id="{5CC5944E-0BC8-4FAA-9F94-6B4B05834E10}" type="datetime1">
               <a:rPr lang="ko-KR" altLang="en-US" smtClean="0"/>
-              <a:t>2026-01-12</a:t>
+              <a:t>2026-01-13</a:t>
             </a:fld>
             <a:endParaRPr lang="ko-KR" altLang="en-US"/>
           </a:p>
@@ -7357,7 +7359,7 @@
             <p:spPr>
               <a:xfrm>
                 <a:off x="288790" y="958844"/>
-                <a:ext cx="11693660" cy="1891352"/>
+                <a:ext cx="11693660" cy="2260683"/>
               </a:xfrm>
               <a:prstGeom prst="rect">
                 <a:avLst/>
@@ -7379,15 +7381,7 @@
                 </a:pPr>
                 <a:r>
                   <a:rPr lang="ko-KR" altLang="en-US" sz="1600" spc="-50" dirty="0"/>
-                  <a:t>앞서 보았듯이</a:t>
-                </a:r>
-                <a:r>
-                  <a:rPr lang="en-US" altLang="ko-KR" sz="1600" spc="-50" dirty="0"/>
-                  <a:t>,</a:t>
-                </a:r>
-                <a:r>
-                  <a:rPr lang="ko-KR" altLang="en-US" sz="1600" spc="-50" dirty="0"/>
-                  <a:t> 표결방식과 관련한 두 가지 유형의 비용을 합친 것이 표결의 총비용이 된다</a:t>
+                  <a:t>앞서 이야기한 표결방식과 관련한 두 가지 유형의 비용을 합친 것이 표결의 총비용이 된다</a:t>
                 </a:r>
                 <a:r>
                   <a:rPr lang="en-US" altLang="ko-KR" sz="1600" spc="-50" dirty="0"/>
@@ -7404,15 +7398,15 @@
                 </a:pPr>
                 <a:r>
                   <a:rPr lang="ko-KR" altLang="en-US" sz="1600" spc="-50" dirty="0"/>
-                  <a:t>총비용이 최저가 되는 수준이 찬성비율을 찾고</a:t>
+                  <a:t>최적다수결제란 총비용이 최저가 되는 수준의 찬성비율을</a:t>
                 </a:r>
                 <a:r>
                   <a:rPr lang="en-US" altLang="ko-KR" sz="1600" spc="-50" dirty="0"/>
-                  <a:t>,</a:t>
+                  <a:t> </a:t>
                 </a:r>
                 <a:r>
                   <a:rPr lang="ko-KR" altLang="en-US" sz="1600" spc="-50" dirty="0"/>
-                  <a:t> 그 최적 수준의 찬성비율을 적용한 것이 최적다수결제이다</a:t>
+                  <a:t>적용하는 것이다</a:t>
                 </a:r>
                 <a:r>
                   <a:rPr lang="en-US" altLang="ko-KR" sz="1600" spc="-50" dirty="0"/>
@@ -7420,12 +7414,12 @@
                 </a:r>
               </a:p>
               <a:p>
-                <a:pPr marL="835025" lvl="1" indent="-285750">
+                <a:pPr marL="377825" indent="-285750">
                   <a:lnSpc>
                     <a:spcPct val="150000"/>
                   </a:lnSpc>
-                  <a:buFont typeface="Wingdings" panose="05000000000000000000" pitchFamily="2" charset="2"/>
-                  <a:buChar char="ü"/>
+                  <a:buFont typeface="Arial" panose="020B0604020202020204" pitchFamily="34" charset="0"/>
+                  <a:buChar char="•"/>
                 </a:pPr>
                 <a:r>
                   <a:rPr lang="ko-KR" altLang="en-US" sz="1600" spc="-50" dirty="0"/>
@@ -7451,12 +7445,12 @@
                 </a:r>
               </a:p>
               <a:p>
-                <a:pPr marL="1292225" lvl="2" indent="-285750">
+                <a:pPr marL="835025" lvl="1" indent="-285750">
                   <a:lnSpc>
                     <a:spcPct val="150000"/>
                   </a:lnSpc>
                   <a:buFont typeface="Wingdings" panose="05000000000000000000" pitchFamily="2" charset="2"/>
-                  <a:buChar char="Ø"/>
+                  <a:buChar char="ü"/>
                 </a:pPr>
                 <a:r>
                   <a:rPr lang="ko-KR" altLang="en-US" sz="1600" spc="-50" dirty="0"/>
@@ -7476,12 +7470,12 @@
                 </a:r>
               </a:p>
               <a:p>
-                <a:pPr marL="1292225" lvl="2" indent="-285750">
+                <a:pPr marL="835025" lvl="1" indent="-285750">
                   <a:lnSpc>
                     <a:spcPct val="150000"/>
                   </a:lnSpc>
                   <a:buFont typeface="Wingdings" panose="05000000000000000000" pitchFamily="2" charset="2"/>
-                  <a:buChar char="Ø"/>
+                  <a:buChar char="ü"/>
                 </a:pPr>
                 <a:r>
                   <a:rPr lang="ko-KR" altLang="en-US" sz="1600" spc="-50" dirty="0"/>
@@ -7494,6 +7488,39 @@
                 <a:r>
                   <a:rPr lang="ko-KR" altLang="en-US" sz="1600" spc="-50" dirty="0"/>
                   <a:t> 곡선으로 표현되어 있다</a:t>
+                </a:r>
+                <a:r>
+                  <a:rPr lang="en-US" altLang="ko-KR" sz="1600" spc="-50" dirty="0"/>
+                  <a:t>.</a:t>
+                </a:r>
+              </a:p>
+              <a:p>
+                <a:pPr marL="835025" lvl="1" indent="-285750">
+                  <a:lnSpc>
+                    <a:spcPct val="150000"/>
+                  </a:lnSpc>
+                  <a:buFont typeface="Wingdings" panose="05000000000000000000" pitchFamily="2" charset="2"/>
+                  <a:buChar char="ü"/>
+                </a:pPr>
+                <a:r>
+                  <a:rPr lang="ko-KR" altLang="en-US" sz="1600" spc="-50" dirty="0"/>
+                  <a:t>총 비용은 두 유형의 비용을 합친 것으로</a:t>
+                </a:r>
+                <a:r>
+                  <a:rPr lang="en-US" altLang="ko-KR" sz="1600" spc="-50" dirty="0"/>
+                  <a:t>, </a:t>
+                </a:r>
+                <a:r>
+                  <a:rPr lang="ko-KR" altLang="en-US" sz="1600" spc="-50" dirty="0"/>
+                  <a:t>평평한 </a:t>
+                </a:r>
+                <a:r>
+                  <a:rPr lang="en-US" altLang="ko-KR" sz="1600" spc="-50" dirty="0"/>
+                  <a:t>U</a:t>
+                </a:r>
+                <a:r>
+                  <a:rPr lang="ko-KR" altLang="en-US" sz="1600" spc="-50" dirty="0"/>
+                  <a:t>자 모양의 곡선으로 표현되어 있다</a:t>
                 </a:r>
                 <a:r>
                   <a:rPr lang="en-US" altLang="ko-KR" sz="1600" spc="-50" dirty="0"/>
@@ -7521,7 +7548,7 @@
             <p:spPr>
               <a:xfrm>
                 <a:off x="288790" y="958844"/>
-                <a:ext cx="11693660" cy="1891352"/>
+                <a:ext cx="11693660" cy="2260683"/>
               </a:xfrm>
               <a:prstGeom prst="rect">
                 <a:avLst/>
@@ -7529,7 +7556,7 @@
               <a:blipFill>
                 <a:blip r:embed="rId2"/>
                 <a:stretch>
-                  <a:fillRect b="-2894"/>
+                  <a:fillRect b="-2426"/>
                 </a:stretch>
               </a:blipFill>
             </p:spPr>
@@ -7570,14 +7597,321 @@
         </p:blipFill>
         <p:spPr>
           <a:xfrm>
-            <a:off x="4378599" y="4362274"/>
-            <a:ext cx="2911981" cy="1937857"/>
+            <a:off x="8245916" y="3849077"/>
+            <a:ext cx="3720972" cy="2476222"/>
           </a:xfrm>
           <a:prstGeom prst="rect">
             <a:avLst/>
           </a:prstGeom>
         </p:spPr>
       </p:pic>
+      <p:sp>
+        <p:nvSpPr>
+          <p:cNvPr id="5" name="TextBox 4">
+            <a:extLst>
+              <a:ext uri="{FF2B5EF4-FFF2-40B4-BE49-F238E27FC236}">
+                <a16:creationId xmlns:a16="http://schemas.microsoft.com/office/drawing/2014/main" id="{3F17C69E-B5D0-3F1C-957C-3322EF1EF522}"/>
+              </a:ext>
+            </a:extLst>
+          </p:cNvPr>
+          <p:cNvSpPr txBox="1"/>
+          <p:nvPr/>
+        </p:nvSpPr>
+        <p:spPr>
+          <a:xfrm>
+            <a:off x="8131566" y="3506128"/>
+            <a:ext cx="3580080" cy="276999"/>
+          </a:xfrm>
+          <a:prstGeom prst="rect">
+            <a:avLst/>
+          </a:prstGeom>
+          <a:noFill/>
+        </p:spPr>
+        <p:txBody>
+          <a:bodyPr wrap="square">
+            <a:spAutoFit/>
+          </a:bodyPr>
+          <a:lstStyle/>
+          <a:p>
+            <a:pPr algn="ctr"/>
+            <a:r>
+              <a:rPr lang="en-US" altLang="ko-KR" sz="1200" spc="-50" dirty="0"/>
+              <a:t>&lt;</a:t>
+            </a:r>
+            <a:r>
+              <a:rPr lang="ko-KR" altLang="en-US" sz="1200" spc="-50" dirty="0"/>
+              <a:t>최적다수결제</a:t>
+            </a:r>
+            <a:r>
+              <a:rPr lang="en-US" altLang="ko-KR" sz="1200" spc="-50" dirty="0"/>
+              <a:t>&gt;</a:t>
+            </a:r>
+            <a:endParaRPr lang="ko-KR" altLang="en-US" sz="1200" dirty="0"/>
+          </a:p>
+        </p:txBody>
+      </p:sp>
+      <mc:AlternateContent xmlns:mc="http://schemas.openxmlformats.org/markup-compatibility/2006">
+        <mc:Choice xmlns:a14="http://schemas.microsoft.com/office/drawing/2010/main" Requires="a14">
+          <p:sp>
+            <p:nvSpPr>
+              <p:cNvPr id="7" name="TextBox 6">
+                <a:extLst>
+                  <a:ext uri="{FF2B5EF4-FFF2-40B4-BE49-F238E27FC236}">
+                    <a16:creationId xmlns:a16="http://schemas.microsoft.com/office/drawing/2014/main" id="{6AA2736A-F71F-AD4B-53E7-0B8395E09603}"/>
+                  </a:ext>
+                </a:extLst>
+              </p:cNvPr>
+              <p:cNvSpPr txBox="1"/>
+              <p:nvPr/>
+            </p:nvSpPr>
+            <p:spPr>
+              <a:xfrm>
+                <a:off x="288790" y="3202565"/>
+                <a:ext cx="7764641" cy="2304285"/>
+              </a:xfrm>
+              <a:prstGeom prst="rect">
+                <a:avLst/>
+              </a:prstGeom>
+              <a:noFill/>
+            </p:spPr>
+            <p:txBody>
+              <a:bodyPr wrap="square">
+                <a:spAutoFit/>
+              </a:bodyPr>
+              <a:lstStyle/>
+              <a:p>
+                <a:pPr marL="835025" lvl="1" indent="-285750">
+                  <a:lnSpc>
+                    <a:spcPct val="150000"/>
+                  </a:lnSpc>
+                  <a:buFont typeface="Wingdings" panose="05000000000000000000" pitchFamily="2" charset="2"/>
+                  <a:buChar char="ü"/>
+                </a:pPr>
+                <a:r>
+                  <a:rPr lang="ko-KR" altLang="en-US" sz="1600" spc="-50" dirty="0"/>
+                  <a:t>그림을 보면 요구되는 찬성표가 </a:t>
+                </a:r>
+                <a14:m>
+                  <m:oMath xmlns:m="http://schemas.openxmlformats.org/officeDocument/2006/math">
+                    <m:r>
+                      <a:rPr lang="en-US" altLang="ko-KR" sz="1600" b="0" i="1" spc="-50" smtClean="0">
+                        <a:latin typeface="Cambria Math" panose="02040503050406030204" pitchFamily="18" charset="0"/>
+                      </a:rPr>
+                      <m:t>𝐾</m:t>
+                    </m:r>
+                  </m:oMath>
+                </a14:m>
+                <a:r>
+                  <a:rPr lang="ko-KR" altLang="en-US" sz="1600" spc="-50" dirty="0"/>
+                  <a:t>일 때</a:t>
+                </a:r>
+                <a:r>
+                  <a:rPr lang="en-US" altLang="ko-KR" sz="1600" spc="-50" dirty="0"/>
+                  <a:t>, </a:t>
+                </a:r>
+                <a:r>
+                  <a:rPr lang="ko-KR" altLang="en-US" sz="1600" spc="-50" dirty="0"/>
+                  <a:t>총비용이 최소가 된다</a:t>
+                </a:r>
+                <a:r>
+                  <a:rPr lang="en-US" altLang="ko-KR" sz="1600" spc="-50" dirty="0"/>
+                  <a:t>.</a:t>
+                </a:r>
+              </a:p>
+              <a:p>
+                <a:pPr marL="1292225" lvl="2" indent="-285750">
+                  <a:lnSpc>
+                    <a:spcPct val="150000"/>
+                  </a:lnSpc>
+                  <a:buFont typeface="Wingdings" panose="05000000000000000000" pitchFamily="2" charset="2"/>
+                  <a:buChar char="Ø"/>
+                </a:pPr>
+                <a:r>
+                  <a:rPr lang="ko-KR" altLang="en-US" sz="1600" spc="-50" dirty="0"/>
+                  <a:t>찬성 비율을 </a:t>
+                </a:r>
+                <a14:m>
+                  <m:oMath xmlns:m="http://schemas.openxmlformats.org/officeDocument/2006/math">
+                    <m:bar>
+                      <m:barPr>
+                        <m:pos m:val="top"/>
+                        <m:ctrlPr>
+                          <a:rPr lang="en-US" altLang="ko-KR" sz="1600" i="1">
+                            <a:latin typeface="Cambria Math" panose="02040503050406030204" pitchFamily="18" charset="0"/>
+                          </a:rPr>
+                        </m:ctrlPr>
+                      </m:barPr>
+                      <m:e>
+                        <m:r>
+                          <a:rPr lang="en-US" altLang="ko-KR" sz="1600" b="0" i="1" smtClean="0">
+                            <a:latin typeface="Cambria Math" panose="02040503050406030204" pitchFamily="18" charset="0"/>
+                          </a:rPr>
+                          <m:t>𝑂𝐾</m:t>
+                        </m:r>
+                      </m:e>
+                    </m:bar>
+                    <m:r>
+                      <a:rPr lang="en-US" altLang="ko-KR" sz="1600" b="0" i="1" smtClean="0">
+                        <a:latin typeface="Cambria Math" panose="02040503050406030204" pitchFamily="18" charset="0"/>
+                      </a:rPr>
+                      <m:t>/</m:t>
+                    </m:r>
+                    <m:bar>
+                      <m:barPr>
+                        <m:pos m:val="top"/>
+                        <m:ctrlPr>
+                          <a:rPr lang="en-US" altLang="ko-KR" sz="1600" i="1">
+                            <a:latin typeface="Cambria Math" panose="02040503050406030204" pitchFamily="18" charset="0"/>
+                          </a:rPr>
+                        </m:ctrlPr>
+                      </m:barPr>
+                      <m:e>
+                        <m:r>
+                          <a:rPr lang="en-US" altLang="ko-KR" sz="1600" i="1">
+                            <a:latin typeface="Cambria Math" panose="02040503050406030204" pitchFamily="18" charset="0"/>
+                          </a:rPr>
+                          <m:t>𝑂</m:t>
+                        </m:r>
+                        <m:r>
+                          <a:rPr lang="en-US" altLang="ko-KR" sz="1600" b="0" i="1" smtClean="0">
+                            <a:latin typeface="Cambria Math" panose="02040503050406030204" pitchFamily="18" charset="0"/>
+                          </a:rPr>
+                          <m:t>𝑁</m:t>
+                        </m:r>
+                      </m:e>
+                    </m:bar>
+                  </m:oMath>
+                </a14:m>
+                <a:r>
+                  <a:rPr lang="en-US" altLang="ko-KR" sz="1600" spc="-50" dirty="0"/>
+                  <a:t> </a:t>
+                </a:r>
+                <a:r>
+                  <a:rPr lang="ko-KR" altLang="en-US" sz="1600" spc="-50" dirty="0"/>
+                  <a:t>로 요구할 때 총비용이 최소가 됨을 뜻한다</a:t>
+                </a:r>
+                <a:r>
+                  <a:rPr lang="en-US" altLang="ko-KR" sz="1600" spc="-50" dirty="0"/>
+                  <a:t>.</a:t>
+                </a:r>
+              </a:p>
+              <a:p>
+                <a:pPr marL="1292225" lvl="2" indent="-285750">
+                  <a:lnSpc>
+                    <a:spcPct val="150000"/>
+                  </a:lnSpc>
+                  <a:buFont typeface="Wingdings" panose="05000000000000000000" pitchFamily="2" charset="2"/>
+                  <a:buChar char="Ø"/>
+                </a:pPr>
+                <a:endParaRPr lang="en-US" altLang="ko-KR" sz="1600" spc="-50" dirty="0"/>
+              </a:p>
+              <a:p>
+                <a:pPr marL="377825" indent="-285750">
+                  <a:lnSpc>
+                    <a:spcPct val="150000"/>
+                  </a:lnSpc>
+                  <a:buFont typeface="Arial" panose="020B0604020202020204" pitchFamily="34" charset="0"/>
+                  <a:buChar char="•"/>
+                </a:pPr>
+                <a:r>
+                  <a:rPr lang="ko-KR" altLang="en-US" sz="1600" spc="-50" dirty="0"/>
+                  <a:t>현실에서 이 비용곡선들의 모양을 알아낸다는 것은 매우 어렵다</a:t>
+                </a:r>
+                <a:r>
+                  <a:rPr lang="en-US" altLang="ko-KR" sz="1600" spc="-50" dirty="0"/>
+                  <a:t>.</a:t>
+                </a:r>
+              </a:p>
+              <a:p>
+                <a:pPr marL="835025" lvl="1" indent="-285750">
+                  <a:lnSpc>
+                    <a:spcPct val="150000"/>
+                  </a:lnSpc>
+                  <a:buFont typeface="Wingdings" panose="05000000000000000000" pitchFamily="2" charset="2"/>
+                  <a:buChar char="ü"/>
+                </a:pPr>
+                <a:r>
+                  <a:rPr lang="ko-KR" altLang="en-US" sz="1600" spc="-50" dirty="0"/>
+                  <a:t>이론적으로는 매우 합리적으로 보이지만</a:t>
+                </a:r>
+                <a:r>
+                  <a:rPr lang="en-US" altLang="ko-KR" sz="1600" spc="-50" dirty="0"/>
+                  <a:t>, </a:t>
+                </a:r>
+                <a:r>
+                  <a:rPr lang="ko-KR" altLang="en-US" sz="1600" spc="-50" dirty="0"/>
+                  <a:t>실제 적용하긴 불가능하다</a:t>
+                </a:r>
+                <a:r>
+                  <a:rPr lang="en-US" altLang="ko-KR" sz="1600" spc="-50" dirty="0"/>
+                  <a:t>.</a:t>
+                </a:r>
+              </a:p>
+              <a:p>
+                <a:pPr marL="835025" lvl="1" indent="-285750">
+                  <a:lnSpc>
+                    <a:spcPct val="150000"/>
+                  </a:lnSpc>
+                  <a:buFont typeface="Wingdings" panose="05000000000000000000" pitchFamily="2" charset="2"/>
+                  <a:buChar char="ü"/>
+                </a:pPr>
+                <a:r>
+                  <a:rPr lang="ko-KR" altLang="en-US" sz="1600" spc="-50" dirty="0"/>
+                  <a:t>최적다수결의 기준을 정하는 단계에서 이미 시간을 낭비할 가능성이 크다</a:t>
+                </a:r>
+                <a:r>
+                  <a:rPr lang="en-US" altLang="ko-KR" sz="1600" spc="-50" dirty="0"/>
+                  <a:t>.</a:t>
+                </a:r>
+              </a:p>
+            </p:txBody>
+          </p:sp>
+        </mc:Choice>
+        <mc:Fallback>
+          <p:sp>
+            <p:nvSpPr>
+              <p:cNvPr id="7" name="TextBox 6">
+                <a:extLst>
+                  <a:ext uri="{FF2B5EF4-FFF2-40B4-BE49-F238E27FC236}">
+                    <a16:creationId xmlns:a16="http://schemas.microsoft.com/office/drawing/2014/main" id="{6AA2736A-F71F-AD4B-53E7-0B8395E09603}"/>
+                  </a:ext>
+                </a:extLst>
+              </p:cNvPr>
+              <p:cNvSpPr txBox="1">
+                <a:spLocks noRot="1" noChangeAspect="1" noMove="1" noResize="1" noEditPoints="1" noAdjustHandles="1" noChangeArrowheads="1" noChangeShapeType="1" noTextEdit="1"/>
+              </p:cNvSpPr>
+              <p:nvPr/>
+            </p:nvSpPr>
+            <p:spPr>
+              <a:xfrm>
+                <a:off x="288790" y="3202565"/>
+                <a:ext cx="7764641" cy="2304285"/>
+              </a:xfrm>
+              <a:prstGeom prst="rect">
+                <a:avLst/>
+              </a:prstGeom>
+              <a:blipFill>
+                <a:blip r:embed="rId4"/>
+                <a:stretch>
+                  <a:fillRect b="-2381"/>
+                </a:stretch>
+              </a:blipFill>
+            </p:spPr>
+            <p:txBody>
+              <a:bodyPr/>
+              <a:lstStyle/>
+              <a:p>
+                <a:r>
+                  <a:rPr lang="ko-KR" altLang="en-US">
+                    <a:noFill/>
+                  </a:rPr>
+                  <a:t> </a:t>
+                </a:r>
+              </a:p>
+            </p:txBody>
+          </p:sp>
+        </mc:Fallback>
+      </mc:AlternateContent>
     </p:spTree>
     <p:extLst>
       <p:ext uri="{BB962C8B-B14F-4D97-AF65-F5344CB8AC3E}">
@@ -7592,6 +7926,3187 @@
 </file>
 
 <file path=ppt/slides/slide11.xml><?xml version="1.0" encoding="utf-8"?>
+<p:sld xmlns:a="http://schemas.openxmlformats.org/drawingml/2006/main" xmlns:r="http://schemas.openxmlformats.org/officeDocument/2006/relationships" xmlns:p="http://schemas.openxmlformats.org/presentationml/2006/main">
+  <p:cSld>
+    <p:spTree>
+      <p:nvGrpSpPr>
+        <p:cNvPr id="1" name=""/>
+        <p:cNvGrpSpPr/>
+        <p:nvPr/>
+      </p:nvGrpSpPr>
+      <p:grpSpPr>
+        <a:xfrm>
+          <a:off x="0" y="0"/>
+          <a:ext cx="0" cy="0"/>
+          <a:chOff x="0" y="0"/>
+          <a:chExt cx="0" cy="0"/>
+        </a:xfrm>
+      </p:grpSpPr>
+      <p:sp>
+        <p:nvSpPr>
+          <p:cNvPr id="2" name="제목 1">
+            <a:extLst>
+              <a:ext uri="{FF2B5EF4-FFF2-40B4-BE49-F238E27FC236}">
+                <a16:creationId xmlns:a16="http://schemas.microsoft.com/office/drawing/2014/main" id="{F984AAFC-A9AD-CA11-89C6-3914F71DBC7C}"/>
+              </a:ext>
+            </a:extLst>
+          </p:cNvPr>
+          <p:cNvSpPr>
+            <a:spLocks noGrp="1"/>
+          </p:cNvSpPr>
+          <p:nvPr>
+            <p:ph type="title"/>
+          </p:nvPr>
+        </p:nvSpPr>
+        <p:spPr/>
+        <p:txBody>
+          <a:bodyPr/>
+          <a:lstStyle/>
+          <a:p>
+            <a:r>
+              <a:rPr lang="ko-KR" altLang="en-US" dirty="0"/>
+              <a:t>점수투표제</a:t>
+            </a:r>
+          </a:p>
+        </p:txBody>
+      </p:sp>
+      <p:sp>
+        <p:nvSpPr>
+          <p:cNvPr id="4" name="슬라이드 번호 개체 틀 3">
+            <a:extLst>
+              <a:ext uri="{FF2B5EF4-FFF2-40B4-BE49-F238E27FC236}">
+                <a16:creationId xmlns:a16="http://schemas.microsoft.com/office/drawing/2014/main" id="{C4986321-DAB8-41E1-02D4-626B21F6DEE5}"/>
+              </a:ext>
+            </a:extLst>
+          </p:cNvPr>
+          <p:cNvSpPr>
+            <a:spLocks noGrp="1"/>
+          </p:cNvSpPr>
+          <p:nvPr>
+            <p:ph type="sldNum" sz="quarter" idx="12"/>
+          </p:nvPr>
+        </p:nvSpPr>
+        <p:spPr/>
+        <p:txBody>
+          <a:bodyPr/>
+          <a:lstStyle/>
+          <a:p>
+            <a:fld id="{109C872D-39A9-4065-8BF3-6A613116E2A1}" type="slidenum">
+              <a:rPr lang="ko-KR" altLang="en-US" smtClean="0"/>
+              <a:t>11</a:t>
+            </a:fld>
+            <a:endParaRPr lang="ko-KR" altLang="en-US"/>
+          </a:p>
+        </p:txBody>
+      </p:sp>
+      <p:sp>
+        <p:nvSpPr>
+          <p:cNvPr id="5" name="TextBox 4">
+            <a:extLst>
+              <a:ext uri="{FF2B5EF4-FFF2-40B4-BE49-F238E27FC236}">
+                <a16:creationId xmlns:a16="http://schemas.microsoft.com/office/drawing/2014/main" id="{46F04AB4-556E-79CC-6EC9-9B0E4F47DFDD}"/>
+              </a:ext>
+            </a:extLst>
+          </p:cNvPr>
+          <p:cNvSpPr txBox="1"/>
+          <p:nvPr/>
+        </p:nvSpPr>
+        <p:spPr>
+          <a:xfrm>
+            <a:off x="288790" y="958844"/>
+            <a:ext cx="11693660" cy="4846007"/>
+          </a:xfrm>
+          <a:prstGeom prst="rect">
+            <a:avLst/>
+          </a:prstGeom>
+          <a:noFill/>
+        </p:spPr>
+        <p:txBody>
+          <a:bodyPr wrap="square" rtlCol="0" anchor="t">
+            <a:spAutoFit/>
+          </a:bodyPr>
+          <a:lstStyle/>
+          <a:p>
+            <a:pPr marL="377825" indent="-285750">
+              <a:lnSpc>
+                <a:spcPct val="150000"/>
+              </a:lnSpc>
+              <a:buFont typeface="Arial" panose="020B0604020202020204" pitchFamily="34" charset="0"/>
+              <a:buChar char="•"/>
+            </a:pPr>
+            <a:r>
+              <a:rPr lang="ko-KR" altLang="en-US" sz="1600" spc="-50" dirty="0"/>
+              <a:t>지금까지 살펴본 표결방식들은 단순히 찬성이나 반대의 뜻을 표현하는 것만 허용하고 있어 선호의 강도를 반영할 수 없었다</a:t>
+            </a:r>
+            <a:r>
+              <a:rPr lang="en-US" altLang="ko-KR" sz="1600" spc="-50" dirty="0"/>
+              <a:t>.</a:t>
+            </a:r>
+          </a:p>
+          <a:p>
+            <a:pPr marL="835025" lvl="1" indent="-285750">
+              <a:lnSpc>
+                <a:spcPct val="150000"/>
+              </a:lnSpc>
+              <a:buFont typeface="Wingdings" panose="05000000000000000000" pitchFamily="2" charset="2"/>
+              <a:buChar char="ü"/>
+            </a:pPr>
+            <a:r>
+              <a:rPr lang="ko-KR" altLang="en-US" sz="1600" spc="-50" dirty="0"/>
+              <a:t>예를 들어 어떤 의안에 대해 </a:t>
+            </a:r>
+            <a:r>
+              <a:rPr lang="en-US" altLang="ko-KR" sz="1600" spc="-50" dirty="0"/>
+              <a:t>51% </a:t>
+            </a:r>
+            <a:r>
+              <a:rPr lang="ko-KR" altLang="en-US" sz="1600" spc="-50" dirty="0"/>
+              <a:t>찬성인데 반해 </a:t>
+            </a:r>
+            <a:r>
+              <a:rPr lang="en-US" altLang="ko-KR" sz="1600" spc="-50" dirty="0"/>
+              <a:t>49%</a:t>
+            </a:r>
+            <a:r>
+              <a:rPr lang="ko-KR" altLang="en-US" sz="1600" spc="-50" dirty="0"/>
+              <a:t>는 목숨 걸고 반대를 하고 있다고 하자</a:t>
+            </a:r>
+            <a:r>
+              <a:rPr lang="en-US" altLang="ko-KR" sz="1600" spc="-50" dirty="0"/>
+              <a:t>. </a:t>
+            </a:r>
+            <a:r>
+              <a:rPr lang="ko-KR" altLang="en-US" sz="1600" spc="-50" dirty="0"/>
+              <a:t>이런 경우라면 반대하는 숫자가 조금 적더라도 강력하게 반대하는 사람들의 뜻을 존중하는 방향으로 결정하는 것이 합리적일 수 있다</a:t>
+            </a:r>
+            <a:r>
+              <a:rPr lang="en-US" altLang="ko-KR" sz="1600" spc="-50" dirty="0"/>
+              <a:t>.</a:t>
+            </a:r>
+          </a:p>
+          <a:p>
+            <a:pPr marL="377825" indent="-285750">
+              <a:lnSpc>
+                <a:spcPct val="150000"/>
+              </a:lnSpc>
+              <a:buFont typeface="Arial" panose="020B0604020202020204" pitchFamily="34" charset="0"/>
+              <a:buChar char="•"/>
+            </a:pPr>
+            <a:r>
+              <a:rPr lang="ko-KR" altLang="en-US" sz="1600" spc="-50" dirty="0"/>
+              <a:t>점수투표제는 이 점을 보완하기 위해 고안된 집단의사결정 방식이다</a:t>
+            </a:r>
+            <a:r>
+              <a:rPr lang="en-US" altLang="ko-KR" sz="1600" spc="-50" dirty="0"/>
+              <a:t>.</a:t>
+            </a:r>
+          </a:p>
+          <a:p>
+            <a:pPr marL="835025" lvl="1" indent="-285750">
+              <a:lnSpc>
+                <a:spcPct val="150000"/>
+              </a:lnSpc>
+              <a:buFont typeface="Wingdings" panose="05000000000000000000" pitchFamily="2" charset="2"/>
+              <a:buChar char="ü"/>
+            </a:pPr>
+            <a:r>
+              <a:rPr lang="ko-KR" altLang="en-US" sz="1600" spc="-50" dirty="0"/>
+              <a:t>투표자들에게 </a:t>
+            </a:r>
+            <a:r>
+              <a:rPr lang="en-US" altLang="ko-KR" sz="1600" spc="-50" dirty="0"/>
+              <a:t>10</a:t>
+            </a:r>
+            <a:r>
+              <a:rPr lang="ko-KR" altLang="en-US" sz="1600" spc="-50" dirty="0"/>
+              <a:t>점씩을 부여하고</a:t>
+            </a:r>
+            <a:r>
+              <a:rPr lang="en-US" altLang="ko-KR" sz="1600" spc="-50" dirty="0"/>
+              <a:t>, </a:t>
+            </a:r>
+            <a:r>
+              <a:rPr lang="ko-KR" altLang="en-US" sz="1600" spc="-50" dirty="0"/>
+              <a:t>투표자는 의안들에 대해 부여 받은</a:t>
+            </a:r>
+            <a:r>
+              <a:rPr lang="en-US" altLang="ko-KR" sz="1600" spc="-50" dirty="0"/>
+              <a:t> 10</a:t>
+            </a:r>
+            <a:r>
+              <a:rPr lang="ko-KR" altLang="en-US" sz="1600" spc="-50" dirty="0"/>
+              <a:t>점을 적절히 배분하여 투표한다</a:t>
+            </a:r>
+            <a:r>
+              <a:rPr lang="en-US" altLang="ko-KR" sz="1600" spc="-50" dirty="0"/>
+              <a:t>.</a:t>
+            </a:r>
+          </a:p>
+          <a:p>
+            <a:pPr marL="1292225" lvl="2" indent="-285750">
+              <a:lnSpc>
+                <a:spcPct val="150000"/>
+              </a:lnSpc>
+              <a:buFont typeface="Wingdings" panose="05000000000000000000" pitchFamily="2" charset="2"/>
+              <a:buChar char="Ø"/>
+            </a:pPr>
+            <a:r>
+              <a:rPr lang="ko-KR" altLang="en-US" sz="1600" spc="-50" dirty="0"/>
+              <a:t>특정 의안만 좋아한다면 그 의안에 </a:t>
+            </a:r>
+            <a:r>
+              <a:rPr lang="en-US" altLang="ko-KR" sz="1600" spc="-50" dirty="0"/>
+              <a:t>10</a:t>
+            </a:r>
+            <a:r>
+              <a:rPr lang="ko-KR" altLang="en-US" sz="1600" spc="-50" dirty="0"/>
+              <a:t>점을 몰아주고</a:t>
+            </a:r>
+            <a:r>
+              <a:rPr lang="en-US" altLang="ko-KR" sz="1600" spc="-50" dirty="0"/>
+              <a:t>, </a:t>
+            </a:r>
+            <a:r>
+              <a:rPr lang="ko-KR" altLang="en-US" sz="1600" spc="-50" dirty="0"/>
+              <a:t>나머지들에 대해서는 </a:t>
+            </a:r>
+            <a:r>
+              <a:rPr lang="en-US" altLang="ko-KR" sz="1600" spc="-50" dirty="0"/>
+              <a:t>0</a:t>
+            </a:r>
+            <a:r>
+              <a:rPr lang="ko-KR" altLang="en-US" sz="1600" spc="-50" dirty="0"/>
+              <a:t>점을 부과하는 것도 가능하다</a:t>
+            </a:r>
+            <a:r>
+              <a:rPr lang="en-US" altLang="ko-KR" sz="1600" spc="-50" dirty="0"/>
+              <a:t>.</a:t>
+            </a:r>
+          </a:p>
+          <a:p>
+            <a:pPr marL="835025" lvl="1" indent="-285750">
+              <a:lnSpc>
+                <a:spcPct val="150000"/>
+              </a:lnSpc>
+              <a:buFont typeface="Wingdings" panose="05000000000000000000" pitchFamily="2" charset="2"/>
+              <a:buChar char="ü"/>
+            </a:pPr>
+            <a:r>
+              <a:rPr lang="ko-KR" altLang="en-US" sz="1600" spc="-50" dirty="0"/>
+              <a:t>총점을 가장 많이 획득한 의안을 최종 선택하게 된다</a:t>
+            </a:r>
+            <a:r>
+              <a:rPr lang="en-US" altLang="ko-KR" sz="1600" spc="-50" dirty="0"/>
+              <a:t>.</a:t>
+            </a:r>
+          </a:p>
+          <a:p>
+            <a:pPr marL="835025" lvl="1" indent="-285750">
+              <a:lnSpc>
+                <a:spcPct val="150000"/>
+              </a:lnSpc>
+              <a:buFont typeface="Wingdings" panose="05000000000000000000" pitchFamily="2" charset="2"/>
+              <a:buChar char="ü"/>
+            </a:pPr>
+            <a:r>
+              <a:rPr lang="ko-KR" altLang="en-US" sz="1600" spc="-50" dirty="0"/>
+              <a:t>투표자들 선호의 강도가 제대로 반영되어 합리적인 의사결정에 이를 수 있다는 장점이 있다</a:t>
+            </a:r>
+            <a:r>
+              <a:rPr lang="en-US" altLang="ko-KR" sz="1600" spc="-50" dirty="0"/>
+              <a:t>.</a:t>
+            </a:r>
+          </a:p>
+          <a:p>
+            <a:pPr marL="377825" indent="-285750">
+              <a:lnSpc>
+                <a:spcPct val="150000"/>
+              </a:lnSpc>
+              <a:buFont typeface="Arial" panose="020B0604020202020204" pitchFamily="34" charset="0"/>
+              <a:buChar char="•"/>
+            </a:pPr>
+            <a:r>
+              <a:rPr lang="ko-KR" altLang="en-US" sz="1600" spc="-50" dirty="0"/>
+              <a:t>그러나 점수투표제는 전략적 행위에 상대적으로 취약하다</a:t>
+            </a:r>
+            <a:r>
+              <a:rPr lang="en-US" altLang="ko-KR" sz="1600" spc="-50" dirty="0"/>
+              <a:t>.</a:t>
+            </a:r>
+          </a:p>
+          <a:p>
+            <a:pPr marL="835025" lvl="1" indent="-285750">
+              <a:lnSpc>
+                <a:spcPct val="150000"/>
+              </a:lnSpc>
+              <a:buFont typeface="Wingdings" panose="05000000000000000000" pitchFamily="2" charset="2"/>
+              <a:buChar char="ü"/>
+            </a:pPr>
+            <a:r>
+              <a:rPr lang="ko-KR" altLang="en-US" sz="1600" spc="-50" dirty="0"/>
+              <a:t>여기서 전략적 </a:t>
+            </a:r>
+            <a:r>
+              <a:rPr lang="ko-KR" altLang="en-US" sz="1600" spc="-50" dirty="0" err="1"/>
+              <a:t>행위란</a:t>
+            </a:r>
+            <a:r>
+              <a:rPr lang="ko-KR" altLang="en-US" sz="1600" spc="-50" dirty="0"/>
+              <a:t> 어떤 투표자가 다른 투표자의 투표성향을 미리 예측하고</a:t>
+            </a:r>
+            <a:r>
+              <a:rPr lang="en-US" altLang="ko-KR" sz="1600" spc="-50" dirty="0"/>
+              <a:t>, </a:t>
+            </a:r>
+            <a:r>
+              <a:rPr lang="ko-KR" altLang="en-US" sz="1600" spc="-50" dirty="0"/>
+              <a:t>그에 맞춰 자신의 행동을 변화시킴으로써 자기가 원하는 결과를 얻으려 하는 행동을 의미한다</a:t>
+            </a:r>
+            <a:r>
+              <a:rPr lang="en-US" altLang="ko-KR" sz="1600" spc="-50" dirty="0"/>
+              <a:t>.</a:t>
+            </a:r>
+          </a:p>
+          <a:p>
+            <a:pPr marL="1292225" lvl="2" indent="-285750">
+              <a:lnSpc>
+                <a:spcPct val="150000"/>
+              </a:lnSpc>
+              <a:buFont typeface="Wingdings" panose="05000000000000000000" pitchFamily="2" charset="2"/>
+              <a:buChar char="Ø"/>
+            </a:pPr>
+            <a:r>
+              <a:rPr lang="ko-KR" altLang="en-US" sz="1600" spc="-50" dirty="0"/>
+              <a:t>예를 들어 본인이 가장 싫어하는 의안이 통과될 것 같다고 예상이 되면</a:t>
+            </a:r>
+            <a:r>
+              <a:rPr lang="en-US" altLang="ko-KR" sz="1600" spc="-50" dirty="0"/>
+              <a:t>, </a:t>
+            </a:r>
+            <a:r>
+              <a:rPr lang="ko-KR" altLang="en-US" sz="1600" spc="-50" dirty="0"/>
+              <a:t>비교적 덜 싫어하는 의안에 고의로 점수를 몰아줌으로써 최소한 가장 싫은 의안이 통과되는 것을 막으려 할 수 있다</a:t>
+            </a:r>
+            <a:r>
+              <a:rPr lang="en-US" altLang="ko-KR" sz="1600" spc="-50" dirty="0"/>
+              <a:t>.</a:t>
+            </a:r>
+          </a:p>
+        </p:txBody>
+      </p:sp>
+    </p:spTree>
+    <p:extLst>
+      <p:ext uri="{BB962C8B-B14F-4D97-AF65-F5344CB8AC3E}">
+        <p14:creationId xmlns:p14="http://schemas.microsoft.com/office/powerpoint/2010/main" val="1727705681"/>
+      </p:ext>
+    </p:extLst>
+  </p:cSld>
+  <p:clrMapOvr>
+    <a:masterClrMapping/>
+  </p:clrMapOvr>
+</p:sld>
+</file>
+
+<file path=ppt/slides/slide12.xml><?xml version="1.0" encoding="utf-8"?>
+<p:sld xmlns:a="http://schemas.openxmlformats.org/drawingml/2006/main" xmlns:r="http://schemas.openxmlformats.org/officeDocument/2006/relationships" xmlns:p="http://schemas.openxmlformats.org/presentationml/2006/main">
+  <p:cSld>
+    <p:spTree>
+      <p:nvGrpSpPr>
+        <p:cNvPr id="1" name=""/>
+        <p:cNvGrpSpPr/>
+        <p:nvPr/>
+      </p:nvGrpSpPr>
+      <p:grpSpPr>
+        <a:xfrm>
+          <a:off x="0" y="0"/>
+          <a:ext cx="0" cy="0"/>
+          <a:chOff x="0" y="0"/>
+          <a:chExt cx="0" cy="0"/>
+        </a:xfrm>
+      </p:grpSpPr>
+      <p:sp>
+        <p:nvSpPr>
+          <p:cNvPr id="2" name="제목 1">
+            <a:extLst>
+              <a:ext uri="{FF2B5EF4-FFF2-40B4-BE49-F238E27FC236}">
+                <a16:creationId xmlns:a16="http://schemas.microsoft.com/office/drawing/2014/main" id="{D466AFBF-7B4A-2230-CC5C-9F305E326785}"/>
+              </a:ext>
+            </a:extLst>
+          </p:cNvPr>
+          <p:cNvSpPr>
+            <a:spLocks noGrp="1"/>
+          </p:cNvSpPr>
+          <p:nvPr>
+            <p:ph type="title"/>
+          </p:nvPr>
+        </p:nvSpPr>
+        <p:spPr/>
+        <p:txBody>
+          <a:bodyPr/>
+          <a:lstStyle/>
+          <a:p>
+            <a:r>
+              <a:rPr lang="ko-KR" altLang="en-US" dirty="0"/>
+              <a:t>점수투표제</a:t>
+            </a:r>
+          </a:p>
+        </p:txBody>
+      </p:sp>
+      <p:sp>
+        <p:nvSpPr>
+          <p:cNvPr id="4" name="슬라이드 번호 개체 틀 3">
+            <a:extLst>
+              <a:ext uri="{FF2B5EF4-FFF2-40B4-BE49-F238E27FC236}">
+                <a16:creationId xmlns:a16="http://schemas.microsoft.com/office/drawing/2014/main" id="{456C40E7-07A7-8BCA-48FB-A446D615F48D}"/>
+              </a:ext>
+            </a:extLst>
+          </p:cNvPr>
+          <p:cNvSpPr>
+            <a:spLocks noGrp="1"/>
+          </p:cNvSpPr>
+          <p:nvPr>
+            <p:ph type="sldNum" sz="quarter" idx="12"/>
+          </p:nvPr>
+        </p:nvSpPr>
+        <p:spPr/>
+        <p:txBody>
+          <a:bodyPr/>
+          <a:lstStyle/>
+          <a:p>
+            <a:fld id="{109C872D-39A9-4065-8BF3-6A613116E2A1}" type="slidenum">
+              <a:rPr lang="ko-KR" altLang="en-US" smtClean="0"/>
+              <a:t>12</a:t>
+            </a:fld>
+            <a:endParaRPr lang="ko-KR" altLang="en-US"/>
+          </a:p>
+        </p:txBody>
+      </p:sp>
+      <p:sp>
+        <p:nvSpPr>
+          <p:cNvPr id="5" name="TextBox 4">
+            <a:extLst>
+              <a:ext uri="{FF2B5EF4-FFF2-40B4-BE49-F238E27FC236}">
+                <a16:creationId xmlns:a16="http://schemas.microsoft.com/office/drawing/2014/main" id="{FA0DA94B-12CA-C5DB-2FF1-657B3822EADC}"/>
+              </a:ext>
+            </a:extLst>
+          </p:cNvPr>
+          <p:cNvSpPr txBox="1"/>
+          <p:nvPr/>
+        </p:nvSpPr>
+        <p:spPr>
+          <a:xfrm>
+            <a:off x="288790" y="958844"/>
+            <a:ext cx="11693660" cy="2260683"/>
+          </a:xfrm>
+          <a:prstGeom prst="rect">
+            <a:avLst/>
+          </a:prstGeom>
+          <a:noFill/>
+        </p:spPr>
+        <p:txBody>
+          <a:bodyPr wrap="square" rtlCol="0" anchor="t">
+            <a:spAutoFit/>
+          </a:bodyPr>
+          <a:lstStyle/>
+          <a:p>
+            <a:pPr marL="377825" indent="-285750">
+              <a:lnSpc>
+                <a:spcPct val="150000"/>
+              </a:lnSpc>
+              <a:buFont typeface="Arial" panose="020B0604020202020204" pitchFamily="34" charset="0"/>
+              <a:buChar char="•"/>
+            </a:pPr>
+            <a:r>
+              <a:rPr lang="ko-KR" altLang="en-US" sz="1600" spc="-50" dirty="0"/>
+              <a:t>점수투표제에서 전략적 행위의 예로 다음과 같은 조합장 선출과정을 생각해보자</a:t>
+            </a:r>
+            <a:r>
+              <a:rPr lang="en-US" altLang="ko-KR" sz="1600" spc="-50" dirty="0"/>
+              <a:t>.</a:t>
+            </a:r>
+          </a:p>
+          <a:p>
+            <a:pPr marL="835025" lvl="1" indent="-285750">
+              <a:lnSpc>
+                <a:spcPct val="150000"/>
+              </a:lnSpc>
+              <a:buFont typeface="Wingdings" panose="05000000000000000000" pitchFamily="2" charset="2"/>
+              <a:buChar char="ü"/>
+            </a:pPr>
+            <a:r>
+              <a:rPr lang="en-US" altLang="ko-KR" sz="1600" spc="-50" dirty="0"/>
+              <a:t>6</a:t>
+            </a:r>
+            <a:r>
+              <a:rPr lang="ko-KR" altLang="en-US" sz="1600" spc="-50" dirty="0"/>
+              <a:t>명으로 구성된 어떤 조합이 있는데</a:t>
+            </a:r>
+            <a:r>
+              <a:rPr lang="en-US" altLang="ko-KR" sz="1600" spc="-50" dirty="0"/>
+              <a:t>, </a:t>
+            </a:r>
+            <a:r>
+              <a:rPr lang="ko-KR" altLang="en-US" sz="1600" spc="-50" dirty="0"/>
+              <a:t>외부로부터 조합장을 영입하기로 하였고</a:t>
+            </a:r>
+            <a:r>
+              <a:rPr lang="en-US" altLang="ko-KR" sz="1600" spc="-50" dirty="0"/>
+              <a:t>, </a:t>
+            </a:r>
+            <a:r>
+              <a:rPr lang="ko-KR" altLang="en-US" sz="1600" spc="-50" dirty="0"/>
+              <a:t>세 명의 후보자 </a:t>
+            </a:r>
+            <a:r>
+              <a:rPr lang="en-US" altLang="ko-KR" sz="1600" spc="-50" dirty="0"/>
+              <a:t>(A, B, C)</a:t>
+            </a:r>
+            <a:r>
+              <a:rPr lang="ko-KR" altLang="en-US" sz="1600" spc="-50" dirty="0"/>
+              <a:t> 중 한 사람을 고르기로 했다</a:t>
+            </a:r>
+            <a:r>
+              <a:rPr lang="en-US" altLang="ko-KR" sz="1600" spc="-50" dirty="0"/>
+              <a:t>.</a:t>
+            </a:r>
+          </a:p>
+          <a:p>
+            <a:pPr marL="835025" lvl="1" indent="-285750">
+              <a:lnSpc>
+                <a:spcPct val="150000"/>
+              </a:lnSpc>
+              <a:buFont typeface="Wingdings" panose="05000000000000000000" pitchFamily="2" charset="2"/>
+              <a:buChar char="ü"/>
+            </a:pPr>
+            <a:r>
+              <a:rPr lang="ko-KR" altLang="en-US" sz="1600" spc="-50" dirty="0"/>
+              <a:t>조합원 각자는 세 명의 후보에게 느끼는 지지도에 따라 </a:t>
+            </a:r>
+            <a:r>
+              <a:rPr lang="en-US" altLang="ko-KR" sz="1600" spc="-50" dirty="0"/>
+              <a:t>10</a:t>
+            </a:r>
+            <a:r>
+              <a:rPr lang="ko-KR" altLang="en-US" sz="1600" spc="-50" dirty="0"/>
+              <a:t>점의 점수를 나누어 주는 방식으로 투표를 진행하기로 하였다</a:t>
+            </a:r>
+            <a:r>
+              <a:rPr lang="en-US" altLang="ko-KR" sz="1600" spc="-50" dirty="0"/>
+              <a:t>.</a:t>
+            </a:r>
+          </a:p>
+          <a:p>
+            <a:pPr marL="835025" lvl="1" indent="-285750">
+              <a:lnSpc>
+                <a:spcPct val="150000"/>
+              </a:lnSpc>
+              <a:buFont typeface="Wingdings" panose="05000000000000000000" pitchFamily="2" charset="2"/>
+              <a:buChar char="ü"/>
+            </a:pPr>
+            <a:r>
+              <a:rPr lang="ko-KR" altLang="en-US" sz="1600" spc="-50" dirty="0"/>
+              <a:t>각 조합원</a:t>
+            </a:r>
+            <a:r>
+              <a:rPr lang="en-US" altLang="ko-KR" sz="1600" spc="-50" dirty="0"/>
+              <a:t>(</a:t>
+            </a:r>
+            <a:r>
+              <a:rPr lang="ko-KR" altLang="en-US" sz="1600" spc="-50" dirty="0"/>
+              <a:t>투표자</a:t>
+            </a:r>
+            <a:r>
+              <a:rPr lang="en-US" altLang="ko-KR" sz="1600" spc="-50" dirty="0"/>
+              <a:t>1~6)</a:t>
+            </a:r>
+            <a:r>
+              <a:rPr lang="ko-KR" altLang="en-US" sz="1600" spc="-50" dirty="0"/>
+              <a:t>들이 후보자들에게 느끼는 선호의 정도는 아래의 표와 같다</a:t>
+            </a:r>
+            <a:r>
+              <a:rPr lang="en-US" altLang="ko-KR" sz="1600" spc="-50" dirty="0"/>
+              <a:t>.</a:t>
+            </a:r>
+          </a:p>
+          <a:p>
+            <a:pPr marL="1292225" lvl="2" indent="-285750">
+              <a:lnSpc>
+                <a:spcPct val="150000"/>
+              </a:lnSpc>
+              <a:buFont typeface="Wingdings" panose="05000000000000000000" pitchFamily="2" charset="2"/>
+              <a:buChar char="Ø"/>
+            </a:pPr>
+            <a:endParaRPr lang="en-US" altLang="ko-KR" sz="1600" spc="-50" dirty="0"/>
+          </a:p>
+        </p:txBody>
+      </p:sp>
+      <p:graphicFrame>
+        <p:nvGraphicFramePr>
+          <p:cNvPr id="6" name="표 5">
+            <a:extLst>
+              <a:ext uri="{FF2B5EF4-FFF2-40B4-BE49-F238E27FC236}">
+                <a16:creationId xmlns:a16="http://schemas.microsoft.com/office/drawing/2014/main" id="{7FF6E734-CE39-108B-A2B2-DBCA43275D0B}"/>
+              </a:ext>
+            </a:extLst>
+          </p:cNvPr>
+          <p:cNvGraphicFramePr>
+            <a:graphicFrameLocks noGrp="1"/>
+          </p:cNvGraphicFramePr>
+          <p:nvPr>
+            <p:extLst>
+              <p:ext uri="{D42A27DB-BD31-4B8C-83A1-F6EECF244321}">
+                <p14:modId xmlns:p14="http://schemas.microsoft.com/office/powerpoint/2010/main" val="1460704135"/>
+              </p:ext>
+            </p:extLst>
+          </p:nvPr>
+        </p:nvGraphicFramePr>
+        <p:xfrm>
+          <a:off x="2957921" y="3595613"/>
+          <a:ext cx="5336688" cy="1017628"/>
+        </p:xfrm>
+        <a:graphic>
+          <a:graphicData uri="http://schemas.openxmlformats.org/drawingml/2006/table">
+            <a:tbl>
+              <a:tblPr firstRow="1" bandRow="1">
+                <a:effectLst>
+                  <a:outerShdw blurRad="50800" dist="38100" dir="2700000" algn="tl" rotWithShape="0">
+                    <a:prstClr val="black">
+                      <a:alpha val="40000"/>
+                    </a:prstClr>
+                  </a:outerShdw>
+                </a:effectLst>
+                <a:tableStyleId>{5C22544A-7EE6-4342-B048-85BDC9FD1C3A}</a:tableStyleId>
+              </a:tblPr>
+              <a:tblGrid>
+                <a:gridCol w="667086">
+                  <a:extLst>
+                    <a:ext uri="{9D8B030D-6E8A-4147-A177-3AD203B41FA5}">
+                      <a16:colId xmlns:a16="http://schemas.microsoft.com/office/drawing/2014/main" val="2218693278"/>
+                    </a:ext>
+                  </a:extLst>
+                </a:gridCol>
+                <a:gridCol w="667086">
+                  <a:extLst>
+                    <a:ext uri="{9D8B030D-6E8A-4147-A177-3AD203B41FA5}">
+                      <a16:colId xmlns:a16="http://schemas.microsoft.com/office/drawing/2014/main" val="3036950207"/>
+                    </a:ext>
+                  </a:extLst>
+                </a:gridCol>
+                <a:gridCol w="667086">
+                  <a:extLst>
+                    <a:ext uri="{9D8B030D-6E8A-4147-A177-3AD203B41FA5}">
+                      <a16:colId xmlns:a16="http://schemas.microsoft.com/office/drawing/2014/main" val="2699398209"/>
+                    </a:ext>
+                  </a:extLst>
+                </a:gridCol>
+                <a:gridCol w="667086">
+                  <a:extLst>
+                    <a:ext uri="{9D8B030D-6E8A-4147-A177-3AD203B41FA5}">
+                      <a16:colId xmlns:a16="http://schemas.microsoft.com/office/drawing/2014/main" val="3382775548"/>
+                    </a:ext>
+                  </a:extLst>
+                </a:gridCol>
+                <a:gridCol w="667086">
+                  <a:extLst>
+                    <a:ext uri="{9D8B030D-6E8A-4147-A177-3AD203B41FA5}">
+                      <a16:colId xmlns:a16="http://schemas.microsoft.com/office/drawing/2014/main" val="1783205468"/>
+                    </a:ext>
+                  </a:extLst>
+                </a:gridCol>
+                <a:gridCol w="667086">
+                  <a:extLst>
+                    <a:ext uri="{9D8B030D-6E8A-4147-A177-3AD203B41FA5}">
+                      <a16:colId xmlns:a16="http://schemas.microsoft.com/office/drawing/2014/main" val="3288731490"/>
+                    </a:ext>
+                  </a:extLst>
+                </a:gridCol>
+                <a:gridCol w="667086">
+                  <a:extLst>
+                    <a:ext uri="{9D8B030D-6E8A-4147-A177-3AD203B41FA5}">
+                      <a16:colId xmlns:a16="http://schemas.microsoft.com/office/drawing/2014/main" val="4205076024"/>
+                    </a:ext>
+                  </a:extLst>
+                </a:gridCol>
+                <a:gridCol w="667086">
+                  <a:extLst>
+                    <a:ext uri="{9D8B030D-6E8A-4147-A177-3AD203B41FA5}">
+                      <a16:colId xmlns:a16="http://schemas.microsoft.com/office/drawing/2014/main" val="4050302428"/>
+                    </a:ext>
+                  </a:extLst>
+                </a:gridCol>
+              </a:tblGrid>
+              <a:tr h="0">
+                <a:tc>
+                  <a:txBody>
+                    <a:bodyPr/>
+                    <a:lstStyle/>
+                    <a:p>
+                      <a:pPr marL="0" marR="0" indent="0" algn="ctr" fontAlgn="base" latinLnBrk="0">
+                        <a:lnSpc>
+                          <a:spcPct val="120000"/>
+                        </a:lnSpc>
+                        <a:spcBef>
+                          <a:spcPts val="0"/>
+                        </a:spcBef>
+                        <a:spcAft>
+                          <a:spcPts val="0"/>
+                        </a:spcAft>
+                      </a:pPr>
+                      <a:r>
+                        <a:rPr lang="ko-KR" altLang="en-US" sz="1050" b="1" kern="0" spc="0" dirty="0">
+                          <a:solidFill>
+                            <a:schemeClr val="tx1"/>
+                          </a:solidFill>
+                          <a:effectLst/>
+                          <a:latin typeface="+mn-ea"/>
+                          <a:ea typeface="+mn-ea"/>
+                          <a:cs typeface="+mn-cs"/>
+                        </a:rPr>
+                        <a:t>조합장 후보</a:t>
+                      </a:r>
+                      <a:endParaRPr lang="en-US" altLang="ko-KR" sz="1050" b="1" kern="0" spc="0" dirty="0">
+                        <a:solidFill>
+                          <a:schemeClr val="tx1"/>
+                        </a:solidFill>
+                        <a:effectLst/>
+                        <a:latin typeface="+mn-ea"/>
+                        <a:ea typeface="+mn-ea"/>
+                        <a:cs typeface="+mn-cs"/>
+                      </a:endParaRPr>
+                    </a:p>
+                  </a:txBody>
+                  <a:tcPr marL="60223" marR="60223" marT="16650" marB="16650" anchor="ctr">
+                    <a:lnL w="12700" cap="flat" cmpd="sng" algn="ctr">
+                      <a:solidFill>
+                        <a:schemeClr val="tx1"/>
+                      </a:solidFill>
+                      <a:prstDash val="solid"/>
+                      <a:round/>
+                      <a:headEnd type="none" w="med" len="med"/>
+                      <a:tailEnd type="none" w="med" len="med"/>
+                    </a:lnL>
+                    <a:lnR w="6350" cap="flat" cmpd="sng" algn="ctr">
+                      <a:solidFill>
+                        <a:schemeClr val="tx1"/>
+                      </a:solidFill>
+                      <a:prstDash val="solid"/>
+                      <a:round/>
+                      <a:headEnd type="none" w="med" len="med"/>
+                      <a:tailEnd type="none" w="med" len="med"/>
+                    </a:lnR>
+                    <a:lnT w="12700" cap="flat" cmpd="sng" algn="ctr">
+                      <a:solidFill>
+                        <a:schemeClr val="tx1"/>
+                      </a:solidFill>
+                      <a:prstDash val="solid"/>
+                      <a:round/>
+                      <a:headEnd type="none" w="med" len="med"/>
+                      <a:tailEnd type="none" w="med" len="med"/>
+                    </a:lnT>
+                    <a:lnB w="6350" cap="flat" cmpd="sng" algn="ctr">
+                      <a:solidFill>
+                        <a:schemeClr val="tx1"/>
+                      </a:solidFill>
+                      <a:prstDash val="solid"/>
+                      <a:round/>
+                      <a:headEnd type="none" w="med" len="med"/>
+                      <a:tailEnd type="none" w="med" len="med"/>
+                    </a:lnB>
+                    <a:solidFill>
+                      <a:schemeClr val="tx2">
+                        <a:lumMod val="10000"/>
+                        <a:lumOff val="90000"/>
+                      </a:schemeClr>
+                    </a:solidFill>
+                  </a:tcPr>
+                </a:tc>
+                <a:tc>
+                  <a:txBody>
+                    <a:bodyPr/>
+                    <a:lstStyle/>
+                    <a:p>
+                      <a:pPr algn="ctr" latinLnBrk="1"/>
+                      <a:r>
+                        <a:rPr lang="ko-KR" altLang="en-US" sz="1050" b="1" kern="0" spc="0" dirty="0">
+                          <a:solidFill>
+                            <a:schemeClr val="tx1"/>
+                          </a:solidFill>
+                          <a:effectLst/>
+                          <a:latin typeface="+mn-ea"/>
+                          <a:ea typeface="+mn-ea"/>
+                          <a:cs typeface="+mn-cs"/>
+                        </a:rPr>
+                        <a:t>투표자 </a:t>
+                      </a:r>
+                      <a:r>
+                        <a:rPr lang="en-US" altLang="ko-KR" sz="1050" b="1" kern="0" spc="0" dirty="0">
+                          <a:solidFill>
+                            <a:schemeClr val="tx1"/>
+                          </a:solidFill>
+                          <a:effectLst/>
+                          <a:latin typeface="+mn-ea"/>
+                          <a:ea typeface="+mn-ea"/>
+                          <a:cs typeface="+mn-cs"/>
+                        </a:rPr>
+                        <a:t>1</a:t>
+                      </a:r>
+                    </a:p>
+                  </a:txBody>
+                  <a:tcPr marL="60223" marR="60223" marT="16650" marB="16650" anchor="ctr">
+                    <a:lnL w="6350" cap="flat" cmpd="sng" algn="ctr">
+                      <a:solidFill>
+                        <a:schemeClr val="tx1"/>
+                      </a:solidFill>
+                      <a:prstDash val="solid"/>
+                      <a:round/>
+                      <a:headEnd type="none" w="med" len="med"/>
+                      <a:tailEnd type="none" w="med" len="med"/>
+                    </a:lnL>
+                    <a:lnR w="6350" cap="flat" cmpd="sng" algn="ctr">
+                      <a:solidFill>
+                        <a:schemeClr val="tx1"/>
+                      </a:solidFill>
+                      <a:prstDash val="solid"/>
+                      <a:round/>
+                      <a:headEnd type="none" w="med" len="med"/>
+                      <a:tailEnd type="none" w="med" len="med"/>
+                    </a:lnR>
+                    <a:lnT w="12700" cap="flat" cmpd="sng" algn="ctr">
+                      <a:solidFill>
+                        <a:schemeClr val="tx1"/>
+                      </a:solidFill>
+                      <a:prstDash val="solid"/>
+                      <a:round/>
+                      <a:headEnd type="none" w="med" len="med"/>
+                      <a:tailEnd type="none" w="med" len="med"/>
+                    </a:lnT>
+                    <a:lnB w="6350" cap="flat" cmpd="sng" algn="ctr">
+                      <a:solidFill>
+                        <a:schemeClr val="tx1"/>
+                      </a:solidFill>
+                      <a:prstDash val="solid"/>
+                      <a:round/>
+                      <a:headEnd type="none" w="med" len="med"/>
+                      <a:tailEnd type="none" w="med" len="med"/>
+                    </a:lnB>
+                    <a:solidFill>
+                      <a:schemeClr val="tx2">
+                        <a:lumMod val="10000"/>
+                        <a:lumOff val="90000"/>
+                      </a:schemeClr>
+                    </a:solidFill>
+                  </a:tcPr>
+                </a:tc>
+                <a:tc>
+                  <a:txBody>
+                    <a:bodyPr/>
+                    <a:lstStyle/>
+                    <a:p>
+                      <a:pPr marL="0" marR="0" lvl="0" indent="0" algn="ctr" defTabSz="914400" rtl="0" eaLnBrk="1" fontAlgn="auto" latinLnBrk="1" hangingPunct="1">
+                        <a:lnSpc>
+                          <a:spcPct val="100000"/>
+                        </a:lnSpc>
+                        <a:spcBef>
+                          <a:spcPts val="0"/>
+                        </a:spcBef>
+                        <a:spcAft>
+                          <a:spcPts val="0"/>
+                        </a:spcAft>
+                        <a:buClrTx/>
+                        <a:buSzTx/>
+                        <a:buFontTx/>
+                        <a:buNone/>
+                        <a:tabLst/>
+                        <a:defRPr/>
+                      </a:pPr>
+                      <a:r>
+                        <a:rPr lang="ko-KR" altLang="en-US" sz="1050" b="1" kern="0" spc="0" dirty="0">
+                          <a:solidFill>
+                            <a:schemeClr val="tx1"/>
+                          </a:solidFill>
+                          <a:effectLst/>
+                          <a:latin typeface="+mn-ea"/>
+                          <a:ea typeface="+mn-ea"/>
+                          <a:cs typeface="+mn-cs"/>
+                        </a:rPr>
+                        <a:t>투표자 </a:t>
+                      </a:r>
+                      <a:r>
+                        <a:rPr lang="en-US" altLang="ko-KR" sz="1050" b="1" kern="0" spc="0" dirty="0">
+                          <a:solidFill>
+                            <a:schemeClr val="tx1"/>
+                          </a:solidFill>
+                          <a:effectLst/>
+                          <a:latin typeface="+mn-ea"/>
+                          <a:ea typeface="+mn-ea"/>
+                          <a:cs typeface="+mn-cs"/>
+                        </a:rPr>
+                        <a:t>2</a:t>
+                      </a:r>
+                    </a:p>
+                  </a:txBody>
+                  <a:tcPr marL="60223" marR="60223" marT="16650" marB="16650" anchor="ctr">
+                    <a:lnL w="6350" cap="flat" cmpd="sng" algn="ctr">
+                      <a:solidFill>
+                        <a:schemeClr val="tx1"/>
+                      </a:solidFill>
+                      <a:prstDash val="solid"/>
+                      <a:round/>
+                      <a:headEnd type="none" w="med" len="med"/>
+                      <a:tailEnd type="none" w="med" len="med"/>
+                    </a:lnL>
+                    <a:lnR w="6350" cap="flat" cmpd="sng" algn="ctr">
+                      <a:solidFill>
+                        <a:schemeClr val="tx1"/>
+                      </a:solidFill>
+                      <a:prstDash val="solid"/>
+                      <a:round/>
+                      <a:headEnd type="none" w="med" len="med"/>
+                      <a:tailEnd type="none" w="med" len="med"/>
+                    </a:lnR>
+                    <a:lnT w="12700" cap="flat" cmpd="sng" algn="ctr">
+                      <a:solidFill>
+                        <a:schemeClr val="tx1"/>
+                      </a:solidFill>
+                      <a:prstDash val="solid"/>
+                      <a:round/>
+                      <a:headEnd type="none" w="med" len="med"/>
+                      <a:tailEnd type="none" w="med" len="med"/>
+                    </a:lnT>
+                    <a:lnB w="6350" cap="flat" cmpd="sng" algn="ctr">
+                      <a:solidFill>
+                        <a:schemeClr val="tx1"/>
+                      </a:solidFill>
+                      <a:prstDash val="solid"/>
+                      <a:round/>
+                      <a:headEnd type="none" w="med" len="med"/>
+                      <a:tailEnd type="none" w="med" len="med"/>
+                    </a:lnB>
+                    <a:solidFill>
+                      <a:schemeClr val="tx2">
+                        <a:lumMod val="10000"/>
+                        <a:lumOff val="90000"/>
+                      </a:schemeClr>
+                    </a:solidFill>
+                  </a:tcPr>
+                </a:tc>
+                <a:tc>
+                  <a:txBody>
+                    <a:bodyPr/>
+                    <a:lstStyle/>
+                    <a:p>
+                      <a:pPr algn="ctr" latinLnBrk="1"/>
+                      <a:r>
+                        <a:rPr lang="ko-KR" altLang="en-US" sz="1050" b="1" kern="0" spc="0" dirty="0">
+                          <a:solidFill>
+                            <a:schemeClr val="tx1"/>
+                          </a:solidFill>
+                          <a:effectLst/>
+                          <a:latin typeface="+mn-ea"/>
+                          <a:ea typeface="+mn-ea"/>
+                          <a:cs typeface="+mn-cs"/>
+                        </a:rPr>
+                        <a:t>투표자 </a:t>
+                      </a:r>
+                      <a:r>
+                        <a:rPr lang="en-US" altLang="ko-KR" sz="1050" b="1" kern="0" spc="0" dirty="0">
+                          <a:solidFill>
+                            <a:schemeClr val="tx1"/>
+                          </a:solidFill>
+                          <a:effectLst/>
+                          <a:latin typeface="+mn-ea"/>
+                          <a:ea typeface="+mn-ea"/>
+                          <a:cs typeface="+mn-cs"/>
+                        </a:rPr>
+                        <a:t>3</a:t>
+                      </a:r>
+                    </a:p>
+                  </a:txBody>
+                  <a:tcPr marL="60223" marR="60223" marT="16650" marB="16650" anchor="ctr">
+                    <a:lnL w="6350" cap="flat" cmpd="sng" algn="ctr">
+                      <a:solidFill>
+                        <a:schemeClr val="tx1"/>
+                      </a:solidFill>
+                      <a:prstDash val="solid"/>
+                      <a:round/>
+                      <a:headEnd type="none" w="med" len="med"/>
+                      <a:tailEnd type="none" w="med" len="med"/>
+                    </a:lnL>
+                    <a:lnR w="6350" cap="flat" cmpd="sng" algn="ctr">
+                      <a:solidFill>
+                        <a:schemeClr val="tx1"/>
+                      </a:solidFill>
+                      <a:prstDash val="solid"/>
+                      <a:round/>
+                      <a:headEnd type="none" w="med" len="med"/>
+                      <a:tailEnd type="none" w="med" len="med"/>
+                    </a:lnR>
+                    <a:lnT w="12700" cap="flat" cmpd="sng" algn="ctr">
+                      <a:solidFill>
+                        <a:schemeClr val="tx1"/>
+                      </a:solidFill>
+                      <a:prstDash val="solid"/>
+                      <a:round/>
+                      <a:headEnd type="none" w="med" len="med"/>
+                      <a:tailEnd type="none" w="med" len="med"/>
+                    </a:lnT>
+                    <a:lnB w="6350" cap="flat" cmpd="sng" algn="ctr">
+                      <a:solidFill>
+                        <a:schemeClr val="tx1"/>
+                      </a:solidFill>
+                      <a:prstDash val="solid"/>
+                      <a:round/>
+                      <a:headEnd type="none" w="med" len="med"/>
+                      <a:tailEnd type="none" w="med" len="med"/>
+                    </a:lnB>
+                    <a:solidFill>
+                      <a:schemeClr val="tx2">
+                        <a:lumMod val="10000"/>
+                        <a:lumOff val="90000"/>
+                      </a:schemeClr>
+                    </a:solidFill>
+                  </a:tcPr>
+                </a:tc>
+                <a:tc>
+                  <a:txBody>
+                    <a:bodyPr/>
+                    <a:lstStyle/>
+                    <a:p>
+                      <a:pPr algn="ctr" latinLnBrk="1"/>
+                      <a:r>
+                        <a:rPr lang="ko-KR" altLang="en-US" sz="1050" b="1" kern="0" spc="0" dirty="0">
+                          <a:solidFill>
+                            <a:schemeClr val="tx1"/>
+                          </a:solidFill>
+                          <a:effectLst/>
+                          <a:latin typeface="+mn-ea"/>
+                          <a:ea typeface="+mn-ea"/>
+                          <a:cs typeface="+mn-cs"/>
+                        </a:rPr>
+                        <a:t>투표자 </a:t>
+                      </a:r>
+                      <a:r>
+                        <a:rPr lang="en-US" altLang="ko-KR" sz="1050" b="1" kern="0" spc="0" dirty="0">
+                          <a:solidFill>
+                            <a:schemeClr val="tx1"/>
+                          </a:solidFill>
+                          <a:effectLst/>
+                          <a:latin typeface="+mn-ea"/>
+                          <a:ea typeface="+mn-ea"/>
+                          <a:cs typeface="+mn-cs"/>
+                        </a:rPr>
+                        <a:t>4</a:t>
+                      </a:r>
+                    </a:p>
+                  </a:txBody>
+                  <a:tcPr marL="60223" marR="60223" marT="16650" marB="16650" anchor="ctr">
+                    <a:lnL w="6350" cap="flat" cmpd="sng" algn="ctr">
+                      <a:solidFill>
+                        <a:schemeClr val="tx1"/>
+                      </a:solidFill>
+                      <a:prstDash val="solid"/>
+                      <a:round/>
+                      <a:headEnd type="none" w="med" len="med"/>
+                      <a:tailEnd type="none" w="med" len="med"/>
+                    </a:lnL>
+                    <a:lnR w="6350" cap="flat" cmpd="sng" algn="ctr">
+                      <a:solidFill>
+                        <a:schemeClr val="tx1"/>
+                      </a:solidFill>
+                      <a:prstDash val="solid"/>
+                      <a:round/>
+                      <a:headEnd type="none" w="med" len="med"/>
+                      <a:tailEnd type="none" w="med" len="med"/>
+                    </a:lnR>
+                    <a:lnT w="12700" cap="flat" cmpd="sng" algn="ctr">
+                      <a:solidFill>
+                        <a:schemeClr val="tx1"/>
+                      </a:solidFill>
+                      <a:prstDash val="solid"/>
+                      <a:round/>
+                      <a:headEnd type="none" w="med" len="med"/>
+                      <a:tailEnd type="none" w="med" len="med"/>
+                    </a:lnT>
+                    <a:lnB w="6350" cap="flat" cmpd="sng" algn="ctr">
+                      <a:solidFill>
+                        <a:schemeClr val="tx1"/>
+                      </a:solidFill>
+                      <a:prstDash val="solid"/>
+                      <a:round/>
+                      <a:headEnd type="none" w="med" len="med"/>
+                      <a:tailEnd type="none" w="med" len="med"/>
+                    </a:lnB>
+                    <a:solidFill>
+                      <a:schemeClr val="tx2">
+                        <a:lumMod val="10000"/>
+                        <a:lumOff val="90000"/>
+                      </a:schemeClr>
+                    </a:solidFill>
+                  </a:tcPr>
+                </a:tc>
+                <a:tc>
+                  <a:txBody>
+                    <a:bodyPr/>
+                    <a:lstStyle/>
+                    <a:p>
+                      <a:pPr marL="0" marR="0" lvl="0" indent="0" algn="ctr" defTabSz="914400" rtl="0" eaLnBrk="1" fontAlgn="auto" latinLnBrk="1" hangingPunct="1">
+                        <a:lnSpc>
+                          <a:spcPct val="100000"/>
+                        </a:lnSpc>
+                        <a:spcBef>
+                          <a:spcPts val="0"/>
+                        </a:spcBef>
+                        <a:spcAft>
+                          <a:spcPts val="0"/>
+                        </a:spcAft>
+                        <a:buClrTx/>
+                        <a:buSzTx/>
+                        <a:buFontTx/>
+                        <a:buNone/>
+                        <a:tabLst/>
+                        <a:defRPr/>
+                      </a:pPr>
+                      <a:r>
+                        <a:rPr lang="ko-KR" altLang="en-US" sz="1050" b="1" kern="0" spc="0" dirty="0">
+                          <a:solidFill>
+                            <a:schemeClr val="tx1"/>
+                          </a:solidFill>
+                          <a:effectLst/>
+                          <a:latin typeface="+mn-ea"/>
+                          <a:ea typeface="+mn-ea"/>
+                          <a:cs typeface="+mn-cs"/>
+                        </a:rPr>
+                        <a:t>투표자 </a:t>
+                      </a:r>
+                      <a:r>
+                        <a:rPr lang="en-US" altLang="ko-KR" sz="1050" b="1" kern="0" spc="0" dirty="0">
+                          <a:solidFill>
+                            <a:schemeClr val="tx1"/>
+                          </a:solidFill>
+                          <a:effectLst/>
+                          <a:latin typeface="+mn-ea"/>
+                          <a:ea typeface="+mn-ea"/>
+                          <a:cs typeface="+mn-cs"/>
+                        </a:rPr>
+                        <a:t>5</a:t>
+                      </a:r>
+                    </a:p>
+                  </a:txBody>
+                  <a:tcPr marL="60223" marR="60223" marT="16650" marB="16650" anchor="ctr">
+                    <a:lnL w="6350" cap="flat" cmpd="sng" algn="ctr">
+                      <a:solidFill>
+                        <a:schemeClr val="tx1"/>
+                      </a:solidFill>
+                      <a:prstDash val="solid"/>
+                      <a:round/>
+                      <a:headEnd type="none" w="med" len="med"/>
+                      <a:tailEnd type="none" w="med" len="med"/>
+                    </a:lnL>
+                    <a:lnR w="6350" cap="flat" cmpd="sng" algn="ctr">
+                      <a:solidFill>
+                        <a:schemeClr val="tx1"/>
+                      </a:solidFill>
+                      <a:prstDash val="solid"/>
+                      <a:round/>
+                      <a:headEnd type="none" w="med" len="med"/>
+                      <a:tailEnd type="none" w="med" len="med"/>
+                    </a:lnR>
+                    <a:lnT w="12700" cap="flat" cmpd="sng" algn="ctr">
+                      <a:solidFill>
+                        <a:schemeClr val="tx1"/>
+                      </a:solidFill>
+                      <a:prstDash val="solid"/>
+                      <a:round/>
+                      <a:headEnd type="none" w="med" len="med"/>
+                      <a:tailEnd type="none" w="med" len="med"/>
+                    </a:lnT>
+                    <a:lnB w="6350" cap="flat" cmpd="sng" algn="ctr">
+                      <a:solidFill>
+                        <a:schemeClr val="tx1"/>
+                      </a:solidFill>
+                      <a:prstDash val="solid"/>
+                      <a:round/>
+                      <a:headEnd type="none" w="med" len="med"/>
+                      <a:tailEnd type="none" w="med" len="med"/>
+                    </a:lnB>
+                    <a:solidFill>
+                      <a:schemeClr val="tx2">
+                        <a:lumMod val="10000"/>
+                        <a:lumOff val="90000"/>
+                      </a:schemeClr>
+                    </a:solidFill>
+                  </a:tcPr>
+                </a:tc>
+                <a:tc>
+                  <a:txBody>
+                    <a:bodyPr/>
+                    <a:lstStyle/>
+                    <a:p>
+                      <a:pPr algn="ctr" latinLnBrk="1"/>
+                      <a:r>
+                        <a:rPr lang="ko-KR" altLang="en-US" sz="1050" b="1" kern="0" spc="0" dirty="0">
+                          <a:solidFill>
+                            <a:schemeClr val="tx1"/>
+                          </a:solidFill>
+                          <a:effectLst/>
+                          <a:latin typeface="+mn-ea"/>
+                          <a:ea typeface="+mn-ea"/>
+                          <a:cs typeface="+mn-cs"/>
+                        </a:rPr>
+                        <a:t>투표자 </a:t>
+                      </a:r>
+                      <a:r>
+                        <a:rPr lang="en-US" altLang="ko-KR" sz="1050" b="1" kern="0" spc="0" dirty="0">
+                          <a:solidFill>
+                            <a:schemeClr val="tx1"/>
+                          </a:solidFill>
+                          <a:effectLst/>
+                          <a:latin typeface="+mn-ea"/>
+                          <a:ea typeface="+mn-ea"/>
+                          <a:cs typeface="+mn-cs"/>
+                        </a:rPr>
+                        <a:t>6</a:t>
+                      </a:r>
+                    </a:p>
+                  </a:txBody>
+                  <a:tcPr marL="60223" marR="60223" marT="16650" marB="16650" anchor="ctr">
+                    <a:lnL w="6350" cap="flat" cmpd="sng" algn="ctr">
+                      <a:solidFill>
+                        <a:schemeClr val="tx1"/>
+                      </a:solidFill>
+                      <a:prstDash val="solid"/>
+                      <a:round/>
+                      <a:headEnd type="none" w="med" len="med"/>
+                      <a:tailEnd type="none" w="med" len="med"/>
+                    </a:lnL>
+                    <a:lnR w="6350" cap="flat" cmpd="sng" algn="ctr">
+                      <a:solidFill>
+                        <a:schemeClr val="tx1"/>
+                      </a:solidFill>
+                      <a:prstDash val="solid"/>
+                      <a:round/>
+                      <a:headEnd type="none" w="med" len="med"/>
+                      <a:tailEnd type="none" w="med" len="med"/>
+                    </a:lnR>
+                    <a:lnT w="12700" cap="flat" cmpd="sng" algn="ctr">
+                      <a:solidFill>
+                        <a:schemeClr val="tx1"/>
+                      </a:solidFill>
+                      <a:prstDash val="solid"/>
+                      <a:round/>
+                      <a:headEnd type="none" w="med" len="med"/>
+                      <a:tailEnd type="none" w="med" len="med"/>
+                    </a:lnT>
+                    <a:lnB w="6350" cap="flat" cmpd="sng" algn="ctr">
+                      <a:solidFill>
+                        <a:schemeClr val="tx1"/>
+                      </a:solidFill>
+                      <a:prstDash val="solid"/>
+                      <a:round/>
+                      <a:headEnd type="none" w="med" len="med"/>
+                      <a:tailEnd type="none" w="med" len="med"/>
+                    </a:lnB>
+                    <a:solidFill>
+                      <a:schemeClr val="tx2">
+                        <a:lumMod val="10000"/>
+                        <a:lumOff val="90000"/>
+                      </a:schemeClr>
+                    </a:solidFill>
+                  </a:tcPr>
+                </a:tc>
+                <a:tc>
+                  <a:txBody>
+                    <a:bodyPr/>
+                    <a:lstStyle/>
+                    <a:p>
+                      <a:pPr marL="0" marR="0" lvl="0" indent="0" algn="ctr" defTabSz="914400" rtl="0" eaLnBrk="1" fontAlgn="base" latinLnBrk="0" hangingPunct="1">
+                        <a:lnSpc>
+                          <a:spcPct val="120000"/>
+                        </a:lnSpc>
+                        <a:spcBef>
+                          <a:spcPts val="0"/>
+                        </a:spcBef>
+                        <a:spcAft>
+                          <a:spcPts val="0"/>
+                        </a:spcAft>
+                        <a:buClrTx/>
+                        <a:buSzTx/>
+                        <a:buFontTx/>
+                        <a:buNone/>
+                        <a:tabLst/>
+                        <a:defRPr/>
+                      </a:pPr>
+                      <a:r>
+                        <a:rPr lang="ko-KR" altLang="en-US" sz="1050" b="1" kern="0" spc="0" dirty="0">
+                          <a:solidFill>
+                            <a:schemeClr val="tx1"/>
+                          </a:solidFill>
+                          <a:effectLst/>
+                          <a:latin typeface="+mn-ea"/>
+                          <a:ea typeface="+mn-ea"/>
+                          <a:cs typeface="+mn-cs"/>
+                        </a:rPr>
+                        <a:t>합계</a:t>
+                      </a:r>
+                      <a:endParaRPr lang="en-US" altLang="ko-KR" sz="1050" b="1" kern="0" spc="0" dirty="0">
+                        <a:solidFill>
+                          <a:schemeClr val="tx1"/>
+                        </a:solidFill>
+                        <a:effectLst/>
+                        <a:latin typeface="+mn-ea"/>
+                        <a:ea typeface="+mn-ea"/>
+                        <a:cs typeface="+mn-cs"/>
+                      </a:endParaRPr>
+                    </a:p>
+                  </a:txBody>
+                  <a:tcPr marL="60223" marR="60223" marT="16650" marB="16650" anchor="ctr">
+                    <a:lnL w="6350" cap="flat" cmpd="sng" algn="ctr">
+                      <a:solidFill>
+                        <a:schemeClr val="tx1"/>
+                      </a:solidFill>
+                      <a:prstDash val="solid"/>
+                      <a:round/>
+                      <a:headEnd type="none" w="med" len="med"/>
+                      <a:tailEnd type="none" w="med" len="med"/>
+                    </a:lnL>
+                    <a:lnR w="12700" cap="flat" cmpd="sng" algn="ctr">
+                      <a:solidFill>
+                        <a:schemeClr val="tx1"/>
+                      </a:solidFill>
+                      <a:prstDash val="solid"/>
+                      <a:round/>
+                      <a:headEnd type="none" w="med" len="med"/>
+                      <a:tailEnd type="none" w="med" len="med"/>
+                    </a:lnR>
+                    <a:lnT w="12700" cap="flat" cmpd="sng" algn="ctr">
+                      <a:solidFill>
+                        <a:schemeClr val="tx1"/>
+                      </a:solidFill>
+                      <a:prstDash val="solid"/>
+                      <a:round/>
+                      <a:headEnd type="none" w="med" len="med"/>
+                      <a:tailEnd type="none" w="med" len="med"/>
+                    </a:lnT>
+                    <a:lnB w="6350" cap="flat" cmpd="sng" algn="ctr">
+                      <a:solidFill>
+                        <a:schemeClr val="tx1"/>
+                      </a:solidFill>
+                      <a:prstDash val="solid"/>
+                      <a:round/>
+                      <a:headEnd type="none" w="med" len="med"/>
+                      <a:tailEnd type="none" w="med" len="med"/>
+                    </a:lnB>
+                    <a:solidFill>
+                      <a:schemeClr val="tx2">
+                        <a:lumMod val="10000"/>
+                        <a:lumOff val="90000"/>
+                      </a:schemeClr>
+                    </a:solidFill>
+                  </a:tcPr>
+                </a:tc>
+                <a:extLst>
+                  <a:ext uri="{0D108BD9-81ED-4DB2-BD59-A6C34878D82A}">
+                    <a16:rowId xmlns:a16="http://schemas.microsoft.com/office/drawing/2014/main" val="1069783466"/>
+                  </a:ext>
+                </a:extLst>
+              </a:tr>
+              <a:tr h="0">
+                <a:tc>
+                  <a:txBody>
+                    <a:bodyPr/>
+                    <a:lstStyle/>
+                    <a:p>
+                      <a:pPr marL="0" marR="0" indent="0" algn="ctr" fontAlgn="base" latinLnBrk="0">
+                        <a:lnSpc>
+                          <a:spcPct val="120000"/>
+                        </a:lnSpc>
+                        <a:spcBef>
+                          <a:spcPts val="0"/>
+                        </a:spcBef>
+                        <a:spcAft>
+                          <a:spcPts val="0"/>
+                        </a:spcAft>
+                      </a:pPr>
+                      <a:r>
+                        <a:rPr lang="ko-KR" altLang="en-US" sz="1050" b="0" kern="0" spc="0" dirty="0">
+                          <a:solidFill>
+                            <a:srgbClr val="000000"/>
+                          </a:solidFill>
+                          <a:effectLst/>
+                          <a:latin typeface="+mn-lt"/>
+                          <a:ea typeface="+mn-ea"/>
+                          <a:cs typeface="+mn-cs"/>
+                        </a:rPr>
+                        <a:t>후보 </a:t>
+                      </a:r>
+                      <a:r>
+                        <a:rPr lang="en-US" altLang="ko-KR" sz="1050" b="0" kern="0" spc="0" dirty="0">
+                          <a:solidFill>
+                            <a:srgbClr val="000000"/>
+                          </a:solidFill>
+                          <a:effectLst/>
+                          <a:latin typeface="+mn-lt"/>
+                          <a:ea typeface="+mn-ea"/>
+                          <a:cs typeface="+mn-cs"/>
+                        </a:rPr>
+                        <a:t>A</a:t>
+                      </a:r>
+                      <a:endParaRPr lang="en-US" sz="1050" b="0" kern="0" spc="0" dirty="0">
+                        <a:solidFill>
+                          <a:srgbClr val="000000"/>
+                        </a:solidFill>
+                        <a:effectLst/>
+                        <a:latin typeface="+mn-lt"/>
+                        <a:ea typeface="+mn-ea"/>
+                        <a:cs typeface="+mn-cs"/>
+                      </a:endParaRPr>
+                    </a:p>
+                  </a:txBody>
+                  <a:tcPr marL="60223" marR="60223" marT="16650" marB="16650" anchor="ctr">
+                    <a:lnL w="12700" cap="flat" cmpd="sng" algn="ctr">
+                      <a:solidFill>
+                        <a:schemeClr val="tx1"/>
+                      </a:solidFill>
+                      <a:prstDash val="solid"/>
+                      <a:round/>
+                      <a:headEnd type="none" w="med" len="med"/>
+                      <a:tailEnd type="none" w="med" len="med"/>
+                    </a:lnL>
+                    <a:lnR w="6350" cap="flat" cmpd="sng" algn="ctr">
+                      <a:solidFill>
+                        <a:schemeClr val="tx1"/>
+                      </a:solidFill>
+                      <a:prstDash val="solid"/>
+                      <a:round/>
+                      <a:headEnd type="none" w="med" len="med"/>
+                      <a:tailEnd type="none" w="med" len="med"/>
+                    </a:lnR>
+                    <a:lnT w="6350" cap="flat" cmpd="sng" algn="ctr">
+                      <a:solidFill>
+                        <a:schemeClr val="tx1"/>
+                      </a:solidFill>
+                      <a:prstDash val="solid"/>
+                      <a:round/>
+                      <a:headEnd type="none" w="med" len="med"/>
+                      <a:tailEnd type="none" w="med" len="med"/>
+                    </a:lnT>
+                    <a:lnB w="6350" cap="flat" cmpd="sng" algn="ctr">
+                      <a:solidFill>
+                        <a:schemeClr val="tx1"/>
+                      </a:solidFill>
+                      <a:prstDash val="solid"/>
+                      <a:round/>
+                      <a:headEnd type="none" w="med" len="med"/>
+                      <a:tailEnd type="none" w="med" len="med"/>
+                    </a:lnB>
+                    <a:solidFill>
+                      <a:schemeClr val="bg1"/>
+                    </a:solidFill>
+                  </a:tcPr>
+                </a:tc>
+                <a:tc>
+                  <a:txBody>
+                    <a:bodyPr/>
+                    <a:lstStyle/>
+                    <a:p>
+                      <a:pPr algn="ctr" latinLnBrk="1"/>
+                      <a:r>
+                        <a:rPr lang="en-US" altLang="ko-KR" sz="1050" b="0" kern="0" spc="0" dirty="0">
+                          <a:solidFill>
+                            <a:srgbClr val="000000"/>
+                          </a:solidFill>
+                          <a:effectLst/>
+                          <a:latin typeface="+mn-lt"/>
+                          <a:ea typeface="+mn-ea"/>
+                          <a:cs typeface="+mn-cs"/>
+                        </a:rPr>
+                        <a:t>6</a:t>
+                      </a:r>
+                    </a:p>
+                  </a:txBody>
+                  <a:tcPr marL="60223" marR="60223" marT="16650" marB="16650" anchor="ctr">
+                    <a:lnL w="6350" cap="flat" cmpd="sng" algn="ctr">
+                      <a:solidFill>
+                        <a:schemeClr val="tx1"/>
+                      </a:solidFill>
+                      <a:prstDash val="solid"/>
+                      <a:round/>
+                      <a:headEnd type="none" w="med" len="med"/>
+                      <a:tailEnd type="none" w="med" len="med"/>
+                    </a:lnL>
+                    <a:lnR w="6350" cap="flat" cmpd="sng" algn="ctr">
+                      <a:solidFill>
+                        <a:schemeClr val="tx1"/>
+                      </a:solidFill>
+                      <a:prstDash val="solid"/>
+                      <a:round/>
+                      <a:headEnd type="none" w="med" len="med"/>
+                      <a:tailEnd type="none" w="med" len="med"/>
+                    </a:lnR>
+                    <a:lnT w="6350" cap="flat" cmpd="sng" algn="ctr">
+                      <a:solidFill>
+                        <a:schemeClr val="tx1"/>
+                      </a:solidFill>
+                      <a:prstDash val="solid"/>
+                      <a:round/>
+                      <a:headEnd type="none" w="med" len="med"/>
+                      <a:tailEnd type="none" w="med" len="med"/>
+                    </a:lnT>
+                    <a:lnB w="6350" cap="flat" cmpd="sng" algn="ctr">
+                      <a:solidFill>
+                        <a:schemeClr val="tx1"/>
+                      </a:solidFill>
+                      <a:prstDash val="solid"/>
+                      <a:round/>
+                      <a:headEnd type="none" w="med" len="med"/>
+                      <a:tailEnd type="none" w="med" len="med"/>
+                    </a:lnB>
+                    <a:solidFill>
+                      <a:schemeClr val="bg1"/>
+                    </a:solidFill>
+                  </a:tcPr>
+                </a:tc>
+                <a:tc>
+                  <a:txBody>
+                    <a:bodyPr/>
+                    <a:lstStyle/>
+                    <a:p>
+                      <a:pPr algn="ctr" latinLnBrk="1"/>
+                      <a:r>
+                        <a:rPr lang="en-US" altLang="ko-KR" sz="1050" b="0" kern="0" spc="0" dirty="0">
+                          <a:solidFill>
+                            <a:srgbClr val="000000"/>
+                          </a:solidFill>
+                          <a:effectLst/>
+                          <a:latin typeface="+mn-lt"/>
+                          <a:ea typeface="+mn-ea"/>
+                          <a:cs typeface="+mn-cs"/>
+                        </a:rPr>
+                        <a:t>4</a:t>
+                      </a:r>
+                    </a:p>
+                  </a:txBody>
+                  <a:tcPr marL="60223" marR="60223" marT="16650" marB="16650" anchor="ctr">
+                    <a:lnL w="6350" cap="flat" cmpd="sng" algn="ctr">
+                      <a:solidFill>
+                        <a:schemeClr val="tx1"/>
+                      </a:solidFill>
+                      <a:prstDash val="solid"/>
+                      <a:round/>
+                      <a:headEnd type="none" w="med" len="med"/>
+                      <a:tailEnd type="none" w="med" len="med"/>
+                    </a:lnL>
+                    <a:lnR w="6350" cap="flat" cmpd="sng" algn="ctr">
+                      <a:solidFill>
+                        <a:schemeClr val="tx1"/>
+                      </a:solidFill>
+                      <a:prstDash val="solid"/>
+                      <a:round/>
+                      <a:headEnd type="none" w="med" len="med"/>
+                      <a:tailEnd type="none" w="med" len="med"/>
+                    </a:lnR>
+                    <a:lnT w="6350" cap="flat" cmpd="sng" algn="ctr">
+                      <a:solidFill>
+                        <a:schemeClr val="tx1"/>
+                      </a:solidFill>
+                      <a:prstDash val="solid"/>
+                      <a:round/>
+                      <a:headEnd type="none" w="med" len="med"/>
+                      <a:tailEnd type="none" w="med" len="med"/>
+                    </a:lnT>
+                    <a:lnB w="6350" cap="flat" cmpd="sng" algn="ctr">
+                      <a:solidFill>
+                        <a:schemeClr val="tx1"/>
+                      </a:solidFill>
+                      <a:prstDash val="solid"/>
+                      <a:round/>
+                      <a:headEnd type="none" w="med" len="med"/>
+                      <a:tailEnd type="none" w="med" len="med"/>
+                    </a:lnB>
+                    <a:solidFill>
+                      <a:schemeClr val="bg1"/>
+                    </a:solidFill>
+                  </a:tcPr>
+                </a:tc>
+                <a:tc>
+                  <a:txBody>
+                    <a:bodyPr/>
+                    <a:lstStyle/>
+                    <a:p>
+                      <a:pPr algn="ctr" latinLnBrk="1"/>
+                      <a:r>
+                        <a:rPr lang="en-US" altLang="ko-KR" sz="1050" b="0" kern="0" spc="0" dirty="0">
+                          <a:solidFill>
+                            <a:srgbClr val="000000"/>
+                          </a:solidFill>
+                          <a:effectLst/>
+                          <a:latin typeface="+mn-lt"/>
+                          <a:ea typeface="+mn-ea"/>
+                          <a:cs typeface="+mn-cs"/>
+                        </a:rPr>
+                        <a:t>5</a:t>
+                      </a:r>
+                    </a:p>
+                  </a:txBody>
+                  <a:tcPr marL="60223" marR="60223" marT="16650" marB="16650" anchor="ctr">
+                    <a:lnL w="6350" cap="flat" cmpd="sng" algn="ctr">
+                      <a:solidFill>
+                        <a:schemeClr val="tx1"/>
+                      </a:solidFill>
+                      <a:prstDash val="solid"/>
+                      <a:round/>
+                      <a:headEnd type="none" w="med" len="med"/>
+                      <a:tailEnd type="none" w="med" len="med"/>
+                    </a:lnL>
+                    <a:lnR w="6350" cap="flat" cmpd="sng" algn="ctr">
+                      <a:solidFill>
+                        <a:schemeClr val="tx1"/>
+                      </a:solidFill>
+                      <a:prstDash val="solid"/>
+                      <a:round/>
+                      <a:headEnd type="none" w="med" len="med"/>
+                      <a:tailEnd type="none" w="med" len="med"/>
+                    </a:lnR>
+                    <a:lnT w="6350" cap="flat" cmpd="sng" algn="ctr">
+                      <a:solidFill>
+                        <a:schemeClr val="tx1"/>
+                      </a:solidFill>
+                      <a:prstDash val="solid"/>
+                      <a:round/>
+                      <a:headEnd type="none" w="med" len="med"/>
+                      <a:tailEnd type="none" w="med" len="med"/>
+                    </a:lnT>
+                    <a:lnB w="6350" cap="flat" cmpd="sng" algn="ctr">
+                      <a:solidFill>
+                        <a:schemeClr val="tx1"/>
+                      </a:solidFill>
+                      <a:prstDash val="solid"/>
+                      <a:round/>
+                      <a:headEnd type="none" w="med" len="med"/>
+                      <a:tailEnd type="none" w="med" len="med"/>
+                    </a:lnB>
+                    <a:solidFill>
+                      <a:schemeClr val="bg1"/>
+                    </a:solidFill>
+                  </a:tcPr>
+                </a:tc>
+                <a:tc>
+                  <a:txBody>
+                    <a:bodyPr/>
+                    <a:lstStyle/>
+                    <a:p>
+                      <a:pPr algn="ctr" latinLnBrk="1"/>
+                      <a:r>
+                        <a:rPr lang="en-US" altLang="ko-KR" sz="1050" b="0" kern="0" spc="0" dirty="0">
+                          <a:solidFill>
+                            <a:srgbClr val="000000"/>
+                          </a:solidFill>
+                          <a:effectLst/>
+                          <a:latin typeface="+mn-lt"/>
+                          <a:ea typeface="+mn-ea"/>
+                          <a:cs typeface="+mn-cs"/>
+                        </a:rPr>
+                        <a:t>7</a:t>
+                      </a:r>
+                    </a:p>
+                  </a:txBody>
+                  <a:tcPr marL="60223" marR="60223" marT="16650" marB="16650" anchor="ctr">
+                    <a:lnL w="6350" cap="flat" cmpd="sng" algn="ctr">
+                      <a:solidFill>
+                        <a:schemeClr val="tx1"/>
+                      </a:solidFill>
+                      <a:prstDash val="solid"/>
+                      <a:round/>
+                      <a:headEnd type="none" w="med" len="med"/>
+                      <a:tailEnd type="none" w="med" len="med"/>
+                    </a:lnL>
+                    <a:lnR w="6350" cap="flat" cmpd="sng" algn="ctr">
+                      <a:solidFill>
+                        <a:schemeClr val="tx1"/>
+                      </a:solidFill>
+                      <a:prstDash val="solid"/>
+                      <a:round/>
+                      <a:headEnd type="none" w="med" len="med"/>
+                      <a:tailEnd type="none" w="med" len="med"/>
+                    </a:lnR>
+                    <a:lnT w="6350" cap="flat" cmpd="sng" algn="ctr">
+                      <a:solidFill>
+                        <a:schemeClr val="tx1"/>
+                      </a:solidFill>
+                      <a:prstDash val="solid"/>
+                      <a:round/>
+                      <a:headEnd type="none" w="med" len="med"/>
+                      <a:tailEnd type="none" w="med" len="med"/>
+                    </a:lnT>
+                    <a:lnB w="6350" cap="flat" cmpd="sng" algn="ctr">
+                      <a:solidFill>
+                        <a:schemeClr val="tx1"/>
+                      </a:solidFill>
+                      <a:prstDash val="solid"/>
+                      <a:round/>
+                      <a:headEnd type="none" w="med" len="med"/>
+                      <a:tailEnd type="none" w="med" len="med"/>
+                    </a:lnB>
+                    <a:solidFill>
+                      <a:schemeClr val="bg1"/>
+                    </a:solidFill>
+                  </a:tcPr>
+                </a:tc>
+                <a:tc>
+                  <a:txBody>
+                    <a:bodyPr/>
+                    <a:lstStyle/>
+                    <a:p>
+                      <a:pPr algn="ctr" latinLnBrk="1"/>
+                      <a:r>
+                        <a:rPr lang="en-US" altLang="ko-KR" sz="1050" b="0" kern="0" spc="0" dirty="0">
+                          <a:solidFill>
+                            <a:srgbClr val="000000"/>
+                          </a:solidFill>
+                          <a:effectLst/>
+                          <a:latin typeface="+mn-lt"/>
+                          <a:ea typeface="+mn-ea"/>
+                          <a:cs typeface="+mn-cs"/>
+                        </a:rPr>
+                        <a:t>0</a:t>
+                      </a:r>
+                    </a:p>
+                  </a:txBody>
+                  <a:tcPr marL="60223" marR="60223" marT="16650" marB="16650" anchor="ctr">
+                    <a:lnL w="6350" cap="flat" cmpd="sng" algn="ctr">
+                      <a:solidFill>
+                        <a:schemeClr val="tx1"/>
+                      </a:solidFill>
+                      <a:prstDash val="solid"/>
+                      <a:round/>
+                      <a:headEnd type="none" w="med" len="med"/>
+                      <a:tailEnd type="none" w="med" len="med"/>
+                    </a:lnL>
+                    <a:lnR w="6350" cap="flat" cmpd="sng" algn="ctr">
+                      <a:solidFill>
+                        <a:schemeClr val="tx1"/>
+                      </a:solidFill>
+                      <a:prstDash val="solid"/>
+                      <a:round/>
+                      <a:headEnd type="none" w="med" len="med"/>
+                      <a:tailEnd type="none" w="med" len="med"/>
+                    </a:lnR>
+                    <a:lnT w="6350" cap="flat" cmpd="sng" algn="ctr">
+                      <a:solidFill>
+                        <a:schemeClr val="tx1"/>
+                      </a:solidFill>
+                      <a:prstDash val="solid"/>
+                      <a:round/>
+                      <a:headEnd type="none" w="med" len="med"/>
+                      <a:tailEnd type="none" w="med" len="med"/>
+                    </a:lnT>
+                    <a:lnB w="6350" cap="flat" cmpd="sng" algn="ctr">
+                      <a:solidFill>
+                        <a:schemeClr val="tx1"/>
+                      </a:solidFill>
+                      <a:prstDash val="solid"/>
+                      <a:round/>
+                      <a:headEnd type="none" w="med" len="med"/>
+                      <a:tailEnd type="none" w="med" len="med"/>
+                    </a:lnB>
+                    <a:solidFill>
+                      <a:schemeClr val="bg1"/>
+                    </a:solidFill>
+                  </a:tcPr>
+                </a:tc>
+                <a:tc>
+                  <a:txBody>
+                    <a:bodyPr/>
+                    <a:lstStyle/>
+                    <a:p>
+                      <a:pPr algn="ctr" latinLnBrk="1"/>
+                      <a:r>
+                        <a:rPr lang="en-US" altLang="ko-KR" sz="1050" b="0" kern="0" spc="0" dirty="0">
+                          <a:solidFill>
+                            <a:srgbClr val="000000"/>
+                          </a:solidFill>
+                          <a:effectLst/>
+                          <a:latin typeface="+mn-lt"/>
+                          <a:ea typeface="+mn-ea"/>
+                          <a:cs typeface="+mn-cs"/>
+                        </a:rPr>
+                        <a:t>1</a:t>
+                      </a:r>
+                    </a:p>
+                  </a:txBody>
+                  <a:tcPr marL="60223" marR="60223" marT="16650" marB="16650" anchor="ctr">
+                    <a:lnL w="6350" cap="flat" cmpd="sng" algn="ctr">
+                      <a:solidFill>
+                        <a:schemeClr val="tx1"/>
+                      </a:solidFill>
+                      <a:prstDash val="solid"/>
+                      <a:round/>
+                      <a:headEnd type="none" w="med" len="med"/>
+                      <a:tailEnd type="none" w="med" len="med"/>
+                    </a:lnL>
+                    <a:lnR w="6350" cap="flat" cmpd="sng" algn="ctr">
+                      <a:solidFill>
+                        <a:schemeClr val="tx1"/>
+                      </a:solidFill>
+                      <a:prstDash val="solid"/>
+                      <a:round/>
+                      <a:headEnd type="none" w="med" len="med"/>
+                      <a:tailEnd type="none" w="med" len="med"/>
+                    </a:lnR>
+                    <a:lnT w="6350" cap="flat" cmpd="sng" algn="ctr">
+                      <a:solidFill>
+                        <a:schemeClr val="tx1"/>
+                      </a:solidFill>
+                      <a:prstDash val="solid"/>
+                      <a:round/>
+                      <a:headEnd type="none" w="med" len="med"/>
+                      <a:tailEnd type="none" w="med" len="med"/>
+                    </a:lnT>
+                    <a:lnB w="6350" cap="flat" cmpd="sng" algn="ctr">
+                      <a:solidFill>
+                        <a:schemeClr val="tx1"/>
+                      </a:solidFill>
+                      <a:prstDash val="solid"/>
+                      <a:round/>
+                      <a:headEnd type="none" w="med" len="med"/>
+                      <a:tailEnd type="none" w="med" len="med"/>
+                    </a:lnB>
+                    <a:solidFill>
+                      <a:schemeClr val="bg1"/>
+                    </a:solidFill>
+                  </a:tcPr>
+                </a:tc>
+                <a:tc>
+                  <a:txBody>
+                    <a:bodyPr/>
+                    <a:lstStyle/>
+                    <a:p>
+                      <a:pPr marL="0" marR="0" indent="0" algn="ctr" fontAlgn="base" latinLnBrk="0">
+                        <a:lnSpc>
+                          <a:spcPct val="120000"/>
+                        </a:lnSpc>
+                        <a:spcBef>
+                          <a:spcPts val="0"/>
+                        </a:spcBef>
+                        <a:spcAft>
+                          <a:spcPts val="0"/>
+                        </a:spcAft>
+                      </a:pPr>
+                      <a:r>
+                        <a:rPr lang="en-US" altLang="ko-KR" sz="1050" b="0" kern="0" spc="0" dirty="0">
+                          <a:solidFill>
+                            <a:srgbClr val="000000"/>
+                          </a:solidFill>
+                          <a:effectLst/>
+                          <a:latin typeface="+mn-lt"/>
+                          <a:ea typeface="+mn-ea"/>
+                          <a:cs typeface="+mn-cs"/>
+                        </a:rPr>
+                        <a:t>23</a:t>
+                      </a:r>
+                    </a:p>
+                  </a:txBody>
+                  <a:tcPr marL="60223" marR="60223" marT="16650" marB="16650" anchor="ctr">
+                    <a:lnL w="6350" cap="flat" cmpd="sng" algn="ctr">
+                      <a:solidFill>
+                        <a:schemeClr val="tx1"/>
+                      </a:solidFill>
+                      <a:prstDash val="solid"/>
+                      <a:round/>
+                      <a:headEnd type="none" w="med" len="med"/>
+                      <a:tailEnd type="none" w="med" len="med"/>
+                    </a:lnL>
+                    <a:lnR w="12700" cap="flat" cmpd="sng" algn="ctr">
+                      <a:solidFill>
+                        <a:schemeClr val="tx1"/>
+                      </a:solidFill>
+                      <a:prstDash val="solid"/>
+                      <a:round/>
+                      <a:headEnd type="none" w="med" len="med"/>
+                      <a:tailEnd type="none" w="med" len="med"/>
+                    </a:lnR>
+                    <a:lnT w="6350" cap="flat" cmpd="sng" algn="ctr">
+                      <a:solidFill>
+                        <a:schemeClr val="tx1"/>
+                      </a:solidFill>
+                      <a:prstDash val="solid"/>
+                      <a:round/>
+                      <a:headEnd type="none" w="med" len="med"/>
+                      <a:tailEnd type="none" w="med" len="med"/>
+                    </a:lnT>
+                    <a:lnB w="6350" cap="flat" cmpd="sng" algn="ctr">
+                      <a:solidFill>
+                        <a:schemeClr val="tx1"/>
+                      </a:solidFill>
+                      <a:prstDash val="solid"/>
+                      <a:round/>
+                      <a:headEnd type="none" w="med" len="med"/>
+                      <a:tailEnd type="none" w="med" len="med"/>
+                    </a:lnB>
+                    <a:solidFill>
+                      <a:schemeClr val="bg1"/>
+                    </a:solidFill>
+                  </a:tcPr>
+                </a:tc>
+                <a:extLst>
+                  <a:ext uri="{0D108BD9-81ED-4DB2-BD59-A6C34878D82A}">
+                    <a16:rowId xmlns:a16="http://schemas.microsoft.com/office/drawing/2014/main" val="1723031745"/>
+                  </a:ext>
+                </a:extLst>
+              </a:tr>
+              <a:tr h="0">
+                <a:tc>
+                  <a:txBody>
+                    <a:bodyPr/>
+                    <a:lstStyle/>
+                    <a:p>
+                      <a:pPr marL="0" marR="0" indent="0" algn="ctr" fontAlgn="base" latinLnBrk="0">
+                        <a:lnSpc>
+                          <a:spcPct val="120000"/>
+                        </a:lnSpc>
+                        <a:spcBef>
+                          <a:spcPts val="0"/>
+                        </a:spcBef>
+                        <a:spcAft>
+                          <a:spcPts val="0"/>
+                        </a:spcAft>
+                      </a:pPr>
+                      <a:r>
+                        <a:rPr lang="ko-KR" altLang="en-US" sz="1050" b="0" kern="0" spc="0" dirty="0">
+                          <a:solidFill>
+                            <a:srgbClr val="000000"/>
+                          </a:solidFill>
+                          <a:effectLst/>
+                          <a:latin typeface="+mn-lt"/>
+                          <a:ea typeface="+mn-ea"/>
+                          <a:cs typeface="+mn-cs"/>
+                        </a:rPr>
+                        <a:t>후보 </a:t>
+                      </a:r>
+                      <a:r>
+                        <a:rPr lang="en-US" altLang="ko-KR" sz="1050" b="0" kern="0" spc="0" dirty="0">
+                          <a:solidFill>
+                            <a:srgbClr val="000000"/>
+                          </a:solidFill>
+                          <a:effectLst/>
+                          <a:latin typeface="+mn-lt"/>
+                          <a:ea typeface="+mn-ea"/>
+                          <a:cs typeface="+mn-cs"/>
+                        </a:rPr>
+                        <a:t>B</a:t>
+                      </a:r>
+                    </a:p>
+                  </a:txBody>
+                  <a:tcPr marL="60223" marR="60223" marT="16650" marB="16650" anchor="ctr">
+                    <a:lnL w="12700" cap="flat" cmpd="sng" algn="ctr">
+                      <a:solidFill>
+                        <a:schemeClr val="tx1"/>
+                      </a:solidFill>
+                      <a:prstDash val="solid"/>
+                      <a:round/>
+                      <a:headEnd type="none" w="med" len="med"/>
+                      <a:tailEnd type="none" w="med" len="med"/>
+                    </a:lnL>
+                    <a:lnR w="6350" cap="flat" cmpd="sng" algn="ctr">
+                      <a:solidFill>
+                        <a:schemeClr val="tx1"/>
+                      </a:solidFill>
+                      <a:prstDash val="solid"/>
+                      <a:round/>
+                      <a:headEnd type="none" w="med" len="med"/>
+                      <a:tailEnd type="none" w="med" len="med"/>
+                    </a:lnR>
+                    <a:lnT w="6350" cap="flat" cmpd="sng" algn="ctr">
+                      <a:solidFill>
+                        <a:schemeClr val="tx1"/>
+                      </a:solidFill>
+                      <a:prstDash val="solid"/>
+                      <a:round/>
+                      <a:headEnd type="none" w="med" len="med"/>
+                      <a:tailEnd type="none" w="med" len="med"/>
+                    </a:lnT>
+                    <a:lnB w="6350" cap="flat" cmpd="sng" algn="ctr">
+                      <a:solidFill>
+                        <a:schemeClr val="tx1"/>
+                      </a:solidFill>
+                      <a:prstDash val="solid"/>
+                      <a:round/>
+                      <a:headEnd type="none" w="med" len="med"/>
+                      <a:tailEnd type="none" w="med" len="med"/>
+                    </a:lnB>
+                    <a:solidFill>
+                      <a:schemeClr val="bg1"/>
+                    </a:solidFill>
+                  </a:tcPr>
+                </a:tc>
+                <a:tc>
+                  <a:txBody>
+                    <a:bodyPr/>
+                    <a:lstStyle/>
+                    <a:p>
+                      <a:pPr marL="0" marR="0" indent="0" algn="ctr" fontAlgn="base" latinLnBrk="0">
+                        <a:lnSpc>
+                          <a:spcPct val="120000"/>
+                        </a:lnSpc>
+                        <a:spcBef>
+                          <a:spcPts val="0"/>
+                        </a:spcBef>
+                        <a:spcAft>
+                          <a:spcPts val="0"/>
+                        </a:spcAft>
+                      </a:pPr>
+                      <a:r>
+                        <a:rPr lang="en-US" altLang="ko-KR" sz="1050" b="0" kern="0" spc="0" dirty="0">
+                          <a:solidFill>
+                            <a:srgbClr val="000000"/>
+                          </a:solidFill>
+                          <a:effectLst/>
+                          <a:latin typeface="+mn-lt"/>
+                          <a:ea typeface="+mn-ea"/>
+                          <a:cs typeface="+mn-cs"/>
+                        </a:rPr>
+                        <a:t>3</a:t>
+                      </a:r>
+                    </a:p>
+                  </a:txBody>
+                  <a:tcPr marL="60223" marR="60223" marT="16650" marB="16650" anchor="ctr">
+                    <a:lnL w="6350" cap="flat" cmpd="sng" algn="ctr">
+                      <a:solidFill>
+                        <a:schemeClr val="tx1"/>
+                      </a:solidFill>
+                      <a:prstDash val="solid"/>
+                      <a:round/>
+                      <a:headEnd type="none" w="med" len="med"/>
+                      <a:tailEnd type="none" w="med" len="med"/>
+                    </a:lnL>
+                    <a:lnR w="6350" cap="flat" cmpd="sng" algn="ctr">
+                      <a:solidFill>
+                        <a:schemeClr val="tx1"/>
+                      </a:solidFill>
+                      <a:prstDash val="solid"/>
+                      <a:round/>
+                      <a:headEnd type="none" w="med" len="med"/>
+                      <a:tailEnd type="none" w="med" len="med"/>
+                    </a:lnR>
+                    <a:lnT w="6350" cap="flat" cmpd="sng" algn="ctr">
+                      <a:solidFill>
+                        <a:schemeClr val="tx1"/>
+                      </a:solidFill>
+                      <a:prstDash val="solid"/>
+                      <a:round/>
+                      <a:headEnd type="none" w="med" len="med"/>
+                      <a:tailEnd type="none" w="med" len="med"/>
+                    </a:lnT>
+                    <a:lnB w="6350" cap="flat" cmpd="sng" algn="ctr">
+                      <a:solidFill>
+                        <a:schemeClr val="tx1"/>
+                      </a:solidFill>
+                      <a:prstDash val="solid"/>
+                      <a:round/>
+                      <a:headEnd type="none" w="med" len="med"/>
+                      <a:tailEnd type="none" w="med" len="med"/>
+                    </a:lnB>
+                    <a:solidFill>
+                      <a:schemeClr val="bg1"/>
+                    </a:solidFill>
+                  </a:tcPr>
+                </a:tc>
+                <a:tc>
+                  <a:txBody>
+                    <a:bodyPr/>
+                    <a:lstStyle/>
+                    <a:p>
+                      <a:pPr marL="0" marR="0" indent="0" algn="ctr" fontAlgn="base" latinLnBrk="0">
+                        <a:lnSpc>
+                          <a:spcPct val="120000"/>
+                        </a:lnSpc>
+                        <a:spcBef>
+                          <a:spcPts val="0"/>
+                        </a:spcBef>
+                        <a:spcAft>
+                          <a:spcPts val="0"/>
+                        </a:spcAft>
+                      </a:pPr>
+                      <a:r>
+                        <a:rPr lang="en-US" altLang="ko-KR" sz="1050" b="0" kern="0" spc="0" dirty="0">
+                          <a:solidFill>
+                            <a:srgbClr val="000000"/>
+                          </a:solidFill>
+                          <a:effectLst/>
+                          <a:latin typeface="+mn-lt"/>
+                          <a:ea typeface="+mn-ea"/>
+                          <a:cs typeface="+mn-cs"/>
+                        </a:rPr>
+                        <a:t>3</a:t>
+                      </a:r>
+                    </a:p>
+                  </a:txBody>
+                  <a:tcPr marL="60223" marR="60223" marT="16650" marB="16650" anchor="ctr">
+                    <a:lnL w="6350" cap="flat" cmpd="sng" algn="ctr">
+                      <a:solidFill>
+                        <a:schemeClr val="tx1"/>
+                      </a:solidFill>
+                      <a:prstDash val="solid"/>
+                      <a:round/>
+                      <a:headEnd type="none" w="med" len="med"/>
+                      <a:tailEnd type="none" w="med" len="med"/>
+                    </a:lnL>
+                    <a:lnR w="6350" cap="flat" cmpd="sng" algn="ctr">
+                      <a:solidFill>
+                        <a:schemeClr val="tx1"/>
+                      </a:solidFill>
+                      <a:prstDash val="solid"/>
+                      <a:round/>
+                      <a:headEnd type="none" w="med" len="med"/>
+                      <a:tailEnd type="none" w="med" len="med"/>
+                    </a:lnR>
+                    <a:lnT w="6350" cap="flat" cmpd="sng" algn="ctr">
+                      <a:solidFill>
+                        <a:schemeClr val="tx1"/>
+                      </a:solidFill>
+                      <a:prstDash val="solid"/>
+                      <a:round/>
+                      <a:headEnd type="none" w="med" len="med"/>
+                      <a:tailEnd type="none" w="med" len="med"/>
+                    </a:lnT>
+                    <a:lnB w="6350" cap="flat" cmpd="sng" algn="ctr">
+                      <a:solidFill>
+                        <a:schemeClr val="tx1"/>
+                      </a:solidFill>
+                      <a:prstDash val="solid"/>
+                      <a:round/>
+                      <a:headEnd type="none" w="med" len="med"/>
+                      <a:tailEnd type="none" w="med" len="med"/>
+                    </a:lnB>
+                    <a:solidFill>
+                      <a:schemeClr val="bg1"/>
+                    </a:solidFill>
+                  </a:tcPr>
+                </a:tc>
+                <a:tc>
+                  <a:txBody>
+                    <a:bodyPr/>
+                    <a:lstStyle/>
+                    <a:p>
+                      <a:pPr marL="0" marR="0" indent="0" algn="ctr" fontAlgn="base" latinLnBrk="0">
+                        <a:lnSpc>
+                          <a:spcPct val="120000"/>
+                        </a:lnSpc>
+                        <a:spcBef>
+                          <a:spcPts val="0"/>
+                        </a:spcBef>
+                        <a:spcAft>
+                          <a:spcPts val="0"/>
+                        </a:spcAft>
+                      </a:pPr>
+                      <a:r>
+                        <a:rPr lang="en-US" altLang="ko-KR" sz="1050" b="0" kern="0" spc="0" dirty="0">
+                          <a:solidFill>
+                            <a:srgbClr val="000000"/>
+                          </a:solidFill>
+                          <a:effectLst/>
+                          <a:latin typeface="+mn-lt"/>
+                          <a:ea typeface="+mn-ea"/>
+                          <a:cs typeface="+mn-cs"/>
+                        </a:rPr>
+                        <a:t>3</a:t>
+                      </a:r>
+                    </a:p>
+                  </a:txBody>
+                  <a:tcPr marL="60223" marR="60223" marT="16650" marB="16650" anchor="ctr">
+                    <a:lnL w="6350" cap="flat" cmpd="sng" algn="ctr">
+                      <a:solidFill>
+                        <a:schemeClr val="tx1"/>
+                      </a:solidFill>
+                      <a:prstDash val="solid"/>
+                      <a:round/>
+                      <a:headEnd type="none" w="med" len="med"/>
+                      <a:tailEnd type="none" w="med" len="med"/>
+                    </a:lnL>
+                    <a:lnR w="6350" cap="flat" cmpd="sng" algn="ctr">
+                      <a:solidFill>
+                        <a:schemeClr val="tx1"/>
+                      </a:solidFill>
+                      <a:prstDash val="solid"/>
+                      <a:round/>
+                      <a:headEnd type="none" w="med" len="med"/>
+                      <a:tailEnd type="none" w="med" len="med"/>
+                    </a:lnR>
+                    <a:lnT w="6350" cap="flat" cmpd="sng" algn="ctr">
+                      <a:solidFill>
+                        <a:schemeClr val="tx1"/>
+                      </a:solidFill>
+                      <a:prstDash val="solid"/>
+                      <a:round/>
+                      <a:headEnd type="none" w="med" len="med"/>
+                      <a:tailEnd type="none" w="med" len="med"/>
+                    </a:lnT>
+                    <a:lnB w="6350" cap="flat" cmpd="sng" algn="ctr">
+                      <a:solidFill>
+                        <a:schemeClr val="tx1"/>
+                      </a:solidFill>
+                      <a:prstDash val="solid"/>
+                      <a:round/>
+                      <a:headEnd type="none" w="med" len="med"/>
+                      <a:tailEnd type="none" w="med" len="med"/>
+                    </a:lnB>
+                    <a:solidFill>
+                      <a:schemeClr val="bg1"/>
+                    </a:solidFill>
+                  </a:tcPr>
+                </a:tc>
+                <a:tc>
+                  <a:txBody>
+                    <a:bodyPr/>
+                    <a:lstStyle/>
+                    <a:p>
+                      <a:pPr marL="0" marR="0" indent="0" algn="ctr" fontAlgn="base" latinLnBrk="0">
+                        <a:lnSpc>
+                          <a:spcPct val="120000"/>
+                        </a:lnSpc>
+                        <a:spcBef>
+                          <a:spcPts val="0"/>
+                        </a:spcBef>
+                        <a:spcAft>
+                          <a:spcPts val="0"/>
+                        </a:spcAft>
+                      </a:pPr>
+                      <a:r>
+                        <a:rPr lang="en-US" altLang="ko-KR" sz="1050" b="0" kern="0" spc="0" dirty="0">
+                          <a:solidFill>
+                            <a:srgbClr val="000000"/>
+                          </a:solidFill>
+                          <a:effectLst/>
+                          <a:latin typeface="+mn-lt"/>
+                          <a:ea typeface="+mn-ea"/>
+                          <a:cs typeface="+mn-cs"/>
+                        </a:rPr>
+                        <a:t>2</a:t>
+                      </a:r>
+                    </a:p>
+                  </a:txBody>
+                  <a:tcPr marL="60223" marR="60223" marT="16650" marB="16650" anchor="ctr">
+                    <a:lnL w="6350" cap="flat" cmpd="sng" algn="ctr">
+                      <a:solidFill>
+                        <a:schemeClr val="tx1"/>
+                      </a:solidFill>
+                      <a:prstDash val="solid"/>
+                      <a:round/>
+                      <a:headEnd type="none" w="med" len="med"/>
+                      <a:tailEnd type="none" w="med" len="med"/>
+                    </a:lnL>
+                    <a:lnR w="6350" cap="flat" cmpd="sng" algn="ctr">
+                      <a:solidFill>
+                        <a:schemeClr val="tx1"/>
+                      </a:solidFill>
+                      <a:prstDash val="solid"/>
+                      <a:round/>
+                      <a:headEnd type="none" w="med" len="med"/>
+                      <a:tailEnd type="none" w="med" len="med"/>
+                    </a:lnR>
+                    <a:lnT w="6350" cap="flat" cmpd="sng" algn="ctr">
+                      <a:solidFill>
+                        <a:schemeClr val="tx1"/>
+                      </a:solidFill>
+                      <a:prstDash val="solid"/>
+                      <a:round/>
+                      <a:headEnd type="none" w="med" len="med"/>
+                      <a:tailEnd type="none" w="med" len="med"/>
+                    </a:lnT>
+                    <a:lnB w="6350" cap="flat" cmpd="sng" algn="ctr">
+                      <a:solidFill>
+                        <a:schemeClr val="tx1"/>
+                      </a:solidFill>
+                      <a:prstDash val="solid"/>
+                      <a:round/>
+                      <a:headEnd type="none" w="med" len="med"/>
+                      <a:tailEnd type="none" w="med" len="med"/>
+                    </a:lnB>
+                    <a:solidFill>
+                      <a:schemeClr val="bg1"/>
+                    </a:solidFill>
+                  </a:tcPr>
+                </a:tc>
+                <a:tc>
+                  <a:txBody>
+                    <a:bodyPr/>
+                    <a:lstStyle/>
+                    <a:p>
+                      <a:pPr marL="0" marR="0" indent="0" algn="ctr" fontAlgn="base" latinLnBrk="0">
+                        <a:lnSpc>
+                          <a:spcPct val="120000"/>
+                        </a:lnSpc>
+                        <a:spcBef>
+                          <a:spcPts val="0"/>
+                        </a:spcBef>
+                        <a:spcAft>
+                          <a:spcPts val="0"/>
+                        </a:spcAft>
+                      </a:pPr>
+                      <a:r>
+                        <a:rPr lang="en-US" altLang="ko-KR" sz="1050" b="0" kern="0" spc="0" dirty="0">
+                          <a:solidFill>
+                            <a:srgbClr val="000000"/>
+                          </a:solidFill>
+                          <a:effectLst/>
+                          <a:latin typeface="+mn-lt"/>
+                          <a:ea typeface="+mn-ea"/>
+                          <a:cs typeface="+mn-cs"/>
+                        </a:rPr>
+                        <a:t>7</a:t>
+                      </a:r>
+                    </a:p>
+                  </a:txBody>
+                  <a:tcPr marL="60223" marR="60223" marT="16650" marB="16650" anchor="ctr">
+                    <a:lnL w="6350" cap="flat" cmpd="sng" algn="ctr">
+                      <a:solidFill>
+                        <a:schemeClr val="tx1"/>
+                      </a:solidFill>
+                      <a:prstDash val="solid"/>
+                      <a:round/>
+                      <a:headEnd type="none" w="med" len="med"/>
+                      <a:tailEnd type="none" w="med" len="med"/>
+                    </a:lnL>
+                    <a:lnR w="6350" cap="flat" cmpd="sng" algn="ctr">
+                      <a:solidFill>
+                        <a:schemeClr val="tx1"/>
+                      </a:solidFill>
+                      <a:prstDash val="solid"/>
+                      <a:round/>
+                      <a:headEnd type="none" w="med" len="med"/>
+                      <a:tailEnd type="none" w="med" len="med"/>
+                    </a:lnR>
+                    <a:lnT w="6350" cap="flat" cmpd="sng" algn="ctr">
+                      <a:solidFill>
+                        <a:schemeClr val="tx1"/>
+                      </a:solidFill>
+                      <a:prstDash val="solid"/>
+                      <a:round/>
+                      <a:headEnd type="none" w="med" len="med"/>
+                      <a:tailEnd type="none" w="med" len="med"/>
+                    </a:lnT>
+                    <a:lnB w="6350" cap="flat" cmpd="sng" algn="ctr">
+                      <a:solidFill>
+                        <a:schemeClr val="tx1"/>
+                      </a:solidFill>
+                      <a:prstDash val="solid"/>
+                      <a:round/>
+                      <a:headEnd type="none" w="med" len="med"/>
+                      <a:tailEnd type="none" w="med" len="med"/>
+                    </a:lnB>
+                    <a:solidFill>
+                      <a:schemeClr val="bg1"/>
+                    </a:solidFill>
+                  </a:tcPr>
+                </a:tc>
+                <a:tc>
+                  <a:txBody>
+                    <a:bodyPr/>
+                    <a:lstStyle/>
+                    <a:p>
+                      <a:pPr marL="0" marR="0" indent="0" algn="ctr" fontAlgn="base" latinLnBrk="0">
+                        <a:lnSpc>
+                          <a:spcPct val="120000"/>
+                        </a:lnSpc>
+                        <a:spcBef>
+                          <a:spcPts val="0"/>
+                        </a:spcBef>
+                        <a:spcAft>
+                          <a:spcPts val="0"/>
+                        </a:spcAft>
+                      </a:pPr>
+                      <a:r>
+                        <a:rPr lang="en-US" altLang="ko-KR" sz="1050" b="0" kern="0" spc="0" dirty="0">
+                          <a:solidFill>
+                            <a:srgbClr val="000000"/>
+                          </a:solidFill>
+                          <a:effectLst/>
+                          <a:latin typeface="+mn-lt"/>
+                          <a:ea typeface="+mn-ea"/>
+                          <a:cs typeface="+mn-cs"/>
+                        </a:rPr>
+                        <a:t>1</a:t>
+                      </a:r>
+                    </a:p>
+                  </a:txBody>
+                  <a:tcPr marL="60223" marR="60223" marT="16650" marB="16650" anchor="ctr">
+                    <a:lnL w="6350" cap="flat" cmpd="sng" algn="ctr">
+                      <a:solidFill>
+                        <a:schemeClr val="tx1"/>
+                      </a:solidFill>
+                      <a:prstDash val="solid"/>
+                      <a:round/>
+                      <a:headEnd type="none" w="med" len="med"/>
+                      <a:tailEnd type="none" w="med" len="med"/>
+                    </a:lnL>
+                    <a:lnR w="6350" cap="flat" cmpd="sng" algn="ctr">
+                      <a:solidFill>
+                        <a:schemeClr val="tx1"/>
+                      </a:solidFill>
+                      <a:prstDash val="solid"/>
+                      <a:round/>
+                      <a:headEnd type="none" w="med" len="med"/>
+                      <a:tailEnd type="none" w="med" len="med"/>
+                    </a:lnR>
+                    <a:lnT w="6350" cap="flat" cmpd="sng" algn="ctr">
+                      <a:solidFill>
+                        <a:schemeClr val="tx1"/>
+                      </a:solidFill>
+                      <a:prstDash val="solid"/>
+                      <a:round/>
+                      <a:headEnd type="none" w="med" len="med"/>
+                      <a:tailEnd type="none" w="med" len="med"/>
+                    </a:lnT>
+                    <a:lnB w="6350" cap="flat" cmpd="sng" algn="ctr">
+                      <a:solidFill>
+                        <a:schemeClr val="tx1"/>
+                      </a:solidFill>
+                      <a:prstDash val="solid"/>
+                      <a:round/>
+                      <a:headEnd type="none" w="med" len="med"/>
+                      <a:tailEnd type="none" w="med" len="med"/>
+                    </a:lnB>
+                    <a:solidFill>
+                      <a:schemeClr val="bg1"/>
+                    </a:solidFill>
+                  </a:tcPr>
+                </a:tc>
+                <a:tc>
+                  <a:txBody>
+                    <a:bodyPr/>
+                    <a:lstStyle/>
+                    <a:p>
+                      <a:pPr marL="0" marR="0" indent="0" algn="ctr" fontAlgn="base" latinLnBrk="0">
+                        <a:lnSpc>
+                          <a:spcPct val="120000"/>
+                        </a:lnSpc>
+                        <a:spcBef>
+                          <a:spcPts val="0"/>
+                        </a:spcBef>
+                        <a:spcAft>
+                          <a:spcPts val="0"/>
+                        </a:spcAft>
+                      </a:pPr>
+                      <a:r>
+                        <a:rPr lang="en-US" sz="1050" b="0" kern="0" spc="0" dirty="0">
+                          <a:solidFill>
+                            <a:srgbClr val="000000"/>
+                          </a:solidFill>
+                          <a:effectLst/>
+                          <a:latin typeface="+mn-lt"/>
+                          <a:ea typeface="+mn-ea"/>
+                          <a:cs typeface="+mn-cs"/>
+                        </a:rPr>
+                        <a:t>19</a:t>
+                      </a:r>
+                    </a:p>
+                  </a:txBody>
+                  <a:tcPr marL="60223" marR="60223" marT="16650" marB="16650" anchor="ctr">
+                    <a:lnL w="6350" cap="flat" cmpd="sng" algn="ctr">
+                      <a:solidFill>
+                        <a:schemeClr val="tx1"/>
+                      </a:solidFill>
+                      <a:prstDash val="solid"/>
+                      <a:round/>
+                      <a:headEnd type="none" w="med" len="med"/>
+                      <a:tailEnd type="none" w="med" len="med"/>
+                    </a:lnL>
+                    <a:lnR w="12700" cap="flat" cmpd="sng" algn="ctr">
+                      <a:solidFill>
+                        <a:schemeClr val="tx1"/>
+                      </a:solidFill>
+                      <a:prstDash val="solid"/>
+                      <a:round/>
+                      <a:headEnd type="none" w="med" len="med"/>
+                      <a:tailEnd type="none" w="med" len="med"/>
+                    </a:lnR>
+                    <a:lnT w="6350" cap="flat" cmpd="sng" algn="ctr">
+                      <a:solidFill>
+                        <a:schemeClr val="tx1"/>
+                      </a:solidFill>
+                      <a:prstDash val="solid"/>
+                      <a:round/>
+                      <a:headEnd type="none" w="med" len="med"/>
+                      <a:tailEnd type="none" w="med" len="med"/>
+                    </a:lnT>
+                    <a:lnB w="6350" cap="flat" cmpd="sng" algn="ctr">
+                      <a:solidFill>
+                        <a:schemeClr val="tx1"/>
+                      </a:solidFill>
+                      <a:prstDash val="solid"/>
+                      <a:round/>
+                      <a:headEnd type="none" w="med" len="med"/>
+                      <a:tailEnd type="none" w="med" len="med"/>
+                    </a:lnB>
+                    <a:solidFill>
+                      <a:schemeClr val="bg1"/>
+                    </a:solidFill>
+                  </a:tcPr>
+                </a:tc>
+                <a:extLst>
+                  <a:ext uri="{0D108BD9-81ED-4DB2-BD59-A6C34878D82A}">
+                    <a16:rowId xmlns:a16="http://schemas.microsoft.com/office/drawing/2014/main" val="502214791"/>
+                  </a:ext>
+                </a:extLst>
+              </a:tr>
+              <a:tr h="0">
+                <a:tc>
+                  <a:txBody>
+                    <a:bodyPr/>
+                    <a:lstStyle/>
+                    <a:p>
+                      <a:pPr marL="0" marR="0" indent="0" algn="ctr" fontAlgn="base" latinLnBrk="0">
+                        <a:lnSpc>
+                          <a:spcPct val="120000"/>
+                        </a:lnSpc>
+                        <a:spcBef>
+                          <a:spcPts val="0"/>
+                        </a:spcBef>
+                        <a:spcAft>
+                          <a:spcPts val="0"/>
+                        </a:spcAft>
+                      </a:pPr>
+                      <a:r>
+                        <a:rPr lang="ko-KR" altLang="en-US" sz="1050" b="0" kern="0" spc="0" dirty="0">
+                          <a:solidFill>
+                            <a:srgbClr val="000000"/>
+                          </a:solidFill>
+                          <a:effectLst/>
+                          <a:latin typeface="+mn-lt"/>
+                          <a:ea typeface="+mn-ea"/>
+                          <a:cs typeface="+mn-cs"/>
+                        </a:rPr>
+                        <a:t>후보 </a:t>
+                      </a:r>
+                      <a:r>
+                        <a:rPr lang="en-US" altLang="ko-KR" sz="1050" b="0" kern="0" spc="0" dirty="0">
+                          <a:solidFill>
+                            <a:srgbClr val="000000"/>
+                          </a:solidFill>
+                          <a:effectLst/>
+                          <a:latin typeface="+mn-lt"/>
+                          <a:ea typeface="+mn-ea"/>
+                          <a:cs typeface="+mn-cs"/>
+                        </a:rPr>
+                        <a:t>C</a:t>
+                      </a:r>
+                    </a:p>
+                  </a:txBody>
+                  <a:tcPr marL="60223" marR="60223" marT="16650" marB="16650" anchor="ctr">
+                    <a:lnL w="12700" cap="flat" cmpd="sng" algn="ctr">
+                      <a:solidFill>
+                        <a:schemeClr val="tx1"/>
+                      </a:solidFill>
+                      <a:prstDash val="solid"/>
+                      <a:round/>
+                      <a:headEnd type="none" w="med" len="med"/>
+                      <a:tailEnd type="none" w="med" len="med"/>
+                    </a:lnL>
+                    <a:lnR w="6350" cap="flat" cmpd="sng" algn="ctr">
+                      <a:solidFill>
+                        <a:schemeClr val="tx1"/>
+                      </a:solidFill>
+                      <a:prstDash val="solid"/>
+                      <a:round/>
+                      <a:headEnd type="none" w="med" len="med"/>
+                      <a:tailEnd type="none" w="med" len="med"/>
+                    </a:lnR>
+                    <a:lnT w="6350" cap="flat" cmpd="sng" algn="ctr">
+                      <a:solidFill>
+                        <a:schemeClr val="tx1"/>
+                      </a:solidFill>
+                      <a:prstDash val="solid"/>
+                      <a:round/>
+                      <a:headEnd type="none" w="med" len="med"/>
+                      <a:tailEnd type="none" w="med" len="med"/>
+                    </a:lnT>
+                    <a:lnB w="12700" cap="flat" cmpd="sng" algn="ctr">
+                      <a:solidFill>
+                        <a:schemeClr val="tx1"/>
+                      </a:solidFill>
+                      <a:prstDash val="solid"/>
+                      <a:round/>
+                      <a:headEnd type="none" w="med" len="med"/>
+                      <a:tailEnd type="none" w="med" len="med"/>
+                    </a:lnB>
+                    <a:solidFill>
+                      <a:schemeClr val="bg1"/>
+                    </a:solidFill>
+                  </a:tcPr>
+                </a:tc>
+                <a:tc>
+                  <a:txBody>
+                    <a:bodyPr/>
+                    <a:lstStyle/>
+                    <a:p>
+                      <a:pPr marL="0" marR="0" indent="0" algn="ctr" fontAlgn="base" latinLnBrk="0">
+                        <a:lnSpc>
+                          <a:spcPct val="120000"/>
+                        </a:lnSpc>
+                        <a:spcBef>
+                          <a:spcPts val="0"/>
+                        </a:spcBef>
+                        <a:spcAft>
+                          <a:spcPts val="0"/>
+                        </a:spcAft>
+                      </a:pPr>
+                      <a:r>
+                        <a:rPr lang="en-US" altLang="ko-KR" sz="1050" b="0" kern="0" spc="0" dirty="0">
+                          <a:solidFill>
+                            <a:srgbClr val="000000"/>
+                          </a:solidFill>
+                          <a:effectLst/>
+                          <a:latin typeface="+mn-lt"/>
+                          <a:ea typeface="+mn-ea"/>
+                          <a:cs typeface="+mn-cs"/>
+                        </a:rPr>
+                        <a:t>1</a:t>
+                      </a:r>
+                    </a:p>
+                  </a:txBody>
+                  <a:tcPr marL="60223" marR="60223" marT="16650" marB="16650" anchor="ctr">
+                    <a:lnL w="6350" cap="flat" cmpd="sng" algn="ctr">
+                      <a:solidFill>
+                        <a:schemeClr val="tx1"/>
+                      </a:solidFill>
+                      <a:prstDash val="solid"/>
+                      <a:round/>
+                      <a:headEnd type="none" w="med" len="med"/>
+                      <a:tailEnd type="none" w="med" len="med"/>
+                    </a:lnL>
+                    <a:lnR w="6350" cap="flat" cmpd="sng" algn="ctr">
+                      <a:solidFill>
+                        <a:schemeClr val="tx1"/>
+                      </a:solidFill>
+                      <a:prstDash val="solid"/>
+                      <a:round/>
+                      <a:headEnd type="none" w="med" len="med"/>
+                      <a:tailEnd type="none" w="med" len="med"/>
+                    </a:lnR>
+                    <a:lnT w="6350" cap="flat" cmpd="sng" algn="ctr">
+                      <a:solidFill>
+                        <a:schemeClr val="tx1"/>
+                      </a:solidFill>
+                      <a:prstDash val="solid"/>
+                      <a:round/>
+                      <a:headEnd type="none" w="med" len="med"/>
+                      <a:tailEnd type="none" w="med" len="med"/>
+                    </a:lnT>
+                    <a:lnB w="12700" cap="flat" cmpd="sng" algn="ctr">
+                      <a:solidFill>
+                        <a:schemeClr val="tx1"/>
+                      </a:solidFill>
+                      <a:prstDash val="solid"/>
+                      <a:round/>
+                      <a:headEnd type="none" w="med" len="med"/>
+                      <a:tailEnd type="none" w="med" len="med"/>
+                    </a:lnB>
+                    <a:solidFill>
+                      <a:schemeClr val="bg1"/>
+                    </a:solidFill>
+                  </a:tcPr>
+                </a:tc>
+                <a:tc>
+                  <a:txBody>
+                    <a:bodyPr/>
+                    <a:lstStyle/>
+                    <a:p>
+                      <a:pPr marL="0" marR="0" indent="0" algn="ctr" fontAlgn="base" latinLnBrk="0">
+                        <a:lnSpc>
+                          <a:spcPct val="120000"/>
+                        </a:lnSpc>
+                        <a:spcBef>
+                          <a:spcPts val="0"/>
+                        </a:spcBef>
+                        <a:spcAft>
+                          <a:spcPts val="0"/>
+                        </a:spcAft>
+                      </a:pPr>
+                      <a:r>
+                        <a:rPr lang="en-US" altLang="ko-KR" sz="1050" b="0" kern="0" spc="0" dirty="0">
+                          <a:solidFill>
+                            <a:srgbClr val="000000"/>
+                          </a:solidFill>
+                          <a:effectLst/>
+                          <a:latin typeface="+mn-lt"/>
+                          <a:ea typeface="+mn-ea"/>
+                          <a:cs typeface="+mn-cs"/>
+                        </a:rPr>
+                        <a:t>3</a:t>
+                      </a:r>
+                    </a:p>
+                  </a:txBody>
+                  <a:tcPr marL="60223" marR="60223" marT="16650" marB="16650" anchor="ctr">
+                    <a:lnL w="6350" cap="flat" cmpd="sng" algn="ctr">
+                      <a:solidFill>
+                        <a:schemeClr val="tx1"/>
+                      </a:solidFill>
+                      <a:prstDash val="solid"/>
+                      <a:round/>
+                      <a:headEnd type="none" w="med" len="med"/>
+                      <a:tailEnd type="none" w="med" len="med"/>
+                    </a:lnL>
+                    <a:lnR w="6350" cap="flat" cmpd="sng" algn="ctr">
+                      <a:solidFill>
+                        <a:schemeClr val="tx1"/>
+                      </a:solidFill>
+                      <a:prstDash val="solid"/>
+                      <a:round/>
+                      <a:headEnd type="none" w="med" len="med"/>
+                      <a:tailEnd type="none" w="med" len="med"/>
+                    </a:lnR>
+                    <a:lnT w="6350" cap="flat" cmpd="sng" algn="ctr">
+                      <a:solidFill>
+                        <a:schemeClr val="tx1"/>
+                      </a:solidFill>
+                      <a:prstDash val="solid"/>
+                      <a:round/>
+                      <a:headEnd type="none" w="med" len="med"/>
+                      <a:tailEnd type="none" w="med" len="med"/>
+                    </a:lnT>
+                    <a:lnB w="12700" cap="flat" cmpd="sng" algn="ctr">
+                      <a:solidFill>
+                        <a:schemeClr val="tx1"/>
+                      </a:solidFill>
+                      <a:prstDash val="solid"/>
+                      <a:round/>
+                      <a:headEnd type="none" w="med" len="med"/>
+                      <a:tailEnd type="none" w="med" len="med"/>
+                    </a:lnB>
+                    <a:solidFill>
+                      <a:schemeClr val="bg1"/>
+                    </a:solidFill>
+                  </a:tcPr>
+                </a:tc>
+                <a:tc>
+                  <a:txBody>
+                    <a:bodyPr/>
+                    <a:lstStyle/>
+                    <a:p>
+                      <a:pPr marL="0" marR="0" indent="0" algn="ctr" fontAlgn="base" latinLnBrk="0">
+                        <a:lnSpc>
+                          <a:spcPct val="120000"/>
+                        </a:lnSpc>
+                        <a:spcBef>
+                          <a:spcPts val="0"/>
+                        </a:spcBef>
+                        <a:spcAft>
+                          <a:spcPts val="0"/>
+                        </a:spcAft>
+                      </a:pPr>
+                      <a:r>
+                        <a:rPr lang="en-US" altLang="ko-KR" sz="1050" b="0" kern="0" spc="0" dirty="0">
+                          <a:solidFill>
+                            <a:srgbClr val="000000"/>
+                          </a:solidFill>
+                          <a:effectLst/>
+                          <a:latin typeface="+mn-lt"/>
+                          <a:ea typeface="+mn-ea"/>
+                          <a:cs typeface="+mn-cs"/>
+                        </a:rPr>
+                        <a:t>2</a:t>
+                      </a:r>
+                    </a:p>
+                  </a:txBody>
+                  <a:tcPr marL="60223" marR="60223" marT="16650" marB="16650" anchor="ctr">
+                    <a:lnL w="6350" cap="flat" cmpd="sng" algn="ctr">
+                      <a:solidFill>
+                        <a:schemeClr val="tx1"/>
+                      </a:solidFill>
+                      <a:prstDash val="solid"/>
+                      <a:round/>
+                      <a:headEnd type="none" w="med" len="med"/>
+                      <a:tailEnd type="none" w="med" len="med"/>
+                    </a:lnL>
+                    <a:lnR w="6350" cap="flat" cmpd="sng" algn="ctr">
+                      <a:solidFill>
+                        <a:schemeClr val="tx1"/>
+                      </a:solidFill>
+                      <a:prstDash val="solid"/>
+                      <a:round/>
+                      <a:headEnd type="none" w="med" len="med"/>
+                      <a:tailEnd type="none" w="med" len="med"/>
+                    </a:lnR>
+                    <a:lnT w="6350" cap="flat" cmpd="sng" algn="ctr">
+                      <a:solidFill>
+                        <a:schemeClr val="tx1"/>
+                      </a:solidFill>
+                      <a:prstDash val="solid"/>
+                      <a:round/>
+                      <a:headEnd type="none" w="med" len="med"/>
+                      <a:tailEnd type="none" w="med" len="med"/>
+                    </a:lnT>
+                    <a:lnB w="12700" cap="flat" cmpd="sng" algn="ctr">
+                      <a:solidFill>
+                        <a:schemeClr val="tx1"/>
+                      </a:solidFill>
+                      <a:prstDash val="solid"/>
+                      <a:round/>
+                      <a:headEnd type="none" w="med" len="med"/>
+                      <a:tailEnd type="none" w="med" len="med"/>
+                    </a:lnB>
+                    <a:solidFill>
+                      <a:schemeClr val="bg1"/>
+                    </a:solidFill>
+                  </a:tcPr>
+                </a:tc>
+                <a:tc>
+                  <a:txBody>
+                    <a:bodyPr/>
+                    <a:lstStyle/>
+                    <a:p>
+                      <a:pPr marL="0" marR="0" indent="0" algn="ctr" fontAlgn="base" latinLnBrk="0">
+                        <a:lnSpc>
+                          <a:spcPct val="120000"/>
+                        </a:lnSpc>
+                        <a:spcBef>
+                          <a:spcPts val="0"/>
+                        </a:spcBef>
+                        <a:spcAft>
+                          <a:spcPts val="0"/>
+                        </a:spcAft>
+                      </a:pPr>
+                      <a:r>
+                        <a:rPr lang="en-US" altLang="ko-KR" sz="1050" b="0" kern="0" spc="0" dirty="0">
+                          <a:solidFill>
+                            <a:srgbClr val="000000"/>
+                          </a:solidFill>
+                          <a:effectLst/>
+                          <a:latin typeface="+mn-lt"/>
+                          <a:ea typeface="+mn-ea"/>
+                          <a:cs typeface="+mn-cs"/>
+                        </a:rPr>
+                        <a:t>1</a:t>
+                      </a:r>
+                    </a:p>
+                  </a:txBody>
+                  <a:tcPr marL="60223" marR="60223" marT="16650" marB="16650" anchor="ctr">
+                    <a:lnL w="6350" cap="flat" cmpd="sng" algn="ctr">
+                      <a:solidFill>
+                        <a:schemeClr val="tx1"/>
+                      </a:solidFill>
+                      <a:prstDash val="solid"/>
+                      <a:round/>
+                      <a:headEnd type="none" w="med" len="med"/>
+                      <a:tailEnd type="none" w="med" len="med"/>
+                    </a:lnL>
+                    <a:lnR w="6350" cap="flat" cmpd="sng" algn="ctr">
+                      <a:solidFill>
+                        <a:schemeClr val="tx1"/>
+                      </a:solidFill>
+                      <a:prstDash val="solid"/>
+                      <a:round/>
+                      <a:headEnd type="none" w="med" len="med"/>
+                      <a:tailEnd type="none" w="med" len="med"/>
+                    </a:lnR>
+                    <a:lnT w="6350" cap="flat" cmpd="sng" algn="ctr">
+                      <a:solidFill>
+                        <a:schemeClr val="tx1"/>
+                      </a:solidFill>
+                      <a:prstDash val="solid"/>
+                      <a:round/>
+                      <a:headEnd type="none" w="med" len="med"/>
+                      <a:tailEnd type="none" w="med" len="med"/>
+                    </a:lnT>
+                    <a:lnB w="12700" cap="flat" cmpd="sng" algn="ctr">
+                      <a:solidFill>
+                        <a:schemeClr val="tx1"/>
+                      </a:solidFill>
+                      <a:prstDash val="solid"/>
+                      <a:round/>
+                      <a:headEnd type="none" w="med" len="med"/>
+                      <a:tailEnd type="none" w="med" len="med"/>
+                    </a:lnB>
+                    <a:solidFill>
+                      <a:schemeClr val="bg1"/>
+                    </a:solidFill>
+                  </a:tcPr>
+                </a:tc>
+                <a:tc>
+                  <a:txBody>
+                    <a:bodyPr/>
+                    <a:lstStyle/>
+                    <a:p>
+                      <a:pPr marL="0" marR="0" indent="0" algn="ctr" fontAlgn="base" latinLnBrk="0">
+                        <a:lnSpc>
+                          <a:spcPct val="120000"/>
+                        </a:lnSpc>
+                        <a:spcBef>
+                          <a:spcPts val="0"/>
+                        </a:spcBef>
+                        <a:spcAft>
+                          <a:spcPts val="0"/>
+                        </a:spcAft>
+                      </a:pPr>
+                      <a:r>
+                        <a:rPr lang="en-US" altLang="ko-KR" sz="1050" b="0" kern="0" spc="0" dirty="0">
+                          <a:solidFill>
+                            <a:srgbClr val="000000"/>
+                          </a:solidFill>
+                          <a:effectLst/>
+                          <a:latin typeface="+mn-lt"/>
+                          <a:ea typeface="+mn-ea"/>
+                          <a:cs typeface="+mn-cs"/>
+                        </a:rPr>
+                        <a:t>3</a:t>
+                      </a:r>
+                    </a:p>
+                  </a:txBody>
+                  <a:tcPr marL="60223" marR="60223" marT="16650" marB="16650" anchor="ctr">
+                    <a:lnL w="6350" cap="flat" cmpd="sng" algn="ctr">
+                      <a:solidFill>
+                        <a:schemeClr val="tx1"/>
+                      </a:solidFill>
+                      <a:prstDash val="solid"/>
+                      <a:round/>
+                      <a:headEnd type="none" w="med" len="med"/>
+                      <a:tailEnd type="none" w="med" len="med"/>
+                    </a:lnL>
+                    <a:lnR w="6350" cap="flat" cmpd="sng" algn="ctr">
+                      <a:solidFill>
+                        <a:schemeClr val="tx1"/>
+                      </a:solidFill>
+                      <a:prstDash val="solid"/>
+                      <a:round/>
+                      <a:headEnd type="none" w="med" len="med"/>
+                      <a:tailEnd type="none" w="med" len="med"/>
+                    </a:lnR>
+                    <a:lnT w="6350" cap="flat" cmpd="sng" algn="ctr">
+                      <a:solidFill>
+                        <a:schemeClr val="tx1"/>
+                      </a:solidFill>
+                      <a:prstDash val="solid"/>
+                      <a:round/>
+                      <a:headEnd type="none" w="med" len="med"/>
+                      <a:tailEnd type="none" w="med" len="med"/>
+                    </a:lnT>
+                    <a:lnB w="12700" cap="flat" cmpd="sng" algn="ctr">
+                      <a:solidFill>
+                        <a:schemeClr val="tx1"/>
+                      </a:solidFill>
+                      <a:prstDash val="solid"/>
+                      <a:round/>
+                      <a:headEnd type="none" w="med" len="med"/>
+                      <a:tailEnd type="none" w="med" len="med"/>
+                    </a:lnB>
+                    <a:solidFill>
+                      <a:schemeClr val="bg1"/>
+                    </a:solidFill>
+                  </a:tcPr>
+                </a:tc>
+                <a:tc>
+                  <a:txBody>
+                    <a:bodyPr/>
+                    <a:lstStyle/>
+                    <a:p>
+                      <a:pPr marL="0" marR="0" indent="0" algn="ctr" fontAlgn="base" latinLnBrk="0">
+                        <a:lnSpc>
+                          <a:spcPct val="120000"/>
+                        </a:lnSpc>
+                        <a:spcBef>
+                          <a:spcPts val="0"/>
+                        </a:spcBef>
+                        <a:spcAft>
+                          <a:spcPts val="0"/>
+                        </a:spcAft>
+                      </a:pPr>
+                      <a:r>
+                        <a:rPr lang="en-US" altLang="ko-KR" sz="1050" b="0" kern="0" spc="0" dirty="0">
+                          <a:solidFill>
+                            <a:srgbClr val="000000"/>
+                          </a:solidFill>
+                          <a:effectLst/>
+                          <a:latin typeface="+mn-lt"/>
+                          <a:ea typeface="+mn-ea"/>
+                          <a:cs typeface="+mn-cs"/>
+                        </a:rPr>
+                        <a:t>8</a:t>
+                      </a:r>
+                    </a:p>
+                  </a:txBody>
+                  <a:tcPr marL="60223" marR="60223" marT="16650" marB="16650" anchor="ctr">
+                    <a:lnL w="6350" cap="flat" cmpd="sng" algn="ctr">
+                      <a:solidFill>
+                        <a:schemeClr val="tx1"/>
+                      </a:solidFill>
+                      <a:prstDash val="solid"/>
+                      <a:round/>
+                      <a:headEnd type="none" w="med" len="med"/>
+                      <a:tailEnd type="none" w="med" len="med"/>
+                    </a:lnL>
+                    <a:lnR w="6350" cap="flat" cmpd="sng" algn="ctr">
+                      <a:solidFill>
+                        <a:schemeClr val="tx1"/>
+                      </a:solidFill>
+                      <a:prstDash val="solid"/>
+                      <a:round/>
+                      <a:headEnd type="none" w="med" len="med"/>
+                      <a:tailEnd type="none" w="med" len="med"/>
+                    </a:lnR>
+                    <a:lnT w="6350" cap="flat" cmpd="sng" algn="ctr">
+                      <a:solidFill>
+                        <a:schemeClr val="tx1"/>
+                      </a:solidFill>
+                      <a:prstDash val="solid"/>
+                      <a:round/>
+                      <a:headEnd type="none" w="med" len="med"/>
+                      <a:tailEnd type="none" w="med" len="med"/>
+                    </a:lnT>
+                    <a:lnB w="12700" cap="flat" cmpd="sng" algn="ctr">
+                      <a:solidFill>
+                        <a:schemeClr val="tx1"/>
+                      </a:solidFill>
+                      <a:prstDash val="solid"/>
+                      <a:round/>
+                      <a:headEnd type="none" w="med" len="med"/>
+                      <a:tailEnd type="none" w="med" len="med"/>
+                    </a:lnB>
+                    <a:solidFill>
+                      <a:schemeClr val="bg1"/>
+                    </a:solidFill>
+                  </a:tcPr>
+                </a:tc>
+                <a:tc>
+                  <a:txBody>
+                    <a:bodyPr/>
+                    <a:lstStyle/>
+                    <a:p>
+                      <a:pPr marL="0" marR="0" indent="0" algn="ctr" fontAlgn="base" latinLnBrk="0">
+                        <a:lnSpc>
+                          <a:spcPct val="120000"/>
+                        </a:lnSpc>
+                        <a:spcBef>
+                          <a:spcPts val="0"/>
+                        </a:spcBef>
+                        <a:spcAft>
+                          <a:spcPts val="0"/>
+                        </a:spcAft>
+                      </a:pPr>
+                      <a:r>
+                        <a:rPr lang="en-US" sz="1050" b="0" kern="0" spc="0" dirty="0">
+                          <a:solidFill>
+                            <a:srgbClr val="000000"/>
+                          </a:solidFill>
+                          <a:effectLst/>
+                          <a:latin typeface="+mn-lt"/>
+                          <a:ea typeface="+mn-ea"/>
+                          <a:cs typeface="+mn-cs"/>
+                        </a:rPr>
+                        <a:t>18</a:t>
+                      </a:r>
+                    </a:p>
+                  </a:txBody>
+                  <a:tcPr marL="60223" marR="60223" marT="16650" marB="16650" anchor="ctr">
+                    <a:lnL w="6350" cap="flat" cmpd="sng" algn="ctr">
+                      <a:solidFill>
+                        <a:schemeClr val="tx1"/>
+                      </a:solidFill>
+                      <a:prstDash val="solid"/>
+                      <a:round/>
+                      <a:headEnd type="none" w="med" len="med"/>
+                      <a:tailEnd type="none" w="med" len="med"/>
+                    </a:lnL>
+                    <a:lnR w="12700" cap="flat" cmpd="sng" algn="ctr">
+                      <a:solidFill>
+                        <a:schemeClr val="tx1"/>
+                      </a:solidFill>
+                      <a:prstDash val="solid"/>
+                      <a:round/>
+                      <a:headEnd type="none" w="med" len="med"/>
+                      <a:tailEnd type="none" w="med" len="med"/>
+                    </a:lnR>
+                    <a:lnT w="6350" cap="flat" cmpd="sng" algn="ctr">
+                      <a:solidFill>
+                        <a:schemeClr val="tx1"/>
+                      </a:solidFill>
+                      <a:prstDash val="solid"/>
+                      <a:round/>
+                      <a:headEnd type="none" w="med" len="med"/>
+                      <a:tailEnd type="none" w="med" len="med"/>
+                    </a:lnT>
+                    <a:lnB w="12700" cap="flat" cmpd="sng" algn="ctr">
+                      <a:solidFill>
+                        <a:schemeClr val="tx1"/>
+                      </a:solidFill>
+                      <a:prstDash val="solid"/>
+                      <a:round/>
+                      <a:headEnd type="none" w="med" len="med"/>
+                      <a:tailEnd type="none" w="med" len="med"/>
+                    </a:lnB>
+                    <a:solidFill>
+                      <a:schemeClr val="bg1"/>
+                    </a:solidFill>
+                  </a:tcPr>
+                </a:tc>
+                <a:extLst>
+                  <a:ext uri="{0D108BD9-81ED-4DB2-BD59-A6C34878D82A}">
+                    <a16:rowId xmlns:a16="http://schemas.microsoft.com/office/drawing/2014/main" val="541274545"/>
+                  </a:ext>
+                </a:extLst>
+              </a:tr>
+            </a:tbl>
+          </a:graphicData>
+        </a:graphic>
+      </p:graphicFrame>
+      <p:sp>
+        <p:nvSpPr>
+          <p:cNvPr id="7" name="TextBox 6">
+            <a:extLst>
+              <a:ext uri="{FF2B5EF4-FFF2-40B4-BE49-F238E27FC236}">
+                <a16:creationId xmlns:a16="http://schemas.microsoft.com/office/drawing/2014/main" id="{19A0889D-0FF2-0C8B-3A5C-128E846D512B}"/>
+              </a:ext>
+            </a:extLst>
+          </p:cNvPr>
+          <p:cNvSpPr txBox="1"/>
+          <p:nvPr/>
+        </p:nvSpPr>
+        <p:spPr>
+          <a:xfrm>
+            <a:off x="2957919" y="3335916"/>
+            <a:ext cx="5336690" cy="276999"/>
+          </a:xfrm>
+          <a:prstGeom prst="rect">
+            <a:avLst/>
+          </a:prstGeom>
+          <a:noFill/>
+        </p:spPr>
+        <p:txBody>
+          <a:bodyPr wrap="square">
+            <a:spAutoFit/>
+          </a:bodyPr>
+          <a:lstStyle/>
+          <a:p>
+            <a:pPr algn="ctr"/>
+            <a:r>
+              <a:rPr lang="en-US" altLang="ko-KR" sz="1200" spc="-50" dirty="0"/>
+              <a:t>&lt;</a:t>
+            </a:r>
+            <a:r>
+              <a:rPr lang="ko-KR" altLang="en-US" sz="1200" spc="-50" dirty="0"/>
+              <a:t>후보들에 대한 선호의 정도</a:t>
+            </a:r>
+            <a:r>
+              <a:rPr lang="en-US" altLang="ko-KR" sz="1200" spc="-50" dirty="0"/>
+              <a:t>&gt;</a:t>
+            </a:r>
+            <a:endParaRPr lang="ko-KR" altLang="en-US" sz="1200" dirty="0"/>
+          </a:p>
+        </p:txBody>
+      </p:sp>
+    </p:spTree>
+    <p:extLst>
+      <p:ext uri="{BB962C8B-B14F-4D97-AF65-F5344CB8AC3E}">
+        <p14:creationId xmlns:p14="http://schemas.microsoft.com/office/powerpoint/2010/main" val="3973063617"/>
+      </p:ext>
+    </p:extLst>
+  </p:cSld>
+  <p:clrMapOvr>
+    <a:masterClrMapping/>
+  </p:clrMapOvr>
+</p:sld>
+</file>
+
+<file path=ppt/slides/slide13.xml><?xml version="1.0" encoding="utf-8"?>
 <p:sld xmlns:a="http://schemas.openxmlformats.org/drawingml/2006/main" xmlns:r="http://schemas.openxmlformats.org/officeDocument/2006/relationships" xmlns:p="http://schemas.openxmlformats.org/presentationml/2006/main">
   <p:cSld>
     <p:spTree>
@@ -7666,7 +11181,7 @@
           <a:p>
             <a:fld id="{109C872D-39A9-4065-8BF3-6A613116E2A1}" type="slidenum">
               <a:rPr lang="ko-KR" altLang="en-US" smtClean="0"/>
-              <a:t>11</a:t>
+              <a:t>13</a:t>
             </a:fld>
             <a:endParaRPr lang="ko-KR" altLang="en-US"/>
           </a:p>
@@ -7727,7 +11242,7 @@
 </p:sld>
 </file>
 
-<file path=ppt/slides/slide12.xml><?xml version="1.0" encoding="utf-8"?>
+<file path=ppt/slides/slide14.xml><?xml version="1.0" encoding="utf-8"?>
 <p:sld xmlns:a="http://schemas.openxmlformats.org/drawingml/2006/main" xmlns:r="http://schemas.openxmlformats.org/officeDocument/2006/relationships" xmlns:p="http://schemas.openxmlformats.org/presentationml/2006/main">
   <p:cSld>
     <p:spTree>
@@ -7810,7 +11325,7 @@
           <a:p>
             <a:fld id="{109C872D-39A9-4065-8BF3-6A613116E2A1}" type="slidenum">
               <a:rPr lang="ko-KR" altLang="en-US" smtClean="0"/>
-              <a:t>12</a:t>
+              <a:t>14</a:t>
             </a:fld>
             <a:endParaRPr lang="ko-KR" altLang="en-US"/>
           </a:p>
@@ -7874,7 +11389,7 @@
 </p:sld>
 </file>
 
-<file path=ppt/slides/slide13.xml><?xml version="1.0" encoding="utf-8"?>
+<file path=ppt/slides/slide15.xml><?xml version="1.0" encoding="utf-8"?>
 <p:sld xmlns:a="http://schemas.openxmlformats.org/drawingml/2006/main" xmlns:r="http://schemas.openxmlformats.org/officeDocument/2006/relationships" xmlns:p="http://schemas.openxmlformats.org/presentationml/2006/main">
   <p:cSld>
     <p:spTree>
@@ -7957,7 +11472,7 @@
           <a:p>
             <a:fld id="{109C872D-39A9-4065-8BF3-6A613116E2A1}" type="slidenum">
               <a:rPr lang="ko-KR" altLang="en-US" smtClean="0"/>
-              <a:t>13</a:t>
+              <a:t>15</a:t>
             </a:fld>
             <a:endParaRPr lang="ko-KR" altLang="en-US"/>
           </a:p>
@@ -8021,7 +11536,7 @@
 </p:sld>
 </file>
 
-<file path=ppt/slides/slide14.xml><?xml version="1.0" encoding="utf-8"?>
+<file path=ppt/slides/slide16.xml><?xml version="1.0" encoding="utf-8"?>
 <p:sld xmlns:a="http://schemas.openxmlformats.org/drawingml/2006/main" xmlns:r="http://schemas.openxmlformats.org/officeDocument/2006/relationships" xmlns:p="http://schemas.openxmlformats.org/presentationml/2006/main">
   <p:cSld>
     <p:spTree>
@@ -8089,7 +11604,7 @@
           <a:p>
             <a:fld id="{109C872D-39A9-4065-8BF3-6A613116E2A1}" type="slidenum">
               <a:rPr lang="ko-KR" altLang="en-US" smtClean="0"/>
-              <a:t>14</a:t>
+              <a:t>16</a:t>
             </a:fld>
             <a:endParaRPr lang="ko-KR" altLang="en-US"/>
           </a:p>
@@ -8310,7 +11825,7 @@
 </p:sld>
 </file>
 
-<file path=ppt/slides/slide15.xml><?xml version="1.0" encoding="utf-8"?>
+<file path=ppt/slides/slide17.xml><?xml version="1.0" encoding="utf-8"?>
 <p:sld xmlns:a="http://schemas.openxmlformats.org/drawingml/2006/main" xmlns:r="http://schemas.openxmlformats.org/officeDocument/2006/relationships" xmlns:p="http://schemas.openxmlformats.org/presentationml/2006/main">
   <p:cSld>
     <p:spTree>
@@ -8384,7 +11899,7 @@
           <a:p>
             <a:fld id="{109C872D-39A9-4065-8BF3-6A613116E2A1}" type="slidenum">
               <a:rPr lang="ko-KR" altLang="en-US" smtClean="0"/>
-              <a:t>15</a:t>
+              <a:t>17</a:t>
             </a:fld>
             <a:endParaRPr lang="ko-KR" altLang="en-US"/>
           </a:p>
@@ -9483,7 +12998,7 @@
 </p:sld>
 </file>
 
-<file path=ppt/slides/slide16.xml><?xml version="1.0" encoding="utf-8"?>
+<file path=ppt/slides/slide18.xml><?xml version="1.0" encoding="utf-8"?>
 <p:sld xmlns:a="http://schemas.openxmlformats.org/drawingml/2006/main" xmlns:r="http://schemas.openxmlformats.org/officeDocument/2006/relationships" xmlns:p="http://schemas.openxmlformats.org/presentationml/2006/main">
   <p:cSld>
     <p:spTree>
@@ -9551,7 +13066,7 @@
           <a:p>
             <a:fld id="{109C872D-39A9-4065-8BF3-6A613116E2A1}" type="slidenum">
               <a:rPr lang="ko-KR" altLang="en-US" smtClean="0"/>
-              <a:t>16</a:t>
+              <a:t>18</a:t>
             </a:fld>
             <a:endParaRPr lang="ko-KR" altLang="en-US"/>
           </a:p>
@@ -9851,7 +13366,7 @@
 </p:sld>
 </file>
 
-<file path=ppt/slides/slide17.xml><?xml version="1.0" encoding="utf-8"?>
+<file path=ppt/slides/slide19.xml><?xml version="1.0" encoding="utf-8"?>
 <p:sld xmlns:a="http://schemas.openxmlformats.org/drawingml/2006/main" xmlns:r="http://schemas.openxmlformats.org/officeDocument/2006/relationships" xmlns:p="http://schemas.openxmlformats.org/presentationml/2006/main">
   <p:cSld>
     <p:spTree>
@@ -9919,7 +13434,7 @@
           <a:p>
             <a:fld id="{109C872D-39A9-4065-8BF3-6A613116E2A1}" type="slidenum">
               <a:rPr lang="ko-KR" altLang="en-US" smtClean="0"/>
-              <a:t>17</a:t>
+              <a:t>19</a:t>
             </a:fld>
             <a:endParaRPr lang="ko-KR" altLang="en-US"/>
           </a:p>
@@ -10224,543 +13739,6 @@
     <p:extLst>
       <p:ext uri="{BB962C8B-B14F-4D97-AF65-F5344CB8AC3E}">
         <p14:creationId xmlns:p14="http://schemas.microsoft.com/office/powerpoint/2010/main" val="181855133"/>
-      </p:ext>
-    </p:extLst>
-  </p:cSld>
-  <p:clrMapOvr>
-    <a:masterClrMapping/>
-  </p:clrMapOvr>
-</p:sld>
-</file>
-
-<file path=ppt/slides/slide18.xml><?xml version="1.0" encoding="utf-8"?>
-<p:sld xmlns:a="http://schemas.openxmlformats.org/drawingml/2006/main" xmlns:r="http://schemas.openxmlformats.org/officeDocument/2006/relationships" xmlns:p="http://schemas.openxmlformats.org/presentationml/2006/main">
-  <p:cSld>
-    <p:spTree>
-      <p:nvGrpSpPr>
-        <p:cNvPr id="1" name=""/>
-        <p:cNvGrpSpPr/>
-        <p:nvPr/>
-      </p:nvGrpSpPr>
-      <p:grpSpPr>
-        <a:xfrm>
-          <a:off x="0" y="0"/>
-          <a:ext cx="0" cy="0"/>
-          <a:chOff x="0" y="0"/>
-          <a:chExt cx="0" cy="0"/>
-        </a:xfrm>
-      </p:grpSpPr>
-      <p:sp>
-        <p:nvSpPr>
-          <p:cNvPr id="2" name="제목 1">
-            <a:extLst>
-              <a:ext uri="{FF2B5EF4-FFF2-40B4-BE49-F238E27FC236}">
-                <a16:creationId xmlns:a16="http://schemas.microsoft.com/office/drawing/2014/main" id="{F31B567A-9B29-F57E-6F8F-C5F32D6C24DF}"/>
-              </a:ext>
-            </a:extLst>
-          </p:cNvPr>
-          <p:cNvSpPr>
-            <a:spLocks noGrp="1"/>
-          </p:cNvSpPr>
-          <p:nvPr>
-            <p:ph type="title"/>
-          </p:nvPr>
-        </p:nvSpPr>
-        <p:spPr/>
-        <p:txBody>
-          <a:bodyPr/>
-          <a:lstStyle/>
-          <a:p>
-            <a:r>
-              <a:rPr lang="ko-KR" altLang="en-US" dirty="0"/>
-              <a:t>클럽 이론</a:t>
-            </a:r>
-          </a:p>
-        </p:txBody>
-      </p:sp>
-      <p:sp>
-        <p:nvSpPr>
-          <p:cNvPr id="4" name="슬라이드 번호 개체 틀 3">
-            <a:extLst>
-              <a:ext uri="{FF2B5EF4-FFF2-40B4-BE49-F238E27FC236}">
-                <a16:creationId xmlns:a16="http://schemas.microsoft.com/office/drawing/2014/main" id="{6F4682F1-5C58-3FB8-7120-4ED9E1221613}"/>
-              </a:ext>
-            </a:extLst>
-          </p:cNvPr>
-          <p:cNvSpPr>
-            <a:spLocks noGrp="1"/>
-          </p:cNvSpPr>
-          <p:nvPr>
-            <p:ph type="sldNum" sz="quarter" idx="12"/>
-          </p:nvPr>
-        </p:nvSpPr>
-        <p:spPr/>
-        <p:txBody>
-          <a:bodyPr/>
-          <a:lstStyle/>
-          <a:p>
-            <a:fld id="{109C872D-39A9-4065-8BF3-6A613116E2A1}" type="slidenum">
-              <a:rPr lang="ko-KR" altLang="en-US" smtClean="0"/>
-              <a:t>18</a:t>
-            </a:fld>
-            <a:endParaRPr lang="ko-KR" altLang="en-US"/>
-          </a:p>
-        </p:txBody>
-      </p:sp>
-      <p:sp>
-        <p:nvSpPr>
-          <p:cNvPr id="5" name="TextBox 4">
-            <a:extLst>
-              <a:ext uri="{FF2B5EF4-FFF2-40B4-BE49-F238E27FC236}">
-                <a16:creationId xmlns:a16="http://schemas.microsoft.com/office/drawing/2014/main" id="{53937F7B-CEAC-B863-5500-785A5BC07D75}"/>
-              </a:ext>
-            </a:extLst>
-          </p:cNvPr>
-          <p:cNvSpPr txBox="1"/>
-          <p:nvPr/>
-        </p:nvSpPr>
-        <p:spPr>
-          <a:xfrm>
-            <a:off x="288790" y="958844"/>
-            <a:ext cx="11693660" cy="4476675"/>
-          </a:xfrm>
-          <a:prstGeom prst="rect">
-            <a:avLst/>
-          </a:prstGeom>
-          <a:noFill/>
-        </p:spPr>
-        <p:txBody>
-          <a:bodyPr wrap="square" rtlCol="0" anchor="t">
-            <a:spAutoFit/>
-          </a:bodyPr>
-          <a:lstStyle/>
-          <a:p>
-            <a:pPr marL="377825" indent="-285750">
-              <a:lnSpc>
-                <a:spcPct val="150000"/>
-              </a:lnSpc>
-              <a:buFont typeface="Arial" panose="020B0604020202020204" pitchFamily="34" charset="0"/>
-              <a:buChar char="•"/>
-            </a:pPr>
-            <a:r>
-              <a:rPr lang="ko-KR" altLang="en-US" sz="1600" spc="-50" dirty="0" err="1"/>
-              <a:t>부캐넌</a:t>
-            </a:r>
-            <a:r>
-              <a:rPr lang="ko-KR" altLang="en-US" sz="1600" spc="-50" dirty="0"/>
-              <a:t> </a:t>
-            </a:r>
-            <a:r>
-              <a:rPr lang="en-US" altLang="ko-KR" sz="1600" spc="-50" dirty="0"/>
-              <a:t>(J. Buchanan, 1965)</a:t>
-            </a:r>
-            <a:r>
-              <a:rPr lang="ko-KR" altLang="en-US" sz="1600" spc="-50" dirty="0"/>
-              <a:t>은 비경합성이 있기는 하나 불완전하여 혼잡이 문제되는 재화나 서비스를 대상으로 하는 클럽 이론을 제시했다</a:t>
-            </a:r>
-            <a:r>
-              <a:rPr lang="en-US" altLang="ko-KR" sz="1600" spc="-50" dirty="0"/>
-              <a:t>.</a:t>
-            </a:r>
-          </a:p>
-          <a:p>
-            <a:pPr marL="835025" lvl="1" indent="-285750">
-              <a:lnSpc>
-                <a:spcPct val="150000"/>
-              </a:lnSpc>
-              <a:buFont typeface="Wingdings" panose="05000000000000000000" pitchFamily="2" charset="2"/>
-              <a:buChar char="ü"/>
-            </a:pPr>
-            <a:r>
-              <a:rPr lang="ko-KR" altLang="en-US" sz="1600" spc="-50" dirty="0"/>
-              <a:t>헬스클럽</a:t>
-            </a:r>
-            <a:r>
-              <a:rPr lang="en-US" altLang="ko-KR" sz="1600" spc="-50" dirty="0"/>
-              <a:t>, </a:t>
-            </a:r>
-            <a:r>
-              <a:rPr lang="ko-KR" altLang="en-US" sz="1600" spc="-50" dirty="0"/>
-              <a:t>골프클럽의 경우</a:t>
-            </a:r>
-            <a:r>
-              <a:rPr lang="en-US" altLang="ko-KR" sz="1600" spc="-50" dirty="0"/>
-              <a:t>, </a:t>
-            </a:r>
-            <a:r>
-              <a:rPr lang="ko-KR" altLang="en-US" sz="1600" spc="-50" dirty="0"/>
-              <a:t>회원 수가 많지 않을 때는 혼잡이 발생하지 않다가</a:t>
-            </a:r>
-            <a:r>
-              <a:rPr lang="en-US" altLang="ko-KR" sz="1600" spc="-50" dirty="0"/>
-              <a:t>, </a:t>
-            </a:r>
-            <a:r>
-              <a:rPr lang="ko-KR" altLang="en-US" sz="1600" spc="-50" dirty="0"/>
-              <a:t>그 수가 점차 불어나면서 혼잡의 문제가 발생하기 시작한다</a:t>
-            </a:r>
-            <a:r>
-              <a:rPr lang="en-US" altLang="ko-KR" sz="1600" spc="-50" dirty="0"/>
-              <a:t>.</a:t>
-            </a:r>
-          </a:p>
-          <a:p>
-            <a:pPr marL="835025" lvl="1" indent="-285750">
-              <a:lnSpc>
-                <a:spcPct val="150000"/>
-              </a:lnSpc>
-              <a:buFont typeface="Wingdings" panose="05000000000000000000" pitchFamily="2" charset="2"/>
-              <a:buChar char="ü"/>
-            </a:pPr>
-            <a:r>
-              <a:rPr lang="ko-KR" altLang="en-US" sz="1600" spc="-50" dirty="0"/>
-              <a:t>이 이론은 클럽의 최적 규모와 최적 회원수의 규모를 찾아내고자 하는데 주안점을 두고 있다</a:t>
-            </a:r>
-            <a:r>
-              <a:rPr lang="en-US" altLang="ko-KR" sz="1600" spc="-50" dirty="0"/>
-              <a:t>.</a:t>
-            </a:r>
-          </a:p>
-          <a:p>
-            <a:pPr marL="377825" indent="-285750">
-              <a:lnSpc>
-                <a:spcPct val="150000"/>
-              </a:lnSpc>
-              <a:buFont typeface="Arial" panose="020B0604020202020204" pitchFamily="34" charset="0"/>
-              <a:buChar char="•"/>
-            </a:pPr>
-            <a:r>
-              <a:rPr lang="ko-KR" altLang="en-US" sz="1600" spc="-50" dirty="0"/>
-              <a:t>클럽의 규모가 일정하게 주어진 상황에서 회원 수가 늘어남에 따라</a:t>
-            </a:r>
-            <a:r>
-              <a:rPr lang="en-US" altLang="ko-KR" sz="1600" spc="-50" dirty="0"/>
-              <a:t>, </a:t>
-            </a:r>
-            <a:r>
-              <a:rPr lang="ko-KR" altLang="en-US" sz="1600" spc="-50" dirty="0"/>
-              <a:t>회원</a:t>
-            </a:r>
-            <a:r>
-              <a:rPr lang="en-US" altLang="ko-KR" sz="1600" spc="-50" dirty="0"/>
-              <a:t> 1</a:t>
-            </a:r>
-            <a:r>
-              <a:rPr lang="ko-KR" altLang="en-US" sz="1600" spc="-50" dirty="0"/>
-              <a:t>인당의 편익과 비용을 관찰해보자</a:t>
-            </a:r>
-            <a:r>
-              <a:rPr lang="en-US" altLang="ko-KR" sz="1600" spc="-50" dirty="0"/>
-              <a:t>.</a:t>
-            </a:r>
-          </a:p>
-          <a:p>
-            <a:pPr marL="835025" lvl="1" indent="-285750">
-              <a:lnSpc>
-                <a:spcPct val="150000"/>
-              </a:lnSpc>
-              <a:buFont typeface="Wingdings" panose="05000000000000000000" pitchFamily="2" charset="2"/>
-              <a:buChar char="ü"/>
-            </a:pPr>
-            <a:r>
-              <a:rPr lang="ko-KR" altLang="en-US" sz="1600" spc="-50" dirty="0"/>
-              <a:t>주어진 규모의 클럽을 짓고 운영하는 데 드는 </a:t>
-            </a:r>
-            <a:r>
-              <a:rPr lang="en-US" altLang="ko-KR" sz="1600" spc="-50" dirty="0"/>
-              <a:t>1</a:t>
-            </a:r>
-            <a:r>
-              <a:rPr lang="ko-KR" altLang="en-US" sz="1600" spc="-50" dirty="0"/>
-              <a:t>인당 비용은 회원 수가 증가할 수록 감소한다</a:t>
-            </a:r>
-            <a:r>
-              <a:rPr lang="en-US" altLang="ko-KR" sz="1600" spc="-50" dirty="0"/>
-              <a:t>.</a:t>
-            </a:r>
-          </a:p>
-          <a:p>
-            <a:pPr marL="835025" lvl="1" indent="-285750">
-              <a:lnSpc>
-                <a:spcPct val="150000"/>
-              </a:lnSpc>
-              <a:buFont typeface="Wingdings" panose="05000000000000000000" pitchFamily="2" charset="2"/>
-              <a:buChar char="ü"/>
-            </a:pPr>
-            <a:r>
-              <a:rPr lang="ko-KR" altLang="en-US" sz="1600" spc="-50" dirty="0"/>
-              <a:t>한편</a:t>
-            </a:r>
-            <a:r>
-              <a:rPr lang="en-US" altLang="ko-KR" sz="1600" spc="-50" dirty="0"/>
-              <a:t>, </a:t>
-            </a:r>
-            <a:r>
-              <a:rPr lang="ko-KR" altLang="en-US" sz="1600" spc="-50" dirty="0"/>
-              <a:t>회원 수가 증가할 수록 혼잡이 생겨 </a:t>
-            </a:r>
-            <a:r>
-              <a:rPr lang="en-US" altLang="ko-KR" sz="1600" spc="-50" dirty="0"/>
-              <a:t>1</a:t>
-            </a:r>
-            <a:r>
-              <a:rPr lang="ko-KR" altLang="en-US" sz="1600" spc="-50" dirty="0"/>
-              <a:t>인당 편익이 감소하기도 한다</a:t>
-            </a:r>
-            <a:r>
-              <a:rPr lang="en-US" altLang="ko-KR" sz="1600" spc="-50" dirty="0"/>
-              <a:t>.</a:t>
-            </a:r>
-          </a:p>
-          <a:p>
-            <a:pPr marL="377825" indent="-285750">
-              <a:lnSpc>
-                <a:spcPct val="150000"/>
-              </a:lnSpc>
-              <a:buFont typeface="Arial" panose="020B0604020202020204" pitchFamily="34" charset="0"/>
-              <a:buChar char="•"/>
-            </a:pPr>
-            <a:r>
-              <a:rPr lang="ko-KR" altLang="en-US" sz="1600" spc="-50" dirty="0"/>
-              <a:t>한편</a:t>
-            </a:r>
-            <a:r>
-              <a:rPr lang="en-US" altLang="ko-KR" sz="1600" spc="-50" dirty="0"/>
-              <a:t>, </a:t>
-            </a:r>
-            <a:r>
-              <a:rPr lang="ko-KR" altLang="en-US" sz="1600" spc="-50" dirty="0"/>
-              <a:t>클럽의 회원 수를 주어진 것으로 하면 클럽의 규모에 따라 편익과 비용이 달라진다</a:t>
-            </a:r>
-            <a:r>
-              <a:rPr lang="en-US" altLang="ko-KR" sz="1600" spc="-50" dirty="0"/>
-              <a:t>.</a:t>
-            </a:r>
-          </a:p>
-          <a:p>
-            <a:pPr marL="835025" lvl="1" indent="-285750">
-              <a:lnSpc>
-                <a:spcPct val="150000"/>
-              </a:lnSpc>
-              <a:buFont typeface="Wingdings" panose="05000000000000000000" pitchFamily="2" charset="2"/>
-              <a:buChar char="ü"/>
-            </a:pPr>
-            <a:r>
-              <a:rPr lang="ko-KR" altLang="en-US" sz="1600" spc="-50" dirty="0"/>
-              <a:t>클럽의 회원 수가 주어져 있을 때</a:t>
-            </a:r>
-            <a:r>
-              <a:rPr lang="en-US" altLang="ko-KR" sz="1600" spc="-50" dirty="0"/>
-              <a:t>, </a:t>
-            </a:r>
-            <a:r>
-              <a:rPr lang="ko-KR" altLang="en-US" sz="1600" spc="-50" dirty="0"/>
-              <a:t>클럽 규모가 크면 혼잡이 감소한다</a:t>
-            </a:r>
-            <a:r>
-              <a:rPr lang="en-US" altLang="ko-KR" sz="1600" spc="-50" dirty="0"/>
-              <a:t>.</a:t>
-            </a:r>
-          </a:p>
-          <a:p>
-            <a:pPr marL="835025" lvl="1" indent="-285750">
-              <a:lnSpc>
-                <a:spcPct val="150000"/>
-              </a:lnSpc>
-              <a:buFont typeface="Wingdings" panose="05000000000000000000" pitchFamily="2" charset="2"/>
-              <a:buChar char="ü"/>
-            </a:pPr>
-            <a:r>
-              <a:rPr lang="ko-KR" altLang="en-US" sz="1600" spc="-50" dirty="0"/>
-              <a:t>한편</a:t>
-            </a:r>
-            <a:r>
-              <a:rPr lang="en-US" altLang="ko-KR" sz="1600" spc="-50" dirty="0"/>
-              <a:t>, </a:t>
-            </a:r>
-            <a:r>
-              <a:rPr lang="ko-KR" altLang="en-US" sz="1600" spc="-50" dirty="0"/>
-              <a:t>규모가 크면 혼잡은 없어지나 </a:t>
-            </a:r>
-            <a:r>
-              <a:rPr lang="en-US" altLang="ko-KR" sz="1600" spc="-50" dirty="0"/>
-              <a:t>1</a:t>
-            </a:r>
-            <a:r>
-              <a:rPr lang="ko-KR" altLang="en-US" sz="1600" spc="-50" dirty="0"/>
-              <a:t>인당 비용이 증가한다</a:t>
-            </a:r>
-            <a:r>
-              <a:rPr lang="en-US" altLang="ko-KR" sz="1600" spc="-50" dirty="0"/>
-              <a:t>.</a:t>
-            </a:r>
-          </a:p>
-          <a:p>
-            <a:pPr marL="377825" indent="-285750">
-              <a:lnSpc>
-                <a:spcPct val="150000"/>
-              </a:lnSpc>
-              <a:buFont typeface="Arial" panose="020B0604020202020204" pitchFamily="34" charset="0"/>
-              <a:buChar char="•"/>
-            </a:pPr>
-            <a:r>
-              <a:rPr lang="ko-KR" altLang="en-US" sz="1600" spc="-50" dirty="0"/>
-              <a:t>위의 두 가지 측면을 통합하면 최적인 클럽의 규모와 최적인 회원 수를 동시에 찾아낼 수 있다</a:t>
-            </a:r>
-            <a:r>
-              <a:rPr lang="en-US" altLang="ko-KR" sz="1600" spc="-50" dirty="0"/>
-              <a:t>.</a:t>
-            </a:r>
-          </a:p>
-        </p:txBody>
-      </p:sp>
-    </p:spTree>
-    <p:extLst>
-      <p:ext uri="{BB962C8B-B14F-4D97-AF65-F5344CB8AC3E}">
-        <p14:creationId xmlns:p14="http://schemas.microsoft.com/office/powerpoint/2010/main" val="4275425505"/>
-      </p:ext>
-    </p:extLst>
-  </p:cSld>
-  <p:clrMapOvr>
-    <a:masterClrMapping/>
-  </p:clrMapOvr>
-</p:sld>
-</file>
-
-<file path=ppt/slides/slide19.xml><?xml version="1.0" encoding="utf-8"?>
-<p:sld xmlns:a="http://schemas.openxmlformats.org/drawingml/2006/main" xmlns:r="http://schemas.openxmlformats.org/officeDocument/2006/relationships" xmlns:p="http://schemas.openxmlformats.org/presentationml/2006/main">
-  <p:cSld>
-    <p:spTree>
-      <p:nvGrpSpPr>
-        <p:cNvPr id="1" name="">
-          <a:extLst>
-            <a:ext uri="{FF2B5EF4-FFF2-40B4-BE49-F238E27FC236}">
-              <a16:creationId xmlns:a16="http://schemas.microsoft.com/office/drawing/2014/main" id="{54E96B78-4AE9-D95D-8B4C-5008A3D44AFD}"/>
-            </a:ext>
-          </a:extLst>
-        </p:cNvPr>
-        <p:cNvGrpSpPr/>
-        <p:nvPr/>
-      </p:nvGrpSpPr>
-      <p:grpSpPr>
-        <a:xfrm>
-          <a:off x="0" y="0"/>
-          <a:ext cx="0" cy="0"/>
-          <a:chOff x="0" y="0"/>
-          <a:chExt cx="0" cy="0"/>
-        </a:xfrm>
-      </p:grpSpPr>
-      <p:pic>
-        <p:nvPicPr>
-          <p:cNvPr id="6" name="그림 5" descr="텍스트, 로고, 원, 폰트이(가) 표시된 사진&#10;&#10;AI 생성 콘텐츠는 정확하지 않을 수 있습니다.">
-            <a:extLst>
-              <a:ext uri="{FF2B5EF4-FFF2-40B4-BE49-F238E27FC236}">
-                <a16:creationId xmlns:a16="http://schemas.microsoft.com/office/drawing/2014/main" id="{B4FF820A-FC3D-2E75-D8F0-A416453AF0FF}"/>
-              </a:ext>
-            </a:extLst>
-          </p:cNvPr>
-          <p:cNvPicPr>
-            <a:picLocks noChangeAspect="1"/>
-          </p:cNvPicPr>
-          <p:nvPr/>
-        </p:nvPicPr>
-        <p:blipFill>
-          <a:blip r:embed="rId2">
-            <a:alphaModFix amt="20000"/>
-            <a:extLst>
-              <a:ext uri="{28A0092B-C50C-407E-A947-70E740481C1C}">
-                <a14:useLocalDpi xmlns:a14="http://schemas.microsoft.com/office/drawing/2010/main" val="0"/>
-              </a:ext>
-            </a:extLst>
-          </a:blip>
-          <a:stretch>
-            <a:fillRect/>
-          </a:stretch>
-        </p:blipFill>
-        <p:spPr>
-          <a:xfrm>
-            <a:off x="4012070" y="1673061"/>
-            <a:ext cx="4167861" cy="4167861"/>
-          </a:xfrm>
-          <a:prstGeom prst="rect">
-            <a:avLst/>
-          </a:prstGeom>
-        </p:spPr>
-      </p:pic>
-      <p:sp>
-        <p:nvSpPr>
-          <p:cNvPr id="4" name="슬라이드 번호 개체 틀 3">
-            <a:extLst>
-              <a:ext uri="{FF2B5EF4-FFF2-40B4-BE49-F238E27FC236}">
-                <a16:creationId xmlns:a16="http://schemas.microsoft.com/office/drawing/2014/main" id="{6F1E20EC-46C2-1D74-84A1-E73EF374D46B}"/>
-              </a:ext>
-            </a:extLst>
-          </p:cNvPr>
-          <p:cNvSpPr>
-            <a:spLocks noGrp="1"/>
-          </p:cNvSpPr>
-          <p:nvPr>
-            <p:ph type="sldNum" sz="quarter" idx="12"/>
-          </p:nvPr>
-        </p:nvSpPr>
-        <p:spPr/>
-        <p:txBody>
-          <a:bodyPr/>
-          <a:lstStyle/>
-          <a:p>
-            <a:fld id="{109C872D-39A9-4065-8BF3-6A613116E2A1}" type="slidenum">
-              <a:rPr lang="ko-KR" altLang="en-US" smtClean="0"/>
-              <a:t>19</a:t>
-            </a:fld>
-            <a:endParaRPr lang="ko-KR" altLang="en-US"/>
-          </a:p>
-        </p:txBody>
-      </p:sp>
-      <p:sp>
-        <p:nvSpPr>
-          <p:cNvPr id="7" name="제목 1">
-            <a:extLst>
-              <a:ext uri="{FF2B5EF4-FFF2-40B4-BE49-F238E27FC236}">
-                <a16:creationId xmlns:a16="http://schemas.microsoft.com/office/drawing/2014/main" id="{EC22F06C-7DB9-D880-90E9-4FE9B7D92532}"/>
-              </a:ext>
-            </a:extLst>
-          </p:cNvPr>
-          <p:cNvSpPr>
-            <a:spLocks noGrp="1"/>
-          </p:cNvSpPr>
-          <p:nvPr>
-            <p:ph type="title"/>
-          </p:nvPr>
-        </p:nvSpPr>
-        <p:spPr>
-          <a:xfrm>
-            <a:off x="831850" y="3765550"/>
-            <a:ext cx="11150600" cy="652818"/>
-          </a:xfrm>
-          <a:effectLst>
-            <a:reflection blurRad="50800" stA="45000" endPos="44000" dir="5400000" sy="-100000" algn="bl" rotWithShape="0"/>
-          </a:effectLst>
-        </p:spPr>
-        <p:txBody>
-          <a:bodyPr anchor="b"/>
-          <a:lstStyle/>
-          <a:p>
-            <a:r>
-              <a:rPr lang="en-US" altLang="ko-KR" sz="4000" b="1" i="0" spc="150" dirty="0"/>
-              <a:t>Section 2. </a:t>
-            </a:r>
-            <a:r>
-              <a:rPr lang="ko-KR" altLang="en-US" sz="4000" b="1" i="0" spc="150" dirty="0"/>
-              <a:t>공공재의 최적수준</a:t>
-            </a:r>
-            <a:endParaRPr lang="ko-KR" altLang="en-US" sz="3600" i="0" spc="150" dirty="0"/>
-          </a:p>
-        </p:txBody>
-      </p:sp>
-    </p:spTree>
-    <p:extLst>
-      <p:ext uri="{BB962C8B-B14F-4D97-AF65-F5344CB8AC3E}">
-        <p14:creationId xmlns:p14="http://schemas.microsoft.com/office/powerpoint/2010/main" val="2456189404"/>
       </p:ext>
     </p:extLst>
   </p:cSld>
@@ -10936,6 +13914,543 @@
           <a:chExt cx="0" cy="0"/>
         </a:xfrm>
       </p:grpSpPr>
+      <p:sp>
+        <p:nvSpPr>
+          <p:cNvPr id="2" name="제목 1">
+            <a:extLst>
+              <a:ext uri="{FF2B5EF4-FFF2-40B4-BE49-F238E27FC236}">
+                <a16:creationId xmlns:a16="http://schemas.microsoft.com/office/drawing/2014/main" id="{F31B567A-9B29-F57E-6F8F-C5F32D6C24DF}"/>
+              </a:ext>
+            </a:extLst>
+          </p:cNvPr>
+          <p:cNvSpPr>
+            <a:spLocks noGrp="1"/>
+          </p:cNvSpPr>
+          <p:nvPr>
+            <p:ph type="title"/>
+          </p:nvPr>
+        </p:nvSpPr>
+        <p:spPr/>
+        <p:txBody>
+          <a:bodyPr/>
+          <a:lstStyle/>
+          <a:p>
+            <a:r>
+              <a:rPr lang="ko-KR" altLang="en-US" dirty="0"/>
+              <a:t>클럽 이론</a:t>
+            </a:r>
+          </a:p>
+        </p:txBody>
+      </p:sp>
+      <p:sp>
+        <p:nvSpPr>
+          <p:cNvPr id="4" name="슬라이드 번호 개체 틀 3">
+            <a:extLst>
+              <a:ext uri="{FF2B5EF4-FFF2-40B4-BE49-F238E27FC236}">
+                <a16:creationId xmlns:a16="http://schemas.microsoft.com/office/drawing/2014/main" id="{6F4682F1-5C58-3FB8-7120-4ED9E1221613}"/>
+              </a:ext>
+            </a:extLst>
+          </p:cNvPr>
+          <p:cNvSpPr>
+            <a:spLocks noGrp="1"/>
+          </p:cNvSpPr>
+          <p:nvPr>
+            <p:ph type="sldNum" sz="quarter" idx="12"/>
+          </p:nvPr>
+        </p:nvSpPr>
+        <p:spPr/>
+        <p:txBody>
+          <a:bodyPr/>
+          <a:lstStyle/>
+          <a:p>
+            <a:fld id="{109C872D-39A9-4065-8BF3-6A613116E2A1}" type="slidenum">
+              <a:rPr lang="ko-KR" altLang="en-US" smtClean="0"/>
+              <a:t>20</a:t>
+            </a:fld>
+            <a:endParaRPr lang="ko-KR" altLang="en-US"/>
+          </a:p>
+        </p:txBody>
+      </p:sp>
+      <p:sp>
+        <p:nvSpPr>
+          <p:cNvPr id="5" name="TextBox 4">
+            <a:extLst>
+              <a:ext uri="{FF2B5EF4-FFF2-40B4-BE49-F238E27FC236}">
+                <a16:creationId xmlns:a16="http://schemas.microsoft.com/office/drawing/2014/main" id="{53937F7B-CEAC-B863-5500-785A5BC07D75}"/>
+              </a:ext>
+            </a:extLst>
+          </p:cNvPr>
+          <p:cNvSpPr txBox="1"/>
+          <p:nvPr/>
+        </p:nvSpPr>
+        <p:spPr>
+          <a:xfrm>
+            <a:off x="288790" y="958844"/>
+            <a:ext cx="11693660" cy="4476675"/>
+          </a:xfrm>
+          <a:prstGeom prst="rect">
+            <a:avLst/>
+          </a:prstGeom>
+          <a:noFill/>
+        </p:spPr>
+        <p:txBody>
+          <a:bodyPr wrap="square" rtlCol="0" anchor="t">
+            <a:spAutoFit/>
+          </a:bodyPr>
+          <a:lstStyle/>
+          <a:p>
+            <a:pPr marL="377825" indent="-285750">
+              <a:lnSpc>
+                <a:spcPct val="150000"/>
+              </a:lnSpc>
+              <a:buFont typeface="Arial" panose="020B0604020202020204" pitchFamily="34" charset="0"/>
+              <a:buChar char="•"/>
+            </a:pPr>
+            <a:r>
+              <a:rPr lang="ko-KR" altLang="en-US" sz="1600" spc="-50" dirty="0" err="1"/>
+              <a:t>부캐넌</a:t>
+            </a:r>
+            <a:r>
+              <a:rPr lang="ko-KR" altLang="en-US" sz="1600" spc="-50" dirty="0"/>
+              <a:t> </a:t>
+            </a:r>
+            <a:r>
+              <a:rPr lang="en-US" altLang="ko-KR" sz="1600" spc="-50" dirty="0"/>
+              <a:t>(J. Buchanan, 1965)</a:t>
+            </a:r>
+            <a:r>
+              <a:rPr lang="ko-KR" altLang="en-US" sz="1600" spc="-50" dirty="0"/>
+              <a:t>은 비경합성이 있기는 하나 불완전하여 혼잡이 문제되는 재화나 서비스를 대상으로 하는 클럽 이론을 제시했다</a:t>
+            </a:r>
+            <a:r>
+              <a:rPr lang="en-US" altLang="ko-KR" sz="1600" spc="-50" dirty="0"/>
+              <a:t>.</a:t>
+            </a:r>
+          </a:p>
+          <a:p>
+            <a:pPr marL="835025" lvl="1" indent="-285750">
+              <a:lnSpc>
+                <a:spcPct val="150000"/>
+              </a:lnSpc>
+              <a:buFont typeface="Wingdings" panose="05000000000000000000" pitchFamily="2" charset="2"/>
+              <a:buChar char="ü"/>
+            </a:pPr>
+            <a:r>
+              <a:rPr lang="ko-KR" altLang="en-US" sz="1600" spc="-50" dirty="0"/>
+              <a:t>헬스클럽</a:t>
+            </a:r>
+            <a:r>
+              <a:rPr lang="en-US" altLang="ko-KR" sz="1600" spc="-50" dirty="0"/>
+              <a:t>, </a:t>
+            </a:r>
+            <a:r>
+              <a:rPr lang="ko-KR" altLang="en-US" sz="1600" spc="-50" dirty="0"/>
+              <a:t>골프클럽의 경우</a:t>
+            </a:r>
+            <a:r>
+              <a:rPr lang="en-US" altLang="ko-KR" sz="1600" spc="-50" dirty="0"/>
+              <a:t>, </a:t>
+            </a:r>
+            <a:r>
+              <a:rPr lang="ko-KR" altLang="en-US" sz="1600" spc="-50" dirty="0"/>
+              <a:t>회원 수가 많지 않을 때는 혼잡이 발생하지 않다가</a:t>
+            </a:r>
+            <a:r>
+              <a:rPr lang="en-US" altLang="ko-KR" sz="1600" spc="-50" dirty="0"/>
+              <a:t>, </a:t>
+            </a:r>
+            <a:r>
+              <a:rPr lang="ko-KR" altLang="en-US" sz="1600" spc="-50" dirty="0"/>
+              <a:t>그 수가 점차 불어나면서 혼잡의 문제가 발생하기 시작한다</a:t>
+            </a:r>
+            <a:r>
+              <a:rPr lang="en-US" altLang="ko-KR" sz="1600" spc="-50" dirty="0"/>
+              <a:t>.</a:t>
+            </a:r>
+          </a:p>
+          <a:p>
+            <a:pPr marL="835025" lvl="1" indent="-285750">
+              <a:lnSpc>
+                <a:spcPct val="150000"/>
+              </a:lnSpc>
+              <a:buFont typeface="Wingdings" panose="05000000000000000000" pitchFamily="2" charset="2"/>
+              <a:buChar char="ü"/>
+            </a:pPr>
+            <a:r>
+              <a:rPr lang="ko-KR" altLang="en-US" sz="1600" spc="-50" dirty="0"/>
+              <a:t>이 이론은 클럽의 최적 규모와 최적 회원수의 규모를 찾아내고자 하는데 주안점을 두고 있다</a:t>
+            </a:r>
+            <a:r>
+              <a:rPr lang="en-US" altLang="ko-KR" sz="1600" spc="-50" dirty="0"/>
+              <a:t>.</a:t>
+            </a:r>
+          </a:p>
+          <a:p>
+            <a:pPr marL="377825" indent="-285750">
+              <a:lnSpc>
+                <a:spcPct val="150000"/>
+              </a:lnSpc>
+              <a:buFont typeface="Arial" panose="020B0604020202020204" pitchFamily="34" charset="0"/>
+              <a:buChar char="•"/>
+            </a:pPr>
+            <a:r>
+              <a:rPr lang="ko-KR" altLang="en-US" sz="1600" spc="-50" dirty="0"/>
+              <a:t>클럽의 규모가 일정하게 주어진 상황에서 회원 수가 늘어남에 따라</a:t>
+            </a:r>
+            <a:r>
+              <a:rPr lang="en-US" altLang="ko-KR" sz="1600" spc="-50" dirty="0"/>
+              <a:t>, </a:t>
+            </a:r>
+            <a:r>
+              <a:rPr lang="ko-KR" altLang="en-US" sz="1600" spc="-50" dirty="0"/>
+              <a:t>회원</a:t>
+            </a:r>
+            <a:r>
+              <a:rPr lang="en-US" altLang="ko-KR" sz="1600" spc="-50" dirty="0"/>
+              <a:t> 1</a:t>
+            </a:r>
+            <a:r>
+              <a:rPr lang="ko-KR" altLang="en-US" sz="1600" spc="-50" dirty="0"/>
+              <a:t>인당의 편익과 비용을 관찰해보자</a:t>
+            </a:r>
+            <a:r>
+              <a:rPr lang="en-US" altLang="ko-KR" sz="1600" spc="-50" dirty="0"/>
+              <a:t>.</a:t>
+            </a:r>
+          </a:p>
+          <a:p>
+            <a:pPr marL="835025" lvl="1" indent="-285750">
+              <a:lnSpc>
+                <a:spcPct val="150000"/>
+              </a:lnSpc>
+              <a:buFont typeface="Wingdings" panose="05000000000000000000" pitchFamily="2" charset="2"/>
+              <a:buChar char="ü"/>
+            </a:pPr>
+            <a:r>
+              <a:rPr lang="ko-KR" altLang="en-US" sz="1600" spc="-50" dirty="0"/>
+              <a:t>주어진 규모의 클럽을 짓고 운영하는 데 드는 </a:t>
+            </a:r>
+            <a:r>
+              <a:rPr lang="en-US" altLang="ko-KR" sz="1600" spc="-50" dirty="0"/>
+              <a:t>1</a:t>
+            </a:r>
+            <a:r>
+              <a:rPr lang="ko-KR" altLang="en-US" sz="1600" spc="-50" dirty="0"/>
+              <a:t>인당 비용은 회원 수가 증가할 수록 감소한다</a:t>
+            </a:r>
+            <a:r>
+              <a:rPr lang="en-US" altLang="ko-KR" sz="1600" spc="-50" dirty="0"/>
+              <a:t>.</a:t>
+            </a:r>
+          </a:p>
+          <a:p>
+            <a:pPr marL="835025" lvl="1" indent="-285750">
+              <a:lnSpc>
+                <a:spcPct val="150000"/>
+              </a:lnSpc>
+              <a:buFont typeface="Wingdings" panose="05000000000000000000" pitchFamily="2" charset="2"/>
+              <a:buChar char="ü"/>
+            </a:pPr>
+            <a:r>
+              <a:rPr lang="ko-KR" altLang="en-US" sz="1600" spc="-50" dirty="0"/>
+              <a:t>한편</a:t>
+            </a:r>
+            <a:r>
+              <a:rPr lang="en-US" altLang="ko-KR" sz="1600" spc="-50" dirty="0"/>
+              <a:t>, </a:t>
+            </a:r>
+            <a:r>
+              <a:rPr lang="ko-KR" altLang="en-US" sz="1600" spc="-50" dirty="0"/>
+              <a:t>회원 수가 증가할 수록 혼잡이 생겨 </a:t>
+            </a:r>
+            <a:r>
+              <a:rPr lang="en-US" altLang="ko-KR" sz="1600" spc="-50" dirty="0"/>
+              <a:t>1</a:t>
+            </a:r>
+            <a:r>
+              <a:rPr lang="ko-KR" altLang="en-US" sz="1600" spc="-50" dirty="0"/>
+              <a:t>인당 편익이 감소하기도 한다</a:t>
+            </a:r>
+            <a:r>
+              <a:rPr lang="en-US" altLang="ko-KR" sz="1600" spc="-50" dirty="0"/>
+              <a:t>.</a:t>
+            </a:r>
+          </a:p>
+          <a:p>
+            <a:pPr marL="377825" indent="-285750">
+              <a:lnSpc>
+                <a:spcPct val="150000"/>
+              </a:lnSpc>
+              <a:buFont typeface="Arial" panose="020B0604020202020204" pitchFamily="34" charset="0"/>
+              <a:buChar char="•"/>
+            </a:pPr>
+            <a:r>
+              <a:rPr lang="ko-KR" altLang="en-US" sz="1600" spc="-50" dirty="0"/>
+              <a:t>한편</a:t>
+            </a:r>
+            <a:r>
+              <a:rPr lang="en-US" altLang="ko-KR" sz="1600" spc="-50" dirty="0"/>
+              <a:t>, </a:t>
+            </a:r>
+            <a:r>
+              <a:rPr lang="ko-KR" altLang="en-US" sz="1600" spc="-50" dirty="0"/>
+              <a:t>클럽의 회원 수를 주어진 것으로 하면 클럽의 규모에 따라 편익과 비용이 달라진다</a:t>
+            </a:r>
+            <a:r>
+              <a:rPr lang="en-US" altLang="ko-KR" sz="1600" spc="-50" dirty="0"/>
+              <a:t>.</a:t>
+            </a:r>
+          </a:p>
+          <a:p>
+            <a:pPr marL="835025" lvl="1" indent="-285750">
+              <a:lnSpc>
+                <a:spcPct val="150000"/>
+              </a:lnSpc>
+              <a:buFont typeface="Wingdings" panose="05000000000000000000" pitchFamily="2" charset="2"/>
+              <a:buChar char="ü"/>
+            </a:pPr>
+            <a:r>
+              <a:rPr lang="ko-KR" altLang="en-US" sz="1600" spc="-50" dirty="0"/>
+              <a:t>클럽의 회원 수가 주어져 있을 때</a:t>
+            </a:r>
+            <a:r>
+              <a:rPr lang="en-US" altLang="ko-KR" sz="1600" spc="-50" dirty="0"/>
+              <a:t>, </a:t>
+            </a:r>
+            <a:r>
+              <a:rPr lang="ko-KR" altLang="en-US" sz="1600" spc="-50" dirty="0"/>
+              <a:t>클럽 규모가 크면 혼잡이 감소한다</a:t>
+            </a:r>
+            <a:r>
+              <a:rPr lang="en-US" altLang="ko-KR" sz="1600" spc="-50" dirty="0"/>
+              <a:t>.</a:t>
+            </a:r>
+          </a:p>
+          <a:p>
+            <a:pPr marL="835025" lvl="1" indent="-285750">
+              <a:lnSpc>
+                <a:spcPct val="150000"/>
+              </a:lnSpc>
+              <a:buFont typeface="Wingdings" panose="05000000000000000000" pitchFamily="2" charset="2"/>
+              <a:buChar char="ü"/>
+            </a:pPr>
+            <a:r>
+              <a:rPr lang="ko-KR" altLang="en-US" sz="1600" spc="-50" dirty="0"/>
+              <a:t>한편</a:t>
+            </a:r>
+            <a:r>
+              <a:rPr lang="en-US" altLang="ko-KR" sz="1600" spc="-50" dirty="0"/>
+              <a:t>, </a:t>
+            </a:r>
+            <a:r>
+              <a:rPr lang="ko-KR" altLang="en-US" sz="1600" spc="-50" dirty="0"/>
+              <a:t>규모가 크면 혼잡은 없어지나 </a:t>
+            </a:r>
+            <a:r>
+              <a:rPr lang="en-US" altLang="ko-KR" sz="1600" spc="-50" dirty="0"/>
+              <a:t>1</a:t>
+            </a:r>
+            <a:r>
+              <a:rPr lang="ko-KR" altLang="en-US" sz="1600" spc="-50" dirty="0"/>
+              <a:t>인당 비용이 증가한다</a:t>
+            </a:r>
+            <a:r>
+              <a:rPr lang="en-US" altLang="ko-KR" sz="1600" spc="-50" dirty="0"/>
+              <a:t>.</a:t>
+            </a:r>
+          </a:p>
+          <a:p>
+            <a:pPr marL="377825" indent="-285750">
+              <a:lnSpc>
+                <a:spcPct val="150000"/>
+              </a:lnSpc>
+              <a:buFont typeface="Arial" panose="020B0604020202020204" pitchFamily="34" charset="0"/>
+              <a:buChar char="•"/>
+            </a:pPr>
+            <a:r>
+              <a:rPr lang="ko-KR" altLang="en-US" sz="1600" spc="-50" dirty="0"/>
+              <a:t>위의 두 가지 측면을 통합하면 최적인 클럽의 규모와 최적인 회원 수를 동시에 찾아낼 수 있다</a:t>
+            </a:r>
+            <a:r>
+              <a:rPr lang="en-US" altLang="ko-KR" sz="1600" spc="-50" dirty="0"/>
+              <a:t>.</a:t>
+            </a:r>
+          </a:p>
+        </p:txBody>
+      </p:sp>
+    </p:spTree>
+    <p:extLst>
+      <p:ext uri="{BB962C8B-B14F-4D97-AF65-F5344CB8AC3E}">
+        <p14:creationId xmlns:p14="http://schemas.microsoft.com/office/powerpoint/2010/main" val="4275425505"/>
+      </p:ext>
+    </p:extLst>
+  </p:cSld>
+  <p:clrMapOvr>
+    <a:masterClrMapping/>
+  </p:clrMapOvr>
+</p:sld>
+</file>
+
+<file path=ppt/slides/slide21.xml><?xml version="1.0" encoding="utf-8"?>
+<p:sld xmlns:a="http://schemas.openxmlformats.org/drawingml/2006/main" xmlns:r="http://schemas.openxmlformats.org/officeDocument/2006/relationships" xmlns:p="http://schemas.openxmlformats.org/presentationml/2006/main">
+  <p:cSld>
+    <p:spTree>
+      <p:nvGrpSpPr>
+        <p:cNvPr id="1" name="">
+          <a:extLst>
+            <a:ext uri="{FF2B5EF4-FFF2-40B4-BE49-F238E27FC236}">
+              <a16:creationId xmlns:a16="http://schemas.microsoft.com/office/drawing/2014/main" id="{54E96B78-4AE9-D95D-8B4C-5008A3D44AFD}"/>
+            </a:ext>
+          </a:extLst>
+        </p:cNvPr>
+        <p:cNvGrpSpPr/>
+        <p:nvPr/>
+      </p:nvGrpSpPr>
+      <p:grpSpPr>
+        <a:xfrm>
+          <a:off x="0" y="0"/>
+          <a:ext cx="0" cy="0"/>
+          <a:chOff x="0" y="0"/>
+          <a:chExt cx="0" cy="0"/>
+        </a:xfrm>
+      </p:grpSpPr>
+      <p:pic>
+        <p:nvPicPr>
+          <p:cNvPr id="6" name="그림 5" descr="텍스트, 로고, 원, 폰트이(가) 표시된 사진&#10;&#10;AI 생성 콘텐츠는 정확하지 않을 수 있습니다.">
+            <a:extLst>
+              <a:ext uri="{FF2B5EF4-FFF2-40B4-BE49-F238E27FC236}">
+                <a16:creationId xmlns:a16="http://schemas.microsoft.com/office/drawing/2014/main" id="{B4FF820A-FC3D-2E75-D8F0-A416453AF0FF}"/>
+              </a:ext>
+            </a:extLst>
+          </p:cNvPr>
+          <p:cNvPicPr>
+            <a:picLocks noChangeAspect="1"/>
+          </p:cNvPicPr>
+          <p:nvPr/>
+        </p:nvPicPr>
+        <p:blipFill>
+          <a:blip r:embed="rId2">
+            <a:alphaModFix amt="20000"/>
+            <a:extLst>
+              <a:ext uri="{28A0092B-C50C-407E-A947-70E740481C1C}">
+                <a14:useLocalDpi xmlns:a14="http://schemas.microsoft.com/office/drawing/2010/main" val="0"/>
+              </a:ext>
+            </a:extLst>
+          </a:blip>
+          <a:stretch>
+            <a:fillRect/>
+          </a:stretch>
+        </p:blipFill>
+        <p:spPr>
+          <a:xfrm>
+            <a:off x="4012070" y="1673061"/>
+            <a:ext cx="4167861" cy="4167861"/>
+          </a:xfrm>
+          <a:prstGeom prst="rect">
+            <a:avLst/>
+          </a:prstGeom>
+        </p:spPr>
+      </p:pic>
+      <p:sp>
+        <p:nvSpPr>
+          <p:cNvPr id="4" name="슬라이드 번호 개체 틀 3">
+            <a:extLst>
+              <a:ext uri="{FF2B5EF4-FFF2-40B4-BE49-F238E27FC236}">
+                <a16:creationId xmlns:a16="http://schemas.microsoft.com/office/drawing/2014/main" id="{6F1E20EC-46C2-1D74-84A1-E73EF374D46B}"/>
+              </a:ext>
+            </a:extLst>
+          </p:cNvPr>
+          <p:cNvSpPr>
+            <a:spLocks noGrp="1"/>
+          </p:cNvSpPr>
+          <p:nvPr>
+            <p:ph type="sldNum" sz="quarter" idx="12"/>
+          </p:nvPr>
+        </p:nvSpPr>
+        <p:spPr/>
+        <p:txBody>
+          <a:bodyPr/>
+          <a:lstStyle/>
+          <a:p>
+            <a:fld id="{109C872D-39A9-4065-8BF3-6A613116E2A1}" type="slidenum">
+              <a:rPr lang="ko-KR" altLang="en-US" smtClean="0"/>
+              <a:t>21</a:t>
+            </a:fld>
+            <a:endParaRPr lang="ko-KR" altLang="en-US"/>
+          </a:p>
+        </p:txBody>
+      </p:sp>
+      <p:sp>
+        <p:nvSpPr>
+          <p:cNvPr id="7" name="제목 1">
+            <a:extLst>
+              <a:ext uri="{FF2B5EF4-FFF2-40B4-BE49-F238E27FC236}">
+                <a16:creationId xmlns:a16="http://schemas.microsoft.com/office/drawing/2014/main" id="{EC22F06C-7DB9-D880-90E9-4FE9B7D92532}"/>
+              </a:ext>
+            </a:extLst>
+          </p:cNvPr>
+          <p:cNvSpPr>
+            <a:spLocks noGrp="1"/>
+          </p:cNvSpPr>
+          <p:nvPr>
+            <p:ph type="title"/>
+          </p:nvPr>
+        </p:nvSpPr>
+        <p:spPr>
+          <a:xfrm>
+            <a:off x="831850" y="3765550"/>
+            <a:ext cx="11150600" cy="652818"/>
+          </a:xfrm>
+          <a:effectLst>
+            <a:reflection blurRad="50800" stA="45000" endPos="44000" dir="5400000" sy="-100000" algn="bl" rotWithShape="0"/>
+          </a:effectLst>
+        </p:spPr>
+        <p:txBody>
+          <a:bodyPr anchor="b"/>
+          <a:lstStyle/>
+          <a:p>
+            <a:r>
+              <a:rPr lang="en-US" altLang="ko-KR" sz="4000" b="1" i="0" spc="150" dirty="0"/>
+              <a:t>Section 2. </a:t>
+            </a:r>
+            <a:r>
+              <a:rPr lang="ko-KR" altLang="en-US" sz="4000" b="1" i="0" spc="150" dirty="0"/>
+              <a:t>공공재의 최적수준</a:t>
+            </a:r>
+            <a:endParaRPr lang="ko-KR" altLang="en-US" sz="3600" i="0" spc="150" dirty="0"/>
+          </a:p>
+        </p:txBody>
+      </p:sp>
+    </p:spTree>
+    <p:extLst>
+      <p:ext uri="{BB962C8B-B14F-4D97-AF65-F5344CB8AC3E}">
+        <p14:creationId xmlns:p14="http://schemas.microsoft.com/office/powerpoint/2010/main" val="2456189404"/>
+      </p:ext>
+    </p:extLst>
+  </p:cSld>
+  <p:clrMapOvr>
+    <a:masterClrMapping/>
+  </p:clrMapOvr>
+</p:sld>
+</file>
+
+<file path=ppt/slides/slide22.xml><?xml version="1.0" encoding="utf-8"?>
+<p:sld xmlns:a="http://schemas.openxmlformats.org/drawingml/2006/main" xmlns:r="http://schemas.openxmlformats.org/officeDocument/2006/relationships" xmlns:p="http://schemas.openxmlformats.org/presentationml/2006/main">
+  <p:cSld>
+    <p:spTree>
+      <p:nvGrpSpPr>
+        <p:cNvPr id="1" name=""/>
+        <p:cNvGrpSpPr/>
+        <p:nvPr/>
+      </p:nvGrpSpPr>
+      <p:grpSpPr>
+        <a:xfrm>
+          <a:off x="0" y="0"/>
+          <a:ext cx="0" cy="0"/>
+          <a:chOff x="0" y="0"/>
+          <a:chExt cx="0" cy="0"/>
+        </a:xfrm>
+      </p:grpSpPr>
       <p:pic>
         <p:nvPicPr>
           <p:cNvPr id="8" name="그림 7" descr="라인, 스크린샷, 텍스트, 도표이(가) 표시된 사진&#10;&#10;AI 생성 콘텐츠는 정확하지 않을 수 있습니다.">
@@ -11018,7 +14533,7 @@
           <a:p>
             <a:fld id="{109C872D-39A9-4065-8BF3-6A613116E2A1}" type="slidenum">
               <a:rPr lang="ko-KR" altLang="en-US" smtClean="0"/>
-              <a:t>20</a:t>
+              <a:t>22</a:t>
             </a:fld>
             <a:endParaRPr lang="ko-KR" altLang="en-US"/>
           </a:p>
@@ -13353,7 +16868,7 @@
 </p:sld>
 </file>
 
-<file path=ppt/slides/slide21.xml><?xml version="1.0" encoding="utf-8"?>
+<file path=ppt/slides/slide23.xml><?xml version="1.0" encoding="utf-8"?>
 <p:sld xmlns:a="http://schemas.openxmlformats.org/drawingml/2006/main" xmlns:r="http://schemas.openxmlformats.org/officeDocument/2006/relationships" xmlns:p="http://schemas.openxmlformats.org/presentationml/2006/main">
   <p:cSld>
     <p:spTree>
@@ -13421,7 +16936,7 @@
           <a:p>
             <a:fld id="{109C872D-39A9-4065-8BF3-6A613116E2A1}" type="slidenum">
               <a:rPr lang="ko-KR" altLang="en-US" smtClean="0"/>
-              <a:t>21</a:t>
+              <a:t>23</a:t>
             </a:fld>
             <a:endParaRPr lang="ko-KR" altLang="en-US"/>
           </a:p>
@@ -15245,7 +18760,7 @@
 </p:sld>
 </file>
 
-<file path=ppt/slides/slide22.xml><?xml version="1.0" encoding="utf-8"?>
+<file path=ppt/slides/slide24.xml><?xml version="1.0" encoding="utf-8"?>
 <p:sld xmlns:a="http://schemas.openxmlformats.org/drawingml/2006/main" xmlns:r="http://schemas.openxmlformats.org/officeDocument/2006/relationships" xmlns:p="http://schemas.openxmlformats.org/presentationml/2006/main">
   <p:cSld>
     <p:spTree>
@@ -15319,7 +18834,7 @@
           <a:p>
             <a:fld id="{109C872D-39A9-4065-8BF3-6A613116E2A1}" type="slidenum">
               <a:rPr lang="ko-KR" altLang="en-US" smtClean="0"/>
-              <a:t>22</a:t>
+              <a:t>24</a:t>
             </a:fld>
             <a:endParaRPr lang="ko-KR" altLang="en-US"/>
           </a:p>
@@ -16756,7 +20271,7 @@
 </p:sld>
 </file>
 
-<file path=ppt/slides/slide23.xml><?xml version="1.0" encoding="utf-8"?>
+<file path=ppt/slides/slide25.xml><?xml version="1.0" encoding="utf-8"?>
 <p:sld xmlns:a="http://schemas.openxmlformats.org/drawingml/2006/main" xmlns:r="http://schemas.openxmlformats.org/officeDocument/2006/relationships" xmlns:p="http://schemas.openxmlformats.org/presentationml/2006/main">
   <p:cSld>
     <p:spTree>
@@ -17918,7 +21433,7 @@
           <a:p>
             <a:fld id="{109C872D-39A9-4065-8BF3-6A613116E2A1}" type="slidenum">
               <a:rPr lang="ko-KR" altLang="en-US" smtClean="0"/>
-              <a:t>23</a:t>
+              <a:t>25</a:t>
             </a:fld>
             <a:endParaRPr lang="ko-KR" altLang="en-US"/>
           </a:p>
@@ -18423,7 +21938,7 @@
 </p:sld>
 </file>
 
-<file path=ppt/slides/slide24.xml><?xml version="1.0" encoding="utf-8"?>
+<file path=ppt/slides/slide26.xml><?xml version="1.0" encoding="utf-8"?>
 <p:sld xmlns:a="http://schemas.openxmlformats.org/drawingml/2006/main" xmlns:r="http://schemas.openxmlformats.org/officeDocument/2006/relationships" xmlns:p="http://schemas.openxmlformats.org/presentationml/2006/main">
   <p:cSld>
     <p:spTree>
@@ -18491,7 +22006,7 @@
           <a:p>
             <a:fld id="{109C872D-39A9-4065-8BF3-6A613116E2A1}" type="slidenum">
               <a:rPr lang="ko-KR" altLang="en-US" smtClean="0"/>
-              <a:t>24</a:t>
+              <a:t>26</a:t>
             </a:fld>
             <a:endParaRPr lang="ko-KR" altLang="en-US"/>
           </a:p>
@@ -19321,7 +22836,7 @@
 </p:sld>
 </file>
 
-<file path=ppt/slides/slide25.xml><?xml version="1.0" encoding="utf-8"?>
+<file path=ppt/slides/slide27.xml><?xml version="1.0" encoding="utf-8"?>
 <p:sld xmlns:a="http://schemas.openxmlformats.org/drawingml/2006/main" xmlns:r="http://schemas.openxmlformats.org/officeDocument/2006/relationships" xmlns:p="http://schemas.openxmlformats.org/presentationml/2006/main">
   <p:cSld>
     <p:spTree>
@@ -19395,7 +22910,7 @@
           <a:p>
             <a:fld id="{109C872D-39A9-4065-8BF3-6A613116E2A1}" type="slidenum">
               <a:rPr lang="ko-KR" altLang="en-US" smtClean="0"/>
-              <a:t>25</a:t>
+              <a:t>27</a:t>
             </a:fld>
             <a:endParaRPr lang="ko-KR" altLang="en-US"/>
           </a:p>
@@ -20284,7 +23799,7 @@
 </p:sld>
 </file>
 
-<file path=ppt/slides/slide26.xml><?xml version="1.0" encoding="utf-8"?>
+<file path=ppt/slides/slide28.xml><?xml version="1.0" encoding="utf-8"?>
 <p:sld xmlns:a="http://schemas.openxmlformats.org/drawingml/2006/main" xmlns:r="http://schemas.openxmlformats.org/officeDocument/2006/relationships" xmlns:p="http://schemas.openxmlformats.org/presentationml/2006/main">
   <p:cSld>
     <p:spTree>
@@ -20358,7 +23873,7 @@
           <a:p>
             <a:fld id="{109C872D-39A9-4065-8BF3-6A613116E2A1}" type="slidenum">
               <a:rPr lang="ko-KR" altLang="en-US" smtClean="0"/>
-              <a:t>26</a:t>
+              <a:t>28</a:t>
             </a:fld>
             <a:endParaRPr lang="ko-KR" altLang="en-US"/>
           </a:p>
@@ -21817,7 +25332,7 @@
 </p:sld>
 </file>
 
-<file path=ppt/slides/slide27.xml><?xml version="1.0" encoding="utf-8"?>
+<file path=ppt/slides/slide29.xml><?xml version="1.0" encoding="utf-8"?>
 <p:sld xmlns:a="http://schemas.openxmlformats.org/drawingml/2006/main" xmlns:r="http://schemas.openxmlformats.org/officeDocument/2006/relationships" xmlns:p="http://schemas.openxmlformats.org/presentationml/2006/main">
   <p:cSld>
     <p:spTree>
@@ -21900,7 +25415,7 @@
           <a:p>
             <a:fld id="{109C872D-39A9-4065-8BF3-6A613116E2A1}" type="slidenum">
               <a:rPr lang="ko-KR" altLang="en-US" smtClean="0"/>
-              <a:t>27</a:t>
+              <a:t>29</a:t>
             </a:fld>
             <a:endParaRPr lang="ko-KR" altLang="en-US"/>
           </a:p>
@@ -21955,1101 +25470,6 @@
     <p:extLst>
       <p:ext uri="{BB962C8B-B14F-4D97-AF65-F5344CB8AC3E}">
         <p14:creationId xmlns:p14="http://schemas.microsoft.com/office/powerpoint/2010/main" val="1843797222"/>
-      </p:ext>
-    </p:extLst>
-  </p:cSld>
-  <p:clrMapOvr>
-    <a:masterClrMapping/>
-  </p:clrMapOvr>
-</p:sld>
-</file>
-
-<file path=ppt/slides/slide28.xml><?xml version="1.0" encoding="utf-8"?>
-<p:sld xmlns:a="http://schemas.openxmlformats.org/drawingml/2006/main" xmlns:r="http://schemas.openxmlformats.org/officeDocument/2006/relationships" xmlns:p="http://schemas.openxmlformats.org/presentationml/2006/main">
-  <p:cSld>
-    <p:spTree>
-      <p:nvGrpSpPr>
-        <p:cNvPr id="1" name="">
-          <a:extLst>
-            <a:ext uri="{FF2B5EF4-FFF2-40B4-BE49-F238E27FC236}">
-              <a16:creationId xmlns:a16="http://schemas.microsoft.com/office/drawing/2014/main" id="{64F91656-CF83-881D-5668-78733E15CC33}"/>
-            </a:ext>
-          </a:extLst>
-        </p:cNvPr>
-        <p:cNvGrpSpPr/>
-        <p:nvPr/>
-      </p:nvGrpSpPr>
-      <p:grpSpPr>
-        <a:xfrm>
-          <a:off x="0" y="0"/>
-          <a:ext cx="0" cy="0"/>
-          <a:chOff x="0" y="0"/>
-          <a:chExt cx="0" cy="0"/>
-        </a:xfrm>
-      </p:grpSpPr>
-      <p:sp>
-        <p:nvSpPr>
-          <p:cNvPr id="2" name="제목 1">
-            <a:extLst>
-              <a:ext uri="{FF2B5EF4-FFF2-40B4-BE49-F238E27FC236}">
-                <a16:creationId xmlns:a16="http://schemas.microsoft.com/office/drawing/2014/main" id="{4BD35B91-C44F-5C98-13D0-1FBEB27C5F42}"/>
-              </a:ext>
-            </a:extLst>
-          </p:cNvPr>
-          <p:cNvSpPr>
-            <a:spLocks noGrp="1"/>
-          </p:cNvSpPr>
-          <p:nvPr>
-            <p:ph type="title"/>
-          </p:nvPr>
-        </p:nvSpPr>
-        <p:spPr/>
-        <p:txBody>
-          <a:bodyPr/>
-          <a:lstStyle/>
-          <a:p>
-            <a:r>
-              <a:rPr lang="ko-KR" altLang="en-US" dirty="0" err="1"/>
-              <a:t>린달의</a:t>
-            </a:r>
-            <a:r>
-              <a:rPr lang="ko-KR" altLang="en-US" dirty="0"/>
-              <a:t> 자발적 교환 모형</a:t>
-            </a:r>
-          </a:p>
-        </p:txBody>
-      </p:sp>
-      <p:sp>
-        <p:nvSpPr>
-          <p:cNvPr id="4" name="슬라이드 번호 개체 틀 3">
-            <a:extLst>
-              <a:ext uri="{FF2B5EF4-FFF2-40B4-BE49-F238E27FC236}">
-                <a16:creationId xmlns:a16="http://schemas.microsoft.com/office/drawing/2014/main" id="{AC262C81-C342-1EE3-15AA-6002F89DE294}"/>
-              </a:ext>
-            </a:extLst>
-          </p:cNvPr>
-          <p:cNvSpPr>
-            <a:spLocks noGrp="1"/>
-          </p:cNvSpPr>
-          <p:nvPr>
-            <p:ph type="sldNum" sz="quarter" idx="12"/>
-          </p:nvPr>
-        </p:nvSpPr>
-        <p:spPr/>
-        <p:txBody>
-          <a:bodyPr/>
-          <a:lstStyle/>
-          <a:p>
-            <a:fld id="{109C872D-39A9-4065-8BF3-6A613116E2A1}" type="slidenum">
-              <a:rPr lang="ko-KR" altLang="en-US" smtClean="0"/>
-              <a:t>28</a:t>
-            </a:fld>
-            <a:endParaRPr lang="ko-KR" altLang="en-US"/>
-          </a:p>
-        </p:txBody>
-      </p:sp>
-      <p:sp>
-        <p:nvSpPr>
-          <p:cNvPr id="5" name="TextBox 4">
-            <a:extLst>
-              <a:ext uri="{FF2B5EF4-FFF2-40B4-BE49-F238E27FC236}">
-                <a16:creationId xmlns:a16="http://schemas.microsoft.com/office/drawing/2014/main" id="{4BD55F7A-F538-8C9A-1B41-EC7644B2DBDA}"/>
-              </a:ext>
-            </a:extLst>
-          </p:cNvPr>
-          <p:cNvSpPr txBox="1"/>
-          <p:nvPr/>
-        </p:nvSpPr>
-        <p:spPr>
-          <a:xfrm>
-            <a:off x="288790" y="958844"/>
-            <a:ext cx="11693660" cy="3368679"/>
-          </a:xfrm>
-          <a:prstGeom prst="rect">
-            <a:avLst/>
-          </a:prstGeom>
-          <a:noFill/>
-        </p:spPr>
-        <p:txBody>
-          <a:bodyPr wrap="square" rtlCol="0" anchor="t">
-            <a:spAutoFit/>
-          </a:bodyPr>
-          <a:lstStyle/>
-          <a:p>
-            <a:pPr marL="377825" indent="-285750">
-              <a:lnSpc>
-                <a:spcPct val="150000"/>
-              </a:lnSpc>
-              <a:buFont typeface="Arial" panose="020B0604020202020204" pitchFamily="34" charset="0"/>
-              <a:buChar char="•"/>
-            </a:pPr>
-            <a:r>
-              <a:rPr lang="ko-KR" altLang="en-US" sz="1600" dirty="0"/>
-              <a:t>공공재의 적절한 생산수준을 도출하였지만</a:t>
-            </a:r>
-            <a:r>
-              <a:rPr lang="en-US" altLang="ko-KR" sz="1600" dirty="0"/>
-              <a:t>, </a:t>
-            </a:r>
-            <a:r>
-              <a:rPr lang="ko-KR" altLang="en-US" sz="1600" dirty="0"/>
-              <a:t>그럼에도 불구하고 공공재는 </a:t>
-            </a:r>
-            <a:r>
-              <a:rPr lang="ko-KR" altLang="en-US" sz="1600" dirty="0" err="1"/>
-              <a:t>비경합</a:t>
-            </a:r>
-            <a:r>
-              <a:rPr lang="en-US" altLang="ko-KR" sz="1600" dirty="0"/>
-              <a:t>, </a:t>
-            </a:r>
-            <a:r>
-              <a:rPr lang="ko-KR" altLang="en-US" sz="1600" dirty="0"/>
-              <a:t>비배제성을 갖기 때문에 사람들 간의 거래가 이루어지기 어렵다</a:t>
-            </a:r>
-            <a:r>
-              <a:rPr lang="en-US" altLang="ko-KR" sz="1600" dirty="0"/>
-              <a:t>.</a:t>
-            </a:r>
-          </a:p>
-          <a:p>
-            <a:pPr marL="377825" indent="-285750">
-              <a:lnSpc>
-                <a:spcPct val="150000"/>
-              </a:lnSpc>
-              <a:buFont typeface="Arial" panose="020B0604020202020204" pitchFamily="34" charset="0"/>
-              <a:buChar char="•"/>
-            </a:pPr>
-            <a:endParaRPr lang="en-US" altLang="ko-KR" sz="1600" dirty="0"/>
-          </a:p>
-          <a:p>
-            <a:pPr marL="377825" indent="-285750">
-              <a:lnSpc>
-                <a:spcPct val="150000"/>
-              </a:lnSpc>
-              <a:buFont typeface="Arial" panose="020B0604020202020204" pitchFamily="34" charset="0"/>
-              <a:buChar char="•"/>
-            </a:pPr>
-            <a:r>
-              <a:rPr lang="ko-KR" altLang="en-US" sz="1600" dirty="0"/>
-              <a:t>스웨덴의 경제학자 </a:t>
-            </a:r>
-            <a:r>
-              <a:rPr lang="ko-KR" altLang="en-US" sz="1600" dirty="0" err="1"/>
-              <a:t>린달</a:t>
-            </a:r>
-            <a:r>
-              <a:rPr lang="ko-KR" altLang="en-US" sz="1600" dirty="0"/>
-              <a:t> </a:t>
-            </a:r>
-            <a:r>
-              <a:rPr lang="en-US" altLang="ko-KR" sz="1600" dirty="0"/>
-              <a:t>(</a:t>
-            </a:r>
-            <a:r>
-              <a:rPr lang="en-US" altLang="ko-KR" sz="1600" dirty="0" err="1"/>
-              <a:t>E.Lindahl</a:t>
-            </a:r>
-            <a:r>
-              <a:rPr lang="en-US" altLang="ko-KR" sz="1600" dirty="0"/>
-              <a:t>)</a:t>
-            </a:r>
-            <a:r>
-              <a:rPr lang="ko-KR" altLang="en-US" sz="1600" dirty="0"/>
-              <a:t>은 당사자간의 자발적 교환에 의해 공공재의 생산수준과 비용부담비율이 동시에 결정될 수 있는 모형을 제시하였다</a:t>
-            </a:r>
-            <a:r>
-              <a:rPr lang="en-US" altLang="ko-KR" sz="1600" dirty="0"/>
-              <a:t>.</a:t>
-            </a:r>
-          </a:p>
-          <a:p>
-            <a:pPr marL="835025" lvl="1" indent="-285750">
-              <a:lnSpc>
-                <a:spcPct val="150000"/>
-              </a:lnSpc>
-              <a:buFont typeface="Wingdings" panose="05000000000000000000" pitchFamily="2" charset="2"/>
-              <a:buChar char="ü"/>
-            </a:pPr>
-            <a:r>
-              <a:rPr lang="ko-KR" altLang="en-US" sz="1600" dirty="0"/>
-              <a:t>자발적 교환의 원리에 입각하고 있다는 측면에서 공공재 생산문제와 관련한 </a:t>
-            </a:r>
-            <a:r>
-              <a:rPr lang="en-US" altLang="ko-KR" sz="1600" dirty="0"/>
-              <a:t>‘</a:t>
-            </a:r>
-            <a:r>
-              <a:rPr lang="ko-KR" altLang="en-US" sz="1600" dirty="0"/>
-              <a:t>준시장적 해결책</a:t>
-            </a:r>
-            <a:r>
-              <a:rPr lang="en-US" altLang="ko-KR" sz="1600" dirty="0"/>
-              <a:t>’</a:t>
-            </a:r>
-            <a:r>
-              <a:rPr lang="ko-KR" altLang="en-US" sz="1600" dirty="0"/>
-              <a:t> 으로 불리고 있다</a:t>
-            </a:r>
-            <a:r>
-              <a:rPr lang="en-US" altLang="ko-KR" sz="1600" dirty="0"/>
-              <a:t>.</a:t>
-            </a:r>
-          </a:p>
-          <a:p>
-            <a:pPr marL="835025" lvl="1" indent="-285750">
-              <a:lnSpc>
-                <a:spcPct val="150000"/>
-              </a:lnSpc>
-              <a:buFont typeface="Wingdings" panose="05000000000000000000" pitchFamily="2" charset="2"/>
-              <a:buChar char="ü"/>
-            </a:pPr>
-            <a:r>
-              <a:rPr lang="ko-KR" altLang="en-US" sz="1600" dirty="0"/>
-              <a:t>하지만 </a:t>
-            </a:r>
-            <a:r>
-              <a:rPr lang="ko-KR" altLang="en-US" sz="1600" dirty="0" err="1"/>
-              <a:t>린달의</a:t>
-            </a:r>
-            <a:r>
-              <a:rPr lang="ko-KR" altLang="en-US" sz="1600" dirty="0"/>
-              <a:t> </a:t>
-            </a:r>
-            <a:r>
-              <a:rPr lang="ko-KR" altLang="en-US" sz="1600" dirty="0" err="1"/>
-              <a:t>자발작</a:t>
-            </a:r>
-            <a:r>
-              <a:rPr lang="ko-KR" altLang="en-US" sz="1600" dirty="0"/>
-              <a:t> 교환 모형은 이론적으로 생각할 수 있을 뿐 현실에서 발생하기는 힘든 이론이다</a:t>
-            </a:r>
-            <a:r>
-              <a:rPr lang="en-US" altLang="ko-KR" sz="1600" dirty="0"/>
-              <a:t>.</a:t>
-            </a:r>
-          </a:p>
-          <a:p>
-            <a:pPr marL="835025" lvl="1" indent="-285750">
-              <a:lnSpc>
-                <a:spcPct val="150000"/>
-              </a:lnSpc>
-              <a:buFont typeface="Wingdings" panose="05000000000000000000" pitchFamily="2" charset="2"/>
-              <a:buChar char="ü"/>
-            </a:pPr>
-            <a:endParaRPr lang="en-US" altLang="ko-KR" sz="1600" dirty="0"/>
-          </a:p>
-          <a:p>
-            <a:pPr marL="835025" lvl="1" indent="-285750">
-              <a:lnSpc>
-                <a:spcPct val="150000"/>
-              </a:lnSpc>
-              <a:buFont typeface="Wingdings" panose="05000000000000000000" pitchFamily="2" charset="2"/>
-              <a:buChar char="ü"/>
-            </a:pPr>
-            <a:endParaRPr lang="en-US" altLang="ko-KR" sz="1600" dirty="0"/>
-          </a:p>
-        </p:txBody>
-      </p:sp>
-    </p:spTree>
-    <p:extLst>
-      <p:ext uri="{BB962C8B-B14F-4D97-AF65-F5344CB8AC3E}">
-        <p14:creationId xmlns:p14="http://schemas.microsoft.com/office/powerpoint/2010/main" val="2746811465"/>
-      </p:ext>
-    </p:extLst>
-  </p:cSld>
-  <p:clrMapOvr>
-    <a:masterClrMapping/>
-  </p:clrMapOvr>
-</p:sld>
-</file>
-
-<file path=ppt/slides/slide29.xml><?xml version="1.0" encoding="utf-8"?>
-<p:sld xmlns:a="http://schemas.openxmlformats.org/drawingml/2006/main" xmlns:r="http://schemas.openxmlformats.org/officeDocument/2006/relationships" xmlns:p="http://schemas.openxmlformats.org/presentationml/2006/main">
-  <p:cSld>
-    <p:spTree>
-      <p:nvGrpSpPr>
-        <p:cNvPr id="1" name="">
-          <a:extLst>
-            <a:ext uri="{FF2B5EF4-FFF2-40B4-BE49-F238E27FC236}">
-              <a16:creationId xmlns:a16="http://schemas.microsoft.com/office/drawing/2014/main" id="{EEED11CB-3F22-5253-72CF-11C673C342D4}"/>
-            </a:ext>
-          </a:extLst>
-        </p:cNvPr>
-        <p:cNvGrpSpPr/>
-        <p:nvPr/>
-      </p:nvGrpSpPr>
-      <p:grpSpPr>
-        <a:xfrm>
-          <a:off x="0" y="0"/>
-          <a:ext cx="0" cy="0"/>
-          <a:chOff x="0" y="0"/>
-          <a:chExt cx="0" cy="0"/>
-        </a:xfrm>
-      </p:grpSpPr>
-      <p:sp>
-        <p:nvSpPr>
-          <p:cNvPr id="2" name="제목 1">
-            <a:extLst>
-              <a:ext uri="{FF2B5EF4-FFF2-40B4-BE49-F238E27FC236}">
-                <a16:creationId xmlns:a16="http://schemas.microsoft.com/office/drawing/2014/main" id="{DBC2ADE2-3510-D5FB-C528-0C63AB96DED7}"/>
-              </a:ext>
-            </a:extLst>
-          </p:cNvPr>
-          <p:cNvSpPr>
-            <a:spLocks noGrp="1"/>
-          </p:cNvSpPr>
-          <p:nvPr>
-            <p:ph type="title"/>
-          </p:nvPr>
-        </p:nvSpPr>
-        <p:spPr/>
-        <p:txBody>
-          <a:bodyPr/>
-          <a:lstStyle/>
-          <a:p>
-            <a:r>
-              <a:rPr lang="ko-KR" altLang="en-US" dirty="0" err="1"/>
-              <a:t>린달의</a:t>
-            </a:r>
-            <a:r>
-              <a:rPr lang="ko-KR" altLang="en-US" dirty="0"/>
-              <a:t> 자발적 교환 모형</a:t>
-            </a:r>
-          </a:p>
-        </p:txBody>
-      </p:sp>
-      <p:sp>
-        <p:nvSpPr>
-          <p:cNvPr id="4" name="슬라이드 번호 개체 틀 3">
-            <a:extLst>
-              <a:ext uri="{FF2B5EF4-FFF2-40B4-BE49-F238E27FC236}">
-                <a16:creationId xmlns:a16="http://schemas.microsoft.com/office/drawing/2014/main" id="{436A5EA4-C4B7-06EA-5640-7EB6C82AB783}"/>
-              </a:ext>
-            </a:extLst>
-          </p:cNvPr>
-          <p:cNvSpPr>
-            <a:spLocks noGrp="1"/>
-          </p:cNvSpPr>
-          <p:nvPr>
-            <p:ph type="sldNum" sz="quarter" idx="12"/>
-          </p:nvPr>
-        </p:nvSpPr>
-        <p:spPr/>
-        <p:txBody>
-          <a:bodyPr/>
-          <a:lstStyle/>
-          <a:p>
-            <a:fld id="{109C872D-39A9-4065-8BF3-6A613116E2A1}" type="slidenum">
-              <a:rPr lang="ko-KR" altLang="en-US" smtClean="0"/>
-              <a:t>29</a:t>
-            </a:fld>
-            <a:endParaRPr lang="ko-KR" altLang="en-US"/>
-          </a:p>
-        </p:txBody>
-      </p:sp>
-      <p:pic>
-        <p:nvPicPr>
-          <p:cNvPr id="7" name="그림 6" descr="라인, 도표, 그래프, 텍스트이(가) 표시된 사진&#10;&#10;AI 생성 콘텐츠는 정확하지 않을 수 있습니다.">
-            <a:extLst>
-              <a:ext uri="{FF2B5EF4-FFF2-40B4-BE49-F238E27FC236}">
-                <a16:creationId xmlns:a16="http://schemas.microsoft.com/office/drawing/2014/main" id="{B8DD7DA5-EBFF-EAB0-CCA6-04D96F5871CF}"/>
-              </a:ext>
-            </a:extLst>
-          </p:cNvPr>
-          <p:cNvPicPr>
-            <a:picLocks noChangeAspect="1"/>
-          </p:cNvPicPr>
-          <p:nvPr/>
-        </p:nvPicPr>
-        <p:blipFill>
-          <a:blip r:embed="rId2"/>
-          <a:stretch>
-            <a:fillRect/>
-          </a:stretch>
-        </p:blipFill>
-        <p:spPr>
-          <a:xfrm>
-            <a:off x="5449068" y="4248727"/>
-            <a:ext cx="3906597" cy="2288180"/>
-          </a:xfrm>
-          <a:prstGeom prst="rect">
-            <a:avLst/>
-          </a:prstGeom>
-        </p:spPr>
-      </p:pic>
-      <mc:AlternateContent xmlns:mc="http://schemas.openxmlformats.org/markup-compatibility/2006" xmlns:a14="http://schemas.microsoft.com/office/drawing/2010/main">
-        <mc:Choice Requires="a14">
-          <p:sp>
-            <p:nvSpPr>
-              <p:cNvPr id="8" name="TextBox 7">
-                <a:extLst>
-                  <a:ext uri="{FF2B5EF4-FFF2-40B4-BE49-F238E27FC236}">
-                    <a16:creationId xmlns:a16="http://schemas.microsoft.com/office/drawing/2014/main" id="{7E7DF6D8-7CC1-6320-7827-782893E1CC4F}"/>
-                  </a:ext>
-                </a:extLst>
-              </p:cNvPr>
-              <p:cNvSpPr txBox="1"/>
-              <p:nvPr/>
-            </p:nvSpPr>
-            <p:spPr>
-              <a:xfrm>
-                <a:off x="288790" y="958844"/>
-                <a:ext cx="11693660" cy="4476675"/>
-              </a:xfrm>
-              <a:prstGeom prst="rect">
-                <a:avLst/>
-              </a:prstGeom>
-              <a:noFill/>
-            </p:spPr>
-            <p:txBody>
-              <a:bodyPr wrap="square" rtlCol="0" anchor="t">
-                <a:spAutoFit/>
-              </a:bodyPr>
-              <a:lstStyle/>
-              <a:p>
-                <a:pPr marL="377825" indent="-285750">
-                  <a:lnSpc>
-                    <a:spcPct val="150000"/>
-                  </a:lnSpc>
-                  <a:buFont typeface="Arial" panose="020B0604020202020204" pitchFamily="34" charset="0"/>
-                  <a:buChar char="•"/>
-                </a:pPr>
-                <a:r>
-                  <a:rPr lang="ko-KR" altLang="en-US" sz="1600" dirty="0"/>
-                  <a:t>아래 그림은 </a:t>
-                </a:r>
-                <a:r>
-                  <a:rPr lang="ko-KR" altLang="en-US" sz="1600" dirty="0" err="1"/>
-                  <a:t>린달의</a:t>
-                </a:r>
-                <a:r>
-                  <a:rPr lang="ko-KR" altLang="en-US" sz="1600" dirty="0"/>
-                  <a:t> 자발적 교환 모형을 설명하고 있다</a:t>
-                </a:r>
-                <a:r>
-                  <a:rPr lang="en-US" altLang="ko-KR" sz="1600" dirty="0"/>
-                  <a:t>. A, B </a:t>
-                </a:r>
-                <a:r>
-                  <a:rPr lang="ko-KR" altLang="en-US" sz="1600" dirty="0"/>
-                  <a:t>두 사람만이 있고</a:t>
-                </a:r>
-                <a:r>
-                  <a:rPr lang="en-US" altLang="ko-KR" sz="1600" dirty="0"/>
-                  <a:t>, </a:t>
-                </a:r>
-                <a:r>
-                  <a:rPr lang="ko-KR" altLang="en-US" sz="1600" dirty="0"/>
-                  <a:t>공공재 생산의 단위비용은 생산수준과 관계없이 </a:t>
-                </a:r>
-                <a:r>
-                  <a:rPr lang="en-US" altLang="ko-KR" sz="1600" dirty="0"/>
-                  <a:t>1</a:t>
-                </a:r>
-                <a:r>
-                  <a:rPr lang="ko-KR" altLang="en-US" sz="1600" dirty="0"/>
-                  <a:t>원으로 일정하다고 하자</a:t>
-                </a:r>
-                <a:r>
-                  <a:rPr lang="en-US" altLang="ko-KR" sz="1600" dirty="0"/>
-                  <a:t>.</a:t>
-                </a:r>
-              </a:p>
-              <a:p>
-                <a:pPr marL="835025" lvl="1" indent="-285750">
-                  <a:lnSpc>
-                    <a:spcPct val="150000"/>
-                  </a:lnSpc>
-                  <a:buFont typeface="Wingdings" panose="05000000000000000000" pitchFamily="2" charset="2"/>
-                  <a:buChar char="ü"/>
-                </a:pPr>
-                <a:r>
-                  <a:rPr lang="ko-KR" altLang="en-US" sz="1600" dirty="0"/>
-                  <a:t>왼쪽 아래의 모서리 </a:t>
-                </a:r>
-                <a14:m>
-                  <m:oMath xmlns:m="http://schemas.openxmlformats.org/officeDocument/2006/math">
-                    <m:sSub>
-                      <m:sSubPr>
-                        <m:ctrlPr>
-                          <a:rPr lang="en-US" altLang="ko-KR" sz="1600" i="1">
-                            <a:latin typeface="Cambria Math" panose="02040503050406030204" pitchFamily="18" charset="0"/>
-                          </a:rPr>
-                        </m:ctrlPr>
-                      </m:sSubPr>
-                      <m:e>
-                        <m:r>
-                          <a:rPr lang="en-US" altLang="ko-KR" sz="1600" b="0" i="1" smtClean="0">
-                            <a:latin typeface="Cambria Math" panose="02040503050406030204" pitchFamily="18" charset="0"/>
-                          </a:rPr>
-                          <m:t>𝑂</m:t>
-                        </m:r>
-                      </m:e>
-                      <m:sub>
-                        <m:r>
-                          <a:rPr lang="en-US" altLang="ko-KR" sz="1600" b="0" i="1" smtClean="0">
-                            <a:latin typeface="Cambria Math" panose="02040503050406030204" pitchFamily="18" charset="0"/>
-                          </a:rPr>
-                          <m:t>𝐴</m:t>
-                        </m:r>
-                      </m:sub>
-                    </m:sSub>
-                  </m:oMath>
-                </a14:m>
-                <a:r>
-                  <a:rPr lang="ko-KR" altLang="en-US" sz="1600" dirty="0"/>
-                  <a:t>는 </a:t>
-                </a:r>
-                <a:r>
-                  <a:rPr lang="en-US" altLang="ko-KR" sz="1600" dirty="0"/>
-                  <a:t>A</a:t>
-                </a:r>
-                <a:r>
-                  <a:rPr lang="ko-KR" altLang="en-US" sz="1600" dirty="0"/>
-                  <a:t>의 원점을 나타내고</a:t>
-                </a:r>
-                <a:r>
-                  <a:rPr lang="en-US" altLang="ko-KR" sz="1600" dirty="0"/>
-                  <a:t>, </a:t>
-                </a:r>
-                <a:r>
-                  <a:rPr lang="ko-KR" altLang="en-US" sz="1600" dirty="0"/>
-                  <a:t>수평축으로는 공공재의 양을 측정한다</a:t>
-                </a:r>
-                <a:r>
-                  <a:rPr lang="en-US" altLang="ko-KR" sz="1600" dirty="0"/>
-                  <a:t>.</a:t>
-                </a:r>
-              </a:p>
-              <a:p>
-                <a:pPr marL="835025" lvl="1" indent="-285750">
-                  <a:lnSpc>
-                    <a:spcPct val="150000"/>
-                  </a:lnSpc>
-                  <a:buFont typeface="Wingdings" panose="05000000000000000000" pitchFamily="2" charset="2"/>
-                  <a:buChar char="ü"/>
-                </a:pPr>
-                <a:r>
-                  <a:rPr lang="ko-KR" altLang="en-US" sz="1600" dirty="0" err="1"/>
-                  <a:t>수직축으로는</a:t>
-                </a:r>
-                <a:r>
-                  <a:rPr lang="ko-KR" altLang="en-US" sz="1600" dirty="0"/>
-                  <a:t> 단위생산비용 중 </a:t>
-                </a:r>
-                <a:r>
-                  <a:rPr lang="en-US" altLang="ko-KR" sz="1600" dirty="0"/>
-                  <a:t>A</a:t>
-                </a:r>
-                <a:r>
-                  <a:rPr lang="ko-KR" altLang="en-US" sz="1600" dirty="0"/>
-                  <a:t>가 부담해야 하는 비율</a:t>
-                </a:r>
-                <a:r>
-                  <a:rPr lang="en-US" altLang="ko-KR" sz="1600" dirty="0"/>
-                  <a:t>(</a:t>
-                </a:r>
-                <a14:m>
-                  <m:oMath xmlns:m="http://schemas.openxmlformats.org/officeDocument/2006/math">
-                    <m:r>
-                      <a:rPr lang="en-US" altLang="ko-KR" sz="1600" b="0" i="1" smtClean="0">
-                        <a:latin typeface="Cambria Math" panose="02040503050406030204" pitchFamily="18" charset="0"/>
-                      </a:rPr>
-                      <m:t>𝑘</m:t>
-                    </m:r>
-                  </m:oMath>
-                </a14:m>
-                <a:r>
-                  <a:rPr lang="en-US" altLang="ko-KR" sz="1600" dirty="0"/>
-                  <a:t>)</a:t>
-                </a:r>
-                <a:r>
-                  <a:rPr lang="ko-KR" altLang="en-US" sz="1600" dirty="0"/>
-                  <a:t>이 측정되고 있다</a:t>
-                </a:r>
-                <a:r>
-                  <a:rPr lang="en-US" altLang="ko-KR" sz="1600" dirty="0"/>
-                  <a:t>. </a:t>
-                </a:r>
-              </a:p>
-              <a:p>
-                <a:pPr marL="835025" lvl="1" indent="-285750">
-                  <a:lnSpc>
-                    <a:spcPct val="150000"/>
-                  </a:lnSpc>
-                  <a:buFont typeface="Wingdings" panose="05000000000000000000" pitchFamily="2" charset="2"/>
-                  <a:buChar char="ü"/>
-                </a:pPr>
-                <a:r>
-                  <a:rPr lang="ko-KR" altLang="en-US" sz="1600" dirty="0"/>
-                  <a:t>원점 </a:t>
-                </a:r>
-                <a14:m>
-                  <m:oMath xmlns:m="http://schemas.openxmlformats.org/officeDocument/2006/math">
-                    <m:sSub>
-                      <m:sSubPr>
-                        <m:ctrlPr>
-                          <a:rPr lang="en-US" altLang="ko-KR" sz="1600" i="1">
-                            <a:latin typeface="Cambria Math" panose="02040503050406030204" pitchFamily="18" charset="0"/>
-                          </a:rPr>
-                        </m:ctrlPr>
-                      </m:sSubPr>
-                      <m:e>
-                        <m:r>
-                          <a:rPr lang="en-US" altLang="ko-KR" sz="1600" i="1">
-                            <a:latin typeface="Cambria Math" panose="02040503050406030204" pitchFamily="18" charset="0"/>
-                          </a:rPr>
-                          <m:t>𝑂</m:t>
-                        </m:r>
-                      </m:e>
-                      <m:sub>
-                        <m:r>
-                          <a:rPr lang="en-US" altLang="ko-KR" sz="1600" i="1">
-                            <a:latin typeface="Cambria Math" panose="02040503050406030204" pitchFamily="18" charset="0"/>
-                          </a:rPr>
-                          <m:t>𝐴</m:t>
-                        </m:r>
-                      </m:sub>
-                    </m:sSub>
-                  </m:oMath>
-                </a14:m>
-                <a:r>
-                  <a:rPr lang="ko-KR" altLang="en-US" sz="1600" dirty="0"/>
-                  <a:t>에서 </a:t>
-                </a:r>
-                <a14:m>
-                  <m:oMath xmlns:m="http://schemas.openxmlformats.org/officeDocument/2006/math">
-                    <m:r>
-                      <a:rPr lang="en-US" altLang="ko-KR" sz="1600" i="1">
-                        <a:latin typeface="Cambria Math" panose="02040503050406030204" pitchFamily="18" charset="0"/>
-                      </a:rPr>
-                      <m:t>𝑘</m:t>
-                    </m:r>
-                  </m:oMath>
-                </a14:m>
-                <a:r>
-                  <a:rPr lang="ko-KR" altLang="en-US" sz="1600" dirty="0"/>
-                  <a:t>는 </a:t>
-                </a:r>
-                <a:r>
-                  <a:rPr lang="en-US" altLang="ko-KR" sz="1600" dirty="0"/>
-                  <a:t>0</a:t>
-                </a:r>
-                <a:r>
-                  <a:rPr lang="ko-KR" altLang="en-US" sz="1600" dirty="0"/>
-                  <a:t>의 값을 갖는데</a:t>
-                </a:r>
-                <a:r>
-                  <a:rPr lang="en-US" altLang="ko-KR" sz="1600" dirty="0"/>
-                  <a:t>, </a:t>
-                </a:r>
-                <a:r>
-                  <a:rPr lang="ko-KR" altLang="en-US" sz="1600" dirty="0"/>
-                  <a:t>위로 올라갈수록 커지며 맨 위까지 올라가면 </a:t>
-                </a:r>
-                <a:r>
-                  <a:rPr lang="en-US" altLang="ko-KR" sz="1600" dirty="0"/>
-                  <a:t>1</a:t>
-                </a:r>
-                <a:r>
-                  <a:rPr lang="ko-KR" altLang="en-US" sz="1600" dirty="0"/>
-                  <a:t>의 값을 갖는다</a:t>
-                </a:r>
-                <a:r>
-                  <a:rPr lang="en-US" altLang="ko-KR" sz="1600" dirty="0"/>
-                  <a:t>.</a:t>
-                </a:r>
-              </a:p>
-              <a:p>
-                <a:pPr marL="835025" lvl="1" indent="-285750">
-                  <a:lnSpc>
-                    <a:spcPct val="150000"/>
-                  </a:lnSpc>
-                  <a:buFont typeface="Wingdings" panose="05000000000000000000" pitchFamily="2" charset="2"/>
-                  <a:buChar char="ü"/>
-                </a:pPr>
-                <a:r>
-                  <a:rPr lang="ko-KR" altLang="en-US" sz="1600" dirty="0"/>
-                  <a:t>한편 오른쪽 아래의 모서리 </a:t>
-                </a:r>
-                <a14:m>
-                  <m:oMath xmlns:m="http://schemas.openxmlformats.org/officeDocument/2006/math">
-                    <m:sSub>
-                      <m:sSubPr>
-                        <m:ctrlPr>
-                          <a:rPr lang="en-US" altLang="ko-KR" sz="1600" i="1">
-                            <a:latin typeface="Cambria Math" panose="02040503050406030204" pitchFamily="18" charset="0"/>
-                          </a:rPr>
-                        </m:ctrlPr>
-                      </m:sSubPr>
-                      <m:e>
-                        <m:r>
-                          <a:rPr lang="en-US" altLang="ko-KR" sz="1600" i="1">
-                            <a:latin typeface="Cambria Math" panose="02040503050406030204" pitchFamily="18" charset="0"/>
-                          </a:rPr>
-                          <m:t>𝑂</m:t>
-                        </m:r>
-                      </m:e>
-                      <m:sub>
-                        <m:r>
-                          <a:rPr lang="en-US" altLang="ko-KR" sz="1600" b="0" i="1" smtClean="0">
-                            <a:latin typeface="Cambria Math" panose="02040503050406030204" pitchFamily="18" charset="0"/>
-                          </a:rPr>
-                          <m:t>𝐵</m:t>
-                        </m:r>
-                      </m:sub>
-                    </m:sSub>
-                  </m:oMath>
-                </a14:m>
-                <a:r>
-                  <a:rPr lang="ko-KR" altLang="en-US" sz="1600" dirty="0"/>
-                  <a:t>는 </a:t>
-                </a:r>
-                <a:r>
-                  <a:rPr lang="en-US" altLang="ko-KR" sz="1600" dirty="0"/>
-                  <a:t>B</a:t>
-                </a:r>
-                <a:r>
-                  <a:rPr lang="ko-KR" altLang="en-US" sz="1600" dirty="0"/>
-                  <a:t>의 원점을 나타내고</a:t>
-                </a:r>
-                <a:r>
-                  <a:rPr lang="en-US" altLang="ko-KR" sz="1600" dirty="0"/>
-                  <a:t>, </a:t>
-                </a:r>
-                <a:r>
-                  <a:rPr lang="ko-KR" altLang="en-US" sz="1600" dirty="0"/>
-                  <a:t>수평축으로는 마찬가지로 공공재의 양을 측정한다</a:t>
-                </a:r>
-                <a:r>
-                  <a:rPr lang="en-US" altLang="ko-KR" sz="1600" dirty="0"/>
-                  <a:t>.</a:t>
-                </a:r>
-              </a:p>
-              <a:p>
-                <a:pPr marL="835025" lvl="1" indent="-285750">
-                  <a:lnSpc>
-                    <a:spcPct val="150000"/>
-                  </a:lnSpc>
-                  <a:buFont typeface="Wingdings" panose="05000000000000000000" pitchFamily="2" charset="2"/>
-                  <a:buChar char="ü"/>
-                </a:pPr>
-                <a:r>
-                  <a:rPr lang="ko-KR" altLang="en-US" sz="1600" dirty="0"/>
-                  <a:t>수직축으로는 단위생산비용 중 </a:t>
-                </a:r>
-                <a:r>
-                  <a:rPr lang="en-US" altLang="ko-KR" sz="1600" dirty="0"/>
-                  <a:t>B</a:t>
-                </a:r>
-                <a:r>
-                  <a:rPr lang="ko-KR" altLang="en-US" sz="1600" dirty="0"/>
-                  <a:t>가 부담해야 하는 비율</a:t>
-                </a:r>
-                <a:r>
-                  <a:rPr lang="en-US" altLang="ko-KR" sz="1600" dirty="0"/>
-                  <a:t>(</a:t>
-                </a:r>
-                <a14:m>
-                  <m:oMath xmlns:m="http://schemas.openxmlformats.org/officeDocument/2006/math">
-                    <m:r>
-                      <a:rPr lang="en-US" altLang="ko-KR" sz="1600" b="0" i="1" smtClean="0">
-                        <a:latin typeface="Cambria Math" panose="02040503050406030204" pitchFamily="18" charset="0"/>
-                      </a:rPr>
-                      <m:t>h</m:t>
-                    </m:r>
-                  </m:oMath>
-                </a14:m>
-                <a:r>
-                  <a:rPr lang="en-US" altLang="ko-KR" sz="1600" dirty="0"/>
-                  <a:t>)</a:t>
-                </a:r>
-                <a:r>
-                  <a:rPr lang="ko-KR" altLang="en-US" sz="1600" dirty="0"/>
-                  <a:t>이 측정되고 있다</a:t>
-                </a:r>
-                <a:r>
-                  <a:rPr lang="en-US" altLang="ko-KR" sz="1600" dirty="0"/>
-                  <a:t>.</a:t>
-                </a:r>
-              </a:p>
-              <a:p>
-                <a:pPr marL="835025" lvl="1" indent="-285750">
-                  <a:lnSpc>
-                    <a:spcPct val="150000"/>
-                  </a:lnSpc>
-                  <a:buFont typeface="Wingdings" panose="05000000000000000000" pitchFamily="2" charset="2"/>
-                  <a:buChar char="ü"/>
-                </a:pPr>
-                <a:r>
-                  <a:rPr lang="ko-KR" altLang="en-US" sz="1600" dirty="0"/>
-                  <a:t>원점 </a:t>
-                </a:r>
-                <a14:m>
-                  <m:oMath xmlns:m="http://schemas.openxmlformats.org/officeDocument/2006/math">
-                    <m:sSub>
-                      <m:sSubPr>
-                        <m:ctrlPr>
-                          <a:rPr lang="en-US" altLang="ko-KR" sz="1600" i="1">
-                            <a:latin typeface="Cambria Math" panose="02040503050406030204" pitchFamily="18" charset="0"/>
-                          </a:rPr>
-                        </m:ctrlPr>
-                      </m:sSubPr>
-                      <m:e>
-                        <m:r>
-                          <a:rPr lang="en-US" altLang="ko-KR" sz="1600" i="1">
-                            <a:latin typeface="Cambria Math" panose="02040503050406030204" pitchFamily="18" charset="0"/>
-                          </a:rPr>
-                          <m:t>𝑂</m:t>
-                        </m:r>
-                      </m:e>
-                      <m:sub>
-                        <m:r>
-                          <a:rPr lang="en-US" altLang="ko-KR" sz="1600" b="0" i="1" smtClean="0">
-                            <a:latin typeface="Cambria Math" panose="02040503050406030204" pitchFamily="18" charset="0"/>
-                          </a:rPr>
-                          <m:t>𝐵</m:t>
-                        </m:r>
-                      </m:sub>
-                    </m:sSub>
-                  </m:oMath>
-                </a14:m>
-                <a:r>
-                  <a:rPr lang="ko-KR" altLang="en-US" sz="1600" dirty="0"/>
-                  <a:t>에서 </a:t>
-                </a:r>
-                <a14:m>
-                  <m:oMath xmlns:m="http://schemas.openxmlformats.org/officeDocument/2006/math">
-                    <m:r>
-                      <a:rPr lang="en-US" altLang="ko-KR" sz="1600" b="0" i="1" smtClean="0">
-                        <a:latin typeface="Cambria Math" panose="02040503050406030204" pitchFamily="18" charset="0"/>
-                      </a:rPr>
-                      <m:t>h</m:t>
-                    </m:r>
-                  </m:oMath>
-                </a14:m>
-                <a:r>
-                  <a:rPr lang="ko-KR" altLang="en-US" sz="1600" dirty="0"/>
-                  <a:t>는 </a:t>
-                </a:r>
-                <a:r>
-                  <a:rPr lang="en-US" altLang="ko-KR" sz="1600" dirty="0"/>
-                  <a:t>0</a:t>
-                </a:r>
-                <a:r>
-                  <a:rPr lang="ko-KR" altLang="en-US" sz="1600" dirty="0"/>
-                  <a:t>의 값을 갖는데</a:t>
-                </a:r>
-                <a:r>
-                  <a:rPr lang="en-US" altLang="ko-KR" sz="1600" dirty="0"/>
-                  <a:t>, </a:t>
-                </a:r>
-                <a:r>
-                  <a:rPr lang="ko-KR" altLang="en-US" sz="1600" dirty="0"/>
-                  <a:t>아래로 내려갈수록 커지며 맨 아래까지 내려가면 </a:t>
-                </a:r>
-                <a:r>
-                  <a:rPr lang="en-US" altLang="ko-KR" sz="1600" dirty="0"/>
-                  <a:t>1</a:t>
-                </a:r>
-                <a:r>
-                  <a:rPr lang="ko-KR" altLang="en-US" sz="1600" dirty="0"/>
-                  <a:t>의 값을 갖는다</a:t>
-                </a:r>
-                <a:r>
-                  <a:rPr lang="en-US" altLang="ko-KR" sz="1600" dirty="0"/>
-                  <a:t>.</a:t>
-                </a:r>
-              </a:p>
-              <a:p>
-                <a:pPr marL="835025" lvl="1" indent="-285750">
-                  <a:lnSpc>
-                    <a:spcPct val="150000"/>
-                  </a:lnSpc>
-                  <a:buFont typeface="Wingdings" panose="05000000000000000000" pitchFamily="2" charset="2"/>
-                  <a:buChar char="ü"/>
-                </a:pPr>
-                <a14:m>
-                  <m:oMath xmlns:m="http://schemas.openxmlformats.org/officeDocument/2006/math">
-                    <m:r>
-                      <a:rPr lang="en-US" altLang="ko-KR" sz="1600" i="1">
-                        <a:latin typeface="Cambria Math" panose="02040503050406030204" pitchFamily="18" charset="0"/>
-                      </a:rPr>
-                      <m:t>𝑘</m:t>
-                    </m:r>
-                  </m:oMath>
-                </a14:m>
-                <a:r>
-                  <a:rPr lang="ko-KR" altLang="en-US" sz="1600" dirty="0"/>
-                  <a:t>와 </a:t>
-                </a:r>
-                <a14:m>
-                  <m:oMath xmlns:m="http://schemas.openxmlformats.org/officeDocument/2006/math">
-                    <m:r>
-                      <a:rPr lang="en-US" altLang="ko-KR" sz="1600" i="1">
-                        <a:latin typeface="Cambria Math" panose="02040503050406030204" pitchFamily="18" charset="0"/>
-                      </a:rPr>
-                      <m:t>h</m:t>
-                    </m:r>
-                  </m:oMath>
-                </a14:m>
-                <a:r>
-                  <a:rPr lang="en-US" altLang="ko-KR" sz="1600" dirty="0"/>
-                  <a:t> </a:t>
-                </a:r>
-                <a:r>
-                  <a:rPr lang="ko-KR" altLang="en-US" sz="1600" dirty="0"/>
-                  <a:t>값을 더한 것은 언제나 </a:t>
-                </a:r>
-                <a:r>
-                  <a:rPr lang="en-US" altLang="ko-KR" sz="1600" dirty="0"/>
-                  <a:t>1</a:t>
-                </a:r>
-                <a:r>
-                  <a:rPr lang="ko-KR" altLang="en-US" sz="1600" dirty="0"/>
-                  <a:t>이다</a:t>
-                </a:r>
-                <a:r>
-                  <a:rPr lang="en-US" altLang="ko-KR" sz="1600" dirty="0"/>
-                  <a:t>.</a:t>
-                </a:r>
-              </a:p>
-              <a:p>
-                <a:pPr marL="835025" lvl="1" indent="-285750">
-                  <a:lnSpc>
-                    <a:spcPct val="150000"/>
-                  </a:lnSpc>
-                  <a:buFont typeface="Wingdings" panose="05000000000000000000" pitchFamily="2" charset="2"/>
-                  <a:buChar char="ü"/>
-                </a:pPr>
-                <a:endParaRPr lang="en-US" altLang="ko-KR" sz="1600" dirty="0"/>
-              </a:p>
-              <a:p>
-                <a:pPr marL="377825" indent="-285750">
-                  <a:lnSpc>
-                    <a:spcPct val="150000"/>
-                  </a:lnSpc>
-                  <a:buFont typeface="Arial" panose="020B0604020202020204" pitchFamily="34" charset="0"/>
-                  <a:buChar char="•"/>
-                </a:pPr>
-                <a:endParaRPr lang="en-US" altLang="ko-KR" sz="1600" dirty="0"/>
-              </a:p>
-              <a:p>
-                <a:pPr marL="835025" lvl="1" indent="-285750">
-                  <a:lnSpc>
-                    <a:spcPct val="150000"/>
-                  </a:lnSpc>
-                  <a:buFont typeface="Wingdings" panose="05000000000000000000" pitchFamily="2" charset="2"/>
-                  <a:buChar char="ü"/>
-                </a:pPr>
-                <a:endParaRPr lang="en-US" altLang="ko-KR" sz="1600" dirty="0"/>
-              </a:p>
-            </p:txBody>
-          </p:sp>
-        </mc:Choice>
-        <mc:Fallback xmlns="">
-          <p:sp>
-            <p:nvSpPr>
-              <p:cNvPr id="8" name="TextBox 7">
-                <a:extLst>
-                  <a:ext uri="{FF2B5EF4-FFF2-40B4-BE49-F238E27FC236}">
-                    <a16:creationId xmlns:a16="http://schemas.microsoft.com/office/drawing/2014/main" id="{7E7DF6D8-7CC1-6320-7827-782893E1CC4F}"/>
-                  </a:ext>
-                </a:extLst>
-              </p:cNvPr>
-              <p:cNvSpPr txBox="1">
-                <a:spLocks noRot="1" noChangeAspect="1" noMove="1" noResize="1" noEditPoints="1" noAdjustHandles="1" noChangeArrowheads="1" noChangeShapeType="1" noTextEdit="1"/>
-              </p:cNvSpPr>
-              <p:nvPr/>
-            </p:nvSpPr>
-            <p:spPr>
-              <a:xfrm>
-                <a:off x="288790" y="958844"/>
-                <a:ext cx="11693660" cy="4476675"/>
-              </a:xfrm>
-              <a:prstGeom prst="rect">
-                <a:avLst/>
-              </a:prstGeom>
-              <a:blipFill>
-                <a:blip r:embed="rId3"/>
-                <a:stretch>
-                  <a:fillRect/>
-                </a:stretch>
-              </a:blipFill>
-            </p:spPr>
-            <p:txBody>
-              <a:bodyPr/>
-              <a:lstStyle/>
-              <a:p>
-                <a:r>
-                  <a:rPr lang="ko-KR" altLang="en-US">
-                    <a:noFill/>
-                  </a:rPr>
-                  <a:t> </a:t>
-                </a:r>
-              </a:p>
-            </p:txBody>
-          </p:sp>
-        </mc:Fallback>
-      </mc:AlternateContent>
-      <p:sp>
-        <p:nvSpPr>
-          <p:cNvPr id="10" name="TextBox 9">
-            <a:extLst>
-              <a:ext uri="{FF2B5EF4-FFF2-40B4-BE49-F238E27FC236}">
-                <a16:creationId xmlns:a16="http://schemas.microsoft.com/office/drawing/2014/main" id="{A2434506-FAAC-F82C-A25D-CF6A0E0B2F49}"/>
-              </a:ext>
-            </a:extLst>
-          </p:cNvPr>
-          <p:cNvSpPr txBox="1"/>
-          <p:nvPr/>
-        </p:nvSpPr>
-        <p:spPr>
-          <a:xfrm>
-            <a:off x="5853962" y="4035234"/>
-            <a:ext cx="3580080" cy="276999"/>
-          </a:xfrm>
-          <a:prstGeom prst="rect">
-            <a:avLst/>
-          </a:prstGeom>
-          <a:noFill/>
-        </p:spPr>
-        <p:txBody>
-          <a:bodyPr wrap="square">
-            <a:spAutoFit/>
-          </a:bodyPr>
-          <a:lstStyle/>
-          <a:p>
-            <a:pPr algn="ctr"/>
-            <a:r>
-              <a:rPr lang="en-US" altLang="ko-KR" sz="1200" spc="-50" dirty="0"/>
-              <a:t>&lt;</a:t>
-            </a:r>
-            <a:r>
-              <a:rPr lang="ko-KR" altLang="en-US" sz="1200" spc="-50" dirty="0" err="1"/>
-              <a:t>린달모형</a:t>
-            </a:r>
-            <a:r>
-              <a:rPr lang="en-US" altLang="ko-KR" sz="1200" spc="-50" dirty="0"/>
-              <a:t>: </a:t>
-            </a:r>
-            <a:r>
-              <a:rPr lang="ko-KR" altLang="en-US" sz="1200" spc="-50" dirty="0"/>
-              <a:t>수요곡선의 도출</a:t>
-            </a:r>
-            <a:r>
-              <a:rPr lang="en-US" altLang="ko-KR" sz="1200" spc="-50" dirty="0"/>
-              <a:t>&gt;</a:t>
-            </a:r>
-            <a:endParaRPr lang="ko-KR" altLang="en-US" sz="1200" dirty="0"/>
-          </a:p>
-        </p:txBody>
-      </p:sp>
-    </p:spTree>
-    <p:extLst>
-      <p:ext uri="{BB962C8B-B14F-4D97-AF65-F5344CB8AC3E}">
-        <p14:creationId xmlns:p14="http://schemas.microsoft.com/office/powerpoint/2010/main" val="641355397"/>
       </p:ext>
     </p:extLst>
   </p:cSld>
@@ -23207,6 +25627,1101 @@
   <p:cSld>
     <p:spTree>
       <p:nvGrpSpPr>
+        <p:cNvPr id="1" name="">
+          <a:extLst>
+            <a:ext uri="{FF2B5EF4-FFF2-40B4-BE49-F238E27FC236}">
+              <a16:creationId xmlns:a16="http://schemas.microsoft.com/office/drawing/2014/main" id="{64F91656-CF83-881D-5668-78733E15CC33}"/>
+            </a:ext>
+          </a:extLst>
+        </p:cNvPr>
+        <p:cNvGrpSpPr/>
+        <p:nvPr/>
+      </p:nvGrpSpPr>
+      <p:grpSpPr>
+        <a:xfrm>
+          <a:off x="0" y="0"/>
+          <a:ext cx="0" cy="0"/>
+          <a:chOff x="0" y="0"/>
+          <a:chExt cx="0" cy="0"/>
+        </a:xfrm>
+      </p:grpSpPr>
+      <p:sp>
+        <p:nvSpPr>
+          <p:cNvPr id="2" name="제목 1">
+            <a:extLst>
+              <a:ext uri="{FF2B5EF4-FFF2-40B4-BE49-F238E27FC236}">
+                <a16:creationId xmlns:a16="http://schemas.microsoft.com/office/drawing/2014/main" id="{4BD35B91-C44F-5C98-13D0-1FBEB27C5F42}"/>
+              </a:ext>
+            </a:extLst>
+          </p:cNvPr>
+          <p:cNvSpPr>
+            <a:spLocks noGrp="1"/>
+          </p:cNvSpPr>
+          <p:nvPr>
+            <p:ph type="title"/>
+          </p:nvPr>
+        </p:nvSpPr>
+        <p:spPr/>
+        <p:txBody>
+          <a:bodyPr/>
+          <a:lstStyle/>
+          <a:p>
+            <a:r>
+              <a:rPr lang="ko-KR" altLang="en-US" dirty="0" err="1"/>
+              <a:t>린달의</a:t>
+            </a:r>
+            <a:r>
+              <a:rPr lang="ko-KR" altLang="en-US" dirty="0"/>
+              <a:t> 자발적 교환 모형</a:t>
+            </a:r>
+          </a:p>
+        </p:txBody>
+      </p:sp>
+      <p:sp>
+        <p:nvSpPr>
+          <p:cNvPr id="4" name="슬라이드 번호 개체 틀 3">
+            <a:extLst>
+              <a:ext uri="{FF2B5EF4-FFF2-40B4-BE49-F238E27FC236}">
+                <a16:creationId xmlns:a16="http://schemas.microsoft.com/office/drawing/2014/main" id="{AC262C81-C342-1EE3-15AA-6002F89DE294}"/>
+              </a:ext>
+            </a:extLst>
+          </p:cNvPr>
+          <p:cNvSpPr>
+            <a:spLocks noGrp="1"/>
+          </p:cNvSpPr>
+          <p:nvPr>
+            <p:ph type="sldNum" sz="quarter" idx="12"/>
+          </p:nvPr>
+        </p:nvSpPr>
+        <p:spPr/>
+        <p:txBody>
+          <a:bodyPr/>
+          <a:lstStyle/>
+          <a:p>
+            <a:fld id="{109C872D-39A9-4065-8BF3-6A613116E2A1}" type="slidenum">
+              <a:rPr lang="ko-KR" altLang="en-US" smtClean="0"/>
+              <a:t>30</a:t>
+            </a:fld>
+            <a:endParaRPr lang="ko-KR" altLang="en-US"/>
+          </a:p>
+        </p:txBody>
+      </p:sp>
+      <p:sp>
+        <p:nvSpPr>
+          <p:cNvPr id="5" name="TextBox 4">
+            <a:extLst>
+              <a:ext uri="{FF2B5EF4-FFF2-40B4-BE49-F238E27FC236}">
+                <a16:creationId xmlns:a16="http://schemas.microsoft.com/office/drawing/2014/main" id="{4BD55F7A-F538-8C9A-1B41-EC7644B2DBDA}"/>
+              </a:ext>
+            </a:extLst>
+          </p:cNvPr>
+          <p:cNvSpPr txBox="1"/>
+          <p:nvPr/>
+        </p:nvSpPr>
+        <p:spPr>
+          <a:xfrm>
+            <a:off x="288790" y="958844"/>
+            <a:ext cx="11693660" cy="3368679"/>
+          </a:xfrm>
+          <a:prstGeom prst="rect">
+            <a:avLst/>
+          </a:prstGeom>
+          <a:noFill/>
+        </p:spPr>
+        <p:txBody>
+          <a:bodyPr wrap="square" rtlCol="0" anchor="t">
+            <a:spAutoFit/>
+          </a:bodyPr>
+          <a:lstStyle/>
+          <a:p>
+            <a:pPr marL="377825" indent="-285750">
+              <a:lnSpc>
+                <a:spcPct val="150000"/>
+              </a:lnSpc>
+              <a:buFont typeface="Arial" panose="020B0604020202020204" pitchFamily="34" charset="0"/>
+              <a:buChar char="•"/>
+            </a:pPr>
+            <a:r>
+              <a:rPr lang="ko-KR" altLang="en-US" sz="1600" dirty="0"/>
+              <a:t>공공재의 적절한 생산수준을 도출하였지만</a:t>
+            </a:r>
+            <a:r>
+              <a:rPr lang="en-US" altLang="ko-KR" sz="1600" dirty="0"/>
+              <a:t>, </a:t>
+            </a:r>
+            <a:r>
+              <a:rPr lang="ko-KR" altLang="en-US" sz="1600" dirty="0"/>
+              <a:t>그럼에도 불구하고 공공재는 </a:t>
+            </a:r>
+            <a:r>
+              <a:rPr lang="ko-KR" altLang="en-US" sz="1600" dirty="0" err="1"/>
+              <a:t>비경합</a:t>
+            </a:r>
+            <a:r>
+              <a:rPr lang="en-US" altLang="ko-KR" sz="1600" dirty="0"/>
+              <a:t>, </a:t>
+            </a:r>
+            <a:r>
+              <a:rPr lang="ko-KR" altLang="en-US" sz="1600" dirty="0"/>
+              <a:t>비배제성을 갖기 때문에 사람들 간의 거래가 이루어지기 어렵다</a:t>
+            </a:r>
+            <a:r>
+              <a:rPr lang="en-US" altLang="ko-KR" sz="1600" dirty="0"/>
+              <a:t>.</a:t>
+            </a:r>
+          </a:p>
+          <a:p>
+            <a:pPr marL="377825" indent="-285750">
+              <a:lnSpc>
+                <a:spcPct val="150000"/>
+              </a:lnSpc>
+              <a:buFont typeface="Arial" panose="020B0604020202020204" pitchFamily="34" charset="0"/>
+              <a:buChar char="•"/>
+            </a:pPr>
+            <a:endParaRPr lang="en-US" altLang="ko-KR" sz="1600" dirty="0"/>
+          </a:p>
+          <a:p>
+            <a:pPr marL="377825" indent="-285750">
+              <a:lnSpc>
+                <a:spcPct val="150000"/>
+              </a:lnSpc>
+              <a:buFont typeface="Arial" panose="020B0604020202020204" pitchFamily="34" charset="0"/>
+              <a:buChar char="•"/>
+            </a:pPr>
+            <a:r>
+              <a:rPr lang="ko-KR" altLang="en-US" sz="1600" dirty="0"/>
+              <a:t>스웨덴의 경제학자 </a:t>
+            </a:r>
+            <a:r>
+              <a:rPr lang="ko-KR" altLang="en-US" sz="1600" dirty="0" err="1"/>
+              <a:t>린달</a:t>
+            </a:r>
+            <a:r>
+              <a:rPr lang="ko-KR" altLang="en-US" sz="1600" dirty="0"/>
+              <a:t> </a:t>
+            </a:r>
+            <a:r>
+              <a:rPr lang="en-US" altLang="ko-KR" sz="1600" dirty="0"/>
+              <a:t>(</a:t>
+            </a:r>
+            <a:r>
+              <a:rPr lang="en-US" altLang="ko-KR" sz="1600" dirty="0" err="1"/>
+              <a:t>E.Lindahl</a:t>
+            </a:r>
+            <a:r>
+              <a:rPr lang="en-US" altLang="ko-KR" sz="1600" dirty="0"/>
+              <a:t>)</a:t>
+            </a:r>
+            <a:r>
+              <a:rPr lang="ko-KR" altLang="en-US" sz="1600" dirty="0"/>
+              <a:t>은 당사자간의 자발적 교환에 의해 공공재의 생산수준과 비용부담비율이 동시에 결정될 수 있는 모형을 제시하였다</a:t>
+            </a:r>
+            <a:r>
+              <a:rPr lang="en-US" altLang="ko-KR" sz="1600" dirty="0"/>
+              <a:t>.</a:t>
+            </a:r>
+          </a:p>
+          <a:p>
+            <a:pPr marL="835025" lvl="1" indent="-285750">
+              <a:lnSpc>
+                <a:spcPct val="150000"/>
+              </a:lnSpc>
+              <a:buFont typeface="Wingdings" panose="05000000000000000000" pitchFamily="2" charset="2"/>
+              <a:buChar char="ü"/>
+            </a:pPr>
+            <a:r>
+              <a:rPr lang="ko-KR" altLang="en-US" sz="1600" dirty="0"/>
+              <a:t>자발적 교환의 원리에 입각하고 있다는 측면에서 공공재 생산문제와 관련한 </a:t>
+            </a:r>
+            <a:r>
+              <a:rPr lang="en-US" altLang="ko-KR" sz="1600" dirty="0"/>
+              <a:t>‘</a:t>
+            </a:r>
+            <a:r>
+              <a:rPr lang="ko-KR" altLang="en-US" sz="1600" dirty="0"/>
+              <a:t>준시장적 해결책</a:t>
+            </a:r>
+            <a:r>
+              <a:rPr lang="en-US" altLang="ko-KR" sz="1600" dirty="0"/>
+              <a:t>’</a:t>
+            </a:r>
+            <a:r>
+              <a:rPr lang="ko-KR" altLang="en-US" sz="1600" dirty="0"/>
+              <a:t> 으로 불리고 있다</a:t>
+            </a:r>
+            <a:r>
+              <a:rPr lang="en-US" altLang="ko-KR" sz="1600" dirty="0"/>
+              <a:t>.</a:t>
+            </a:r>
+          </a:p>
+          <a:p>
+            <a:pPr marL="835025" lvl="1" indent="-285750">
+              <a:lnSpc>
+                <a:spcPct val="150000"/>
+              </a:lnSpc>
+              <a:buFont typeface="Wingdings" panose="05000000000000000000" pitchFamily="2" charset="2"/>
+              <a:buChar char="ü"/>
+            </a:pPr>
+            <a:r>
+              <a:rPr lang="ko-KR" altLang="en-US" sz="1600" dirty="0"/>
+              <a:t>하지만 </a:t>
+            </a:r>
+            <a:r>
+              <a:rPr lang="ko-KR" altLang="en-US" sz="1600" dirty="0" err="1"/>
+              <a:t>린달의</a:t>
+            </a:r>
+            <a:r>
+              <a:rPr lang="ko-KR" altLang="en-US" sz="1600" dirty="0"/>
+              <a:t> </a:t>
+            </a:r>
+            <a:r>
+              <a:rPr lang="ko-KR" altLang="en-US" sz="1600" dirty="0" err="1"/>
+              <a:t>자발작</a:t>
+            </a:r>
+            <a:r>
+              <a:rPr lang="ko-KR" altLang="en-US" sz="1600" dirty="0"/>
+              <a:t> 교환 모형은 이론적으로 생각할 수 있을 뿐 현실에서 발생하기는 힘든 이론이다</a:t>
+            </a:r>
+            <a:r>
+              <a:rPr lang="en-US" altLang="ko-KR" sz="1600" dirty="0"/>
+              <a:t>.</a:t>
+            </a:r>
+          </a:p>
+          <a:p>
+            <a:pPr marL="835025" lvl="1" indent="-285750">
+              <a:lnSpc>
+                <a:spcPct val="150000"/>
+              </a:lnSpc>
+              <a:buFont typeface="Wingdings" panose="05000000000000000000" pitchFamily="2" charset="2"/>
+              <a:buChar char="ü"/>
+            </a:pPr>
+            <a:endParaRPr lang="en-US" altLang="ko-KR" sz="1600" dirty="0"/>
+          </a:p>
+          <a:p>
+            <a:pPr marL="835025" lvl="1" indent="-285750">
+              <a:lnSpc>
+                <a:spcPct val="150000"/>
+              </a:lnSpc>
+              <a:buFont typeface="Wingdings" panose="05000000000000000000" pitchFamily="2" charset="2"/>
+              <a:buChar char="ü"/>
+            </a:pPr>
+            <a:endParaRPr lang="en-US" altLang="ko-KR" sz="1600" dirty="0"/>
+          </a:p>
+        </p:txBody>
+      </p:sp>
+    </p:spTree>
+    <p:extLst>
+      <p:ext uri="{BB962C8B-B14F-4D97-AF65-F5344CB8AC3E}">
+        <p14:creationId xmlns:p14="http://schemas.microsoft.com/office/powerpoint/2010/main" val="2746811465"/>
+      </p:ext>
+    </p:extLst>
+  </p:cSld>
+  <p:clrMapOvr>
+    <a:masterClrMapping/>
+  </p:clrMapOvr>
+</p:sld>
+</file>
+
+<file path=ppt/slides/slide31.xml><?xml version="1.0" encoding="utf-8"?>
+<p:sld xmlns:a="http://schemas.openxmlformats.org/drawingml/2006/main" xmlns:r="http://schemas.openxmlformats.org/officeDocument/2006/relationships" xmlns:p="http://schemas.openxmlformats.org/presentationml/2006/main">
+  <p:cSld>
+    <p:spTree>
+      <p:nvGrpSpPr>
+        <p:cNvPr id="1" name="">
+          <a:extLst>
+            <a:ext uri="{FF2B5EF4-FFF2-40B4-BE49-F238E27FC236}">
+              <a16:creationId xmlns:a16="http://schemas.microsoft.com/office/drawing/2014/main" id="{EEED11CB-3F22-5253-72CF-11C673C342D4}"/>
+            </a:ext>
+          </a:extLst>
+        </p:cNvPr>
+        <p:cNvGrpSpPr/>
+        <p:nvPr/>
+      </p:nvGrpSpPr>
+      <p:grpSpPr>
+        <a:xfrm>
+          <a:off x="0" y="0"/>
+          <a:ext cx="0" cy="0"/>
+          <a:chOff x="0" y="0"/>
+          <a:chExt cx="0" cy="0"/>
+        </a:xfrm>
+      </p:grpSpPr>
+      <p:sp>
+        <p:nvSpPr>
+          <p:cNvPr id="2" name="제목 1">
+            <a:extLst>
+              <a:ext uri="{FF2B5EF4-FFF2-40B4-BE49-F238E27FC236}">
+                <a16:creationId xmlns:a16="http://schemas.microsoft.com/office/drawing/2014/main" id="{DBC2ADE2-3510-D5FB-C528-0C63AB96DED7}"/>
+              </a:ext>
+            </a:extLst>
+          </p:cNvPr>
+          <p:cNvSpPr>
+            <a:spLocks noGrp="1"/>
+          </p:cNvSpPr>
+          <p:nvPr>
+            <p:ph type="title"/>
+          </p:nvPr>
+        </p:nvSpPr>
+        <p:spPr/>
+        <p:txBody>
+          <a:bodyPr/>
+          <a:lstStyle/>
+          <a:p>
+            <a:r>
+              <a:rPr lang="ko-KR" altLang="en-US" dirty="0" err="1"/>
+              <a:t>린달의</a:t>
+            </a:r>
+            <a:r>
+              <a:rPr lang="ko-KR" altLang="en-US" dirty="0"/>
+              <a:t> 자발적 교환 모형</a:t>
+            </a:r>
+          </a:p>
+        </p:txBody>
+      </p:sp>
+      <p:sp>
+        <p:nvSpPr>
+          <p:cNvPr id="4" name="슬라이드 번호 개체 틀 3">
+            <a:extLst>
+              <a:ext uri="{FF2B5EF4-FFF2-40B4-BE49-F238E27FC236}">
+                <a16:creationId xmlns:a16="http://schemas.microsoft.com/office/drawing/2014/main" id="{436A5EA4-C4B7-06EA-5640-7EB6C82AB783}"/>
+              </a:ext>
+            </a:extLst>
+          </p:cNvPr>
+          <p:cNvSpPr>
+            <a:spLocks noGrp="1"/>
+          </p:cNvSpPr>
+          <p:nvPr>
+            <p:ph type="sldNum" sz="quarter" idx="12"/>
+          </p:nvPr>
+        </p:nvSpPr>
+        <p:spPr/>
+        <p:txBody>
+          <a:bodyPr/>
+          <a:lstStyle/>
+          <a:p>
+            <a:fld id="{109C872D-39A9-4065-8BF3-6A613116E2A1}" type="slidenum">
+              <a:rPr lang="ko-KR" altLang="en-US" smtClean="0"/>
+              <a:t>31</a:t>
+            </a:fld>
+            <a:endParaRPr lang="ko-KR" altLang="en-US"/>
+          </a:p>
+        </p:txBody>
+      </p:sp>
+      <p:pic>
+        <p:nvPicPr>
+          <p:cNvPr id="7" name="그림 6" descr="라인, 도표, 그래프, 텍스트이(가) 표시된 사진&#10;&#10;AI 생성 콘텐츠는 정확하지 않을 수 있습니다.">
+            <a:extLst>
+              <a:ext uri="{FF2B5EF4-FFF2-40B4-BE49-F238E27FC236}">
+                <a16:creationId xmlns:a16="http://schemas.microsoft.com/office/drawing/2014/main" id="{B8DD7DA5-EBFF-EAB0-CCA6-04D96F5871CF}"/>
+              </a:ext>
+            </a:extLst>
+          </p:cNvPr>
+          <p:cNvPicPr>
+            <a:picLocks noChangeAspect="1"/>
+          </p:cNvPicPr>
+          <p:nvPr/>
+        </p:nvPicPr>
+        <p:blipFill>
+          <a:blip r:embed="rId2"/>
+          <a:stretch>
+            <a:fillRect/>
+          </a:stretch>
+        </p:blipFill>
+        <p:spPr>
+          <a:xfrm>
+            <a:off x="5449068" y="4248727"/>
+            <a:ext cx="3906597" cy="2288180"/>
+          </a:xfrm>
+          <a:prstGeom prst="rect">
+            <a:avLst/>
+          </a:prstGeom>
+        </p:spPr>
+      </p:pic>
+      <mc:AlternateContent xmlns:mc="http://schemas.openxmlformats.org/markup-compatibility/2006" xmlns:a14="http://schemas.microsoft.com/office/drawing/2010/main">
+        <mc:Choice Requires="a14">
+          <p:sp>
+            <p:nvSpPr>
+              <p:cNvPr id="8" name="TextBox 7">
+                <a:extLst>
+                  <a:ext uri="{FF2B5EF4-FFF2-40B4-BE49-F238E27FC236}">
+                    <a16:creationId xmlns:a16="http://schemas.microsoft.com/office/drawing/2014/main" id="{7E7DF6D8-7CC1-6320-7827-782893E1CC4F}"/>
+                  </a:ext>
+                </a:extLst>
+              </p:cNvPr>
+              <p:cNvSpPr txBox="1"/>
+              <p:nvPr/>
+            </p:nvSpPr>
+            <p:spPr>
+              <a:xfrm>
+                <a:off x="288790" y="958844"/>
+                <a:ext cx="11693660" cy="4476675"/>
+              </a:xfrm>
+              <a:prstGeom prst="rect">
+                <a:avLst/>
+              </a:prstGeom>
+              <a:noFill/>
+            </p:spPr>
+            <p:txBody>
+              <a:bodyPr wrap="square" rtlCol="0" anchor="t">
+                <a:spAutoFit/>
+              </a:bodyPr>
+              <a:lstStyle/>
+              <a:p>
+                <a:pPr marL="377825" indent="-285750">
+                  <a:lnSpc>
+                    <a:spcPct val="150000"/>
+                  </a:lnSpc>
+                  <a:buFont typeface="Arial" panose="020B0604020202020204" pitchFamily="34" charset="0"/>
+                  <a:buChar char="•"/>
+                </a:pPr>
+                <a:r>
+                  <a:rPr lang="ko-KR" altLang="en-US" sz="1600" dirty="0"/>
+                  <a:t>아래 그림은 </a:t>
+                </a:r>
+                <a:r>
+                  <a:rPr lang="ko-KR" altLang="en-US" sz="1600" dirty="0" err="1"/>
+                  <a:t>린달의</a:t>
+                </a:r>
+                <a:r>
+                  <a:rPr lang="ko-KR" altLang="en-US" sz="1600" dirty="0"/>
+                  <a:t> 자발적 교환 모형을 설명하고 있다</a:t>
+                </a:r>
+                <a:r>
+                  <a:rPr lang="en-US" altLang="ko-KR" sz="1600" dirty="0"/>
+                  <a:t>. A, B </a:t>
+                </a:r>
+                <a:r>
+                  <a:rPr lang="ko-KR" altLang="en-US" sz="1600" dirty="0"/>
+                  <a:t>두 사람만이 있고</a:t>
+                </a:r>
+                <a:r>
+                  <a:rPr lang="en-US" altLang="ko-KR" sz="1600" dirty="0"/>
+                  <a:t>, </a:t>
+                </a:r>
+                <a:r>
+                  <a:rPr lang="ko-KR" altLang="en-US" sz="1600" dirty="0"/>
+                  <a:t>공공재 생산의 단위비용은 생산수준과 관계없이 </a:t>
+                </a:r>
+                <a:r>
+                  <a:rPr lang="en-US" altLang="ko-KR" sz="1600" dirty="0"/>
+                  <a:t>1</a:t>
+                </a:r>
+                <a:r>
+                  <a:rPr lang="ko-KR" altLang="en-US" sz="1600" dirty="0"/>
+                  <a:t>원으로 일정하다고 하자</a:t>
+                </a:r>
+                <a:r>
+                  <a:rPr lang="en-US" altLang="ko-KR" sz="1600" dirty="0"/>
+                  <a:t>.</a:t>
+                </a:r>
+              </a:p>
+              <a:p>
+                <a:pPr marL="835025" lvl="1" indent="-285750">
+                  <a:lnSpc>
+                    <a:spcPct val="150000"/>
+                  </a:lnSpc>
+                  <a:buFont typeface="Wingdings" panose="05000000000000000000" pitchFamily="2" charset="2"/>
+                  <a:buChar char="ü"/>
+                </a:pPr>
+                <a:r>
+                  <a:rPr lang="ko-KR" altLang="en-US" sz="1600" dirty="0"/>
+                  <a:t>왼쪽 아래의 모서리 </a:t>
+                </a:r>
+                <a14:m>
+                  <m:oMath xmlns:m="http://schemas.openxmlformats.org/officeDocument/2006/math">
+                    <m:sSub>
+                      <m:sSubPr>
+                        <m:ctrlPr>
+                          <a:rPr lang="en-US" altLang="ko-KR" sz="1600" i="1">
+                            <a:latin typeface="Cambria Math" panose="02040503050406030204" pitchFamily="18" charset="0"/>
+                          </a:rPr>
+                        </m:ctrlPr>
+                      </m:sSubPr>
+                      <m:e>
+                        <m:r>
+                          <a:rPr lang="en-US" altLang="ko-KR" sz="1600" b="0" i="1" smtClean="0">
+                            <a:latin typeface="Cambria Math" panose="02040503050406030204" pitchFamily="18" charset="0"/>
+                          </a:rPr>
+                          <m:t>𝑂</m:t>
+                        </m:r>
+                      </m:e>
+                      <m:sub>
+                        <m:r>
+                          <a:rPr lang="en-US" altLang="ko-KR" sz="1600" b="0" i="1" smtClean="0">
+                            <a:latin typeface="Cambria Math" panose="02040503050406030204" pitchFamily="18" charset="0"/>
+                          </a:rPr>
+                          <m:t>𝐴</m:t>
+                        </m:r>
+                      </m:sub>
+                    </m:sSub>
+                  </m:oMath>
+                </a14:m>
+                <a:r>
+                  <a:rPr lang="ko-KR" altLang="en-US" sz="1600" dirty="0"/>
+                  <a:t>는 </a:t>
+                </a:r>
+                <a:r>
+                  <a:rPr lang="en-US" altLang="ko-KR" sz="1600" dirty="0"/>
+                  <a:t>A</a:t>
+                </a:r>
+                <a:r>
+                  <a:rPr lang="ko-KR" altLang="en-US" sz="1600" dirty="0"/>
+                  <a:t>의 원점을 나타내고</a:t>
+                </a:r>
+                <a:r>
+                  <a:rPr lang="en-US" altLang="ko-KR" sz="1600" dirty="0"/>
+                  <a:t>, </a:t>
+                </a:r>
+                <a:r>
+                  <a:rPr lang="ko-KR" altLang="en-US" sz="1600" dirty="0"/>
+                  <a:t>수평축으로는 공공재의 양을 측정한다</a:t>
+                </a:r>
+                <a:r>
+                  <a:rPr lang="en-US" altLang="ko-KR" sz="1600" dirty="0"/>
+                  <a:t>.</a:t>
+                </a:r>
+              </a:p>
+              <a:p>
+                <a:pPr marL="835025" lvl="1" indent="-285750">
+                  <a:lnSpc>
+                    <a:spcPct val="150000"/>
+                  </a:lnSpc>
+                  <a:buFont typeface="Wingdings" panose="05000000000000000000" pitchFamily="2" charset="2"/>
+                  <a:buChar char="ü"/>
+                </a:pPr>
+                <a:r>
+                  <a:rPr lang="ko-KR" altLang="en-US" sz="1600" dirty="0" err="1"/>
+                  <a:t>수직축으로는</a:t>
+                </a:r>
+                <a:r>
+                  <a:rPr lang="ko-KR" altLang="en-US" sz="1600" dirty="0"/>
+                  <a:t> 단위생산비용 중 </a:t>
+                </a:r>
+                <a:r>
+                  <a:rPr lang="en-US" altLang="ko-KR" sz="1600" dirty="0"/>
+                  <a:t>A</a:t>
+                </a:r>
+                <a:r>
+                  <a:rPr lang="ko-KR" altLang="en-US" sz="1600" dirty="0"/>
+                  <a:t>가 부담해야 하는 비율</a:t>
+                </a:r>
+                <a:r>
+                  <a:rPr lang="en-US" altLang="ko-KR" sz="1600" dirty="0"/>
+                  <a:t>(</a:t>
+                </a:r>
+                <a14:m>
+                  <m:oMath xmlns:m="http://schemas.openxmlformats.org/officeDocument/2006/math">
+                    <m:r>
+                      <a:rPr lang="en-US" altLang="ko-KR" sz="1600" b="0" i="1" smtClean="0">
+                        <a:latin typeface="Cambria Math" panose="02040503050406030204" pitchFamily="18" charset="0"/>
+                      </a:rPr>
+                      <m:t>𝑘</m:t>
+                    </m:r>
+                  </m:oMath>
+                </a14:m>
+                <a:r>
+                  <a:rPr lang="en-US" altLang="ko-KR" sz="1600" dirty="0"/>
+                  <a:t>)</a:t>
+                </a:r>
+                <a:r>
+                  <a:rPr lang="ko-KR" altLang="en-US" sz="1600" dirty="0"/>
+                  <a:t>이 측정되고 있다</a:t>
+                </a:r>
+                <a:r>
+                  <a:rPr lang="en-US" altLang="ko-KR" sz="1600" dirty="0"/>
+                  <a:t>. </a:t>
+                </a:r>
+              </a:p>
+              <a:p>
+                <a:pPr marL="835025" lvl="1" indent="-285750">
+                  <a:lnSpc>
+                    <a:spcPct val="150000"/>
+                  </a:lnSpc>
+                  <a:buFont typeface="Wingdings" panose="05000000000000000000" pitchFamily="2" charset="2"/>
+                  <a:buChar char="ü"/>
+                </a:pPr>
+                <a:r>
+                  <a:rPr lang="ko-KR" altLang="en-US" sz="1600" dirty="0"/>
+                  <a:t>원점 </a:t>
+                </a:r>
+                <a14:m>
+                  <m:oMath xmlns:m="http://schemas.openxmlformats.org/officeDocument/2006/math">
+                    <m:sSub>
+                      <m:sSubPr>
+                        <m:ctrlPr>
+                          <a:rPr lang="en-US" altLang="ko-KR" sz="1600" i="1">
+                            <a:latin typeface="Cambria Math" panose="02040503050406030204" pitchFamily="18" charset="0"/>
+                          </a:rPr>
+                        </m:ctrlPr>
+                      </m:sSubPr>
+                      <m:e>
+                        <m:r>
+                          <a:rPr lang="en-US" altLang="ko-KR" sz="1600" i="1">
+                            <a:latin typeface="Cambria Math" panose="02040503050406030204" pitchFamily="18" charset="0"/>
+                          </a:rPr>
+                          <m:t>𝑂</m:t>
+                        </m:r>
+                      </m:e>
+                      <m:sub>
+                        <m:r>
+                          <a:rPr lang="en-US" altLang="ko-KR" sz="1600" i="1">
+                            <a:latin typeface="Cambria Math" panose="02040503050406030204" pitchFamily="18" charset="0"/>
+                          </a:rPr>
+                          <m:t>𝐴</m:t>
+                        </m:r>
+                      </m:sub>
+                    </m:sSub>
+                  </m:oMath>
+                </a14:m>
+                <a:r>
+                  <a:rPr lang="ko-KR" altLang="en-US" sz="1600" dirty="0"/>
+                  <a:t>에서 </a:t>
+                </a:r>
+                <a14:m>
+                  <m:oMath xmlns:m="http://schemas.openxmlformats.org/officeDocument/2006/math">
+                    <m:r>
+                      <a:rPr lang="en-US" altLang="ko-KR" sz="1600" i="1">
+                        <a:latin typeface="Cambria Math" panose="02040503050406030204" pitchFamily="18" charset="0"/>
+                      </a:rPr>
+                      <m:t>𝑘</m:t>
+                    </m:r>
+                  </m:oMath>
+                </a14:m>
+                <a:r>
+                  <a:rPr lang="ko-KR" altLang="en-US" sz="1600" dirty="0"/>
+                  <a:t>는 </a:t>
+                </a:r>
+                <a:r>
+                  <a:rPr lang="en-US" altLang="ko-KR" sz="1600" dirty="0"/>
+                  <a:t>0</a:t>
+                </a:r>
+                <a:r>
+                  <a:rPr lang="ko-KR" altLang="en-US" sz="1600" dirty="0"/>
+                  <a:t>의 값을 갖는데</a:t>
+                </a:r>
+                <a:r>
+                  <a:rPr lang="en-US" altLang="ko-KR" sz="1600" dirty="0"/>
+                  <a:t>, </a:t>
+                </a:r>
+                <a:r>
+                  <a:rPr lang="ko-KR" altLang="en-US" sz="1600" dirty="0"/>
+                  <a:t>위로 올라갈수록 커지며 맨 위까지 올라가면 </a:t>
+                </a:r>
+                <a:r>
+                  <a:rPr lang="en-US" altLang="ko-KR" sz="1600" dirty="0"/>
+                  <a:t>1</a:t>
+                </a:r>
+                <a:r>
+                  <a:rPr lang="ko-KR" altLang="en-US" sz="1600" dirty="0"/>
+                  <a:t>의 값을 갖는다</a:t>
+                </a:r>
+                <a:r>
+                  <a:rPr lang="en-US" altLang="ko-KR" sz="1600" dirty="0"/>
+                  <a:t>.</a:t>
+                </a:r>
+              </a:p>
+              <a:p>
+                <a:pPr marL="835025" lvl="1" indent="-285750">
+                  <a:lnSpc>
+                    <a:spcPct val="150000"/>
+                  </a:lnSpc>
+                  <a:buFont typeface="Wingdings" panose="05000000000000000000" pitchFamily="2" charset="2"/>
+                  <a:buChar char="ü"/>
+                </a:pPr>
+                <a:r>
+                  <a:rPr lang="ko-KR" altLang="en-US" sz="1600" dirty="0"/>
+                  <a:t>한편 오른쪽 아래의 모서리 </a:t>
+                </a:r>
+                <a14:m>
+                  <m:oMath xmlns:m="http://schemas.openxmlformats.org/officeDocument/2006/math">
+                    <m:sSub>
+                      <m:sSubPr>
+                        <m:ctrlPr>
+                          <a:rPr lang="en-US" altLang="ko-KR" sz="1600" i="1">
+                            <a:latin typeface="Cambria Math" panose="02040503050406030204" pitchFamily="18" charset="0"/>
+                          </a:rPr>
+                        </m:ctrlPr>
+                      </m:sSubPr>
+                      <m:e>
+                        <m:r>
+                          <a:rPr lang="en-US" altLang="ko-KR" sz="1600" i="1">
+                            <a:latin typeface="Cambria Math" panose="02040503050406030204" pitchFamily="18" charset="0"/>
+                          </a:rPr>
+                          <m:t>𝑂</m:t>
+                        </m:r>
+                      </m:e>
+                      <m:sub>
+                        <m:r>
+                          <a:rPr lang="en-US" altLang="ko-KR" sz="1600" b="0" i="1" smtClean="0">
+                            <a:latin typeface="Cambria Math" panose="02040503050406030204" pitchFamily="18" charset="0"/>
+                          </a:rPr>
+                          <m:t>𝐵</m:t>
+                        </m:r>
+                      </m:sub>
+                    </m:sSub>
+                  </m:oMath>
+                </a14:m>
+                <a:r>
+                  <a:rPr lang="ko-KR" altLang="en-US" sz="1600" dirty="0"/>
+                  <a:t>는 </a:t>
+                </a:r>
+                <a:r>
+                  <a:rPr lang="en-US" altLang="ko-KR" sz="1600" dirty="0"/>
+                  <a:t>B</a:t>
+                </a:r>
+                <a:r>
+                  <a:rPr lang="ko-KR" altLang="en-US" sz="1600" dirty="0"/>
+                  <a:t>의 원점을 나타내고</a:t>
+                </a:r>
+                <a:r>
+                  <a:rPr lang="en-US" altLang="ko-KR" sz="1600" dirty="0"/>
+                  <a:t>, </a:t>
+                </a:r>
+                <a:r>
+                  <a:rPr lang="ko-KR" altLang="en-US" sz="1600" dirty="0"/>
+                  <a:t>수평축으로는 마찬가지로 공공재의 양을 측정한다</a:t>
+                </a:r>
+                <a:r>
+                  <a:rPr lang="en-US" altLang="ko-KR" sz="1600" dirty="0"/>
+                  <a:t>.</a:t>
+                </a:r>
+              </a:p>
+              <a:p>
+                <a:pPr marL="835025" lvl="1" indent="-285750">
+                  <a:lnSpc>
+                    <a:spcPct val="150000"/>
+                  </a:lnSpc>
+                  <a:buFont typeface="Wingdings" panose="05000000000000000000" pitchFamily="2" charset="2"/>
+                  <a:buChar char="ü"/>
+                </a:pPr>
+                <a:r>
+                  <a:rPr lang="ko-KR" altLang="en-US" sz="1600" dirty="0"/>
+                  <a:t>수직축으로는 단위생산비용 중 </a:t>
+                </a:r>
+                <a:r>
+                  <a:rPr lang="en-US" altLang="ko-KR" sz="1600" dirty="0"/>
+                  <a:t>B</a:t>
+                </a:r>
+                <a:r>
+                  <a:rPr lang="ko-KR" altLang="en-US" sz="1600" dirty="0"/>
+                  <a:t>가 부담해야 하는 비율</a:t>
+                </a:r>
+                <a:r>
+                  <a:rPr lang="en-US" altLang="ko-KR" sz="1600" dirty="0"/>
+                  <a:t>(</a:t>
+                </a:r>
+                <a14:m>
+                  <m:oMath xmlns:m="http://schemas.openxmlformats.org/officeDocument/2006/math">
+                    <m:r>
+                      <a:rPr lang="en-US" altLang="ko-KR" sz="1600" b="0" i="1" smtClean="0">
+                        <a:latin typeface="Cambria Math" panose="02040503050406030204" pitchFamily="18" charset="0"/>
+                      </a:rPr>
+                      <m:t>h</m:t>
+                    </m:r>
+                  </m:oMath>
+                </a14:m>
+                <a:r>
+                  <a:rPr lang="en-US" altLang="ko-KR" sz="1600" dirty="0"/>
+                  <a:t>)</a:t>
+                </a:r>
+                <a:r>
+                  <a:rPr lang="ko-KR" altLang="en-US" sz="1600" dirty="0"/>
+                  <a:t>이 측정되고 있다</a:t>
+                </a:r>
+                <a:r>
+                  <a:rPr lang="en-US" altLang="ko-KR" sz="1600" dirty="0"/>
+                  <a:t>.</a:t>
+                </a:r>
+              </a:p>
+              <a:p>
+                <a:pPr marL="835025" lvl="1" indent="-285750">
+                  <a:lnSpc>
+                    <a:spcPct val="150000"/>
+                  </a:lnSpc>
+                  <a:buFont typeface="Wingdings" panose="05000000000000000000" pitchFamily="2" charset="2"/>
+                  <a:buChar char="ü"/>
+                </a:pPr>
+                <a:r>
+                  <a:rPr lang="ko-KR" altLang="en-US" sz="1600" dirty="0"/>
+                  <a:t>원점 </a:t>
+                </a:r>
+                <a14:m>
+                  <m:oMath xmlns:m="http://schemas.openxmlformats.org/officeDocument/2006/math">
+                    <m:sSub>
+                      <m:sSubPr>
+                        <m:ctrlPr>
+                          <a:rPr lang="en-US" altLang="ko-KR" sz="1600" i="1">
+                            <a:latin typeface="Cambria Math" panose="02040503050406030204" pitchFamily="18" charset="0"/>
+                          </a:rPr>
+                        </m:ctrlPr>
+                      </m:sSubPr>
+                      <m:e>
+                        <m:r>
+                          <a:rPr lang="en-US" altLang="ko-KR" sz="1600" i="1">
+                            <a:latin typeface="Cambria Math" panose="02040503050406030204" pitchFamily="18" charset="0"/>
+                          </a:rPr>
+                          <m:t>𝑂</m:t>
+                        </m:r>
+                      </m:e>
+                      <m:sub>
+                        <m:r>
+                          <a:rPr lang="en-US" altLang="ko-KR" sz="1600" b="0" i="1" smtClean="0">
+                            <a:latin typeface="Cambria Math" panose="02040503050406030204" pitchFamily="18" charset="0"/>
+                          </a:rPr>
+                          <m:t>𝐵</m:t>
+                        </m:r>
+                      </m:sub>
+                    </m:sSub>
+                  </m:oMath>
+                </a14:m>
+                <a:r>
+                  <a:rPr lang="ko-KR" altLang="en-US" sz="1600" dirty="0"/>
+                  <a:t>에서 </a:t>
+                </a:r>
+                <a14:m>
+                  <m:oMath xmlns:m="http://schemas.openxmlformats.org/officeDocument/2006/math">
+                    <m:r>
+                      <a:rPr lang="en-US" altLang="ko-KR" sz="1600" b="0" i="1" smtClean="0">
+                        <a:latin typeface="Cambria Math" panose="02040503050406030204" pitchFamily="18" charset="0"/>
+                      </a:rPr>
+                      <m:t>h</m:t>
+                    </m:r>
+                  </m:oMath>
+                </a14:m>
+                <a:r>
+                  <a:rPr lang="ko-KR" altLang="en-US" sz="1600" dirty="0"/>
+                  <a:t>는 </a:t>
+                </a:r>
+                <a:r>
+                  <a:rPr lang="en-US" altLang="ko-KR" sz="1600" dirty="0"/>
+                  <a:t>0</a:t>
+                </a:r>
+                <a:r>
+                  <a:rPr lang="ko-KR" altLang="en-US" sz="1600" dirty="0"/>
+                  <a:t>의 값을 갖는데</a:t>
+                </a:r>
+                <a:r>
+                  <a:rPr lang="en-US" altLang="ko-KR" sz="1600" dirty="0"/>
+                  <a:t>, </a:t>
+                </a:r>
+                <a:r>
+                  <a:rPr lang="ko-KR" altLang="en-US" sz="1600" dirty="0"/>
+                  <a:t>아래로 내려갈수록 커지며 맨 아래까지 내려가면 </a:t>
+                </a:r>
+                <a:r>
+                  <a:rPr lang="en-US" altLang="ko-KR" sz="1600" dirty="0"/>
+                  <a:t>1</a:t>
+                </a:r>
+                <a:r>
+                  <a:rPr lang="ko-KR" altLang="en-US" sz="1600" dirty="0"/>
+                  <a:t>의 값을 갖는다</a:t>
+                </a:r>
+                <a:r>
+                  <a:rPr lang="en-US" altLang="ko-KR" sz="1600" dirty="0"/>
+                  <a:t>.</a:t>
+                </a:r>
+              </a:p>
+              <a:p>
+                <a:pPr marL="835025" lvl="1" indent="-285750">
+                  <a:lnSpc>
+                    <a:spcPct val="150000"/>
+                  </a:lnSpc>
+                  <a:buFont typeface="Wingdings" panose="05000000000000000000" pitchFamily="2" charset="2"/>
+                  <a:buChar char="ü"/>
+                </a:pPr>
+                <a14:m>
+                  <m:oMath xmlns:m="http://schemas.openxmlformats.org/officeDocument/2006/math">
+                    <m:r>
+                      <a:rPr lang="en-US" altLang="ko-KR" sz="1600" i="1">
+                        <a:latin typeface="Cambria Math" panose="02040503050406030204" pitchFamily="18" charset="0"/>
+                      </a:rPr>
+                      <m:t>𝑘</m:t>
+                    </m:r>
+                  </m:oMath>
+                </a14:m>
+                <a:r>
+                  <a:rPr lang="ko-KR" altLang="en-US" sz="1600" dirty="0"/>
+                  <a:t>와 </a:t>
+                </a:r>
+                <a14:m>
+                  <m:oMath xmlns:m="http://schemas.openxmlformats.org/officeDocument/2006/math">
+                    <m:r>
+                      <a:rPr lang="en-US" altLang="ko-KR" sz="1600" i="1">
+                        <a:latin typeface="Cambria Math" panose="02040503050406030204" pitchFamily="18" charset="0"/>
+                      </a:rPr>
+                      <m:t>h</m:t>
+                    </m:r>
+                  </m:oMath>
+                </a14:m>
+                <a:r>
+                  <a:rPr lang="en-US" altLang="ko-KR" sz="1600" dirty="0"/>
+                  <a:t> </a:t>
+                </a:r>
+                <a:r>
+                  <a:rPr lang="ko-KR" altLang="en-US" sz="1600" dirty="0"/>
+                  <a:t>값을 더한 것은 언제나 </a:t>
+                </a:r>
+                <a:r>
+                  <a:rPr lang="en-US" altLang="ko-KR" sz="1600" dirty="0"/>
+                  <a:t>1</a:t>
+                </a:r>
+                <a:r>
+                  <a:rPr lang="ko-KR" altLang="en-US" sz="1600" dirty="0"/>
+                  <a:t>이다</a:t>
+                </a:r>
+                <a:r>
+                  <a:rPr lang="en-US" altLang="ko-KR" sz="1600" dirty="0"/>
+                  <a:t>.</a:t>
+                </a:r>
+              </a:p>
+              <a:p>
+                <a:pPr marL="835025" lvl="1" indent="-285750">
+                  <a:lnSpc>
+                    <a:spcPct val="150000"/>
+                  </a:lnSpc>
+                  <a:buFont typeface="Wingdings" panose="05000000000000000000" pitchFamily="2" charset="2"/>
+                  <a:buChar char="ü"/>
+                </a:pPr>
+                <a:endParaRPr lang="en-US" altLang="ko-KR" sz="1600" dirty="0"/>
+              </a:p>
+              <a:p>
+                <a:pPr marL="377825" indent="-285750">
+                  <a:lnSpc>
+                    <a:spcPct val="150000"/>
+                  </a:lnSpc>
+                  <a:buFont typeface="Arial" panose="020B0604020202020204" pitchFamily="34" charset="0"/>
+                  <a:buChar char="•"/>
+                </a:pPr>
+                <a:endParaRPr lang="en-US" altLang="ko-KR" sz="1600" dirty="0"/>
+              </a:p>
+              <a:p>
+                <a:pPr marL="835025" lvl="1" indent="-285750">
+                  <a:lnSpc>
+                    <a:spcPct val="150000"/>
+                  </a:lnSpc>
+                  <a:buFont typeface="Wingdings" panose="05000000000000000000" pitchFamily="2" charset="2"/>
+                  <a:buChar char="ü"/>
+                </a:pPr>
+                <a:endParaRPr lang="en-US" altLang="ko-KR" sz="1600" dirty="0"/>
+              </a:p>
+            </p:txBody>
+          </p:sp>
+        </mc:Choice>
+        <mc:Fallback xmlns="">
+          <p:sp>
+            <p:nvSpPr>
+              <p:cNvPr id="8" name="TextBox 7">
+                <a:extLst>
+                  <a:ext uri="{FF2B5EF4-FFF2-40B4-BE49-F238E27FC236}">
+                    <a16:creationId xmlns:a16="http://schemas.microsoft.com/office/drawing/2014/main" id="{7E7DF6D8-7CC1-6320-7827-782893E1CC4F}"/>
+                  </a:ext>
+                </a:extLst>
+              </p:cNvPr>
+              <p:cNvSpPr txBox="1">
+                <a:spLocks noRot="1" noChangeAspect="1" noMove="1" noResize="1" noEditPoints="1" noAdjustHandles="1" noChangeArrowheads="1" noChangeShapeType="1" noTextEdit="1"/>
+              </p:cNvSpPr>
+              <p:nvPr/>
+            </p:nvSpPr>
+            <p:spPr>
+              <a:xfrm>
+                <a:off x="288790" y="958844"/>
+                <a:ext cx="11693660" cy="4476675"/>
+              </a:xfrm>
+              <a:prstGeom prst="rect">
+                <a:avLst/>
+              </a:prstGeom>
+              <a:blipFill>
+                <a:blip r:embed="rId3"/>
+                <a:stretch>
+                  <a:fillRect/>
+                </a:stretch>
+              </a:blipFill>
+            </p:spPr>
+            <p:txBody>
+              <a:bodyPr/>
+              <a:lstStyle/>
+              <a:p>
+                <a:r>
+                  <a:rPr lang="ko-KR" altLang="en-US">
+                    <a:noFill/>
+                  </a:rPr>
+                  <a:t> </a:t>
+                </a:r>
+              </a:p>
+            </p:txBody>
+          </p:sp>
+        </mc:Fallback>
+      </mc:AlternateContent>
+      <p:sp>
+        <p:nvSpPr>
+          <p:cNvPr id="10" name="TextBox 9">
+            <a:extLst>
+              <a:ext uri="{FF2B5EF4-FFF2-40B4-BE49-F238E27FC236}">
+                <a16:creationId xmlns:a16="http://schemas.microsoft.com/office/drawing/2014/main" id="{A2434506-FAAC-F82C-A25D-CF6A0E0B2F49}"/>
+              </a:ext>
+            </a:extLst>
+          </p:cNvPr>
+          <p:cNvSpPr txBox="1"/>
+          <p:nvPr/>
+        </p:nvSpPr>
+        <p:spPr>
+          <a:xfrm>
+            <a:off x="5853962" y="4035234"/>
+            <a:ext cx="3580080" cy="276999"/>
+          </a:xfrm>
+          <a:prstGeom prst="rect">
+            <a:avLst/>
+          </a:prstGeom>
+          <a:noFill/>
+        </p:spPr>
+        <p:txBody>
+          <a:bodyPr wrap="square">
+            <a:spAutoFit/>
+          </a:bodyPr>
+          <a:lstStyle/>
+          <a:p>
+            <a:pPr algn="ctr"/>
+            <a:r>
+              <a:rPr lang="en-US" altLang="ko-KR" sz="1200" spc="-50" dirty="0"/>
+              <a:t>&lt;</a:t>
+            </a:r>
+            <a:r>
+              <a:rPr lang="ko-KR" altLang="en-US" sz="1200" spc="-50" dirty="0" err="1"/>
+              <a:t>린달모형</a:t>
+            </a:r>
+            <a:r>
+              <a:rPr lang="en-US" altLang="ko-KR" sz="1200" spc="-50" dirty="0"/>
+              <a:t>: </a:t>
+            </a:r>
+            <a:r>
+              <a:rPr lang="ko-KR" altLang="en-US" sz="1200" spc="-50" dirty="0"/>
+              <a:t>수요곡선의 도출</a:t>
+            </a:r>
+            <a:r>
+              <a:rPr lang="en-US" altLang="ko-KR" sz="1200" spc="-50" dirty="0"/>
+              <a:t>&gt;</a:t>
+            </a:r>
+            <a:endParaRPr lang="ko-KR" altLang="en-US" sz="1200" dirty="0"/>
+          </a:p>
+        </p:txBody>
+      </p:sp>
+    </p:spTree>
+    <p:extLst>
+      <p:ext uri="{BB962C8B-B14F-4D97-AF65-F5344CB8AC3E}">
+        <p14:creationId xmlns:p14="http://schemas.microsoft.com/office/powerpoint/2010/main" val="641355397"/>
+      </p:ext>
+    </p:extLst>
+  </p:cSld>
+  <p:clrMapOvr>
+    <a:masterClrMapping/>
+  </p:clrMapOvr>
+</p:sld>
+</file>
+
+<file path=ppt/slides/slide32.xml><?xml version="1.0" encoding="utf-8"?>
+<p:sld xmlns:a="http://schemas.openxmlformats.org/drawingml/2006/main" xmlns:r="http://schemas.openxmlformats.org/officeDocument/2006/relationships" xmlns:p="http://schemas.openxmlformats.org/presentationml/2006/main">
+  <p:cSld>
+    <p:spTree>
+      <p:nvGrpSpPr>
         <p:cNvPr id="1" name=""/>
         <p:cNvGrpSpPr/>
         <p:nvPr/>
@@ -23274,7 +26789,7 @@
           <a:p>
             <a:fld id="{109C872D-39A9-4065-8BF3-6A613116E2A1}" type="slidenum">
               <a:rPr lang="ko-KR" altLang="en-US" smtClean="0"/>
-              <a:t>30</a:t>
+              <a:t>32</a:t>
             </a:fld>
             <a:endParaRPr lang="ko-KR" altLang="en-US"/>
           </a:p>
@@ -23909,7 +27424,7 @@
 </p:sld>
 </file>
 
-<file path=ppt/slides/slide31.xml><?xml version="1.0" encoding="utf-8"?>
+<file path=ppt/slides/slide33.xml><?xml version="1.0" encoding="utf-8"?>
 <p:sld xmlns:a="http://schemas.openxmlformats.org/drawingml/2006/main" xmlns:r="http://schemas.openxmlformats.org/officeDocument/2006/relationships" xmlns:p="http://schemas.openxmlformats.org/presentationml/2006/main">
   <p:cSld>
     <p:spTree>
@@ -23987,7 +27502,7 @@
           <a:p>
             <a:fld id="{109C872D-39A9-4065-8BF3-6A613116E2A1}" type="slidenum">
               <a:rPr lang="ko-KR" altLang="en-US" smtClean="0"/>
-              <a:t>31</a:t>
+              <a:t>33</a:t>
             </a:fld>
             <a:endParaRPr lang="ko-KR" altLang="en-US"/>
           </a:p>
@@ -24520,7 +28035,7 @@
 </p:sld>
 </file>
 
-<file path=ppt/slides/slide32.xml><?xml version="1.0" encoding="utf-8"?>
+<file path=ppt/slides/slide34.xml><?xml version="1.0" encoding="utf-8"?>
 <p:sld xmlns:a="http://schemas.openxmlformats.org/drawingml/2006/main" xmlns:r="http://schemas.openxmlformats.org/officeDocument/2006/relationships" xmlns:p="http://schemas.openxmlformats.org/presentationml/2006/main">
   <p:cSld>
     <p:spTree>
@@ -24588,7 +28103,7 @@
           <a:p>
             <a:fld id="{109C872D-39A9-4065-8BF3-6A613116E2A1}" type="slidenum">
               <a:rPr lang="ko-KR" altLang="en-US" smtClean="0"/>
-              <a:t>32</a:t>
+              <a:t>34</a:t>
             </a:fld>
             <a:endParaRPr lang="ko-KR" altLang="en-US"/>
           </a:p>
@@ -25438,7 +28953,7 @@
 </p:sld>
 </file>
 
-<file path=ppt/slides/slide33.xml><?xml version="1.0" encoding="utf-8"?>
+<file path=ppt/slides/slide35.xml><?xml version="1.0" encoding="utf-8"?>
 <p:sld xmlns:a="http://schemas.openxmlformats.org/drawingml/2006/main" xmlns:r="http://schemas.openxmlformats.org/officeDocument/2006/relationships" xmlns:p="http://schemas.openxmlformats.org/presentationml/2006/main">
   <p:cSld>
     <p:spTree>
@@ -25512,7 +29027,7 @@
           <a:p>
             <a:fld id="{109C872D-39A9-4065-8BF3-6A613116E2A1}" type="slidenum">
               <a:rPr lang="ko-KR" altLang="en-US" smtClean="0"/>
-              <a:t>33</a:t>
+              <a:t>35</a:t>
             </a:fld>
             <a:endParaRPr lang="ko-KR" altLang="en-US"/>
           </a:p>
@@ -26088,7 +29603,7 @@
 </p:sld>
 </file>
 
-<file path=ppt/slides/slide34.xml><?xml version="1.0" encoding="utf-8"?>
+<file path=ppt/slides/slide36.xml><?xml version="1.0" encoding="utf-8"?>
 <p:sld xmlns:a="http://schemas.openxmlformats.org/drawingml/2006/main" xmlns:r="http://schemas.openxmlformats.org/officeDocument/2006/relationships" xmlns:p="http://schemas.openxmlformats.org/presentationml/2006/main">
   <p:cSld>
     <p:spTree>
@@ -26171,7 +29686,7 @@
           <a:p>
             <a:fld id="{109C872D-39A9-4065-8BF3-6A613116E2A1}" type="slidenum">
               <a:rPr lang="ko-KR" altLang="en-US" smtClean="0"/>
-              <a:t>34</a:t>
+              <a:t>36</a:t>
             </a:fld>
             <a:endParaRPr lang="ko-KR" altLang="en-US"/>
           </a:p>
@@ -26231,7 +29746,7 @@
 </p:sld>
 </file>
 
-<file path=ppt/slides/slide35.xml><?xml version="1.0" encoding="utf-8"?>
+<file path=ppt/slides/slide37.xml><?xml version="1.0" encoding="utf-8"?>
 <p:sld xmlns:a="http://schemas.openxmlformats.org/drawingml/2006/main" xmlns:r="http://schemas.openxmlformats.org/officeDocument/2006/relationships" xmlns:p="http://schemas.openxmlformats.org/presentationml/2006/main">
   <p:cSld>
     <p:spTree>
@@ -26305,7 +29820,7 @@
           <a:p>
             <a:fld id="{109C872D-39A9-4065-8BF3-6A613116E2A1}" type="slidenum">
               <a:rPr lang="ko-KR" altLang="en-US" smtClean="0"/>
-              <a:t>35</a:t>
+              <a:t>37</a:t>
             </a:fld>
             <a:endParaRPr lang="ko-KR" altLang="en-US"/>
           </a:p>
@@ -26604,7 +30119,7 @@
 </p:sld>
 </file>
 
-<file path=ppt/slides/slide36.xml><?xml version="1.0" encoding="utf-8"?>
+<file path=ppt/slides/slide38.xml><?xml version="1.0" encoding="utf-8"?>
 <p:sld xmlns:a="http://schemas.openxmlformats.org/drawingml/2006/main" xmlns:r="http://schemas.openxmlformats.org/officeDocument/2006/relationships" xmlns:p="http://schemas.openxmlformats.org/presentationml/2006/main">
   <p:cSld>
     <p:spTree>
@@ -26678,7 +30193,7 @@
           <a:p>
             <a:fld id="{109C872D-39A9-4065-8BF3-6A613116E2A1}" type="slidenum">
               <a:rPr lang="ko-KR" altLang="en-US" smtClean="0"/>
-              <a:t>36</a:t>
+              <a:t>38</a:t>
             </a:fld>
             <a:endParaRPr lang="ko-KR" altLang="en-US"/>
           </a:p>
@@ -26900,7 +30415,7 @@
 </p:sld>
 </file>
 
-<file path=ppt/slides/slide37.xml><?xml version="1.0" encoding="utf-8"?>
+<file path=ppt/slides/slide39.xml><?xml version="1.0" encoding="utf-8"?>
 <p:sld xmlns:a="http://schemas.openxmlformats.org/drawingml/2006/main" xmlns:r="http://schemas.openxmlformats.org/officeDocument/2006/relationships" xmlns:p="http://schemas.openxmlformats.org/presentationml/2006/main">
   <p:cSld>
     <p:spTree>
@@ -26974,7 +30489,7 @@
           <a:p>
             <a:fld id="{109C872D-39A9-4065-8BF3-6A613116E2A1}" type="slidenum">
               <a:rPr lang="ko-KR" altLang="en-US" smtClean="0"/>
-              <a:t>37</a:t>
+              <a:t>39</a:t>
             </a:fld>
             <a:endParaRPr lang="ko-KR" altLang="en-US"/>
           </a:p>
@@ -27276,7 +30791,414 @@
 </p:sld>
 </file>
 
-<file path=ppt/slides/slide38.xml><?xml version="1.0" encoding="utf-8"?>
+<file path=ppt/slides/slide4.xml><?xml version="1.0" encoding="utf-8"?>
+<p:sld xmlns:a="http://schemas.openxmlformats.org/drawingml/2006/main" xmlns:r="http://schemas.openxmlformats.org/officeDocument/2006/relationships" xmlns:p="http://schemas.openxmlformats.org/presentationml/2006/main">
+  <p:cSld>
+    <p:spTree>
+      <p:nvGrpSpPr>
+        <p:cNvPr id="1" name="">
+          <a:extLst>
+            <a:ext uri="{FF2B5EF4-FFF2-40B4-BE49-F238E27FC236}">
+              <a16:creationId xmlns:a16="http://schemas.microsoft.com/office/drawing/2014/main" id="{7E764ACB-B8A0-8B8E-50AE-F6949A866C73}"/>
+            </a:ext>
+          </a:extLst>
+        </p:cNvPr>
+        <p:cNvGrpSpPr/>
+        <p:nvPr/>
+      </p:nvGrpSpPr>
+      <p:grpSpPr>
+        <a:xfrm>
+          <a:off x="0" y="0"/>
+          <a:ext cx="0" cy="0"/>
+          <a:chOff x="0" y="0"/>
+          <a:chExt cx="0" cy="0"/>
+        </a:xfrm>
+      </p:grpSpPr>
+      <p:sp>
+        <p:nvSpPr>
+          <p:cNvPr id="2" name="제목 1">
+            <a:extLst>
+              <a:ext uri="{FF2B5EF4-FFF2-40B4-BE49-F238E27FC236}">
+                <a16:creationId xmlns:a16="http://schemas.microsoft.com/office/drawing/2014/main" id="{3B730496-A872-5CFB-3130-C4429F8285BC}"/>
+              </a:ext>
+            </a:extLst>
+          </p:cNvPr>
+          <p:cNvSpPr>
+            <a:spLocks noGrp="1"/>
+          </p:cNvSpPr>
+          <p:nvPr>
+            <p:ph type="title"/>
+          </p:nvPr>
+        </p:nvSpPr>
+        <p:spPr/>
+        <p:txBody>
+          <a:bodyPr/>
+          <a:lstStyle/>
+          <a:p>
+            <a:r>
+              <a:rPr lang="ko-KR" altLang="en-US" dirty="0"/>
+              <a:t>공공선택의 의의</a:t>
+            </a:r>
+          </a:p>
+        </p:txBody>
+      </p:sp>
+      <p:sp>
+        <p:nvSpPr>
+          <p:cNvPr id="4" name="슬라이드 번호 개체 틀 3">
+            <a:extLst>
+              <a:ext uri="{FF2B5EF4-FFF2-40B4-BE49-F238E27FC236}">
+                <a16:creationId xmlns:a16="http://schemas.microsoft.com/office/drawing/2014/main" id="{CBD72302-C21E-82F3-1317-6A67EB8523B7}"/>
+              </a:ext>
+            </a:extLst>
+          </p:cNvPr>
+          <p:cNvSpPr>
+            <a:spLocks noGrp="1"/>
+          </p:cNvSpPr>
+          <p:nvPr>
+            <p:ph type="sldNum" sz="quarter" idx="12"/>
+          </p:nvPr>
+        </p:nvSpPr>
+        <p:spPr/>
+        <p:txBody>
+          <a:bodyPr/>
+          <a:lstStyle/>
+          <a:p>
+            <a:fld id="{109C872D-39A9-4065-8BF3-6A613116E2A1}" type="slidenum">
+              <a:rPr lang="ko-KR" altLang="en-US" smtClean="0"/>
+              <a:t>4</a:t>
+            </a:fld>
+            <a:endParaRPr lang="ko-KR" altLang="en-US"/>
+          </a:p>
+        </p:txBody>
+      </p:sp>
+      <p:sp>
+        <p:nvSpPr>
+          <p:cNvPr id="5" name="TextBox 4">
+            <a:extLst>
+              <a:ext uri="{FF2B5EF4-FFF2-40B4-BE49-F238E27FC236}">
+                <a16:creationId xmlns:a16="http://schemas.microsoft.com/office/drawing/2014/main" id="{71AEC86F-2434-0377-0126-D48FC4912B4A}"/>
+              </a:ext>
+            </a:extLst>
+          </p:cNvPr>
+          <p:cNvSpPr txBox="1"/>
+          <p:nvPr/>
+        </p:nvSpPr>
+        <p:spPr>
+          <a:xfrm>
+            <a:off x="288790" y="958844"/>
+            <a:ext cx="11693660" cy="5584670"/>
+          </a:xfrm>
+          <a:prstGeom prst="rect">
+            <a:avLst/>
+          </a:prstGeom>
+          <a:noFill/>
+        </p:spPr>
+        <p:txBody>
+          <a:bodyPr wrap="square" rtlCol="0" anchor="t">
+            <a:spAutoFit/>
+          </a:bodyPr>
+          <a:lstStyle/>
+          <a:p>
+            <a:pPr marL="377825" indent="-285750">
+              <a:lnSpc>
+                <a:spcPct val="150000"/>
+              </a:lnSpc>
+              <a:buFont typeface="Arial" panose="020B0604020202020204" pitchFamily="34" charset="0"/>
+              <a:buChar char="•"/>
+            </a:pPr>
+            <a:r>
+              <a:rPr lang="ko-KR" altLang="en-US" sz="1600" spc="-50" dirty="0"/>
+              <a:t>경제학의 다른 분야에서는 개별 경제주체의 의사결정 과정에 관심을 갖는다</a:t>
+            </a:r>
+            <a:r>
+              <a:rPr lang="en-US" altLang="ko-KR" sz="1600" spc="-50" dirty="0"/>
+              <a:t>.</a:t>
+            </a:r>
+          </a:p>
+          <a:p>
+            <a:pPr marL="835025" lvl="1" indent="-285750">
+              <a:lnSpc>
+                <a:spcPct val="150000"/>
+              </a:lnSpc>
+              <a:buFont typeface="Wingdings" panose="05000000000000000000" pitchFamily="2" charset="2"/>
+              <a:buChar char="ü"/>
+            </a:pPr>
+            <a:r>
+              <a:rPr lang="ko-KR" altLang="en-US" sz="1600" spc="-50" dirty="0"/>
+              <a:t>효용극대화를 추구하는 소비자의 의사결정</a:t>
+            </a:r>
+            <a:r>
+              <a:rPr lang="en-US" altLang="ko-KR" sz="1600" spc="-50" dirty="0"/>
+              <a:t>, </a:t>
+            </a:r>
+            <a:r>
+              <a:rPr lang="ko-KR" altLang="en-US" sz="1600" spc="-50" dirty="0"/>
+              <a:t>이윤극대화를 추구하는 기업의 의사결정이 전형적인 그 예이다</a:t>
+            </a:r>
+            <a:r>
+              <a:rPr lang="en-US" altLang="ko-KR" sz="1600" spc="-50" dirty="0"/>
+              <a:t>.</a:t>
+            </a:r>
+          </a:p>
+          <a:p>
+            <a:pPr marL="377825" indent="-285750">
+              <a:lnSpc>
+                <a:spcPct val="150000"/>
+              </a:lnSpc>
+              <a:buFont typeface="Arial" panose="020B0604020202020204" pitchFamily="34" charset="0"/>
+              <a:buChar char="•"/>
+            </a:pPr>
+            <a:r>
+              <a:rPr lang="ko-KR" altLang="en-US" sz="1600" spc="-50" dirty="0"/>
+              <a:t>재정학에서는 개별이 아닌 집단의 의사결정 과정이 주요한 관심 대상이다</a:t>
+            </a:r>
+            <a:r>
+              <a:rPr lang="en-US" altLang="ko-KR" sz="1600" spc="-50" dirty="0"/>
+              <a:t>.</a:t>
+            </a:r>
+          </a:p>
+          <a:p>
+            <a:pPr marL="835025" lvl="1" indent="-285750">
+              <a:lnSpc>
+                <a:spcPct val="150000"/>
+              </a:lnSpc>
+              <a:buFont typeface="Wingdings" panose="05000000000000000000" pitchFamily="2" charset="2"/>
+              <a:buChar char="ü"/>
+            </a:pPr>
+            <a:r>
+              <a:rPr lang="ko-KR" altLang="en-US" sz="1600" spc="-50" dirty="0"/>
+              <a:t>집단의 구성원 모두가 제각기 다른 의견을 갖기 마련이므로</a:t>
+            </a:r>
+            <a:r>
+              <a:rPr lang="en-US" altLang="ko-KR" sz="1600" spc="-50" dirty="0"/>
+              <a:t>,</a:t>
+            </a:r>
+            <a:r>
+              <a:rPr lang="ko-KR" altLang="en-US" sz="1600" spc="-50" dirty="0"/>
+              <a:t> 조율 과정을 거쳐 집단적 합의에 이르는 길을 모색해야 한다</a:t>
+            </a:r>
+            <a:r>
+              <a:rPr lang="en-US" altLang="ko-KR" sz="1600" spc="-50" dirty="0"/>
+              <a:t>.</a:t>
+            </a:r>
+          </a:p>
+          <a:p>
+            <a:pPr marL="377825" indent="-285750">
+              <a:lnSpc>
+                <a:spcPct val="150000"/>
+              </a:lnSpc>
+              <a:buFont typeface="Arial" panose="020B0604020202020204" pitchFamily="34" charset="0"/>
+              <a:buChar char="•"/>
+            </a:pPr>
+            <a:r>
+              <a:rPr lang="ko-KR" altLang="en-US" sz="1600" spc="-50" dirty="0"/>
+              <a:t>공공선택이론의 목적은 각 구성원의 의사가 집단의 의사로 통합되는 과정이 경제적 측면에서 갖는 의미를 분석하는 것이며</a:t>
+            </a:r>
+            <a:r>
+              <a:rPr lang="en-US" altLang="ko-KR" sz="1600" spc="-50" dirty="0"/>
+              <a:t>, </a:t>
+            </a:r>
+            <a:r>
+              <a:rPr lang="ko-KR" altLang="en-US" sz="1600" spc="-50" dirty="0"/>
+              <a:t>주로 관심대상으로 삼는 주요한 주제들은 아래와 같다</a:t>
+            </a:r>
+            <a:r>
+              <a:rPr lang="en-US" altLang="ko-KR" sz="1600" spc="-50" dirty="0"/>
+              <a:t>.</a:t>
+            </a:r>
+          </a:p>
+          <a:p>
+            <a:pPr marL="835025" lvl="1" indent="-285750">
+              <a:lnSpc>
+                <a:spcPct val="150000"/>
+              </a:lnSpc>
+              <a:buFont typeface="Wingdings" panose="05000000000000000000" pitchFamily="2" charset="2"/>
+              <a:buChar char="ü"/>
+            </a:pPr>
+            <a:r>
+              <a:rPr lang="ko-KR" altLang="en-US" sz="1600" spc="-50" dirty="0"/>
+              <a:t>집단의사결정 과정의 성격을 분석</a:t>
+            </a:r>
+            <a:endParaRPr lang="en-US" altLang="ko-KR" sz="1600" spc="-50" dirty="0"/>
+          </a:p>
+          <a:p>
+            <a:pPr marL="1292225" lvl="2" indent="-285750">
+              <a:lnSpc>
+                <a:spcPct val="150000"/>
+              </a:lnSpc>
+              <a:buFont typeface="Wingdings" panose="05000000000000000000" pitchFamily="2" charset="2"/>
+              <a:buChar char="Ø"/>
+            </a:pPr>
+            <a:r>
+              <a:rPr lang="ko-KR" altLang="en-US" sz="1600" spc="-50" dirty="0"/>
+              <a:t>개인들의 선호를 모아 집단의 의사로 수렴하는데 여러가지 방법이 있을 수 있는데</a:t>
+            </a:r>
+            <a:r>
+              <a:rPr lang="en-US" altLang="ko-KR" sz="1600" spc="-50" dirty="0"/>
+              <a:t>, </a:t>
+            </a:r>
+            <a:r>
+              <a:rPr lang="ko-KR" altLang="en-US" sz="1600" spc="-50" dirty="0"/>
+              <a:t>각 방법의 장단점을 살펴본다</a:t>
+            </a:r>
+            <a:r>
+              <a:rPr lang="en-US" altLang="ko-KR" sz="1600" spc="-50" dirty="0"/>
+              <a:t>.</a:t>
+            </a:r>
+          </a:p>
+          <a:p>
+            <a:pPr marL="835025" lvl="1" indent="-285750">
+              <a:lnSpc>
+                <a:spcPct val="150000"/>
+              </a:lnSpc>
+              <a:buFont typeface="Wingdings" panose="05000000000000000000" pitchFamily="2" charset="2"/>
+              <a:buChar char="ü"/>
+            </a:pPr>
+            <a:r>
+              <a:rPr lang="ko-KR" altLang="en-US" sz="1600" spc="-50" dirty="0"/>
+              <a:t>집단의사결정 과정에서 파생되는 자원배분상의 함의를 분석</a:t>
+            </a:r>
+            <a:endParaRPr lang="en-US" altLang="ko-KR" sz="1600" spc="-50" dirty="0"/>
+          </a:p>
+          <a:p>
+            <a:pPr marL="1292225" lvl="2" indent="-285750">
+              <a:lnSpc>
+                <a:spcPct val="150000"/>
+              </a:lnSpc>
+              <a:buFont typeface="Wingdings" panose="05000000000000000000" pitchFamily="2" charset="2"/>
+              <a:buChar char="Ø"/>
+            </a:pPr>
+            <a:r>
+              <a:rPr lang="ko-KR" altLang="en-US" sz="1600" spc="-50" dirty="0"/>
+              <a:t>집단의사결정의 결과로</a:t>
+            </a:r>
+            <a:r>
+              <a:rPr lang="en-US" altLang="ko-KR" sz="1600" spc="-50" dirty="0"/>
+              <a:t>, </a:t>
+            </a:r>
+            <a:r>
+              <a:rPr lang="ko-KR" altLang="en-US" sz="1600" spc="-50" dirty="0"/>
+              <a:t>자원의 배분이 얼마나 효율적인지</a:t>
+            </a:r>
+            <a:r>
+              <a:rPr lang="en-US" altLang="ko-KR" sz="1600" spc="-50" dirty="0"/>
+              <a:t>, </a:t>
+            </a:r>
+            <a:r>
+              <a:rPr lang="ko-KR" altLang="en-US" sz="1600" spc="-50" dirty="0"/>
+              <a:t>얼마나 공평한지를 살펴본다</a:t>
+            </a:r>
+            <a:r>
+              <a:rPr lang="en-US" altLang="ko-KR" sz="1600" spc="-50" dirty="0"/>
+              <a:t>.</a:t>
+            </a:r>
+          </a:p>
+          <a:p>
+            <a:pPr marL="835025" lvl="1" indent="-285750">
+              <a:lnSpc>
+                <a:spcPct val="150000"/>
+              </a:lnSpc>
+              <a:buFont typeface="Wingdings" panose="05000000000000000000" pitchFamily="2" charset="2"/>
+              <a:buChar char="ü"/>
+            </a:pPr>
+            <a:r>
+              <a:rPr lang="ko-KR" altLang="en-US" sz="1600" spc="-50" dirty="0"/>
+              <a:t>이론적 관점에서 정부의 행태를 예측하고 설명하고 분석</a:t>
+            </a:r>
+            <a:endParaRPr lang="en-US" altLang="ko-KR" sz="1600" spc="-50" dirty="0"/>
+          </a:p>
+          <a:p>
+            <a:pPr marL="1292225" lvl="2" indent="-285750">
+              <a:lnSpc>
+                <a:spcPct val="150000"/>
+              </a:lnSpc>
+              <a:buFont typeface="Wingdings" panose="05000000000000000000" pitchFamily="2" charset="2"/>
+              <a:buChar char="Ø"/>
+            </a:pPr>
+            <a:r>
+              <a:rPr lang="ko-KR" altLang="en-US" sz="1600" spc="-50" dirty="0"/>
+              <a:t>현실에서 나타나는 정부의 행태를 보고</a:t>
+            </a:r>
+            <a:r>
+              <a:rPr lang="en-US" altLang="ko-KR" sz="1600" spc="-50" dirty="0"/>
+              <a:t>, </a:t>
+            </a:r>
+            <a:r>
+              <a:rPr lang="ko-KR" altLang="en-US" sz="1600" spc="-50" dirty="0"/>
+              <a:t>앞으로 어떤 행동을 취할지 예측해본다</a:t>
+            </a:r>
+            <a:r>
+              <a:rPr lang="en-US" altLang="ko-KR" sz="1600" spc="-50" dirty="0"/>
+              <a:t>.</a:t>
+            </a:r>
+          </a:p>
+          <a:p>
+            <a:pPr marL="1292225" lvl="2" indent="-285750">
+              <a:lnSpc>
+                <a:spcPct val="150000"/>
+              </a:lnSpc>
+              <a:buFont typeface="Wingdings" panose="05000000000000000000" pitchFamily="2" charset="2"/>
+              <a:buChar char="Ø"/>
+            </a:pPr>
+            <a:endParaRPr lang="en-US" altLang="ko-KR" sz="1600" spc="-50" dirty="0"/>
+          </a:p>
+          <a:p>
+            <a:pPr marL="377825" indent="-285750">
+              <a:lnSpc>
+                <a:spcPct val="150000"/>
+              </a:lnSpc>
+              <a:buFont typeface="Arial" panose="020B0604020202020204" pitchFamily="34" charset="0"/>
+              <a:buChar char="•"/>
+            </a:pPr>
+            <a:r>
+              <a:rPr lang="ko-KR" altLang="en-US" sz="1600" spc="-50" dirty="0"/>
+              <a:t>우선</a:t>
+            </a:r>
+            <a:r>
+              <a:rPr lang="en-US" altLang="ko-KR" sz="1600" spc="-50" dirty="0"/>
+              <a:t>, </a:t>
+            </a:r>
+            <a:r>
+              <a:rPr lang="ko-KR" altLang="en-US" sz="1600" spc="-50" dirty="0"/>
+              <a:t>집단이 의사결정을 할 때</a:t>
+            </a:r>
+            <a:r>
+              <a:rPr lang="en-US" altLang="ko-KR" sz="1600" spc="-50" dirty="0"/>
+              <a:t>, </a:t>
+            </a:r>
+            <a:r>
+              <a:rPr lang="ko-KR" altLang="en-US" sz="1600" spc="-50" dirty="0"/>
+              <a:t>구성원 모두가 직접 의사결정에 참여하는 직접민주제를 채택할 수 있고</a:t>
+            </a:r>
+            <a:r>
+              <a:rPr lang="en-US" altLang="ko-KR" sz="1600" spc="-50" dirty="0"/>
+              <a:t>, </a:t>
+            </a:r>
+            <a:r>
+              <a:rPr lang="ko-KR" altLang="en-US" sz="1600" spc="-50" dirty="0"/>
+              <a:t>한편 대표를 선출한 뒤에 대표가 의사결정을 하는 간접민주제 혹은 대의민주제 방식을 채택할 수 있다</a:t>
+            </a:r>
+            <a:r>
+              <a:rPr lang="en-US" altLang="ko-KR" sz="1600" spc="-50" dirty="0"/>
+              <a:t>.</a:t>
+            </a:r>
+          </a:p>
+        </p:txBody>
+      </p:sp>
+    </p:spTree>
+    <p:extLst>
+      <p:ext uri="{BB962C8B-B14F-4D97-AF65-F5344CB8AC3E}">
+        <p14:creationId xmlns:p14="http://schemas.microsoft.com/office/powerpoint/2010/main" val="3608071698"/>
+      </p:ext>
+    </p:extLst>
+  </p:cSld>
+  <p:clrMapOvr>
+    <a:masterClrMapping/>
+  </p:clrMapOvr>
+</p:sld>
+</file>
+
+<file path=ppt/slides/slide40.xml><?xml version="1.0" encoding="utf-8"?>
 <p:sld xmlns:a="http://schemas.openxmlformats.org/drawingml/2006/main" xmlns:r="http://schemas.openxmlformats.org/officeDocument/2006/relationships" xmlns:p="http://schemas.openxmlformats.org/presentationml/2006/main">
   <p:cSld>
     <p:spTree>
@@ -27350,7 +31272,7 @@
           <a:p>
             <a:fld id="{109C872D-39A9-4065-8BF3-6A613116E2A1}" type="slidenum">
               <a:rPr lang="ko-KR" altLang="en-US" smtClean="0"/>
-              <a:t>38</a:t>
+              <a:t>40</a:t>
             </a:fld>
             <a:endParaRPr lang="ko-KR" altLang="en-US"/>
           </a:p>
@@ -28465,7 +32387,7 @@
 </p:sld>
 </file>
 
-<file path=ppt/slides/slide39.xml><?xml version="1.0" encoding="utf-8"?>
+<file path=ppt/slides/slide41.xml><?xml version="1.0" encoding="utf-8"?>
 <p:sld xmlns:a="http://schemas.openxmlformats.org/drawingml/2006/main" xmlns:r="http://schemas.openxmlformats.org/officeDocument/2006/relationships" xmlns:p="http://schemas.openxmlformats.org/presentationml/2006/main">
   <p:cSld>
     <p:spTree>
@@ -28534,7 +32456,7 @@
           <a:p>
             <a:fld id="{109C872D-39A9-4065-8BF3-6A613116E2A1}" type="slidenum">
               <a:rPr lang="ko-KR" altLang="en-US" smtClean="0"/>
-              <a:t>39</a:t>
+              <a:t>41</a:t>
             </a:fld>
             <a:endParaRPr lang="ko-KR" altLang="en-US"/>
           </a:p>
@@ -29241,414 +33163,7 @@
 </p:sld>
 </file>
 
-<file path=ppt/slides/slide4.xml><?xml version="1.0" encoding="utf-8"?>
-<p:sld xmlns:a="http://schemas.openxmlformats.org/drawingml/2006/main" xmlns:r="http://schemas.openxmlformats.org/officeDocument/2006/relationships" xmlns:p="http://schemas.openxmlformats.org/presentationml/2006/main">
-  <p:cSld>
-    <p:spTree>
-      <p:nvGrpSpPr>
-        <p:cNvPr id="1" name="">
-          <a:extLst>
-            <a:ext uri="{FF2B5EF4-FFF2-40B4-BE49-F238E27FC236}">
-              <a16:creationId xmlns:a16="http://schemas.microsoft.com/office/drawing/2014/main" id="{7E764ACB-B8A0-8B8E-50AE-F6949A866C73}"/>
-            </a:ext>
-          </a:extLst>
-        </p:cNvPr>
-        <p:cNvGrpSpPr/>
-        <p:nvPr/>
-      </p:nvGrpSpPr>
-      <p:grpSpPr>
-        <a:xfrm>
-          <a:off x="0" y="0"/>
-          <a:ext cx="0" cy="0"/>
-          <a:chOff x="0" y="0"/>
-          <a:chExt cx="0" cy="0"/>
-        </a:xfrm>
-      </p:grpSpPr>
-      <p:sp>
-        <p:nvSpPr>
-          <p:cNvPr id="2" name="제목 1">
-            <a:extLst>
-              <a:ext uri="{FF2B5EF4-FFF2-40B4-BE49-F238E27FC236}">
-                <a16:creationId xmlns:a16="http://schemas.microsoft.com/office/drawing/2014/main" id="{3B730496-A872-5CFB-3130-C4429F8285BC}"/>
-              </a:ext>
-            </a:extLst>
-          </p:cNvPr>
-          <p:cNvSpPr>
-            <a:spLocks noGrp="1"/>
-          </p:cNvSpPr>
-          <p:nvPr>
-            <p:ph type="title"/>
-          </p:nvPr>
-        </p:nvSpPr>
-        <p:spPr/>
-        <p:txBody>
-          <a:bodyPr/>
-          <a:lstStyle/>
-          <a:p>
-            <a:r>
-              <a:rPr lang="ko-KR" altLang="en-US" dirty="0"/>
-              <a:t>공공선택의 의의</a:t>
-            </a:r>
-          </a:p>
-        </p:txBody>
-      </p:sp>
-      <p:sp>
-        <p:nvSpPr>
-          <p:cNvPr id="4" name="슬라이드 번호 개체 틀 3">
-            <a:extLst>
-              <a:ext uri="{FF2B5EF4-FFF2-40B4-BE49-F238E27FC236}">
-                <a16:creationId xmlns:a16="http://schemas.microsoft.com/office/drawing/2014/main" id="{CBD72302-C21E-82F3-1317-6A67EB8523B7}"/>
-              </a:ext>
-            </a:extLst>
-          </p:cNvPr>
-          <p:cNvSpPr>
-            <a:spLocks noGrp="1"/>
-          </p:cNvSpPr>
-          <p:nvPr>
-            <p:ph type="sldNum" sz="quarter" idx="12"/>
-          </p:nvPr>
-        </p:nvSpPr>
-        <p:spPr/>
-        <p:txBody>
-          <a:bodyPr/>
-          <a:lstStyle/>
-          <a:p>
-            <a:fld id="{109C872D-39A9-4065-8BF3-6A613116E2A1}" type="slidenum">
-              <a:rPr lang="ko-KR" altLang="en-US" smtClean="0"/>
-              <a:t>4</a:t>
-            </a:fld>
-            <a:endParaRPr lang="ko-KR" altLang="en-US"/>
-          </a:p>
-        </p:txBody>
-      </p:sp>
-      <p:sp>
-        <p:nvSpPr>
-          <p:cNvPr id="5" name="TextBox 4">
-            <a:extLst>
-              <a:ext uri="{FF2B5EF4-FFF2-40B4-BE49-F238E27FC236}">
-                <a16:creationId xmlns:a16="http://schemas.microsoft.com/office/drawing/2014/main" id="{71AEC86F-2434-0377-0126-D48FC4912B4A}"/>
-              </a:ext>
-            </a:extLst>
-          </p:cNvPr>
-          <p:cNvSpPr txBox="1"/>
-          <p:nvPr/>
-        </p:nvSpPr>
-        <p:spPr>
-          <a:xfrm>
-            <a:off x="288790" y="958844"/>
-            <a:ext cx="11693660" cy="5584670"/>
-          </a:xfrm>
-          <a:prstGeom prst="rect">
-            <a:avLst/>
-          </a:prstGeom>
-          <a:noFill/>
-        </p:spPr>
-        <p:txBody>
-          <a:bodyPr wrap="square" rtlCol="0" anchor="t">
-            <a:spAutoFit/>
-          </a:bodyPr>
-          <a:lstStyle/>
-          <a:p>
-            <a:pPr marL="377825" indent="-285750">
-              <a:lnSpc>
-                <a:spcPct val="150000"/>
-              </a:lnSpc>
-              <a:buFont typeface="Arial" panose="020B0604020202020204" pitchFamily="34" charset="0"/>
-              <a:buChar char="•"/>
-            </a:pPr>
-            <a:r>
-              <a:rPr lang="ko-KR" altLang="en-US" sz="1600" spc="-50" dirty="0"/>
-              <a:t>경제학의 다른 분야에서는 개별 경제주체의 의사결정 과정에 관심을 갖는다</a:t>
-            </a:r>
-            <a:r>
-              <a:rPr lang="en-US" altLang="ko-KR" sz="1600" spc="-50" dirty="0"/>
-              <a:t>.</a:t>
-            </a:r>
-          </a:p>
-          <a:p>
-            <a:pPr marL="835025" lvl="1" indent="-285750">
-              <a:lnSpc>
-                <a:spcPct val="150000"/>
-              </a:lnSpc>
-              <a:buFont typeface="Wingdings" panose="05000000000000000000" pitchFamily="2" charset="2"/>
-              <a:buChar char="ü"/>
-            </a:pPr>
-            <a:r>
-              <a:rPr lang="ko-KR" altLang="en-US" sz="1600" spc="-50" dirty="0"/>
-              <a:t>효용극대화를 추구하는 소비자의 의사결정</a:t>
-            </a:r>
-            <a:r>
-              <a:rPr lang="en-US" altLang="ko-KR" sz="1600" spc="-50" dirty="0"/>
-              <a:t>, </a:t>
-            </a:r>
-            <a:r>
-              <a:rPr lang="ko-KR" altLang="en-US" sz="1600" spc="-50" dirty="0"/>
-              <a:t>이윤극대화를 추구하는 기업의 의사결정이 전형적인 그 예이다</a:t>
-            </a:r>
-            <a:r>
-              <a:rPr lang="en-US" altLang="ko-KR" sz="1600" spc="-50" dirty="0"/>
-              <a:t>.</a:t>
-            </a:r>
-          </a:p>
-          <a:p>
-            <a:pPr marL="377825" indent="-285750">
-              <a:lnSpc>
-                <a:spcPct val="150000"/>
-              </a:lnSpc>
-              <a:buFont typeface="Arial" panose="020B0604020202020204" pitchFamily="34" charset="0"/>
-              <a:buChar char="•"/>
-            </a:pPr>
-            <a:r>
-              <a:rPr lang="ko-KR" altLang="en-US" sz="1600" spc="-50" dirty="0"/>
-              <a:t>재정학에서는 개별이 아닌 집단의 의사결정 과정이 주요한 관심 대상이다</a:t>
-            </a:r>
-            <a:r>
-              <a:rPr lang="en-US" altLang="ko-KR" sz="1600" spc="-50" dirty="0"/>
-              <a:t>.</a:t>
-            </a:r>
-          </a:p>
-          <a:p>
-            <a:pPr marL="835025" lvl="1" indent="-285750">
-              <a:lnSpc>
-                <a:spcPct val="150000"/>
-              </a:lnSpc>
-              <a:buFont typeface="Wingdings" panose="05000000000000000000" pitchFamily="2" charset="2"/>
-              <a:buChar char="ü"/>
-            </a:pPr>
-            <a:r>
-              <a:rPr lang="ko-KR" altLang="en-US" sz="1600" spc="-50" dirty="0"/>
-              <a:t>집단의 구성원 모두가 제각기 다른 의견을 갖기 마련이므로</a:t>
-            </a:r>
-            <a:r>
-              <a:rPr lang="en-US" altLang="ko-KR" sz="1600" spc="-50" dirty="0"/>
-              <a:t>,</a:t>
-            </a:r>
-            <a:r>
-              <a:rPr lang="ko-KR" altLang="en-US" sz="1600" spc="-50" dirty="0"/>
-              <a:t> 조율 과정을 거쳐 집단적 합의에 이르는 길을 모색해야 한다</a:t>
-            </a:r>
-            <a:r>
-              <a:rPr lang="en-US" altLang="ko-KR" sz="1600" spc="-50" dirty="0"/>
-              <a:t>.</a:t>
-            </a:r>
-          </a:p>
-          <a:p>
-            <a:pPr marL="377825" indent="-285750">
-              <a:lnSpc>
-                <a:spcPct val="150000"/>
-              </a:lnSpc>
-              <a:buFont typeface="Arial" panose="020B0604020202020204" pitchFamily="34" charset="0"/>
-              <a:buChar char="•"/>
-            </a:pPr>
-            <a:r>
-              <a:rPr lang="ko-KR" altLang="en-US" sz="1600" spc="-50" dirty="0"/>
-              <a:t>공공선택이론의 목적은 각 구성원의 의사가 집단의 의사로 통합되는 과정이 경제적 측면에서 갖는 의미를 분석하는 것이며</a:t>
-            </a:r>
-            <a:r>
-              <a:rPr lang="en-US" altLang="ko-KR" sz="1600" spc="-50" dirty="0"/>
-              <a:t>, </a:t>
-            </a:r>
-            <a:r>
-              <a:rPr lang="ko-KR" altLang="en-US" sz="1600" spc="-50" dirty="0"/>
-              <a:t>주로 관심대상으로 삼는 주요한 주제들은 아래와 같다</a:t>
-            </a:r>
-            <a:r>
-              <a:rPr lang="en-US" altLang="ko-KR" sz="1600" spc="-50" dirty="0"/>
-              <a:t>.</a:t>
-            </a:r>
-          </a:p>
-          <a:p>
-            <a:pPr marL="835025" lvl="1" indent="-285750">
-              <a:lnSpc>
-                <a:spcPct val="150000"/>
-              </a:lnSpc>
-              <a:buFont typeface="Wingdings" panose="05000000000000000000" pitchFamily="2" charset="2"/>
-              <a:buChar char="ü"/>
-            </a:pPr>
-            <a:r>
-              <a:rPr lang="ko-KR" altLang="en-US" sz="1600" spc="-50" dirty="0"/>
-              <a:t>집단의사결정 과정의 성격을 분석</a:t>
-            </a:r>
-            <a:endParaRPr lang="en-US" altLang="ko-KR" sz="1600" spc="-50" dirty="0"/>
-          </a:p>
-          <a:p>
-            <a:pPr marL="1292225" lvl="2" indent="-285750">
-              <a:lnSpc>
-                <a:spcPct val="150000"/>
-              </a:lnSpc>
-              <a:buFont typeface="Wingdings" panose="05000000000000000000" pitchFamily="2" charset="2"/>
-              <a:buChar char="Ø"/>
-            </a:pPr>
-            <a:r>
-              <a:rPr lang="ko-KR" altLang="en-US" sz="1600" spc="-50" dirty="0"/>
-              <a:t>개인들의 선호를 모아 집단의 의사로 수렴하는데 여러가지 방법이 있을 수 있는데</a:t>
-            </a:r>
-            <a:r>
-              <a:rPr lang="en-US" altLang="ko-KR" sz="1600" spc="-50" dirty="0"/>
-              <a:t>, </a:t>
-            </a:r>
-            <a:r>
-              <a:rPr lang="ko-KR" altLang="en-US" sz="1600" spc="-50" dirty="0"/>
-              <a:t>각 방법의 장단점을 살펴본다</a:t>
-            </a:r>
-            <a:r>
-              <a:rPr lang="en-US" altLang="ko-KR" sz="1600" spc="-50" dirty="0"/>
-              <a:t>.</a:t>
-            </a:r>
-          </a:p>
-          <a:p>
-            <a:pPr marL="835025" lvl="1" indent="-285750">
-              <a:lnSpc>
-                <a:spcPct val="150000"/>
-              </a:lnSpc>
-              <a:buFont typeface="Wingdings" panose="05000000000000000000" pitchFamily="2" charset="2"/>
-              <a:buChar char="ü"/>
-            </a:pPr>
-            <a:r>
-              <a:rPr lang="ko-KR" altLang="en-US" sz="1600" spc="-50" dirty="0"/>
-              <a:t>집단의사결정 과정에서 파생되는 자원배분상의 함의를 분석</a:t>
-            </a:r>
-            <a:endParaRPr lang="en-US" altLang="ko-KR" sz="1600" spc="-50" dirty="0"/>
-          </a:p>
-          <a:p>
-            <a:pPr marL="1292225" lvl="2" indent="-285750">
-              <a:lnSpc>
-                <a:spcPct val="150000"/>
-              </a:lnSpc>
-              <a:buFont typeface="Wingdings" panose="05000000000000000000" pitchFamily="2" charset="2"/>
-              <a:buChar char="Ø"/>
-            </a:pPr>
-            <a:r>
-              <a:rPr lang="ko-KR" altLang="en-US" sz="1600" spc="-50" dirty="0"/>
-              <a:t>집단의사결정의 결과로</a:t>
-            </a:r>
-            <a:r>
-              <a:rPr lang="en-US" altLang="ko-KR" sz="1600" spc="-50" dirty="0"/>
-              <a:t>, </a:t>
-            </a:r>
-            <a:r>
-              <a:rPr lang="ko-KR" altLang="en-US" sz="1600" spc="-50" dirty="0"/>
-              <a:t>자원의 배분이 얼마나 효율적인지</a:t>
-            </a:r>
-            <a:r>
-              <a:rPr lang="en-US" altLang="ko-KR" sz="1600" spc="-50" dirty="0"/>
-              <a:t>, </a:t>
-            </a:r>
-            <a:r>
-              <a:rPr lang="ko-KR" altLang="en-US" sz="1600" spc="-50" dirty="0"/>
-              <a:t>얼마나 공평한지를 살펴본다</a:t>
-            </a:r>
-            <a:r>
-              <a:rPr lang="en-US" altLang="ko-KR" sz="1600" spc="-50" dirty="0"/>
-              <a:t>.</a:t>
-            </a:r>
-          </a:p>
-          <a:p>
-            <a:pPr marL="835025" lvl="1" indent="-285750">
-              <a:lnSpc>
-                <a:spcPct val="150000"/>
-              </a:lnSpc>
-              <a:buFont typeface="Wingdings" panose="05000000000000000000" pitchFamily="2" charset="2"/>
-              <a:buChar char="ü"/>
-            </a:pPr>
-            <a:r>
-              <a:rPr lang="ko-KR" altLang="en-US" sz="1600" spc="-50" dirty="0"/>
-              <a:t>이론적 관점에서 정부의 행태를 예측하고 설명하고 분석</a:t>
-            </a:r>
-            <a:endParaRPr lang="en-US" altLang="ko-KR" sz="1600" spc="-50" dirty="0"/>
-          </a:p>
-          <a:p>
-            <a:pPr marL="1292225" lvl="2" indent="-285750">
-              <a:lnSpc>
-                <a:spcPct val="150000"/>
-              </a:lnSpc>
-              <a:buFont typeface="Wingdings" panose="05000000000000000000" pitchFamily="2" charset="2"/>
-              <a:buChar char="Ø"/>
-            </a:pPr>
-            <a:r>
-              <a:rPr lang="ko-KR" altLang="en-US" sz="1600" spc="-50" dirty="0"/>
-              <a:t>현실에서 나타나는 정부의 행태를 보고</a:t>
-            </a:r>
-            <a:r>
-              <a:rPr lang="en-US" altLang="ko-KR" sz="1600" spc="-50" dirty="0"/>
-              <a:t>, </a:t>
-            </a:r>
-            <a:r>
-              <a:rPr lang="ko-KR" altLang="en-US" sz="1600" spc="-50" dirty="0"/>
-              <a:t>앞으로 어떤 행동을 취할지 예측해본다</a:t>
-            </a:r>
-            <a:r>
-              <a:rPr lang="en-US" altLang="ko-KR" sz="1600" spc="-50" dirty="0"/>
-              <a:t>.</a:t>
-            </a:r>
-          </a:p>
-          <a:p>
-            <a:pPr marL="1292225" lvl="2" indent="-285750">
-              <a:lnSpc>
-                <a:spcPct val="150000"/>
-              </a:lnSpc>
-              <a:buFont typeface="Wingdings" panose="05000000000000000000" pitchFamily="2" charset="2"/>
-              <a:buChar char="Ø"/>
-            </a:pPr>
-            <a:endParaRPr lang="en-US" altLang="ko-KR" sz="1600" spc="-50" dirty="0"/>
-          </a:p>
-          <a:p>
-            <a:pPr marL="377825" indent="-285750">
-              <a:lnSpc>
-                <a:spcPct val="150000"/>
-              </a:lnSpc>
-              <a:buFont typeface="Arial" panose="020B0604020202020204" pitchFamily="34" charset="0"/>
-              <a:buChar char="•"/>
-            </a:pPr>
-            <a:r>
-              <a:rPr lang="ko-KR" altLang="en-US" sz="1600" spc="-50" dirty="0"/>
-              <a:t>우선</a:t>
-            </a:r>
-            <a:r>
-              <a:rPr lang="en-US" altLang="ko-KR" sz="1600" spc="-50" dirty="0"/>
-              <a:t>, </a:t>
-            </a:r>
-            <a:r>
-              <a:rPr lang="ko-KR" altLang="en-US" sz="1600" spc="-50" dirty="0"/>
-              <a:t>집단이 의사결정을 할 때</a:t>
-            </a:r>
-            <a:r>
-              <a:rPr lang="en-US" altLang="ko-KR" sz="1600" spc="-50" dirty="0"/>
-              <a:t>, </a:t>
-            </a:r>
-            <a:r>
-              <a:rPr lang="ko-KR" altLang="en-US" sz="1600" spc="-50" dirty="0"/>
-              <a:t>구성원 모두가 직접 의사결정에 참여하는 직접민주제를 채택할 수 있고</a:t>
-            </a:r>
-            <a:r>
-              <a:rPr lang="en-US" altLang="ko-KR" sz="1600" spc="-50" dirty="0"/>
-              <a:t>, </a:t>
-            </a:r>
-            <a:r>
-              <a:rPr lang="ko-KR" altLang="en-US" sz="1600" spc="-50" dirty="0"/>
-              <a:t>한편 대표를 선출한 뒤에 대표가 의사결정을 하는 간접민주제 혹은 대의민주제 방식을 채택할 수 있다</a:t>
-            </a:r>
-            <a:r>
-              <a:rPr lang="en-US" altLang="ko-KR" sz="1600" spc="-50" dirty="0"/>
-              <a:t>.</a:t>
-            </a:r>
-          </a:p>
-        </p:txBody>
-      </p:sp>
-    </p:spTree>
-    <p:extLst>
-      <p:ext uri="{BB962C8B-B14F-4D97-AF65-F5344CB8AC3E}">
-        <p14:creationId xmlns:p14="http://schemas.microsoft.com/office/powerpoint/2010/main" val="3608071698"/>
-      </p:ext>
-    </p:extLst>
-  </p:cSld>
-  <p:clrMapOvr>
-    <a:masterClrMapping/>
-  </p:clrMapOvr>
-</p:sld>
-</file>
-
-<file path=ppt/slides/slide40.xml><?xml version="1.0" encoding="utf-8"?>
+<file path=ppt/slides/slide42.xml><?xml version="1.0" encoding="utf-8"?>
 <p:sld xmlns:a="http://schemas.openxmlformats.org/drawingml/2006/main" xmlns:r="http://schemas.openxmlformats.org/officeDocument/2006/relationships" xmlns:p="http://schemas.openxmlformats.org/presentationml/2006/main">
   <p:cSld>
     <p:spTree>
@@ -29717,7 +33232,7 @@
           <a:p>
             <a:fld id="{109C872D-39A9-4065-8BF3-6A613116E2A1}" type="slidenum">
               <a:rPr lang="ko-KR" altLang="en-US" smtClean="0"/>
-              <a:t>40</a:t>
+              <a:t>42</a:t>
             </a:fld>
             <a:endParaRPr lang="ko-KR" altLang="en-US"/>
           </a:p>
@@ -30576,7 +34091,7 @@
 </p:sld>
 </file>
 
-<file path=ppt/slides/slide41.xml><?xml version="1.0" encoding="utf-8"?>
+<file path=ppt/slides/slide43.xml><?xml version="1.0" encoding="utf-8"?>
 <p:sld xmlns:a="http://schemas.openxmlformats.org/drawingml/2006/main" xmlns:r="http://schemas.openxmlformats.org/officeDocument/2006/relationships" xmlns:p="http://schemas.openxmlformats.org/presentationml/2006/main">
   <p:cSld>
     <p:spTree>
@@ -30645,7 +34160,7 @@
           <a:p>
             <a:fld id="{109C872D-39A9-4065-8BF3-6A613116E2A1}" type="slidenum">
               <a:rPr lang="ko-KR" altLang="en-US" smtClean="0"/>
-              <a:t>41</a:t>
+              <a:t>43</a:t>
             </a:fld>
             <a:endParaRPr lang="ko-KR" altLang="en-US"/>
           </a:p>
@@ -30907,7 +34422,7 @@
 </p:sld>
 </file>
 
-<file path=ppt/slides/slide42.xml><?xml version="1.0" encoding="utf-8"?>
+<file path=ppt/slides/slide44.xml><?xml version="1.0" encoding="utf-8"?>
 <p:sld xmlns:a="http://schemas.openxmlformats.org/drawingml/2006/main" xmlns:r="http://schemas.openxmlformats.org/officeDocument/2006/relationships" xmlns:p="http://schemas.openxmlformats.org/presentationml/2006/main">
   <p:cSld>
     <p:spTree>
@@ -30983,7 +34498,7 @@
           <a:p>
             <a:fld id="{109C872D-39A9-4065-8BF3-6A613116E2A1}" type="slidenum">
               <a:rPr lang="ko-KR" altLang="en-US" smtClean="0"/>
-              <a:t>42</a:t>
+              <a:t>44</a:t>
             </a:fld>
             <a:endParaRPr lang="ko-KR" altLang="en-US"/>
           </a:p>
@@ -31147,7 +34662,7 @@
 </p:sld>
 </file>
 
-<file path=ppt/slides/slide43.xml><?xml version="1.0" encoding="utf-8"?>
+<file path=ppt/slides/slide45.xml><?xml version="1.0" encoding="utf-8"?>
 <p:sld xmlns:a="http://schemas.openxmlformats.org/drawingml/2006/main" xmlns:r="http://schemas.openxmlformats.org/officeDocument/2006/relationships" xmlns:p="http://schemas.openxmlformats.org/presentationml/2006/main">
   <p:cSld>
     <p:spTree>
@@ -31230,7 +34745,7 @@
           <a:p>
             <a:fld id="{109C872D-39A9-4065-8BF3-6A613116E2A1}" type="slidenum">
               <a:rPr lang="ko-KR" altLang="en-US" smtClean="0"/>
-              <a:t>43</a:t>
+              <a:t>45</a:t>
             </a:fld>
             <a:endParaRPr lang="ko-KR" altLang="en-US"/>
           </a:p>
@@ -31290,7 +34805,7 @@
 </p:sld>
 </file>
 
-<file path=ppt/slides/slide44.xml><?xml version="1.0" encoding="utf-8"?>
+<file path=ppt/slides/slide46.xml><?xml version="1.0" encoding="utf-8"?>
 <p:sld xmlns:a="http://schemas.openxmlformats.org/drawingml/2006/main" xmlns:r="http://schemas.openxmlformats.org/officeDocument/2006/relationships" xmlns:p="http://schemas.openxmlformats.org/presentationml/2006/main">
   <p:cSld>
     <p:spTree>
@@ -31364,7 +34879,7 @@
           <a:p>
             <a:fld id="{109C872D-39A9-4065-8BF3-6A613116E2A1}" type="slidenum">
               <a:rPr lang="ko-KR" altLang="en-US" smtClean="0"/>
-              <a:t>44</a:t>
+              <a:t>46</a:t>
             </a:fld>
             <a:endParaRPr lang="ko-KR" altLang="en-US"/>
           </a:p>
@@ -31736,7 +35251,7 @@
 </p:sld>
 </file>
 
-<file path=ppt/slides/slide45.xml><?xml version="1.0" encoding="utf-8"?>
+<file path=ppt/slides/slide47.xml><?xml version="1.0" encoding="utf-8"?>
 <p:sld xmlns:a="http://schemas.openxmlformats.org/drawingml/2006/main" xmlns:r="http://schemas.openxmlformats.org/officeDocument/2006/relationships" xmlns:p="http://schemas.openxmlformats.org/presentationml/2006/main">
   <p:cSld>
     <p:spTree>
@@ -31804,7 +35319,7 @@
           <a:p>
             <a:fld id="{109C872D-39A9-4065-8BF3-6A613116E2A1}" type="slidenum">
               <a:rPr lang="ko-KR" altLang="en-US" smtClean="0"/>
-              <a:t>45</a:t>
+              <a:t>47</a:t>
             </a:fld>
             <a:endParaRPr lang="ko-KR" altLang="en-US"/>
           </a:p>
@@ -32176,7 +35691,7 @@
 </p:sld>
 </file>
 
-<file path=ppt/slides/slide46.xml><?xml version="1.0" encoding="utf-8"?>
+<file path=ppt/slides/slide48.xml><?xml version="1.0" encoding="utf-8"?>
 <p:sld xmlns:a="http://schemas.openxmlformats.org/drawingml/2006/main" xmlns:r="http://schemas.openxmlformats.org/officeDocument/2006/relationships" xmlns:p="http://schemas.openxmlformats.org/presentationml/2006/main">
   <p:cSld>
     <p:spTree>
@@ -32244,7 +35759,7 @@
           <a:p>
             <a:fld id="{109C872D-39A9-4065-8BF3-6A613116E2A1}" type="slidenum">
               <a:rPr lang="ko-KR" altLang="en-US" smtClean="0"/>
-              <a:t>46</a:t>
+              <a:t>48</a:t>
             </a:fld>
             <a:endParaRPr lang="ko-KR" altLang="en-US"/>
           </a:p>
@@ -32595,7 +36110,7 @@
 </p:sld>
 </file>
 
-<file path=ppt/slides/slide47.xml><?xml version="1.0" encoding="utf-8"?>
+<file path=ppt/slides/slide49.xml><?xml version="1.0" encoding="utf-8"?>
 <p:sld xmlns:a="http://schemas.openxmlformats.org/drawingml/2006/main" xmlns:r="http://schemas.openxmlformats.org/officeDocument/2006/relationships" xmlns:p="http://schemas.openxmlformats.org/presentationml/2006/main">
   <p:cSld>
     <p:spTree>
@@ -32663,7 +36178,7 @@
           <a:p>
             <a:fld id="{109C872D-39A9-4065-8BF3-6A613116E2A1}" type="slidenum">
               <a:rPr lang="ko-KR" altLang="en-US" smtClean="0"/>
-              <a:t>47</a:t>
+              <a:t>49</a:t>
             </a:fld>
             <a:endParaRPr lang="ko-KR" altLang="en-US"/>
           </a:p>
@@ -32888,153 +36403,6 @@
     <p:extLst>
       <p:ext uri="{BB962C8B-B14F-4D97-AF65-F5344CB8AC3E}">
         <p14:creationId xmlns:p14="http://schemas.microsoft.com/office/powerpoint/2010/main" val="502799633"/>
-      </p:ext>
-    </p:extLst>
-  </p:cSld>
-  <p:clrMapOvr>
-    <a:masterClrMapping/>
-  </p:clrMapOvr>
-</p:sld>
-</file>
-
-<file path=ppt/slides/slide48.xml><?xml version="1.0" encoding="utf-8"?>
-<p:sld xmlns:a="http://schemas.openxmlformats.org/drawingml/2006/main" xmlns:r="http://schemas.openxmlformats.org/officeDocument/2006/relationships" xmlns:p="http://schemas.openxmlformats.org/presentationml/2006/main">
-  <p:cSld>
-    <p:spTree>
-      <p:nvGrpSpPr>
-        <p:cNvPr id="1" name="">
-          <a:extLst>
-            <a:ext uri="{FF2B5EF4-FFF2-40B4-BE49-F238E27FC236}">
-              <a16:creationId xmlns:a16="http://schemas.microsoft.com/office/drawing/2014/main" id="{9AC8B0EB-74B1-B51C-A4E6-7DD41C0B047F}"/>
-            </a:ext>
-          </a:extLst>
-        </p:cNvPr>
-        <p:cNvGrpSpPr/>
-        <p:nvPr/>
-      </p:nvGrpSpPr>
-      <p:grpSpPr>
-        <a:xfrm>
-          <a:off x="0" y="0"/>
-          <a:ext cx="0" cy="0"/>
-          <a:chOff x="0" y="0"/>
-          <a:chExt cx="0" cy="0"/>
-        </a:xfrm>
-      </p:grpSpPr>
-      <p:pic>
-        <p:nvPicPr>
-          <p:cNvPr id="3" name="그림 2" descr="텍스트, 로고, 원, 폰트이(가) 표시된 사진&#10;&#10;AI 생성 콘텐츠는 정확하지 않을 수 있습니다.">
-            <a:extLst>
-              <a:ext uri="{FF2B5EF4-FFF2-40B4-BE49-F238E27FC236}">
-                <a16:creationId xmlns:a16="http://schemas.microsoft.com/office/drawing/2014/main" id="{C524993C-D1C3-8436-D8C1-21698BE6D1B3}"/>
-              </a:ext>
-            </a:extLst>
-          </p:cNvPr>
-          <p:cNvPicPr>
-            <a:picLocks noChangeAspect="1"/>
-          </p:cNvPicPr>
-          <p:nvPr/>
-        </p:nvPicPr>
-        <p:blipFill>
-          <a:blip r:embed="rId2">
-            <a:alphaModFix amt="20000"/>
-            <a:extLst>
-              <a:ext uri="{28A0092B-C50C-407E-A947-70E740481C1C}">
-                <a14:useLocalDpi xmlns:a14="http://schemas.microsoft.com/office/drawing/2010/main" val="0"/>
-              </a:ext>
-            </a:extLst>
-          </a:blip>
-          <a:stretch>
-            <a:fillRect/>
-          </a:stretch>
-        </p:blipFill>
-        <p:spPr>
-          <a:xfrm>
-            <a:off x="4012070" y="1673061"/>
-            <a:ext cx="4167861" cy="4167861"/>
-          </a:xfrm>
-          <a:prstGeom prst="rect">
-            <a:avLst/>
-          </a:prstGeom>
-        </p:spPr>
-      </p:pic>
-      <p:sp>
-        <p:nvSpPr>
-          <p:cNvPr id="2" name="제목 1">
-            <a:extLst>
-              <a:ext uri="{FF2B5EF4-FFF2-40B4-BE49-F238E27FC236}">
-                <a16:creationId xmlns:a16="http://schemas.microsoft.com/office/drawing/2014/main" id="{051A9577-CCBA-F474-5E82-99100C452E21}"/>
-              </a:ext>
-            </a:extLst>
-          </p:cNvPr>
-          <p:cNvSpPr>
-            <a:spLocks noGrp="1"/>
-          </p:cNvSpPr>
-          <p:nvPr>
-            <p:ph type="title"/>
-          </p:nvPr>
-        </p:nvSpPr>
-        <p:spPr>
-          <a:xfrm>
-            <a:off x="831850" y="1709739"/>
-            <a:ext cx="10515600" cy="2134292"/>
-          </a:xfrm>
-          <a:effectLst>
-            <a:reflection blurRad="50800" stA="45000" endPos="44000" dir="5400000" sy="-100000" algn="bl" rotWithShape="0"/>
-          </a:effectLst>
-        </p:spPr>
-        <p:txBody>
-          <a:bodyPr/>
-          <a:lstStyle/>
-          <a:p>
-            <a:r>
-              <a:rPr lang="en-US" altLang="ko-KR" b="1" i="0" spc="150">
-                <a:solidFill>
-                  <a:schemeClr val="accent2"/>
-                </a:solidFill>
-              </a:rPr>
-              <a:t>T</a:t>
-            </a:r>
-            <a:r>
-              <a:rPr lang="en-US" altLang="ko-KR" sz="5400" i="0" spc="100"/>
-              <a:t>hank you</a:t>
-            </a:r>
-            <a:endParaRPr lang="ko-KR" altLang="en-US" sz="5400" i="0" spc="100"/>
-          </a:p>
-        </p:txBody>
-      </p:sp>
-      <p:sp>
-        <p:nvSpPr>
-          <p:cNvPr id="4" name="슬라이드 번호 개체 틀 3">
-            <a:extLst>
-              <a:ext uri="{FF2B5EF4-FFF2-40B4-BE49-F238E27FC236}">
-                <a16:creationId xmlns:a16="http://schemas.microsoft.com/office/drawing/2014/main" id="{AF4898E0-926C-D8DA-8874-21A66F64BB68}"/>
-              </a:ext>
-            </a:extLst>
-          </p:cNvPr>
-          <p:cNvSpPr>
-            <a:spLocks noGrp="1"/>
-          </p:cNvSpPr>
-          <p:nvPr>
-            <p:ph type="sldNum" sz="quarter" idx="12"/>
-          </p:nvPr>
-        </p:nvSpPr>
-        <p:spPr/>
-        <p:txBody>
-          <a:bodyPr/>
-          <a:lstStyle/>
-          <a:p>
-            <a:fld id="{109C872D-39A9-4065-8BF3-6A613116E2A1}" type="slidenum">
-              <a:rPr lang="ko-KR" altLang="en-US" smtClean="0"/>
-              <a:t>48</a:t>
-            </a:fld>
-            <a:endParaRPr lang="ko-KR" altLang="en-US"/>
-          </a:p>
-        </p:txBody>
-      </p:sp>
-    </p:spTree>
-    <p:extLst>
-      <p:ext uri="{BB962C8B-B14F-4D97-AF65-F5344CB8AC3E}">
-        <p14:creationId xmlns:p14="http://schemas.microsoft.com/office/powerpoint/2010/main" val="3130404870"/>
       </p:ext>
     </p:extLst>
   </p:cSld>
@@ -33178,6 +36546,153 @@
     <p:extLst>
       <p:ext uri="{BB962C8B-B14F-4D97-AF65-F5344CB8AC3E}">
         <p14:creationId xmlns:p14="http://schemas.microsoft.com/office/powerpoint/2010/main" val="630996227"/>
+      </p:ext>
+    </p:extLst>
+  </p:cSld>
+  <p:clrMapOvr>
+    <a:masterClrMapping/>
+  </p:clrMapOvr>
+</p:sld>
+</file>
+
+<file path=ppt/slides/slide50.xml><?xml version="1.0" encoding="utf-8"?>
+<p:sld xmlns:a="http://schemas.openxmlformats.org/drawingml/2006/main" xmlns:r="http://schemas.openxmlformats.org/officeDocument/2006/relationships" xmlns:p="http://schemas.openxmlformats.org/presentationml/2006/main">
+  <p:cSld>
+    <p:spTree>
+      <p:nvGrpSpPr>
+        <p:cNvPr id="1" name="">
+          <a:extLst>
+            <a:ext uri="{FF2B5EF4-FFF2-40B4-BE49-F238E27FC236}">
+              <a16:creationId xmlns:a16="http://schemas.microsoft.com/office/drawing/2014/main" id="{9AC8B0EB-74B1-B51C-A4E6-7DD41C0B047F}"/>
+            </a:ext>
+          </a:extLst>
+        </p:cNvPr>
+        <p:cNvGrpSpPr/>
+        <p:nvPr/>
+      </p:nvGrpSpPr>
+      <p:grpSpPr>
+        <a:xfrm>
+          <a:off x="0" y="0"/>
+          <a:ext cx="0" cy="0"/>
+          <a:chOff x="0" y="0"/>
+          <a:chExt cx="0" cy="0"/>
+        </a:xfrm>
+      </p:grpSpPr>
+      <p:pic>
+        <p:nvPicPr>
+          <p:cNvPr id="3" name="그림 2" descr="텍스트, 로고, 원, 폰트이(가) 표시된 사진&#10;&#10;AI 생성 콘텐츠는 정확하지 않을 수 있습니다.">
+            <a:extLst>
+              <a:ext uri="{FF2B5EF4-FFF2-40B4-BE49-F238E27FC236}">
+                <a16:creationId xmlns:a16="http://schemas.microsoft.com/office/drawing/2014/main" id="{C524993C-D1C3-8436-D8C1-21698BE6D1B3}"/>
+              </a:ext>
+            </a:extLst>
+          </p:cNvPr>
+          <p:cNvPicPr>
+            <a:picLocks noChangeAspect="1"/>
+          </p:cNvPicPr>
+          <p:nvPr/>
+        </p:nvPicPr>
+        <p:blipFill>
+          <a:blip r:embed="rId2">
+            <a:alphaModFix amt="20000"/>
+            <a:extLst>
+              <a:ext uri="{28A0092B-C50C-407E-A947-70E740481C1C}">
+                <a14:useLocalDpi xmlns:a14="http://schemas.microsoft.com/office/drawing/2010/main" val="0"/>
+              </a:ext>
+            </a:extLst>
+          </a:blip>
+          <a:stretch>
+            <a:fillRect/>
+          </a:stretch>
+        </p:blipFill>
+        <p:spPr>
+          <a:xfrm>
+            <a:off x="4012070" y="1673061"/>
+            <a:ext cx="4167861" cy="4167861"/>
+          </a:xfrm>
+          <a:prstGeom prst="rect">
+            <a:avLst/>
+          </a:prstGeom>
+        </p:spPr>
+      </p:pic>
+      <p:sp>
+        <p:nvSpPr>
+          <p:cNvPr id="2" name="제목 1">
+            <a:extLst>
+              <a:ext uri="{FF2B5EF4-FFF2-40B4-BE49-F238E27FC236}">
+                <a16:creationId xmlns:a16="http://schemas.microsoft.com/office/drawing/2014/main" id="{051A9577-CCBA-F474-5E82-99100C452E21}"/>
+              </a:ext>
+            </a:extLst>
+          </p:cNvPr>
+          <p:cNvSpPr>
+            <a:spLocks noGrp="1"/>
+          </p:cNvSpPr>
+          <p:nvPr>
+            <p:ph type="title"/>
+          </p:nvPr>
+        </p:nvSpPr>
+        <p:spPr>
+          <a:xfrm>
+            <a:off x="831850" y="1709739"/>
+            <a:ext cx="10515600" cy="2134292"/>
+          </a:xfrm>
+          <a:effectLst>
+            <a:reflection blurRad="50800" stA="45000" endPos="44000" dir="5400000" sy="-100000" algn="bl" rotWithShape="0"/>
+          </a:effectLst>
+        </p:spPr>
+        <p:txBody>
+          <a:bodyPr/>
+          <a:lstStyle/>
+          <a:p>
+            <a:r>
+              <a:rPr lang="en-US" altLang="ko-KR" b="1" i="0" spc="150">
+                <a:solidFill>
+                  <a:schemeClr val="accent2"/>
+                </a:solidFill>
+              </a:rPr>
+              <a:t>T</a:t>
+            </a:r>
+            <a:r>
+              <a:rPr lang="en-US" altLang="ko-KR" sz="5400" i="0" spc="100"/>
+              <a:t>hank you</a:t>
+            </a:r>
+            <a:endParaRPr lang="ko-KR" altLang="en-US" sz="5400" i="0" spc="100"/>
+          </a:p>
+        </p:txBody>
+      </p:sp>
+      <p:sp>
+        <p:nvSpPr>
+          <p:cNvPr id="4" name="슬라이드 번호 개체 틀 3">
+            <a:extLst>
+              <a:ext uri="{FF2B5EF4-FFF2-40B4-BE49-F238E27FC236}">
+                <a16:creationId xmlns:a16="http://schemas.microsoft.com/office/drawing/2014/main" id="{AF4898E0-926C-D8DA-8874-21A66F64BB68}"/>
+              </a:ext>
+            </a:extLst>
+          </p:cNvPr>
+          <p:cNvSpPr>
+            <a:spLocks noGrp="1"/>
+          </p:cNvSpPr>
+          <p:nvPr>
+            <p:ph type="sldNum" sz="quarter" idx="12"/>
+          </p:nvPr>
+        </p:nvSpPr>
+        <p:spPr/>
+        <p:txBody>
+          <a:bodyPr/>
+          <a:lstStyle/>
+          <a:p>
+            <a:fld id="{109C872D-39A9-4065-8BF3-6A613116E2A1}" type="slidenum">
+              <a:rPr lang="ko-KR" altLang="en-US" smtClean="0"/>
+              <a:t>50</a:t>
+            </a:fld>
+            <a:endParaRPr lang="ko-KR" altLang="en-US"/>
+          </a:p>
+        </p:txBody>
+      </p:sp>
+    </p:spTree>
+    <p:extLst>
+      <p:ext uri="{BB962C8B-B14F-4D97-AF65-F5344CB8AC3E}">
+        <p14:creationId xmlns:p14="http://schemas.microsoft.com/office/powerpoint/2010/main" val="3130404870"/>
       </p:ext>
     </p:extLst>
   </p:cSld>

--- a/재정학/01_Lectures/재정학_Chapter_5.pptx
+++ b/재정학/01_Lectures/재정학_Chapter_5.pptx
@@ -253,7 +253,7 @@
           <a:p>
             <a:fld id="{4A5E00EF-AEA4-43E2-9451-8F9C59A39471}" type="datetimeFigureOut">
               <a:rPr lang="ko-KR" altLang="en-US" smtClean="0"/>
-              <a:t>2026-02-12</a:t>
+              <a:t>2026-04-02</a:t>
             </a:fld>
             <a:endParaRPr lang="ko-KR" altLang="en-US"/>
           </a:p>
@@ -675,7 +675,7 @@
           <a:p>
             <a:fld id="{CD32C56F-BD27-4999-9E6D-D4EACE3DA9F4}" type="datetime1">
               <a:rPr lang="ko-KR" altLang="en-US" smtClean="0"/>
-              <a:t>2026-02-12</a:t>
+              <a:t>2026-04-02</a:t>
             </a:fld>
             <a:endParaRPr lang="ko-KR" altLang="en-US"/>
           </a:p>
@@ -889,7 +889,7 @@
           <a:p>
             <a:fld id="{8EF4A19C-72C8-45CA-8E3F-68A7FA345D6C}" type="datetime1">
               <a:rPr lang="ko-KR" altLang="en-US" smtClean="0"/>
-              <a:t>2026-02-12</a:t>
+              <a:t>2026-04-02</a:t>
             </a:fld>
             <a:endParaRPr lang="ko-KR" altLang="en-US"/>
           </a:p>
@@ -1113,7 +1113,7 @@
           <a:p>
             <a:fld id="{56A175B2-010B-4341-954C-5F8F5C70B124}" type="datetime1">
               <a:rPr lang="ko-KR" altLang="en-US" smtClean="0"/>
-              <a:t>2026-02-12</a:t>
+              <a:t>2026-04-02</a:t>
             </a:fld>
             <a:endParaRPr lang="ko-KR" altLang="en-US"/>
           </a:p>
@@ -1327,7 +1327,7 @@
           <a:p>
             <a:fld id="{16B83F9E-22C9-45CA-9E85-070F1D3EF530}" type="datetime1">
               <a:rPr lang="ko-KR" altLang="en-US" smtClean="0"/>
-              <a:t>2026-02-12</a:t>
+              <a:t>2026-04-02</a:t>
             </a:fld>
             <a:endParaRPr lang="ko-KR" altLang="en-US"/>
           </a:p>
@@ -1618,7 +1618,7 @@
           <a:p>
             <a:fld id="{03278F45-FB3C-4C4D-B89A-7BC3F5F229F6}" type="datetime1">
               <a:rPr lang="ko-KR" altLang="en-US" smtClean="0"/>
-              <a:t>2026-02-12</a:t>
+              <a:t>2026-04-02</a:t>
             </a:fld>
             <a:endParaRPr lang="ko-KR" altLang="en-US"/>
           </a:p>
@@ -2011,7 +2011,7 @@
           <a:p>
             <a:fld id="{38FDAC3C-35A6-415C-9F03-738A6AC328B1}" type="datetime1">
               <a:rPr lang="ko-KR" altLang="en-US" smtClean="0"/>
-              <a:t>2026-02-12</a:t>
+              <a:t>2026-04-02</a:t>
             </a:fld>
             <a:endParaRPr lang="ko-KR" altLang="en-US"/>
           </a:p>
@@ -3605,7 +3605,7 @@
           <a:p>
             <a:fld id="{507A0DF1-AEE6-4B0D-89D2-351E7B3EF65C}" type="datetime1">
               <a:rPr lang="ko-KR" altLang="en-US" smtClean="0"/>
-              <a:t>2026-02-12</a:t>
+              <a:t>2026-04-02</a:t>
             </a:fld>
             <a:endParaRPr lang="ko-KR" altLang="en-US"/>
           </a:p>
@@ -4033,7 +4033,7 @@
           <a:p>
             <a:fld id="{CA93B8C9-630F-4D57-944D-04FD37CECCD3}" type="datetime1">
               <a:rPr lang="ko-KR" altLang="en-US" smtClean="0"/>
-              <a:t>2026-02-12</a:t>
+              <a:t>2026-04-02</a:t>
             </a:fld>
             <a:endParaRPr lang="ko-KR" altLang="en-US"/>
           </a:p>
@@ -4190,7 +4190,7 @@
           <a:p>
             <a:fld id="{E986165A-AC43-4902-9541-874ECD310BA3}" type="datetime1">
               <a:rPr lang="ko-KR" altLang="en-US" smtClean="0"/>
-              <a:t>2026-02-12</a:t>
+              <a:t>2026-04-02</a:t>
             </a:fld>
             <a:endParaRPr lang="ko-KR" altLang="en-US"/>
           </a:p>
@@ -4517,7 +4517,7 @@
           <a:p>
             <a:fld id="{47E6EE6D-2B0E-43A9-87A2-7354CDB998F4}" type="datetime1">
               <a:rPr lang="ko-KR" altLang="en-US" smtClean="0"/>
-              <a:t>2026-02-12</a:t>
+              <a:t>2026-04-02</a:t>
             </a:fld>
             <a:endParaRPr lang="ko-KR" altLang="en-US"/>
           </a:p>
@@ -4821,7 +4821,7 @@
           <a:p>
             <a:fld id="{5CC5944E-0BC8-4FAA-9F94-6B4B05834E10}" type="datetime1">
               <a:rPr lang="ko-KR" altLang="en-US" smtClean="0"/>
-              <a:t>2026-02-12</a:t>
+              <a:t>2026-04-02</a:t>
             </a:fld>
             <a:endParaRPr lang="ko-KR" altLang="en-US"/>
           </a:p>
@@ -21571,7 +21571,7 @@
             </a:pPr>
             <a:r>
               <a:rPr lang="ko-KR" altLang="en-US" sz="1600" spc="-50" dirty="0"/>
-              <a:t>다시 말해</a:t>
+              <a:t>즉</a:t>
             </a:r>
             <a:r>
               <a:rPr lang="en-US" altLang="ko-KR" sz="1600" spc="-50" dirty="0"/>
@@ -21697,8 +21697,8 @@
           </a:p>
         </p:txBody>
       </p:sp>
-      <mc:AlternateContent xmlns:mc="http://schemas.openxmlformats.org/markup-compatibility/2006">
-        <mc:Choice xmlns:a14="http://schemas.microsoft.com/office/drawing/2010/main" Requires="a14">
+      <mc:AlternateContent xmlns:mc="http://schemas.openxmlformats.org/markup-compatibility/2006" xmlns:a14="http://schemas.microsoft.com/office/drawing/2010/main">
+        <mc:Choice Requires="a14">
           <p:sp>
             <p:nvSpPr>
               <p:cNvPr id="7" name="TextBox 6">
@@ -22090,7 +22090,7 @@
             </p:txBody>
           </p:sp>
         </mc:Choice>
-        <mc:Fallback>
+        <mc:Fallback xmlns="">
           <p:sp>
             <p:nvSpPr>
               <p:cNvPr id="7" name="TextBox 6">
@@ -22661,9 +22661,12 @@
             </a:r>
             <a:r>
               <a:rPr lang="ko-KR" altLang="en-US" sz="1600" spc="-50" dirty="0"/>
-              <a:t>수동적인 존재인지 의문</a:t>
-            </a:r>
-            <a:endParaRPr lang="en-US" altLang="ko-KR" sz="1600" spc="-50" dirty="0"/>
+              <a:t>수동적인 존재인지 의문이다</a:t>
+            </a:r>
+            <a:r>
+              <a:rPr lang="en-US" altLang="ko-KR" sz="1600" spc="-50" dirty="0"/>
+              <a:t>.</a:t>
+            </a:r>
           </a:p>
           <a:p>
             <a:pPr marL="1292225" lvl="2" indent="-285750">
@@ -22716,7 +22719,11 @@
             </a:r>
             <a:r>
               <a:rPr lang="ko-KR" altLang="en-US" sz="1600" spc="-50" dirty="0"/>
-              <a:t>이것이 타당한지 의문</a:t>
+              <a:t>이것이 타당한지 의문이다</a:t>
+            </a:r>
+            <a:r>
+              <a:rPr lang="en-US" altLang="ko-KR" sz="1600" spc="-50"/>
+              <a:t>.</a:t>
             </a:r>
             <a:endParaRPr lang="en-US" altLang="ko-KR" sz="1600" spc="-50" dirty="0"/>
           </a:p>
@@ -22888,8 +22895,8 @@
           </a:p>
         </p:txBody>
       </p:sp>
-      <mc:AlternateContent xmlns:mc="http://schemas.openxmlformats.org/markup-compatibility/2006">
-        <mc:Choice xmlns:a14="http://schemas.microsoft.com/office/drawing/2010/main" Requires="a14">
+      <mc:AlternateContent xmlns:mc="http://schemas.openxmlformats.org/markup-compatibility/2006" xmlns:a14="http://schemas.microsoft.com/office/drawing/2010/main">
+        <mc:Choice Requires="a14">
           <p:sp>
             <p:nvSpPr>
               <p:cNvPr id="3" name="TextBox 2">
@@ -23376,7 +23383,7 @@
             </p:txBody>
           </p:sp>
         </mc:Choice>
-        <mc:Fallback>
+        <mc:Fallback xmlns="">
           <p:sp>
             <p:nvSpPr>
               <p:cNvPr id="3" name="TextBox 2">

--- a/재정학/01_Lectures/재정학_Chapter_5.pptx
+++ b/재정학/01_Lectures/재정학_Chapter_5.pptx
@@ -253,7 +253,7 @@
           <a:p>
             <a:fld id="{4A5E00EF-AEA4-43E2-9451-8F9C59A39471}" type="datetimeFigureOut">
               <a:rPr lang="ko-KR" altLang="en-US" smtClean="0"/>
-              <a:t>2026-04-02</a:t>
+              <a:t>2026-04-03</a:t>
             </a:fld>
             <a:endParaRPr lang="ko-KR" altLang="en-US"/>
           </a:p>
@@ -675,7 +675,7 @@
           <a:p>
             <a:fld id="{CD32C56F-BD27-4999-9E6D-D4EACE3DA9F4}" type="datetime1">
               <a:rPr lang="ko-KR" altLang="en-US" smtClean="0"/>
-              <a:t>2026-04-02</a:t>
+              <a:t>2026-04-03</a:t>
             </a:fld>
             <a:endParaRPr lang="ko-KR" altLang="en-US"/>
           </a:p>
@@ -889,7 +889,7 @@
           <a:p>
             <a:fld id="{8EF4A19C-72C8-45CA-8E3F-68A7FA345D6C}" type="datetime1">
               <a:rPr lang="ko-KR" altLang="en-US" smtClean="0"/>
-              <a:t>2026-04-02</a:t>
+              <a:t>2026-04-03</a:t>
             </a:fld>
             <a:endParaRPr lang="ko-KR" altLang="en-US"/>
           </a:p>
@@ -1113,7 +1113,7 @@
           <a:p>
             <a:fld id="{56A175B2-010B-4341-954C-5F8F5C70B124}" type="datetime1">
               <a:rPr lang="ko-KR" altLang="en-US" smtClean="0"/>
-              <a:t>2026-04-02</a:t>
+              <a:t>2026-04-03</a:t>
             </a:fld>
             <a:endParaRPr lang="ko-KR" altLang="en-US"/>
           </a:p>
@@ -1327,7 +1327,7 @@
           <a:p>
             <a:fld id="{16B83F9E-22C9-45CA-9E85-070F1D3EF530}" type="datetime1">
               <a:rPr lang="ko-KR" altLang="en-US" smtClean="0"/>
-              <a:t>2026-04-02</a:t>
+              <a:t>2026-04-03</a:t>
             </a:fld>
             <a:endParaRPr lang="ko-KR" altLang="en-US"/>
           </a:p>
@@ -1618,7 +1618,7 @@
           <a:p>
             <a:fld id="{03278F45-FB3C-4C4D-B89A-7BC3F5F229F6}" type="datetime1">
               <a:rPr lang="ko-KR" altLang="en-US" smtClean="0"/>
-              <a:t>2026-04-02</a:t>
+              <a:t>2026-04-03</a:t>
             </a:fld>
             <a:endParaRPr lang="ko-KR" altLang="en-US"/>
           </a:p>
@@ -2011,7 +2011,7 @@
           <a:p>
             <a:fld id="{38FDAC3C-35A6-415C-9F03-738A6AC328B1}" type="datetime1">
               <a:rPr lang="ko-KR" altLang="en-US" smtClean="0"/>
-              <a:t>2026-04-02</a:t>
+              <a:t>2026-04-03</a:t>
             </a:fld>
             <a:endParaRPr lang="ko-KR" altLang="en-US"/>
           </a:p>
@@ -3605,7 +3605,7 @@
           <a:p>
             <a:fld id="{507A0DF1-AEE6-4B0D-89D2-351E7B3EF65C}" type="datetime1">
               <a:rPr lang="ko-KR" altLang="en-US" smtClean="0"/>
-              <a:t>2026-04-02</a:t>
+              <a:t>2026-04-03</a:t>
             </a:fld>
             <a:endParaRPr lang="ko-KR" altLang="en-US"/>
           </a:p>
@@ -4033,7 +4033,7 @@
           <a:p>
             <a:fld id="{CA93B8C9-630F-4D57-944D-04FD37CECCD3}" type="datetime1">
               <a:rPr lang="ko-KR" altLang="en-US" smtClean="0"/>
-              <a:t>2026-04-02</a:t>
+              <a:t>2026-04-03</a:t>
             </a:fld>
             <a:endParaRPr lang="ko-KR" altLang="en-US"/>
           </a:p>
@@ -4190,7 +4190,7 @@
           <a:p>
             <a:fld id="{E986165A-AC43-4902-9541-874ECD310BA3}" type="datetime1">
               <a:rPr lang="ko-KR" altLang="en-US" smtClean="0"/>
-              <a:t>2026-04-02</a:t>
+              <a:t>2026-04-03</a:t>
             </a:fld>
             <a:endParaRPr lang="ko-KR" altLang="en-US"/>
           </a:p>
@@ -4517,7 +4517,7 @@
           <a:p>
             <a:fld id="{47E6EE6D-2B0E-43A9-87A2-7354CDB998F4}" type="datetime1">
               <a:rPr lang="ko-KR" altLang="en-US" smtClean="0"/>
-              <a:t>2026-04-02</a:t>
+              <a:t>2026-04-03</a:t>
             </a:fld>
             <a:endParaRPr lang="ko-KR" altLang="en-US"/>
           </a:p>
@@ -4821,7 +4821,7 @@
           <a:p>
             <a:fld id="{5CC5944E-0BC8-4FAA-9F94-6B4B05834E10}" type="datetime1">
               <a:rPr lang="ko-KR" altLang="en-US" smtClean="0"/>
-              <a:t>2026-04-02</a:t>
+              <a:t>2026-04-03</a:t>
             </a:fld>
             <a:endParaRPr lang="ko-KR" altLang="en-US"/>
           </a:p>
@@ -25722,7 +25722,7 @@
         <p:spPr>
           <a:xfrm>
             <a:off x="288790" y="958844"/>
-            <a:ext cx="11693660" cy="4476675"/>
+            <a:ext cx="11693660" cy="5584670"/>
           </a:xfrm>
           <a:prstGeom prst="rect">
             <a:avLst/>
@@ -25947,6 +25947,98 @@
               <a:rPr lang="en-US" altLang="ko-KR" sz="1600" spc="-50" dirty="0"/>
               <a:t>.</a:t>
             </a:r>
+          </a:p>
+          <a:p>
+            <a:pPr marL="1292225" lvl="2" indent="-285750">
+              <a:lnSpc>
+                <a:spcPct val="150000"/>
+              </a:lnSpc>
+              <a:buFont typeface="Wingdings" panose="05000000000000000000" pitchFamily="2" charset="2"/>
+              <a:buChar char="Ø"/>
+            </a:pPr>
+            <a:r>
+              <a:rPr lang="en-US" altLang="ko-KR" sz="1600" spc="-50" dirty="0"/>
+              <a:t>(2026) ‘</a:t>
+            </a:r>
+            <a:r>
+              <a:rPr lang="ko-KR" altLang="en-US" sz="1600" spc="-50" dirty="0" err="1"/>
+              <a:t>호르무즈</a:t>
+            </a:r>
+            <a:r>
+              <a:rPr lang="ko-KR" altLang="en-US" sz="1600" spc="-50" dirty="0"/>
+              <a:t> 무력 개방</a:t>
+            </a:r>
+            <a:r>
+              <a:rPr lang="en-US" altLang="ko-KR" sz="1600" spc="-50" dirty="0"/>
+              <a:t>’ </a:t>
+            </a:r>
+            <a:r>
+              <a:rPr lang="ko-KR" altLang="en-US" sz="1600" spc="-50" dirty="0"/>
+              <a:t>안보리 결의 추진 </a:t>
+            </a:r>
+            <a:r>
+              <a:rPr lang="en-US" altLang="ko-KR" sz="1600" spc="-50" dirty="0"/>
+              <a:t>(</a:t>
+            </a:r>
+            <a:r>
+              <a:rPr lang="en-US" altLang="ko-KR" sz="1600" spc="-50" dirty="0">
+                <a:hlinkClick r:id="rId2"/>
+              </a:rPr>
+              <a:t>https://www.youtube.com/watch?v=AEs1dDWsp04</a:t>
+            </a:r>
+            <a:r>
+              <a:rPr lang="en-US" altLang="ko-KR" sz="1600" spc="-50" dirty="0"/>
+              <a:t>)</a:t>
+            </a:r>
+          </a:p>
+          <a:p>
+            <a:pPr marL="1292225" lvl="2" indent="-285750">
+              <a:lnSpc>
+                <a:spcPct val="150000"/>
+              </a:lnSpc>
+              <a:buFont typeface="Wingdings" panose="05000000000000000000" pitchFamily="2" charset="2"/>
+              <a:buChar char="Ø"/>
+            </a:pPr>
+            <a:r>
+              <a:rPr lang="en-US" altLang="ko-KR" sz="1600" spc="-50" dirty="0"/>
+              <a:t>(2023) </a:t>
+            </a:r>
+            <a:r>
+              <a:rPr lang="ko-KR" altLang="en-US" sz="1600" spc="-50" dirty="0"/>
+              <a:t>이란 </a:t>
+            </a:r>
+            <a:r>
+              <a:rPr lang="en-US" altLang="ko-KR" sz="1600" spc="-50" dirty="0"/>
+              <a:t>vs. </a:t>
+            </a:r>
+            <a:r>
+              <a:rPr lang="ko-KR" altLang="en-US" sz="1600" spc="-50" dirty="0"/>
+              <a:t>이스라엘 </a:t>
+            </a:r>
+            <a:r>
+              <a:rPr lang="en-US" altLang="ko-KR" sz="1600" spc="-50" dirty="0"/>
+              <a:t>(</a:t>
+            </a:r>
+            <a:r>
+              <a:rPr lang="en-US" altLang="ko-KR" sz="1600" spc="-50" dirty="0">
+                <a:hlinkClick r:id="rId3"/>
+              </a:rPr>
+              <a:t>https://www.youtube.com/watch?v=8oX8NmyuQpw</a:t>
+            </a:r>
+            <a:r>
+              <a:rPr lang="en-US" altLang="ko-KR" sz="1600" spc="-50" dirty="0"/>
+              <a:t>)</a:t>
+            </a:r>
+          </a:p>
+          <a:p>
+            <a:pPr marL="1292225" lvl="2" indent="-285750">
+              <a:lnSpc>
+                <a:spcPct val="150000"/>
+              </a:lnSpc>
+              <a:buFont typeface="Wingdings" panose="05000000000000000000" pitchFamily="2" charset="2"/>
+              <a:buChar char="Ø"/>
+            </a:pPr>
+            <a:endParaRPr lang="en-US" altLang="ko-KR" sz="1600" spc="-50" dirty="0"/>
           </a:p>
           <a:p>
             <a:pPr marL="835025" lvl="1" indent="-285750">

--- a/재정학/01_Lectures/재정학_Chapter_5.pptx
+++ b/재정학/01_Lectures/재정학_Chapter_5.pptx
@@ -25722,7 +25722,7 @@
         <p:spPr>
           <a:xfrm>
             <a:off x="288790" y="958844"/>
-            <a:ext cx="11693660" cy="5584670"/>
+            <a:ext cx="11693660" cy="5215338"/>
           </a:xfrm>
           <a:prstGeom prst="rect">
             <a:avLst/>
@@ -25843,6 +25843,14 @@
             </a:pPr>
             <a:r>
               <a:rPr lang="ko-KR" altLang="en-US" sz="1600" spc="-50" dirty="0"/>
+              <a:t>표의 배분을 정해야 한다</a:t>
+            </a:r>
+            <a:r>
+              <a:rPr lang="en-US" altLang="ko-KR" sz="1600" spc="-50" dirty="0"/>
+              <a:t>. </a:t>
+            </a:r>
+            <a:r>
+              <a:rPr lang="ko-KR" altLang="en-US" sz="1600" spc="-50" dirty="0"/>
               <a:t>지금은 </a:t>
             </a:r>
             <a:r>
@@ -25923,9 +25931,65 @@
               <a:buFont typeface="Wingdings" panose="05000000000000000000" pitchFamily="2" charset="2"/>
               <a:buChar char="Ø"/>
             </a:pPr>
-            <a:r>
-              <a:rPr lang="ko-KR" altLang="en-US" sz="1600" spc="-50" dirty="0"/>
-              <a:t>심지어 국제연합</a:t>
+            <a:endParaRPr lang="en-US" altLang="ko-KR" sz="1600" spc="-50" dirty="0"/>
+          </a:p>
+          <a:p>
+            <a:pPr marL="835025" lvl="1" indent="-285750">
+              <a:lnSpc>
+                <a:spcPct val="150000"/>
+              </a:lnSpc>
+              <a:buFont typeface="Wingdings" panose="05000000000000000000" pitchFamily="2" charset="2"/>
+              <a:buChar char="ü"/>
+            </a:pPr>
+            <a:r>
+              <a:rPr lang="ko-KR" altLang="en-US" sz="1600" spc="-50" dirty="0"/>
+              <a:t>어떤 조건이 충족되었을 때 의사결정에 도달되었다고 볼 수 있는지 합의가 되어야 한다</a:t>
+            </a:r>
+            <a:r>
+              <a:rPr lang="en-US" altLang="ko-KR" sz="1600" spc="-50" dirty="0"/>
+              <a:t>.</a:t>
+            </a:r>
+          </a:p>
+          <a:p>
+            <a:pPr marL="1292225" lvl="2" indent="-285750">
+              <a:lnSpc>
+                <a:spcPct val="150000"/>
+              </a:lnSpc>
+              <a:buFont typeface="Wingdings" panose="05000000000000000000" pitchFamily="2" charset="2"/>
+              <a:buChar char="Ø"/>
+            </a:pPr>
+            <a:r>
+              <a:rPr lang="ko-KR" altLang="en-US" sz="1600" spc="-50" dirty="0"/>
+              <a:t>참여자 전원이 찬성을 해야 하는지 혹은 과반수 이상이 찬성을 해야 하는지 등을 결정해야 한다</a:t>
+            </a:r>
+            <a:r>
+              <a:rPr lang="en-US" altLang="ko-KR" sz="1600" spc="-50" dirty="0"/>
+              <a:t>.</a:t>
+            </a:r>
+          </a:p>
+          <a:p>
+            <a:pPr marL="1292225" lvl="2" indent="-285750">
+              <a:lnSpc>
+                <a:spcPct val="150000"/>
+              </a:lnSpc>
+              <a:buFont typeface="Wingdings" panose="05000000000000000000" pitchFamily="2" charset="2"/>
+              <a:buChar char="Ø"/>
+            </a:pPr>
+            <a:r>
+              <a:rPr lang="ko-KR" altLang="en-US" sz="1600" spc="-50" dirty="0"/>
+              <a:t>예컨대</a:t>
+            </a:r>
+            <a:r>
+              <a:rPr lang="en-US" altLang="ko-KR" sz="1600" spc="-50"/>
+              <a:t>,</a:t>
+            </a:r>
+            <a:r>
+              <a:rPr lang="ko-KR" altLang="en-US" sz="1600" spc="-50"/>
+              <a:t> </a:t>
+            </a:r>
+            <a:r>
+              <a:rPr lang="ko-KR" altLang="en-US" sz="1600" spc="-50" dirty="0"/>
+              <a:t>국제연합</a:t>
             </a:r>
             <a:r>
               <a:rPr lang="en-US" altLang="ko-KR" sz="1600" spc="-50" dirty="0"/>
@@ -26029,60 +26093,6 @@
               <a:rPr lang="en-US" altLang="ko-KR" sz="1600" spc="-50" dirty="0"/>
               <a:t>)</a:t>
             </a:r>
-          </a:p>
-          <a:p>
-            <a:pPr marL="1292225" lvl="2" indent="-285750">
-              <a:lnSpc>
-                <a:spcPct val="150000"/>
-              </a:lnSpc>
-              <a:buFont typeface="Wingdings" panose="05000000000000000000" pitchFamily="2" charset="2"/>
-              <a:buChar char="Ø"/>
-            </a:pPr>
-            <a:endParaRPr lang="en-US" altLang="ko-KR" sz="1600" spc="-50" dirty="0"/>
-          </a:p>
-          <a:p>
-            <a:pPr marL="835025" lvl="1" indent="-285750">
-              <a:lnSpc>
-                <a:spcPct val="150000"/>
-              </a:lnSpc>
-              <a:buFont typeface="Wingdings" panose="05000000000000000000" pitchFamily="2" charset="2"/>
-              <a:buChar char="ü"/>
-            </a:pPr>
-            <a:r>
-              <a:rPr lang="ko-KR" altLang="en-US" sz="1600" spc="-50" dirty="0"/>
-              <a:t>어떤 조건이 충족되었을 때 의사결정에 도달되었다고 볼 수 있는지 합의가 되어야 한다</a:t>
-            </a:r>
-            <a:r>
-              <a:rPr lang="en-US" altLang="ko-KR" sz="1600" spc="-50" dirty="0"/>
-              <a:t>.</a:t>
-            </a:r>
-          </a:p>
-          <a:p>
-            <a:pPr marL="1292225" lvl="2" indent="-285750">
-              <a:lnSpc>
-                <a:spcPct val="150000"/>
-              </a:lnSpc>
-              <a:buFont typeface="Wingdings" panose="05000000000000000000" pitchFamily="2" charset="2"/>
-              <a:buChar char="Ø"/>
-            </a:pPr>
-            <a:r>
-              <a:rPr lang="ko-KR" altLang="en-US" sz="1600" spc="-50" dirty="0"/>
-              <a:t>참여자 전원이 찬성을 해야 하는지 혹은 과반수 이상이 찬성을 해야 하는지 등을 결정해야 한다</a:t>
-            </a:r>
-            <a:r>
-              <a:rPr lang="en-US" altLang="ko-KR" sz="1600" spc="-50" dirty="0"/>
-              <a:t>.</a:t>
-            </a:r>
-          </a:p>
-          <a:p>
-            <a:pPr marL="1292225" lvl="2" indent="-285750">
-              <a:lnSpc>
-                <a:spcPct val="150000"/>
-              </a:lnSpc>
-              <a:buFont typeface="Wingdings" panose="05000000000000000000" pitchFamily="2" charset="2"/>
-              <a:buChar char="Ø"/>
-            </a:pPr>
-            <a:endParaRPr lang="en-US" altLang="ko-KR" sz="1600" spc="-50" dirty="0"/>
           </a:p>
         </p:txBody>
       </p:sp>

--- a/재정학/01_Lectures/재정학_Chapter_5.pptx
+++ b/재정학/01_Lectures/재정학_Chapter_5.pptx
@@ -253,7 +253,7 @@
           <a:p>
             <a:fld id="{4A5E00EF-AEA4-43E2-9451-8F9C59A39471}" type="datetimeFigureOut">
               <a:rPr lang="ko-KR" altLang="en-US" smtClean="0"/>
-              <a:t>2026-04-03</a:t>
+              <a:t>2026-04-04</a:t>
             </a:fld>
             <a:endParaRPr lang="ko-KR" altLang="en-US"/>
           </a:p>
@@ -675,7 +675,7 @@
           <a:p>
             <a:fld id="{CD32C56F-BD27-4999-9E6D-D4EACE3DA9F4}" type="datetime1">
               <a:rPr lang="ko-KR" altLang="en-US" smtClean="0"/>
-              <a:t>2026-04-03</a:t>
+              <a:t>2026-04-04</a:t>
             </a:fld>
             <a:endParaRPr lang="ko-KR" altLang="en-US"/>
           </a:p>
@@ -889,7 +889,7 @@
           <a:p>
             <a:fld id="{8EF4A19C-72C8-45CA-8E3F-68A7FA345D6C}" type="datetime1">
               <a:rPr lang="ko-KR" altLang="en-US" smtClean="0"/>
-              <a:t>2026-04-03</a:t>
+              <a:t>2026-04-04</a:t>
             </a:fld>
             <a:endParaRPr lang="ko-KR" altLang="en-US"/>
           </a:p>
@@ -1113,7 +1113,7 @@
           <a:p>
             <a:fld id="{56A175B2-010B-4341-954C-5F8F5C70B124}" type="datetime1">
               <a:rPr lang="ko-KR" altLang="en-US" smtClean="0"/>
-              <a:t>2026-04-03</a:t>
+              <a:t>2026-04-04</a:t>
             </a:fld>
             <a:endParaRPr lang="ko-KR" altLang="en-US"/>
           </a:p>
@@ -1327,7 +1327,7 @@
           <a:p>
             <a:fld id="{16B83F9E-22C9-45CA-9E85-070F1D3EF530}" type="datetime1">
               <a:rPr lang="ko-KR" altLang="en-US" smtClean="0"/>
-              <a:t>2026-04-03</a:t>
+              <a:t>2026-04-04</a:t>
             </a:fld>
             <a:endParaRPr lang="ko-KR" altLang="en-US"/>
           </a:p>
@@ -1618,7 +1618,7 @@
           <a:p>
             <a:fld id="{03278F45-FB3C-4C4D-B89A-7BC3F5F229F6}" type="datetime1">
               <a:rPr lang="ko-KR" altLang="en-US" smtClean="0"/>
-              <a:t>2026-04-03</a:t>
+              <a:t>2026-04-04</a:t>
             </a:fld>
             <a:endParaRPr lang="ko-KR" altLang="en-US"/>
           </a:p>
@@ -2011,7 +2011,7 @@
           <a:p>
             <a:fld id="{38FDAC3C-35A6-415C-9F03-738A6AC328B1}" type="datetime1">
               <a:rPr lang="ko-KR" altLang="en-US" smtClean="0"/>
-              <a:t>2026-04-03</a:t>
+              <a:t>2026-04-04</a:t>
             </a:fld>
             <a:endParaRPr lang="ko-KR" altLang="en-US"/>
           </a:p>
@@ -3605,7 +3605,7 @@
           <a:p>
             <a:fld id="{507A0DF1-AEE6-4B0D-89D2-351E7B3EF65C}" type="datetime1">
               <a:rPr lang="ko-KR" altLang="en-US" smtClean="0"/>
-              <a:t>2026-04-03</a:t>
+              <a:t>2026-04-04</a:t>
             </a:fld>
             <a:endParaRPr lang="ko-KR" altLang="en-US"/>
           </a:p>
@@ -4033,7 +4033,7 @@
           <a:p>
             <a:fld id="{CA93B8C9-630F-4D57-944D-04FD37CECCD3}" type="datetime1">
               <a:rPr lang="ko-KR" altLang="en-US" smtClean="0"/>
-              <a:t>2026-04-03</a:t>
+              <a:t>2026-04-04</a:t>
             </a:fld>
             <a:endParaRPr lang="ko-KR" altLang="en-US"/>
           </a:p>
@@ -4190,7 +4190,7 @@
           <a:p>
             <a:fld id="{E986165A-AC43-4902-9541-874ECD310BA3}" type="datetime1">
               <a:rPr lang="ko-KR" altLang="en-US" smtClean="0"/>
-              <a:t>2026-04-03</a:t>
+              <a:t>2026-04-04</a:t>
             </a:fld>
             <a:endParaRPr lang="ko-KR" altLang="en-US"/>
           </a:p>
@@ -4517,7 +4517,7 @@
           <a:p>
             <a:fld id="{47E6EE6D-2B0E-43A9-87A2-7354CDB998F4}" type="datetime1">
               <a:rPr lang="ko-KR" altLang="en-US" smtClean="0"/>
-              <a:t>2026-04-03</a:t>
+              <a:t>2026-04-04</a:t>
             </a:fld>
             <a:endParaRPr lang="ko-KR" altLang="en-US"/>
           </a:p>
@@ -4821,7 +4821,7 @@
           <a:p>
             <a:fld id="{5CC5944E-0BC8-4FAA-9F94-6B4B05834E10}" type="datetime1">
               <a:rPr lang="ko-KR" altLang="en-US" smtClean="0"/>
-              <a:t>2026-04-03</a:t>
+              <a:t>2026-04-04</a:t>
             </a:fld>
             <a:endParaRPr lang="ko-KR" altLang="en-US"/>
           </a:p>
@@ -11771,7 +11771,15 @@
             </a:pPr>
             <a:r>
               <a:rPr lang="en-US" altLang="ko-KR" sz="1600" spc="-50" dirty="0"/>
-              <a:t>X:   A &gt; B &gt; C</a:t>
+              <a:t>X:   A &gt; B &gt; C (</a:t>
+            </a:r>
+            <a:r>
+              <a:rPr lang="ko-KR" altLang="en-US" sz="1600" spc="-50" dirty="0"/>
+              <a:t>가장 큰 예산 선호</a:t>
+            </a:r>
+            <a:r>
+              <a:rPr lang="en-US" altLang="ko-KR" sz="1600" spc="-50" dirty="0"/>
+              <a:t>)</a:t>
             </a:r>
           </a:p>
           <a:p>
@@ -11784,7 +11792,15 @@
             </a:pPr>
             <a:r>
               <a:rPr lang="en-US" altLang="ko-KR" sz="1600" spc="-50" dirty="0"/>
-              <a:t>Y:   C &gt; B &gt; A</a:t>
+              <a:t>Y:   C &gt; B &gt; A (</a:t>
+            </a:r>
+            <a:r>
+              <a:rPr lang="ko-KR" altLang="en-US" sz="1600" spc="-50" dirty="0"/>
+              <a:t>가장 작은 예산 선호</a:t>
+            </a:r>
+            <a:r>
+              <a:rPr lang="en-US" altLang="ko-KR" sz="1600" spc="-50" dirty="0"/>
+              <a:t>)</a:t>
             </a:r>
           </a:p>
           <a:p>
@@ -11797,7 +11813,15 @@
             </a:pPr>
             <a:r>
               <a:rPr lang="en-US" altLang="ko-KR" sz="1600" spc="-50" dirty="0"/>
-              <a:t>Z:   B &gt; C &gt; A</a:t>
+              <a:t>Z:   B &gt; C &gt; A (</a:t>
+            </a:r>
+            <a:r>
+              <a:rPr lang="ko-KR" altLang="en-US" sz="1600" spc="-50" dirty="0"/>
+              <a:t>중간 정도 예산 선호</a:t>
+            </a:r>
+            <a:r>
+              <a:rPr lang="en-US" altLang="ko-KR" sz="1600" spc="-50" dirty="0"/>
+              <a:t>)</a:t>
             </a:r>
           </a:p>
           <a:p>
@@ -13915,6 +13939,88 @@
             </a:r>
           </a:p>
           <a:p>
+            <a:pPr marL="1292225" lvl="2" indent="-285750">
+              <a:lnSpc>
+                <a:spcPct val="150000"/>
+              </a:lnSpc>
+              <a:buFont typeface="Wingdings" panose="05000000000000000000" pitchFamily="2" charset="2"/>
+              <a:buChar char="Ø"/>
+            </a:pPr>
+            <a:r>
+              <a:rPr lang="ko-KR" altLang="en-US" sz="1600" spc="-50" dirty="0"/>
+              <a:t>투표자의 선호 </a:t>
+            </a:r>
+            <a:r>
+              <a:rPr lang="en-US" altLang="ko-KR" sz="1600" spc="-50" dirty="0"/>
+              <a:t>Ⅱ </a:t>
+            </a:r>
+            <a:r>
+              <a:rPr lang="ko-KR" altLang="en-US" sz="1600" spc="-50" dirty="0"/>
+              <a:t>그림을 보면 </a:t>
+            </a:r>
+            <a:r>
+              <a:rPr lang="en-US" altLang="ko-KR" sz="1600" spc="-50" dirty="0"/>
+              <a:t>Y</a:t>
+            </a:r>
+            <a:r>
+              <a:rPr lang="ko-KR" altLang="en-US" sz="1600" spc="-50" dirty="0"/>
+              <a:t>의 선호는 </a:t>
+            </a:r>
+            <a:r>
+              <a:rPr lang="en-US" altLang="ko-KR" sz="1600" spc="-50" dirty="0"/>
+              <a:t>V</a:t>
+            </a:r>
+            <a:r>
+              <a:rPr lang="ko-KR" altLang="en-US" sz="1600" spc="-50" dirty="0" err="1"/>
+              <a:t>자모양</a:t>
+            </a:r>
+            <a:r>
+              <a:rPr lang="en-US" altLang="ko-KR" sz="1600" spc="-50" dirty="0"/>
+              <a:t>, </a:t>
+            </a:r>
+            <a:r>
+              <a:rPr lang="ko-KR" altLang="en-US" sz="1600" spc="-50" dirty="0"/>
+              <a:t>즉 왼쪽과 오른쪽이 동시에 솟아 있다</a:t>
+            </a:r>
+            <a:r>
+              <a:rPr lang="en-US" altLang="ko-KR" sz="1600" spc="-50" dirty="0"/>
+              <a:t>. </a:t>
+            </a:r>
+          </a:p>
+          <a:p>
+            <a:pPr marL="1292225" lvl="2" indent="-285750">
+              <a:lnSpc>
+                <a:spcPct val="150000"/>
+              </a:lnSpc>
+              <a:buFont typeface="Wingdings" panose="05000000000000000000" pitchFamily="2" charset="2"/>
+              <a:buChar char="Ø"/>
+            </a:pPr>
+            <a:r>
+              <a:rPr lang="ko-KR" altLang="en-US" sz="1600" spc="-50" dirty="0"/>
+              <a:t>우리는 이를 </a:t>
+            </a:r>
+            <a:r>
+              <a:rPr lang="ko-KR" altLang="en-US" sz="1600" spc="-50" dirty="0" err="1"/>
+              <a:t>다봉선호</a:t>
+            </a:r>
+            <a:r>
+              <a:rPr lang="ko-KR" altLang="en-US" sz="1600" spc="-50" dirty="0"/>
+              <a:t> </a:t>
+            </a:r>
+            <a:r>
+              <a:rPr lang="en-US" altLang="ko-KR" sz="1600" spc="-50" dirty="0"/>
+              <a:t>(multi-peaked preference)</a:t>
+            </a:r>
+            <a:r>
+              <a:rPr lang="ko-KR" altLang="en-US" sz="1600" spc="-50" dirty="0"/>
+              <a:t>라고 부른다</a:t>
+            </a:r>
+            <a:r>
+              <a:rPr lang="en-US" altLang="ko-KR" sz="1600" spc="-50" dirty="0"/>
+              <a:t>.</a:t>
+            </a:r>
+          </a:p>
+          <a:p>
             <a:pPr marL="835025" lvl="1" indent="-285750">
               <a:lnSpc>
                 <a:spcPct val="150000"/>
@@ -13924,31 +14030,7 @@
             </a:pPr>
             <a:r>
               <a:rPr lang="ko-KR" altLang="en-US" sz="1600" spc="-50" dirty="0"/>
-              <a:t>투표자의 선호 </a:t>
-            </a:r>
-            <a:r>
-              <a:rPr lang="en-US" altLang="ko-KR" sz="1600" spc="-50" dirty="0"/>
-              <a:t>Ⅱ </a:t>
-            </a:r>
-            <a:r>
-              <a:rPr lang="ko-KR" altLang="en-US" sz="1600" spc="-50" dirty="0"/>
-              <a:t>그림을 보면 </a:t>
-            </a:r>
-            <a:r>
-              <a:rPr lang="en-US" altLang="ko-KR" sz="1600" spc="-50" dirty="0"/>
-              <a:t>Y</a:t>
-            </a:r>
-            <a:r>
-              <a:rPr lang="ko-KR" altLang="en-US" sz="1600" spc="-50" dirty="0"/>
-              <a:t>의 선호는 </a:t>
-            </a:r>
-            <a:r>
-              <a:rPr lang="en-US" altLang="ko-KR" sz="1600" spc="-50" dirty="0"/>
-              <a:t>V</a:t>
-            </a:r>
-            <a:r>
-              <a:rPr lang="ko-KR" altLang="en-US" sz="1600" spc="-50" dirty="0" err="1"/>
-              <a:t>자모양</a:t>
+              <a:t>이에 비해 다른 경우</a:t>
             </a:r>
             <a:r>
               <a:rPr lang="en-US" altLang="ko-KR" sz="1600" spc="-50" dirty="0"/>
@@ -13956,57 +14038,15 @@
             </a:r>
             <a:r>
               <a:rPr lang="ko-KR" altLang="en-US" sz="1600" spc="-50" dirty="0"/>
-              <a:t>즉 왼쪽과 오른쪽이 솟아 있다</a:t>
-            </a:r>
-            <a:r>
-              <a:rPr lang="en-US" altLang="ko-KR" sz="1600" spc="-50" dirty="0"/>
-              <a:t>. </a:t>
-            </a:r>
-          </a:p>
-          <a:p>
-            <a:pPr marL="1292225" lvl="2" indent="-285750">
-              <a:lnSpc>
-                <a:spcPct val="150000"/>
-              </a:lnSpc>
-              <a:buFont typeface="Wingdings" panose="05000000000000000000" pitchFamily="2" charset="2"/>
-              <a:buChar char="Ø"/>
-            </a:pPr>
-            <a:r>
-              <a:rPr lang="ko-KR" altLang="en-US" sz="1600" spc="-50" dirty="0"/>
-              <a:t>우리는 이를 </a:t>
-            </a:r>
-            <a:r>
-              <a:rPr lang="ko-KR" altLang="en-US" sz="1600" spc="-50" dirty="0" err="1"/>
-              <a:t>다봉선호</a:t>
-            </a:r>
-            <a:r>
-              <a:rPr lang="ko-KR" altLang="en-US" sz="1600" spc="-50" dirty="0"/>
-              <a:t> </a:t>
-            </a:r>
-            <a:r>
-              <a:rPr lang="en-US" altLang="ko-KR" sz="1600" spc="-50" dirty="0"/>
-              <a:t>(multi-peaked preference)</a:t>
-            </a:r>
-            <a:r>
-              <a:rPr lang="ko-KR" altLang="en-US" sz="1600" spc="-50" dirty="0"/>
-              <a:t>라고 부른다</a:t>
-            </a:r>
-            <a:r>
-              <a:rPr lang="en-US" altLang="ko-KR" sz="1600" spc="-50" dirty="0"/>
-              <a:t>.</a:t>
-            </a:r>
-          </a:p>
-          <a:p>
-            <a:pPr marL="835025" lvl="1" indent="-285750">
-              <a:lnSpc>
-                <a:spcPct val="150000"/>
-              </a:lnSpc>
-              <a:buFont typeface="Wingdings" panose="05000000000000000000" pitchFamily="2" charset="2"/>
-              <a:buChar char="ü"/>
-            </a:pPr>
-            <a:r>
-              <a:rPr lang="ko-KR" altLang="en-US" sz="1600" spc="-50" dirty="0"/>
-              <a:t>이에 비해 다른 경우는 봉우리처럼 솟아오른 부분을 한 곳에서만 갖고있다</a:t>
+              <a:t>즉 투표자의 선호 </a:t>
+            </a:r>
+            <a:r>
+              <a:rPr lang="en-US" altLang="ko-KR" sz="1600" spc="-50" dirty="0"/>
+              <a:t>Ⅰ</a:t>
+            </a:r>
+            <a:r>
+              <a:rPr lang="ko-KR" altLang="en-US" sz="1600" spc="-50" dirty="0"/>
+              <a:t>에서는 봉우리처럼 솟아오른 부분을 한 곳에서만 갖고있다</a:t>
             </a:r>
             <a:r>
               <a:rPr lang="en-US" altLang="ko-KR" sz="1600" spc="-50" dirty="0"/>
@@ -14156,7 +14196,7 @@
         <p:spPr>
           <a:xfrm>
             <a:off x="288790" y="954490"/>
-            <a:ext cx="11693660" cy="4846007"/>
+            <a:ext cx="11693660" cy="5584670"/>
           </a:xfrm>
           <a:prstGeom prst="rect">
             <a:avLst/>
@@ -14272,6 +14312,16 @@
             </a:r>
           </a:p>
           <a:p>
+            <a:pPr marL="1292225" lvl="2" indent="-285750">
+              <a:lnSpc>
+                <a:spcPct val="150000"/>
+              </a:lnSpc>
+              <a:buFont typeface="Wingdings" panose="05000000000000000000" pitchFamily="2" charset="2"/>
+              <a:buChar char="Ø"/>
+            </a:pPr>
+            <a:endParaRPr lang="en-US" altLang="ko-KR" sz="1600" spc="-50" dirty="0"/>
+          </a:p>
+          <a:p>
             <a:pPr marL="377825" indent="-285750">
               <a:lnSpc>
                 <a:spcPct val="150000"/>
@@ -14280,21 +14330,30 @@
               <a:buChar char="•"/>
             </a:pPr>
             <a:r>
-              <a:rPr lang="en-US" altLang="ko-KR" sz="1600" spc="-50" dirty="0"/>
-              <a:t>(</a:t>
+              <a:rPr lang="ko-KR" altLang="en-US" sz="1600" spc="-50" dirty="0"/>
+              <a:t>아래는 </a:t>
             </a:r>
             <a:r>
               <a:rPr lang="ko-KR" altLang="en-US" sz="1600" spc="-50" dirty="0" err="1"/>
-              <a:t>다봉선호</a:t>
-            </a:r>
-            <a:r>
-              <a:rPr lang="ko-KR" altLang="en-US" sz="1600" spc="-50" dirty="0"/>
-              <a:t> 예시</a:t>
-            </a:r>
-            <a:r>
-              <a:rPr lang="en-US" altLang="ko-KR" sz="1600" spc="-50" dirty="0"/>
-              <a:t>)</a:t>
-            </a:r>
+              <a:t>다봉선호를</a:t>
+            </a:r>
+            <a:r>
+              <a:rPr lang="ko-KR" altLang="en-US" sz="1600" spc="-50" dirty="0"/>
+              <a:t> 갖게 되는 두 가지 예시이다</a:t>
+            </a:r>
+            <a:r>
+              <a:rPr lang="en-US" altLang="ko-KR" sz="1600" spc="-50" dirty="0"/>
+              <a:t>.</a:t>
+            </a:r>
+          </a:p>
+          <a:p>
+            <a:pPr marL="377825" indent="-285750">
+              <a:lnSpc>
+                <a:spcPct val="150000"/>
+              </a:lnSpc>
+              <a:buFont typeface="Arial" panose="020B0604020202020204" pitchFamily="34" charset="0"/>
+              <a:buChar char="•"/>
+            </a:pPr>
             <a:r>
               <a:rPr lang="ko-KR" altLang="en-US" sz="1600" spc="-50" dirty="0"/>
               <a:t>중소도시의 주민이 공립학교를 유지하는데 지출될 예산의 수준에 대해 평가를 내리는 경우를 생각해보자</a:t>
@@ -14424,22 +14483,6 @@
               <a:buFont typeface="Arial" panose="020B0604020202020204" pitchFamily="34" charset="0"/>
               <a:buChar char="•"/>
             </a:pPr>
-            <a:r>
-              <a:rPr lang="en-US" altLang="ko-KR" sz="1600" spc="-50" dirty="0"/>
-              <a:t>(</a:t>
-            </a:r>
-            <a:r>
-              <a:rPr lang="ko-KR" altLang="en-US" sz="1600" spc="-50" dirty="0" err="1"/>
-              <a:t>다봉선호</a:t>
-            </a:r>
-            <a:r>
-              <a:rPr lang="ko-KR" altLang="en-US" sz="1600" spc="-50" dirty="0"/>
-              <a:t> 예시</a:t>
-            </a:r>
-            <a:r>
-              <a:rPr lang="en-US" altLang="ko-KR" sz="1600" spc="-50" dirty="0"/>
-              <a:t>) </a:t>
-            </a:r>
             <a:r>
               <a:rPr lang="ko-KR" altLang="en-US" sz="1600" spc="-50" dirty="0"/>
               <a:t>비어 있는 건물을 어떤 용도로 쓸 것인지에 관한문제가 있을 수 있다</a:t>
@@ -25722,7 +25765,7 @@
         <p:spPr>
           <a:xfrm>
             <a:off x="288790" y="958844"/>
-            <a:ext cx="11693660" cy="5215338"/>
+            <a:ext cx="11693660" cy="4846007"/>
           </a:xfrm>
           <a:prstGeom prst="rect">
             <a:avLst/>
@@ -25924,6 +25967,23 @@
             </a:r>
           </a:p>
           <a:p>
+            <a:pPr marL="835025" lvl="1" indent="-285750">
+              <a:lnSpc>
+                <a:spcPct val="150000"/>
+              </a:lnSpc>
+              <a:buFont typeface="Wingdings" panose="05000000000000000000" pitchFamily="2" charset="2"/>
+              <a:buChar char="ü"/>
+            </a:pPr>
+            <a:r>
+              <a:rPr lang="ko-KR" altLang="en-US" sz="1600" spc="-50" dirty="0"/>
+              <a:t>어떤 조건이 충족되었을 때 의사결정에 도달되었다고 볼 수 있는지 합의가 되어야 한다</a:t>
+            </a:r>
+            <a:r>
+              <a:rPr lang="en-US" altLang="ko-KR" sz="1600" spc="-50" dirty="0"/>
+              <a:t>.</a:t>
+            </a:r>
+          </a:p>
+          <a:p>
             <a:pPr marL="1292225" lvl="2" indent="-285750">
               <a:lnSpc>
                 <a:spcPct val="150000"/>
@@ -25931,19 +25991,9 @@
               <a:buFont typeface="Wingdings" panose="05000000000000000000" pitchFamily="2" charset="2"/>
               <a:buChar char="Ø"/>
             </a:pPr>
-            <a:endParaRPr lang="en-US" altLang="ko-KR" sz="1600" spc="-50" dirty="0"/>
-          </a:p>
-          <a:p>
-            <a:pPr marL="835025" lvl="1" indent="-285750">
-              <a:lnSpc>
-                <a:spcPct val="150000"/>
-              </a:lnSpc>
-              <a:buFont typeface="Wingdings" panose="05000000000000000000" pitchFamily="2" charset="2"/>
-              <a:buChar char="ü"/>
-            </a:pPr>
-            <a:r>
-              <a:rPr lang="ko-KR" altLang="en-US" sz="1600" spc="-50" dirty="0"/>
-              <a:t>어떤 조건이 충족되었을 때 의사결정에 도달되었다고 볼 수 있는지 합의가 되어야 한다</a:t>
+            <a:r>
+              <a:rPr lang="ko-KR" altLang="en-US" sz="1600" spc="-50" dirty="0"/>
+              <a:t>참여자 전원이 찬성을 해야 하는지 혹은 과반수 이상이 찬성을 해야 하는지 등을 결정해야 한다</a:t>
             </a:r>
             <a:r>
               <a:rPr lang="en-US" altLang="ko-KR" sz="1600" spc="-50" dirty="0"/>
@@ -25960,36 +26010,15 @@
             </a:pPr>
             <a:r>
               <a:rPr lang="ko-KR" altLang="en-US" sz="1600" spc="-50" dirty="0"/>
-              <a:t>참여자 전원이 찬성을 해야 하는지 혹은 과반수 이상이 찬성을 해야 하는지 등을 결정해야 한다</a:t>
-            </a:r>
-            <a:r>
-              <a:rPr lang="en-US" altLang="ko-KR" sz="1600" spc="-50" dirty="0"/>
-              <a:t>.</a:t>
-            </a:r>
-          </a:p>
-          <a:p>
-            <a:pPr marL="1292225" lvl="2" indent="-285750">
-              <a:lnSpc>
-                <a:spcPct val="150000"/>
-              </a:lnSpc>
-              <a:buFont typeface="Wingdings" panose="05000000000000000000" pitchFamily="2" charset="2"/>
-              <a:buChar char="Ø"/>
-            </a:pPr>
-            <a:r>
-              <a:rPr lang="ko-KR" altLang="en-US" sz="1600" spc="-50" dirty="0"/>
               <a:t>예컨대</a:t>
             </a:r>
             <a:r>
-              <a:rPr lang="en-US" altLang="ko-KR" sz="1600" spc="-50"/>
+              <a:rPr lang="en-US" altLang="ko-KR" sz="1600" spc="-50" dirty="0"/>
               <a:t>,</a:t>
             </a:r>
             <a:r>
-              <a:rPr lang="ko-KR" altLang="en-US" sz="1600" spc="-50"/>
-              <a:t> </a:t>
-            </a:r>
-            <a:r>
-              <a:rPr lang="ko-KR" altLang="en-US" sz="1600" spc="-50" dirty="0"/>
-              <a:t>국제연합</a:t>
+              <a:rPr lang="ko-KR" altLang="en-US" sz="1600" spc="-50" dirty="0"/>
+              <a:t> 국제연합</a:t>
             </a:r>
             <a:r>
               <a:rPr lang="en-US" altLang="ko-KR" sz="1600" spc="-50" dirty="0"/>
@@ -26220,7 +26249,7 @@
             </a:pPr>
             <a:r>
               <a:rPr lang="ko-KR" altLang="en-US" sz="1600" spc="-50" dirty="0"/>
-              <a:t>전원합의제는 투표자 전원의 동의를 요구하는 표결 방식이므로 그 결과는 당연히 파레토 최적을 달성한다</a:t>
+              <a:t>전원합의제는 투표자 전원의 동의를 요구하는 표결 방식이므로 그 결과는 당연히 파레토 효율적이다</a:t>
             </a:r>
             <a:r>
               <a:rPr lang="en-US" altLang="ko-KR" sz="1600" spc="-50" dirty="0"/>

--- a/재정학/01_Lectures/재정학_Chapter_5.pptx
+++ b/재정학/01_Lectures/재정학_Chapter_5.pptx
@@ -253,7 +253,7 @@
           <a:p>
             <a:fld id="{4A5E00EF-AEA4-43E2-9451-8F9C59A39471}" type="datetimeFigureOut">
               <a:rPr lang="ko-KR" altLang="en-US" smtClean="0"/>
-              <a:t>2026-04-04</a:t>
+              <a:t>2026-04-06</a:t>
             </a:fld>
             <a:endParaRPr lang="ko-KR" altLang="en-US"/>
           </a:p>
@@ -675,7 +675,7 @@
           <a:p>
             <a:fld id="{CD32C56F-BD27-4999-9E6D-D4EACE3DA9F4}" type="datetime1">
               <a:rPr lang="ko-KR" altLang="en-US" smtClean="0"/>
-              <a:t>2026-04-04</a:t>
+              <a:t>2026-04-06</a:t>
             </a:fld>
             <a:endParaRPr lang="ko-KR" altLang="en-US"/>
           </a:p>
@@ -889,7 +889,7 @@
           <a:p>
             <a:fld id="{8EF4A19C-72C8-45CA-8E3F-68A7FA345D6C}" type="datetime1">
               <a:rPr lang="ko-KR" altLang="en-US" smtClean="0"/>
-              <a:t>2026-04-04</a:t>
+              <a:t>2026-04-06</a:t>
             </a:fld>
             <a:endParaRPr lang="ko-KR" altLang="en-US"/>
           </a:p>
@@ -1113,7 +1113,7 @@
           <a:p>
             <a:fld id="{56A175B2-010B-4341-954C-5F8F5C70B124}" type="datetime1">
               <a:rPr lang="ko-KR" altLang="en-US" smtClean="0"/>
-              <a:t>2026-04-04</a:t>
+              <a:t>2026-04-06</a:t>
             </a:fld>
             <a:endParaRPr lang="ko-KR" altLang="en-US"/>
           </a:p>
@@ -1327,7 +1327,7 @@
           <a:p>
             <a:fld id="{16B83F9E-22C9-45CA-9E85-070F1D3EF530}" type="datetime1">
               <a:rPr lang="ko-KR" altLang="en-US" smtClean="0"/>
-              <a:t>2026-04-04</a:t>
+              <a:t>2026-04-06</a:t>
             </a:fld>
             <a:endParaRPr lang="ko-KR" altLang="en-US"/>
           </a:p>
@@ -1618,7 +1618,7 @@
           <a:p>
             <a:fld id="{03278F45-FB3C-4C4D-B89A-7BC3F5F229F6}" type="datetime1">
               <a:rPr lang="ko-KR" altLang="en-US" smtClean="0"/>
-              <a:t>2026-04-04</a:t>
+              <a:t>2026-04-06</a:t>
             </a:fld>
             <a:endParaRPr lang="ko-KR" altLang="en-US"/>
           </a:p>
@@ -2011,7 +2011,7 @@
           <a:p>
             <a:fld id="{38FDAC3C-35A6-415C-9F03-738A6AC328B1}" type="datetime1">
               <a:rPr lang="ko-KR" altLang="en-US" smtClean="0"/>
-              <a:t>2026-04-04</a:t>
+              <a:t>2026-04-06</a:t>
             </a:fld>
             <a:endParaRPr lang="ko-KR" altLang="en-US"/>
           </a:p>
@@ -3605,7 +3605,7 @@
           <a:p>
             <a:fld id="{507A0DF1-AEE6-4B0D-89D2-351E7B3EF65C}" type="datetime1">
               <a:rPr lang="ko-KR" altLang="en-US" smtClean="0"/>
-              <a:t>2026-04-04</a:t>
+              <a:t>2026-04-06</a:t>
             </a:fld>
             <a:endParaRPr lang="ko-KR" altLang="en-US"/>
           </a:p>
@@ -4033,7 +4033,7 @@
           <a:p>
             <a:fld id="{CA93B8C9-630F-4D57-944D-04FD37CECCD3}" type="datetime1">
               <a:rPr lang="ko-KR" altLang="en-US" smtClean="0"/>
-              <a:t>2026-04-04</a:t>
+              <a:t>2026-04-06</a:t>
             </a:fld>
             <a:endParaRPr lang="ko-KR" altLang="en-US"/>
           </a:p>
@@ -4190,7 +4190,7 @@
           <a:p>
             <a:fld id="{E986165A-AC43-4902-9541-874ECD310BA3}" type="datetime1">
               <a:rPr lang="ko-KR" altLang="en-US" smtClean="0"/>
-              <a:t>2026-04-04</a:t>
+              <a:t>2026-04-06</a:t>
             </a:fld>
             <a:endParaRPr lang="ko-KR" altLang="en-US"/>
           </a:p>
@@ -4517,7 +4517,7 @@
           <a:p>
             <a:fld id="{47E6EE6D-2B0E-43A9-87A2-7354CDB998F4}" type="datetime1">
               <a:rPr lang="ko-KR" altLang="en-US" smtClean="0"/>
-              <a:t>2026-04-04</a:t>
+              <a:t>2026-04-06</a:t>
             </a:fld>
             <a:endParaRPr lang="ko-KR" altLang="en-US"/>
           </a:p>
@@ -4821,7 +4821,7 @@
           <a:p>
             <a:fld id="{5CC5944E-0BC8-4FAA-9F94-6B4B05834E10}" type="datetime1">
               <a:rPr lang="ko-KR" altLang="en-US" smtClean="0"/>
-              <a:t>2026-04-04</a:t>
+              <a:t>2026-04-06</a:t>
             </a:fld>
             <a:endParaRPr lang="ko-KR" altLang="en-US"/>
           </a:p>
@@ -23971,50 +23971,6 @@
           </a:p>
         </p:txBody>
       </p:sp>
-      <p:sp>
-        <p:nvSpPr>
-          <p:cNvPr id="7" name="TextBox 6">
-            <a:extLst>
-              <a:ext uri="{FF2B5EF4-FFF2-40B4-BE49-F238E27FC236}">
-                <a16:creationId xmlns:a16="http://schemas.microsoft.com/office/drawing/2014/main" id="{098EDBD3-ABD6-6055-E9E3-BDE428D8F18D}"/>
-              </a:ext>
-            </a:extLst>
-          </p:cNvPr>
-          <p:cNvSpPr txBox="1"/>
-          <p:nvPr/>
-        </p:nvSpPr>
-        <p:spPr>
-          <a:xfrm>
-            <a:off x="4476750" y="321093"/>
-            <a:ext cx="6134100" cy="369332"/>
-          </a:xfrm>
-          <a:prstGeom prst="rect">
-            <a:avLst/>
-          </a:prstGeom>
-          <a:noFill/>
-        </p:spPr>
-        <p:txBody>
-          <a:bodyPr wrap="square">
-            <a:spAutoFit/>
-          </a:bodyPr>
-          <a:lstStyle/>
-          <a:p>
-            <a:r>
-              <a:rPr lang="ko-KR" altLang="en-US" sz="1800" spc="-50" dirty="0">
-                <a:highlight>
-                  <a:srgbClr val="FFFF00"/>
-                </a:highlight>
-              </a:rPr>
-              <a:t>청문회 장면 비디오</a:t>
-            </a:r>
-            <a:endParaRPr lang="ko-KR" altLang="en-US" dirty="0">
-              <a:highlight>
-                <a:srgbClr val="FFFF00"/>
-              </a:highlight>
-            </a:endParaRPr>
-          </a:p>
-        </p:txBody>
-      </p:sp>
     </p:spTree>
     <p:extLst>
       <p:ext uri="{BB962C8B-B14F-4D97-AF65-F5344CB8AC3E}">
@@ -24444,50 +24400,6 @@
               <a:rPr lang="en-US" altLang="ko-KR" sz="1600" spc="-50" dirty="0"/>
               <a:t>.</a:t>
             </a:r>
-          </a:p>
-        </p:txBody>
-      </p:sp>
-      <p:sp>
-        <p:nvSpPr>
-          <p:cNvPr id="3" name="TextBox 2">
-            <a:extLst>
-              <a:ext uri="{FF2B5EF4-FFF2-40B4-BE49-F238E27FC236}">
-                <a16:creationId xmlns:a16="http://schemas.microsoft.com/office/drawing/2014/main" id="{5E6E60A3-40F9-9948-3539-C4DDF837268C}"/>
-              </a:ext>
-            </a:extLst>
-          </p:cNvPr>
-          <p:cNvSpPr txBox="1"/>
-          <p:nvPr/>
-        </p:nvSpPr>
-        <p:spPr>
-          <a:xfrm>
-            <a:off x="4476750" y="321093"/>
-            <a:ext cx="6134100" cy="369332"/>
-          </a:xfrm>
-          <a:prstGeom prst="rect">
-            <a:avLst/>
-          </a:prstGeom>
-          <a:noFill/>
-        </p:spPr>
-        <p:txBody>
-          <a:bodyPr wrap="square">
-            <a:spAutoFit/>
-          </a:bodyPr>
-          <a:lstStyle/>
-          <a:p>
-            <a:r>
-              <a:rPr lang="ko-KR" altLang="en-US" sz="1800" spc="-50" dirty="0">
-                <a:highlight>
-                  <a:srgbClr val="FFFF00"/>
-                </a:highlight>
-              </a:rPr>
-              <a:t>그리스 계단만 올라가도 보조금이 나온다</a:t>
-            </a:r>
-            <a:endParaRPr lang="ko-KR" altLang="en-US" dirty="0">
-              <a:highlight>
-                <a:srgbClr val="FFFF00"/>
-              </a:highlight>
-            </a:endParaRPr>
           </a:p>
         </p:txBody>
       </p:sp>
@@ -24895,64 +24807,20 @@
             </a:pPr>
             <a:r>
               <a:rPr lang="ko-KR" altLang="en-US" sz="1600" spc="-50" dirty="0"/>
-              <a:t>반면 특수이해집단은 사회 공익 </a:t>
-            </a:r>
-            <a:r>
-              <a:rPr lang="ko-KR" altLang="en-US" sz="1600" spc="-50" dirty="0" err="1"/>
-              <a:t>보단느</a:t>
-            </a:r>
-            <a:r>
-              <a:rPr lang="ko-KR" altLang="en-US" sz="1600" spc="-50" dirty="0"/>
-              <a:t> 구성원들의 이익을 앞세우는 경향이 있기 때문에 사회 전체 입장에서 보면 비효율적이거나 불합리한 결과가 도출되기도 한다</a:t>
+              <a:t>반면 특수이해집단은 사회 </a:t>
+            </a:r>
+            <a:r>
+              <a:rPr lang="ko-KR" altLang="en-US" sz="1600" spc="-50"/>
+              <a:t>공익 보다는 </a:t>
+            </a:r>
+            <a:r>
+              <a:rPr lang="ko-KR" altLang="en-US" sz="1600" spc="-50" dirty="0"/>
+              <a:t>구성원들의 이익을 앞세우는 경향이 있기 때문에 사회 전체 입장에서 보면 비효율적이거나 불합리한 결과가 도출되기도 한다</a:t>
             </a:r>
             <a:r>
               <a:rPr lang="en-US" altLang="ko-KR" sz="1600" spc="-50" dirty="0"/>
               <a:t>.</a:t>
             </a:r>
-          </a:p>
-        </p:txBody>
-      </p:sp>
-      <p:sp>
-        <p:nvSpPr>
-          <p:cNvPr id="6" name="TextBox 5">
-            <a:extLst>
-              <a:ext uri="{FF2B5EF4-FFF2-40B4-BE49-F238E27FC236}">
-                <a16:creationId xmlns:a16="http://schemas.microsoft.com/office/drawing/2014/main" id="{91E81600-6D93-5032-8D2B-A538819138FD}"/>
-              </a:ext>
-            </a:extLst>
-          </p:cNvPr>
-          <p:cNvSpPr txBox="1"/>
-          <p:nvPr/>
-        </p:nvSpPr>
-        <p:spPr>
-          <a:xfrm>
-            <a:off x="5168900" y="6080543"/>
-            <a:ext cx="6134100" cy="369332"/>
-          </a:xfrm>
-          <a:prstGeom prst="rect">
-            <a:avLst/>
-          </a:prstGeom>
-          <a:noFill/>
-        </p:spPr>
-        <p:txBody>
-          <a:bodyPr wrap="square">
-            <a:spAutoFit/>
-          </a:bodyPr>
-          <a:lstStyle/>
-          <a:p>
-            <a:r>
-              <a:rPr lang="ko-KR" altLang="en-US" sz="1800" spc="-50" dirty="0">
-                <a:highlight>
-                  <a:srgbClr val="FFFF00"/>
-                </a:highlight>
-              </a:rPr>
-              <a:t>철의 삼각형</a:t>
-            </a:r>
-            <a:endParaRPr lang="ko-KR" altLang="en-US" dirty="0">
-              <a:highlight>
-                <a:srgbClr val="FFFF00"/>
-              </a:highlight>
-            </a:endParaRPr>
           </a:p>
         </p:txBody>
       </p:sp>

--- a/재정학/01_Lectures/재정학_Chapter_5.pptx
+++ b/재정학/01_Lectures/재정학_Chapter_5.pptx
@@ -253,7 +253,7 @@
           <a:p>
             <a:fld id="{4A5E00EF-AEA4-43E2-9451-8F9C59A39471}" type="datetimeFigureOut">
               <a:rPr lang="ko-KR" altLang="en-US" smtClean="0"/>
-              <a:t>2026-04-06</a:t>
+              <a:t>2026-04-07</a:t>
             </a:fld>
             <a:endParaRPr lang="ko-KR" altLang="en-US"/>
           </a:p>
@@ -675,7 +675,7 @@
           <a:p>
             <a:fld id="{CD32C56F-BD27-4999-9E6D-D4EACE3DA9F4}" type="datetime1">
               <a:rPr lang="ko-KR" altLang="en-US" smtClean="0"/>
-              <a:t>2026-04-06</a:t>
+              <a:t>2026-04-07</a:t>
             </a:fld>
             <a:endParaRPr lang="ko-KR" altLang="en-US"/>
           </a:p>
@@ -889,7 +889,7 @@
           <a:p>
             <a:fld id="{8EF4A19C-72C8-45CA-8E3F-68A7FA345D6C}" type="datetime1">
               <a:rPr lang="ko-KR" altLang="en-US" smtClean="0"/>
-              <a:t>2026-04-06</a:t>
+              <a:t>2026-04-07</a:t>
             </a:fld>
             <a:endParaRPr lang="ko-KR" altLang="en-US"/>
           </a:p>
@@ -1113,7 +1113,7 @@
           <a:p>
             <a:fld id="{56A175B2-010B-4341-954C-5F8F5C70B124}" type="datetime1">
               <a:rPr lang="ko-KR" altLang="en-US" smtClean="0"/>
-              <a:t>2026-04-06</a:t>
+              <a:t>2026-04-07</a:t>
             </a:fld>
             <a:endParaRPr lang="ko-KR" altLang="en-US"/>
           </a:p>
@@ -1327,7 +1327,7 @@
           <a:p>
             <a:fld id="{16B83F9E-22C9-45CA-9E85-070F1D3EF530}" type="datetime1">
               <a:rPr lang="ko-KR" altLang="en-US" smtClean="0"/>
-              <a:t>2026-04-06</a:t>
+              <a:t>2026-04-07</a:t>
             </a:fld>
             <a:endParaRPr lang="ko-KR" altLang="en-US"/>
           </a:p>
@@ -1618,7 +1618,7 @@
           <a:p>
             <a:fld id="{03278F45-FB3C-4C4D-B89A-7BC3F5F229F6}" type="datetime1">
               <a:rPr lang="ko-KR" altLang="en-US" smtClean="0"/>
-              <a:t>2026-04-06</a:t>
+              <a:t>2026-04-07</a:t>
             </a:fld>
             <a:endParaRPr lang="ko-KR" altLang="en-US"/>
           </a:p>
@@ -2011,7 +2011,7 @@
           <a:p>
             <a:fld id="{38FDAC3C-35A6-415C-9F03-738A6AC328B1}" type="datetime1">
               <a:rPr lang="ko-KR" altLang="en-US" smtClean="0"/>
-              <a:t>2026-04-06</a:t>
+              <a:t>2026-04-07</a:t>
             </a:fld>
             <a:endParaRPr lang="ko-KR" altLang="en-US"/>
           </a:p>
@@ -3605,7 +3605,7 @@
           <a:p>
             <a:fld id="{507A0DF1-AEE6-4B0D-89D2-351E7B3EF65C}" type="datetime1">
               <a:rPr lang="ko-KR" altLang="en-US" smtClean="0"/>
-              <a:t>2026-04-06</a:t>
+              <a:t>2026-04-07</a:t>
             </a:fld>
             <a:endParaRPr lang="ko-KR" altLang="en-US"/>
           </a:p>
@@ -4033,7 +4033,7 @@
           <a:p>
             <a:fld id="{CA93B8C9-630F-4D57-944D-04FD37CECCD3}" type="datetime1">
               <a:rPr lang="ko-KR" altLang="en-US" smtClean="0"/>
-              <a:t>2026-04-06</a:t>
+              <a:t>2026-04-07</a:t>
             </a:fld>
             <a:endParaRPr lang="ko-KR" altLang="en-US"/>
           </a:p>
@@ -4190,7 +4190,7 @@
           <a:p>
             <a:fld id="{E986165A-AC43-4902-9541-874ECD310BA3}" type="datetime1">
               <a:rPr lang="ko-KR" altLang="en-US" smtClean="0"/>
-              <a:t>2026-04-06</a:t>
+              <a:t>2026-04-07</a:t>
             </a:fld>
             <a:endParaRPr lang="ko-KR" altLang="en-US"/>
           </a:p>
@@ -4517,7 +4517,7 @@
           <a:p>
             <a:fld id="{47E6EE6D-2B0E-43A9-87A2-7354CDB998F4}" type="datetime1">
               <a:rPr lang="ko-KR" altLang="en-US" smtClean="0"/>
-              <a:t>2026-04-06</a:t>
+              <a:t>2026-04-07</a:t>
             </a:fld>
             <a:endParaRPr lang="ko-KR" altLang="en-US"/>
           </a:p>
@@ -4821,7 +4821,7 @@
           <a:p>
             <a:fld id="{5CC5944E-0BC8-4FAA-9F94-6B4B05834E10}" type="datetime1">
               <a:rPr lang="ko-KR" altLang="en-US" smtClean="0"/>
-              <a:t>2026-04-06</a:t>
+              <a:t>2026-04-07</a:t>
             </a:fld>
             <a:endParaRPr lang="ko-KR" altLang="en-US"/>
           </a:p>
@@ -14950,10 +14950,10 @@
       </p:sp>
       <p:pic>
         <p:nvPicPr>
-          <p:cNvPr id="136" name="그림 135">
+          <p:cNvPr id="3" name="그림 2">
             <a:extLst>
               <a:ext uri="{FF2B5EF4-FFF2-40B4-BE49-F238E27FC236}">
-                <a16:creationId xmlns:a16="http://schemas.microsoft.com/office/drawing/2014/main" id="{7DBBE739-D146-A956-4838-725B0E51F94E}"/>
+                <a16:creationId xmlns:a16="http://schemas.microsoft.com/office/drawing/2014/main" id="{57AD157E-C05C-19D0-7D57-76BEAD3D1273}"/>
               </a:ext>
             </a:extLst>
           </p:cNvPr>
@@ -14963,15 +14963,22 @@
           <p:nvPr/>
         </p:nvPicPr>
         <p:blipFill>
-          <a:blip r:embed="rId2"/>
+          <a:blip r:embed="rId2" cstate="print">
+            <a:extLst>
+              <a:ext uri="{28A0092B-C50C-407E-A947-70E740481C1C}">
+                <a14:useLocalDpi xmlns:a14="http://schemas.microsoft.com/office/drawing/2010/main" val="0"/>
+              </a:ext>
+            </a:extLst>
+          </a:blip>
+          <a:srcRect l="11778" t="15667" r="10918" b="14681"/>
           <a:stretch>
             <a:fillRect/>
           </a:stretch>
         </p:blipFill>
         <p:spPr>
           <a:xfrm>
-            <a:off x="4924332" y="4554114"/>
-            <a:ext cx="6123963" cy="2091849"/>
+            <a:off x="6252731" y="4403387"/>
+            <a:ext cx="4344615" cy="2208513"/>
           </a:xfrm>
           <a:prstGeom prst="rect">
             <a:avLst/>
@@ -16503,7 +16510,7 @@
           <p:nvPr>
             <p:extLst>
               <p:ext uri="{D42A27DB-BD31-4B8C-83A1-F6EECF244321}">
-                <p14:modId xmlns:p14="http://schemas.microsoft.com/office/powerpoint/2010/main" val="3999205443"/>
+                <p14:modId xmlns:p14="http://schemas.microsoft.com/office/powerpoint/2010/main" val="2892081911"/>
               </p:ext>
             </p:extLst>
           </p:nvPr>
@@ -17604,7 +17611,7 @@
                     <a:p>
                       <a:pPr algn="ctr" latinLnBrk="1"/>
                       <a:r>
-                        <a:rPr lang="en-US" altLang="ko-KR" sz="1200" b="1" kern="0" spc="0" dirty="0">
+                        <a:rPr lang="en-US" altLang="ko-KR" sz="1200" b="1" u="sng" kern="0" spc="0" dirty="0">
                           <a:solidFill>
                             <a:srgbClr val="000000"/>
                           </a:solidFill>
@@ -17728,7 +17735,7 @@
                     <a:p>
                       <a:pPr algn="ctr" latinLnBrk="1"/>
                       <a:r>
-                        <a:rPr lang="en-US" altLang="ko-KR" sz="1200" b="1" kern="0" spc="0" dirty="0">
+                        <a:rPr lang="en-US" altLang="ko-KR" sz="1200" b="1" u="sng" kern="0" spc="0" dirty="0">
                           <a:solidFill>
                             <a:srgbClr val="000000"/>
                           </a:solidFill>
@@ -17790,7 +17797,7 @@
                     <a:p>
                       <a:pPr algn="ctr" latinLnBrk="1"/>
                       <a:r>
-                        <a:rPr lang="en-US" altLang="ko-KR" sz="1200" b="1" kern="0" spc="0" dirty="0">
+                        <a:rPr lang="en-US" altLang="ko-KR" sz="1200" b="1" u="sng" kern="0" spc="0" dirty="0">
                           <a:solidFill>
                             <a:srgbClr val="000000"/>
                           </a:solidFill>
@@ -18097,7 +18104,7 @@
                         <a:defRPr/>
                       </a:pPr>
                       <a:r>
-                        <a:rPr lang="en-US" altLang="ko-KR" sz="1200" b="1" kern="0" spc="0" dirty="0">
+                        <a:rPr lang="en-US" altLang="ko-KR" sz="1200" b="1" u="sng" kern="0" spc="0" dirty="0">
                           <a:solidFill>
                             <a:srgbClr val="000000"/>
                           </a:solidFill>
@@ -18221,7 +18228,7 @@
                     <a:p>
                       <a:pPr algn="ctr" latinLnBrk="1"/>
                       <a:r>
-                        <a:rPr lang="en-US" altLang="ko-KR" sz="1200" b="1" kern="0" spc="0" dirty="0">
+                        <a:rPr lang="en-US" altLang="ko-KR" sz="1200" b="1" u="sng" kern="0" spc="0" dirty="0">
                           <a:solidFill>
                             <a:srgbClr val="000000"/>
                           </a:solidFill>
@@ -18834,7 +18841,7 @@
                     <a:p>
                       <a:pPr algn="ctr" latinLnBrk="1"/>
                       <a:r>
-                        <a:rPr lang="en-US" altLang="ko-KR" sz="1200" b="1" kern="0" spc="0" dirty="0">
+                        <a:rPr lang="en-US" altLang="ko-KR" sz="1200" b="1" u="sng" kern="0" spc="0" dirty="0">
                           <a:solidFill>
                             <a:srgbClr val="000000"/>
                           </a:solidFill>
@@ -18906,7 +18913,7 @@
                         </a:spcAft>
                       </a:pPr>
                       <a:r>
-                        <a:rPr lang="en-US" altLang="ko-KR" sz="1200" b="1" kern="0" spc="0" dirty="0">
+                        <a:rPr lang="en-US" altLang="ko-KR" sz="1200" b="1" u="sng" kern="0" spc="0" dirty="0">
                           <a:solidFill>
                             <a:srgbClr val="000000"/>
                           </a:solidFill>
@@ -19207,7 +19214,7 @@
                         </a:spcAft>
                       </a:pPr>
                       <a:r>
-                        <a:rPr lang="en-US" altLang="ko-KR" sz="1200" b="1" kern="0" spc="0" dirty="0">
+                        <a:rPr lang="en-US" altLang="ko-KR" sz="1200" b="1" u="sng" kern="0" spc="0" dirty="0">
                           <a:solidFill>
                             <a:srgbClr val="000000"/>
                           </a:solidFill>
@@ -19279,7 +19286,7 @@
                         </a:spcAft>
                       </a:pPr>
                       <a:r>
-                        <a:rPr lang="en-US" altLang="ko-KR" sz="1200" b="1" kern="0" spc="0" dirty="0">
+                        <a:rPr lang="en-US" altLang="ko-KR" sz="1200" b="1" u="sng" kern="0" spc="0" dirty="0">
                           <a:solidFill>
                             <a:srgbClr val="000000"/>
                           </a:solidFill>
@@ -19351,7 +19358,7 @@
                         </a:spcAft>
                       </a:pPr>
                       <a:r>
-                        <a:rPr lang="en-US" altLang="ko-KR" sz="1200" b="1" kern="0" spc="0" dirty="0">
+                        <a:rPr lang="en-US" altLang="ko-KR" sz="1200" b="1" u="sng" kern="0" spc="0" dirty="0">
                           <a:solidFill>
                             <a:srgbClr val="000000"/>
                           </a:solidFill>

--- a/재정학/01_Lectures/재정학_Chapter_5.pptx
+++ b/재정학/01_Lectures/재정학_Chapter_5.pptx
@@ -253,7 +253,7 @@
           <a:p>
             <a:fld id="{4A5E00EF-AEA4-43E2-9451-8F9C59A39471}" type="datetimeFigureOut">
               <a:rPr lang="ko-KR" altLang="en-US" smtClean="0"/>
-              <a:t>2026-04-07</a:t>
+              <a:t>2026-04-08</a:t>
             </a:fld>
             <a:endParaRPr lang="ko-KR" altLang="en-US"/>
           </a:p>
@@ -675,7 +675,7 @@
           <a:p>
             <a:fld id="{CD32C56F-BD27-4999-9E6D-D4EACE3DA9F4}" type="datetime1">
               <a:rPr lang="ko-KR" altLang="en-US" smtClean="0"/>
-              <a:t>2026-04-07</a:t>
+              <a:t>2026-04-08</a:t>
             </a:fld>
             <a:endParaRPr lang="ko-KR" altLang="en-US"/>
           </a:p>
@@ -889,7 +889,7 @@
           <a:p>
             <a:fld id="{8EF4A19C-72C8-45CA-8E3F-68A7FA345D6C}" type="datetime1">
               <a:rPr lang="ko-KR" altLang="en-US" smtClean="0"/>
-              <a:t>2026-04-07</a:t>
+              <a:t>2026-04-08</a:t>
             </a:fld>
             <a:endParaRPr lang="ko-KR" altLang="en-US"/>
           </a:p>
@@ -1113,7 +1113,7 @@
           <a:p>
             <a:fld id="{56A175B2-010B-4341-954C-5F8F5C70B124}" type="datetime1">
               <a:rPr lang="ko-KR" altLang="en-US" smtClean="0"/>
-              <a:t>2026-04-07</a:t>
+              <a:t>2026-04-08</a:t>
             </a:fld>
             <a:endParaRPr lang="ko-KR" altLang="en-US"/>
           </a:p>
@@ -1327,7 +1327,7 @@
           <a:p>
             <a:fld id="{16B83F9E-22C9-45CA-9E85-070F1D3EF530}" type="datetime1">
               <a:rPr lang="ko-KR" altLang="en-US" smtClean="0"/>
-              <a:t>2026-04-07</a:t>
+              <a:t>2026-04-08</a:t>
             </a:fld>
             <a:endParaRPr lang="ko-KR" altLang="en-US"/>
           </a:p>
@@ -1618,7 +1618,7 @@
           <a:p>
             <a:fld id="{03278F45-FB3C-4C4D-B89A-7BC3F5F229F6}" type="datetime1">
               <a:rPr lang="ko-KR" altLang="en-US" smtClean="0"/>
-              <a:t>2026-04-07</a:t>
+              <a:t>2026-04-08</a:t>
             </a:fld>
             <a:endParaRPr lang="ko-KR" altLang="en-US"/>
           </a:p>
@@ -2011,7 +2011,7 @@
           <a:p>
             <a:fld id="{38FDAC3C-35A6-415C-9F03-738A6AC328B1}" type="datetime1">
               <a:rPr lang="ko-KR" altLang="en-US" smtClean="0"/>
-              <a:t>2026-04-07</a:t>
+              <a:t>2026-04-08</a:t>
             </a:fld>
             <a:endParaRPr lang="ko-KR" altLang="en-US"/>
           </a:p>
@@ -3605,7 +3605,7 @@
           <a:p>
             <a:fld id="{507A0DF1-AEE6-4B0D-89D2-351E7B3EF65C}" type="datetime1">
               <a:rPr lang="ko-KR" altLang="en-US" smtClean="0"/>
-              <a:t>2026-04-07</a:t>
+              <a:t>2026-04-08</a:t>
             </a:fld>
             <a:endParaRPr lang="ko-KR" altLang="en-US"/>
           </a:p>
@@ -4033,7 +4033,7 @@
           <a:p>
             <a:fld id="{CA93B8C9-630F-4D57-944D-04FD37CECCD3}" type="datetime1">
               <a:rPr lang="ko-KR" altLang="en-US" smtClean="0"/>
-              <a:t>2026-04-07</a:t>
+              <a:t>2026-04-08</a:t>
             </a:fld>
             <a:endParaRPr lang="ko-KR" altLang="en-US"/>
           </a:p>
@@ -4190,7 +4190,7 @@
           <a:p>
             <a:fld id="{E986165A-AC43-4902-9541-874ECD310BA3}" type="datetime1">
               <a:rPr lang="ko-KR" altLang="en-US" smtClean="0"/>
-              <a:t>2026-04-07</a:t>
+              <a:t>2026-04-08</a:t>
             </a:fld>
             <a:endParaRPr lang="ko-KR" altLang="en-US"/>
           </a:p>
@@ -4517,7 +4517,7 @@
           <a:p>
             <a:fld id="{47E6EE6D-2B0E-43A9-87A2-7354CDB998F4}" type="datetime1">
               <a:rPr lang="ko-KR" altLang="en-US" smtClean="0"/>
-              <a:t>2026-04-07</a:t>
+              <a:t>2026-04-08</a:t>
             </a:fld>
             <a:endParaRPr lang="ko-KR" altLang="en-US"/>
           </a:p>
@@ -4821,7 +4821,7 @@
           <a:p>
             <a:fld id="{5CC5944E-0BC8-4FAA-9F94-6B4B05834E10}" type="datetime1">
               <a:rPr lang="ko-KR" altLang="en-US" smtClean="0"/>
-              <a:t>2026-04-07</a:t>
+              <a:t>2026-04-08</a:t>
             </a:fld>
             <a:endParaRPr lang="ko-KR" altLang="en-US"/>
           </a:p>
@@ -16510,7 +16510,7 @@
           <p:nvPr>
             <p:extLst>
               <p:ext uri="{D42A27DB-BD31-4B8C-83A1-F6EECF244321}">
-                <p14:modId xmlns:p14="http://schemas.microsoft.com/office/powerpoint/2010/main" val="2892081911"/>
+                <p14:modId xmlns:p14="http://schemas.microsoft.com/office/powerpoint/2010/main" val="1141159946"/>
               </p:ext>
             </p:extLst>
           </p:nvPr>
@@ -18424,7 +18424,7 @@
                         </a:spcAft>
                       </a:pPr>
                       <a:r>
-                        <a:rPr lang="en-US" sz="1200" b="0" kern="0" spc="0" dirty="0">
+                        <a:rPr lang="en-US" sz="1200" b="1" u="sng" kern="0" spc="0" dirty="0">
                           <a:solidFill>
                             <a:srgbClr val="000000"/>
                           </a:solidFill>
@@ -18985,7 +18985,7 @@
                         </a:spcAft>
                       </a:pPr>
                       <a:r>
-                        <a:rPr lang="en-US" sz="1200" b="0" kern="0" spc="0" dirty="0">
+                        <a:rPr lang="en-US" sz="1200" b="1" u="sng" kern="0" spc="0" dirty="0">
                           <a:solidFill>
                             <a:srgbClr val="000000"/>
                           </a:solidFill>
@@ -20443,15 +20443,15 @@
             </a:pPr>
             <a:r>
               <a:rPr lang="ko-KR" altLang="en-US" sz="1600" spc="-50" dirty="0"/>
-              <a:t>현실에서는 긍정적인 의미에서의 타협과 </a:t>
-            </a:r>
-            <a:r>
-              <a:rPr lang="ko-KR" altLang="en-US" sz="1600" spc="-50" dirty="0" err="1"/>
-              <a:t>부적적인</a:t>
-            </a:r>
-            <a:r>
-              <a:rPr lang="ko-KR" altLang="en-US" sz="1600" spc="-50" dirty="0"/>
-              <a:t> 의미에서의 야합을 구분하는 것은 힘들다</a:t>
+              <a:t>현실에서는 긍정적인 의미에서의 </a:t>
+            </a:r>
+            <a:r>
+              <a:rPr lang="ko-KR" altLang="en-US" sz="1600" spc="-50"/>
+              <a:t>타협과 부정적인 </a:t>
+            </a:r>
+            <a:r>
+              <a:rPr lang="ko-KR" altLang="en-US" sz="1600" spc="-50" dirty="0"/>
+              <a:t>의미에서의 야합을 구분하는 것은 힘들다</a:t>
             </a:r>
             <a:r>
               <a:rPr lang="en-US" altLang="ko-KR" sz="1600" spc="-50" dirty="0"/>

--- a/재정학/01_Lectures/재정학_Chapter_5.pptx
+++ b/재정학/01_Lectures/재정학_Chapter_5.pptx
@@ -253,7 +253,7 @@
           <a:p>
             <a:fld id="{4A5E00EF-AEA4-43E2-9451-8F9C59A39471}" type="datetimeFigureOut">
               <a:rPr lang="ko-KR" altLang="en-US" smtClean="0"/>
-              <a:t>2026-04-08</a:t>
+              <a:t>2026-04-09</a:t>
             </a:fld>
             <a:endParaRPr lang="ko-KR" altLang="en-US"/>
           </a:p>
@@ -675,7 +675,7 @@
           <a:p>
             <a:fld id="{CD32C56F-BD27-4999-9E6D-D4EACE3DA9F4}" type="datetime1">
               <a:rPr lang="ko-KR" altLang="en-US" smtClean="0"/>
-              <a:t>2026-04-08</a:t>
+              <a:t>2026-04-09</a:t>
             </a:fld>
             <a:endParaRPr lang="ko-KR" altLang="en-US"/>
           </a:p>
@@ -889,7 +889,7 @@
           <a:p>
             <a:fld id="{8EF4A19C-72C8-45CA-8E3F-68A7FA345D6C}" type="datetime1">
               <a:rPr lang="ko-KR" altLang="en-US" smtClean="0"/>
-              <a:t>2026-04-08</a:t>
+              <a:t>2026-04-09</a:t>
             </a:fld>
             <a:endParaRPr lang="ko-KR" altLang="en-US"/>
           </a:p>
@@ -1113,7 +1113,7 @@
           <a:p>
             <a:fld id="{56A175B2-010B-4341-954C-5F8F5C70B124}" type="datetime1">
               <a:rPr lang="ko-KR" altLang="en-US" smtClean="0"/>
-              <a:t>2026-04-08</a:t>
+              <a:t>2026-04-09</a:t>
             </a:fld>
             <a:endParaRPr lang="ko-KR" altLang="en-US"/>
           </a:p>
@@ -1327,7 +1327,7 @@
           <a:p>
             <a:fld id="{16B83F9E-22C9-45CA-9E85-070F1D3EF530}" type="datetime1">
               <a:rPr lang="ko-KR" altLang="en-US" smtClean="0"/>
-              <a:t>2026-04-08</a:t>
+              <a:t>2026-04-09</a:t>
             </a:fld>
             <a:endParaRPr lang="ko-KR" altLang="en-US"/>
           </a:p>
@@ -1618,7 +1618,7 @@
           <a:p>
             <a:fld id="{03278F45-FB3C-4C4D-B89A-7BC3F5F229F6}" type="datetime1">
               <a:rPr lang="ko-KR" altLang="en-US" smtClean="0"/>
-              <a:t>2026-04-08</a:t>
+              <a:t>2026-04-09</a:t>
             </a:fld>
             <a:endParaRPr lang="ko-KR" altLang="en-US"/>
           </a:p>
@@ -2011,7 +2011,7 @@
           <a:p>
             <a:fld id="{38FDAC3C-35A6-415C-9F03-738A6AC328B1}" type="datetime1">
               <a:rPr lang="ko-KR" altLang="en-US" smtClean="0"/>
-              <a:t>2026-04-08</a:t>
+              <a:t>2026-04-09</a:t>
             </a:fld>
             <a:endParaRPr lang="ko-KR" altLang="en-US"/>
           </a:p>
@@ -3605,7 +3605,7 @@
           <a:p>
             <a:fld id="{507A0DF1-AEE6-4B0D-89D2-351E7B3EF65C}" type="datetime1">
               <a:rPr lang="ko-KR" altLang="en-US" smtClean="0"/>
-              <a:t>2026-04-08</a:t>
+              <a:t>2026-04-09</a:t>
             </a:fld>
             <a:endParaRPr lang="ko-KR" altLang="en-US"/>
           </a:p>
@@ -4033,7 +4033,7 @@
           <a:p>
             <a:fld id="{CA93B8C9-630F-4D57-944D-04FD37CECCD3}" type="datetime1">
               <a:rPr lang="ko-KR" altLang="en-US" smtClean="0"/>
-              <a:t>2026-04-08</a:t>
+              <a:t>2026-04-09</a:t>
             </a:fld>
             <a:endParaRPr lang="ko-KR" altLang="en-US"/>
           </a:p>
@@ -4190,7 +4190,7 @@
           <a:p>
             <a:fld id="{E986165A-AC43-4902-9541-874ECD310BA3}" type="datetime1">
               <a:rPr lang="ko-KR" altLang="en-US" smtClean="0"/>
-              <a:t>2026-04-08</a:t>
+              <a:t>2026-04-09</a:t>
             </a:fld>
             <a:endParaRPr lang="ko-KR" altLang="en-US"/>
           </a:p>
@@ -4517,7 +4517,7 @@
           <a:p>
             <a:fld id="{47E6EE6D-2B0E-43A9-87A2-7354CDB998F4}" type="datetime1">
               <a:rPr lang="ko-KR" altLang="en-US" smtClean="0"/>
-              <a:t>2026-04-08</a:t>
+              <a:t>2026-04-09</a:t>
             </a:fld>
             <a:endParaRPr lang="ko-KR" altLang="en-US"/>
           </a:p>
@@ -4821,7 +4821,7 @@
           <a:p>
             <a:fld id="{5CC5944E-0BC8-4FAA-9F94-6B4B05834E10}" type="datetime1">
               <a:rPr lang="ko-KR" altLang="en-US" smtClean="0"/>
-              <a:t>2026-04-08</a:t>
+              <a:t>2026-04-09</a:t>
             </a:fld>
             <a:endParaRPr lang="ko-KR" altLang="en-US"/>
           </a:p>
@@ -22772,10 +22772,9 @@
               <a:t>이것이 타당한지 의문이다</a:t>
             </a:r>
             <a:r>
-              <a:rPr lang="en-US" altLang="ko-KR" sz="1600" spc="-50"/>
+              <a:rPr lang="en-US" altLang="ko-KR" sz="1600" spc="-50" dirty="0"/>
               <a:t>.</a:t>
             </a:r>
-            <a:endParaRPr lang="en-US" altLang="ko-KR" sz="1600" spc="-50" dirty="0"/>
           </a:p>
           <a:p>
             <a:pPr marL="1292225" lvl="2" indent="-285750">

--- a/재정학/01_Lectures/재정학_Chapter_5.pptx
+++ b/재정학/01_Lectures/재정학_Chapter_5.pptx
@@ -253,7 +253,7 @@
           <a:p>
             <a:fld id="{4A5E00EF-AEA4-43E2-9451-8F9C59A39471}" type="datetimeFigureOut">
               <a:rPr lang="ko-KR" altLang="en-US" smtClean="0"/>
-              <a:t>2026-04-09</a:t>
+              <a:t>2026-04-10</a:t>
             </a:fld>
             <a:endParaRPr lang="ko-KR" altLang="en-US"/>
           </a:p>
@@ -675,7 +675,7 @@
           <a:p>
             <a:fld id="{CD32C56F-BD27-4999-9E6D-D4EACE3DA9F4}" type="datetime1">
               <a:rPr lang="ko-KR" altLang="en-US" smtClean="0"/>
-              <a:t>2026-04-09</a:t>
+              <a:t>2026-04-10</a:t>
             </a:fld>
             <a:endParaRPr lang="ko-KR" altLang="en-US"/>
           </a:p>
@@ -889,7 +889,7 @@
           <a:p>
             <a:fld id="{8EF4A19C-72C8-45CA-8E3F-68A7FA345D6C}" type="datetime1">
               <a:rPr lang="ko-KR" altLang="en-US" smtClean="0"/>
-              <a:t>2026-04-09</a:t>
+              <a:t>2026-04-10</a:t>
             </a:fld>
             <a:endParaRPr lang="ko-KR" altLang="en-US"/>
           </a:p>
@@ -1113,7 +1113,7 @@
           <a:p>
             <a:fld id="{56A175B2-010B-4341-954C-5F8F5C70B124}" type="datetime1">
               <a:rPr lang="ko-KR" altLang="en-US" smtClean="0"/>
-              <a:t>2026-04-09</a:t>
+              <a:t>2026-04-10</a:t>
             </a:fld>
             <a:endParaRPr lang="ko-KR" altLang="en-US"/>
           </a:p>
@@ -1327,7 +1327,7 @@
           <a:p>
             <a:fld id="{16B83F9E-22C9-45CA-9E85-070F1D3EF530}" type="datetime1">
               <a:rPr lang="ko-KR" altLang="en-US" smtClean="0"/>
-              <a:t>2026-04-09</a:t>
+              <a:t>2026-04-10</a:t>
             </a:fld>
             <a:endParaRPr lang="ko-KR" altLang="en-US"/>
           </a:p>
@@ -1618,7 +1618,7 @@
           <a:p>
             <a:fld id="{03278F45-FB3C-4C4D-B89A-7BC3F5F229F6}" type="datetime1">
               <a:rPr lang="ko-KR" altLang="en-US" smtClean="0"/>
-              <a:t>2026-04-09</a:t>
+              <a:t>2026-04-10</a:t>
             </a:fld>
             <a:endParaRPr lang="ko-KR" altLang="en-US"/>
           </a:p>
@@ -2011,7 +2011,7 @@
           <a:p>
             <a:fld id="{38FDAC3C-35A6-415C-9F03-738A6AC328B1}" type="datetime1">
               <a:rPr lang="ko-KR" altLang="en-US" smtClean="0"/>
-              <a:t>2026-04-09</a:t>
+              <a:t>2026-04-10</a:t>
             </a:fld>
             <a:endParaRPr lang="ko-KR" altLang="en-US"/>
           </a:p>
@@ -3605,7 +3605,7 @@
           <a:p>
             <a:fld id="{507A0DF1-AEE6-4B0D-89D2-351E7B3EF65C}" type="datetime1">
               <a:rPr lang="ko-KR" altLang="en-US" smtClean="0"/>
-              <a:t>2026-04-09</a:t>
+              <a:t>2026-04-10</a:t>
             </a:fld>
             <a:endParaRPr lang="ko-KR" altLang="en-US"/>
           </a:p>
@@ -4033,7 +4033,7 @@
           <a:p>
             <a:fld id="{CA93B8C9-630F-4D57-944D-04FD37CECCD3}" type="datetime1">
               <a:rPr lang="ko-KR" altLang="en-US" smtClean="0"/>
-              <a:t>2026-04-09</a:t>
+              <a:t>2026-04-10</a:t>
             </a:fld>
             <a:endParaRPr lang="ko-KR" altLang="en-US"/>
           </a:p>
@@ -4190,7 +4190,7 @@
           <a:p>
             <a:fld id="{E986165A-AC43-4902-9541-874ECD310BA3}" type="datetime1">
               <a:rPr lang="ko-KR" altLang="en-US" smtClean="0"/>
-              <a:t>2026-04-09</a:t>
+              <a:t>2026-04-10</a:t>
             </a:fld>
             <a:endParaRPr lang="ko-KR" altLang="en-US"/>
           </a:p>
@@ -4517,7 +4517,7 @@
           <a:p>
             <a:fld id="{47E6EE6D-2B0E-43A9-87A2-7354CDB998F4}" type="datetime1">
               <a:rPr lang="ko-KR" altLang="en-US" smtClean="0"/>
-              <a:t>2026-04-09</a:t>
+              <a:t>2026-04-10</a:t>
             </a:fld>
             <a:endParaRPr lang="ko-KR" altLang="en-US"/>
           </a:p>
@@ -4821,7 +4821,7 @@
           <a:p>
             <a:fld id="{5CC5944E-0BC8-4FAA-9F94-6B4B05834E10}" type="datetime1">
               <a:rPr lang="ko-KR" altLang="en-US" smtClean="0"/>
-              <a:t>2026-04-09</a:t>
+              <a:t>2026-04-10</a:t>
             </a:fld>
             <a:endParaRPr lang="ko-KR" altLang="en-US"/>
           </a:p>
@@ -25149,7 +25149,15 @@
             </a:pPr>
             <a:r>
               <a:rPr lang="ko-KR" altLang="en-US" sz="1600" spc="-50" dirty="0"/>
-              <a:t>재정학에서는 개별이 아닌 집단의 의사결정 과정이 주요한 관심 대상이다</a:t>
+              <a:t>재정학에서는 개별이 아닌 </a:t>
+            </a:r>
+            <a:r>
+              <a:rPr lang="ko-KR" altLang="en-US" sz="1600" b="1" spc="-50" dirty="0"/>
+              <a:t>집단의 의사결정</a:t>
+            </a:r>
+            <a:r>
+              <a:rPr lang="ko-KR" altLang="en-US" sz="1600" spc="-50" dirty="0"/>
+              <a:t> 과정이 주요한 관심 대상이다</a:t>
             </a:r>
             <a:r>
               <a:rPr lang="en-US" altLang="ko-KR" sz="1600" spc="-50" dirty="0"/>
@@ -25951,7 +25959,7 @@
               <a:rPr lang="en-US" altLang="ko-KR" sz="1600" spc="-50" dirty="0">
                 <a:hlinkClick r:id="rId2"/>
               </a:rPr>
-              <a:t>https://www.youtube.com/watch?v=AEs1dDWsp04</a:t>
+              <a:t>https://www.youtube.com/watch?v=Z8ahVf42beo</a:t>
             </a:r>
             <a:r>
               <a:rPr lang="en-US" altLang="ko-KR" sz="1600" spc="-50" dirty="0"/>
